--- a/dft_seedlayer_screen/ppt/Ag_electrode_summary.pptx
+++ b/dft_seedlayer_screen/ppt/Ag_electrode_summary.pptx
@@ -399,14 +399,14 @@
               <c:strCache>
                 <c:ptCount val="1"/>
                 <c:pt idx="0">
-                  <c:v>E_b (eV)</c:v>
+                  <c:v>E_b</c:v>
                 </c:pt>
               </c:strCache>
             </c:strRef>
           </c:tx>
           <c:spPr>
             <a:solidFill>
-              <a:srgbClr val="7A849C"/>
+              <a:srgbClr val="2EC4B6"/>
             </a:solidFill>
             <a:effectLst/>
           </c:spPr>
@@ -441,7 +441,7 @@
             <c:bubble3D val="0"/>
             <c:spPr>
               <a:solidFill>
-                <a:srgbClr val="7A849C"/>
+                <a:srgbClr val="2EC4B6"/>
               </a:solidFill>
               <a:effectLst/>
             </c:spPr>
@@ -452,7 +452,7 @@
             <c:bubble3D val="0"/>
             <c:spPr>
               <a:solidFill>
-                <a:srgbClr val="2EC4B6"/>
+                <a:srgbClr val="3FA9A0"/>
               </a:solidFill>
               <a:effectLst/>
             </c:spPr>
@@ -463,7 +463,7 @@
             <c:bubble3D val="0"/>
             <c:spPr>
               <a:solidFill>
-                <a:srgbClr val="2EC4B6"/>
+                <a:srgbClr val="9AA5BC"/>
               </a:solidFill>
               <a:effectLst/>
             </c:spPr>
@@ -474,7 +474,7 @@
             <c:bubble3D val="0"/>
             <c:spPr>
               <a:solidFill>
-                <a:srgbClr val="C5CEDE"/>
+                <a:srgbClr val="9AA5BC"/>
               </a:solidFill>
               <a:effectLst/>
             </c:spPr>
@@ -507,7 +507,7 @@
             <c:bubble3D val="0"/>
             <c:spPr>
               <a:solidFill>
-                <a:srgbClr val="C5CEDE"/>
+                <a:srgbClr val="9AA5BC"/>
               </a:solidFill>
               <a:effectLst/>
             </c:spPr>
@@ -518,7 +518,7 @@
             <c:bubble3D val="0"/>
             <c:spPr>
               <a:solidFill>
-                <a:srgbClr val="9AA5BC"/>
+                <a:srgbClr val="C5CEDE"/>
               </a:solidFill>
               <a:effectLst/>
             </c:spPr>
@@ -529,211 +529,43 @@
             <c:bubble3D val="0"/>
             <c:spPr>
               <a:solidFill>
-                <a:srgbClr val="C5CEDE"/>
-              </a:solidFill>
-              <a:effectLst/>
-            </c:spPr>
-          </c:dPt>
-          <c:dPt>
-            <c:idx val="9"/>
-            <c:invertIfNegative val="0"/>
-            <c:bubble3D val="0"/>
-            <c:spPr>
-              <a:solidFill>
-                <a:srgbClr val="9AA5BC"/>
-              </a:solidFill>
-              <a:effectLst/>
-            </c:spPr>
-          </c:dPt>
-          <c:dPt>
-            <c:idx val="10"/>
-            <c:invertIfNegative val="0"/>
-            <c:bubble3D val="0"/>
-            <c:spPr>
-              <a:solidFill>
-                <a:srgbClr val="2EC4B6"/>
-              </a:solidFill>
-              <a:effectLst/>
-            </c:spPr>
-          </c:dPt>
-          <c:dPt>
-            <c:idx val="11"/>
-            <c:invertIfNegative val="0"/>
-            <c:bubble3D val="0"/>
-            <c:spPr>
-              <a:solidFill>
-                <a:srgbClr val="D8DEE9"/>
-              </a:solidFill>
-              <a:effectLst/>
-            </c:spPr>
-          </c:dPt>
-          <c:dPt>
-            <c:idx val="12"/>
-            <c:invertIfNegative val="0"/>
-            <c:bubble3D val="0"/>
-            <c:spPr>
-              <a:solidFill>
-                <a:srgbClr val="2EC4B6"/>
-              </a:solidFill>
-              <a:effectLst/>
-            </c:spPr>
-          </c:dPt>
-          <c:dPt>
-            <c:idx val="13"/>
-            <c:invertIfNegative val="0"/>
-            <c:bubble3D val="0"/>
-            <c:spPr>
-              <a:solidFill>
-                <a:srgbClr val="2EC4B6"/>
-              </a:solidFill>
-              <a:effectLst/>
-            </c:spPr>
-          </c:dPt>
-          <c:dPt>
-            <c:idx val="14"/>
-            <c:invertIfNegative val="0"/>
-            <c:bubble3D val="0"/>
-            <c:spPr>
-              <a:solidFill>
-                <a:srgbClr val="D8DEE9"/>
-              </a:solidFill>
-              <a:effectLst/>
-            </c:spPr>
-          </c:dPt>
-          <c:dPt>
-            <c:idx val="15"/>
-            <c:invertIfNegative val="0"/>
-            <c:bubble3D val="0"/>
-            <c:spPr>
-              <a:solidFill>
-                <a:srgbClr val="2EC4B6"/>
-              </a:solidFill>
-              <a:effectLst/>
-            </c:spPr>
-          </c:dPt>
-          <c:dPt>
-            <c:idx val="16"/>
-            <c:invertIfNegative val="0"/>
-            <c:bubble3D val="0"/>
-            <c:spPr>
-              <a:solidFill>
-                <a:srgbClr val="D8DEE9"/>
-              </a:solidFill>
-              <a:effectLst/>
-            </c:spPr>
-          </c:dPt>
-          <c:dPt>
-            <c:idx val="17"/>
-            <c:invertIfNegative val="0"/>
-            <c:bubble3D val="0"/>
-            <c:spPr>
-              <a:solidFill>
-                <a:srgbClr val="C5CEDE"/>
-              </a:solidFill>
-              <a:effectLst/>
-            </c:spPr>
-          </c:dPt>
-          <c:dPt>
-            <c:idx val="18"/>
-            <c:invertIfNegative val="0"/>
-            <c:bubble3D val="0"/>
-            <c:spPr>
-              <a:solidFill>
-                <a:srgbClr val="2EC4B6"/>
-              </a:solidFill>
-              <a:effectLst/>
-            </c:spPr>
-          </c:dPt>
-          <c:dPt>
-            <c:idx val="19"/>
-            <c:invertIfNegative val="0"/>
-            <c:bubble3D val="0"/>
-            <c:spPr>
-              <a:solidFill>
-                <a:srgbClr val="D8DEE9"/>
-              </a:solidFill>
-              <a:effectLst/>
-            </c:spPr>
-          </c:dPt>
-          <c:dPt>
-            <c:idx val="20"/>
-            <c:invertIfNegative val="0"/>
-            <c:bubble3D val="0"/>
-            <c:spPr>
-              <a:solidFill>
-                <a:srgbClr val="D8DEE9"/>
+                <a:srgbClr val="C0392B"/>
               </a:solidFill>
               <a:effectLst/>
             </c:spPr>
           </c:dPt>
           <c:cat>
             <c:multiLvlStrRef>
-              <c:f>Sheet1!$A$2:$A$22</c:f>
+              <c:f>Sheet1!$A$2:$A$10</c:f>
               <c:multiLvlStrCache>
-                <c:ptCount val="21"/>
+                <c:ptCount val="9"/>
                 <c:lvl>
                   <c:pt idx="0">
-                    <c:v>Ag–Ag (기준)</c:v>
+                    <c:v>HATCN  (CN 자리)</c:v>
                   </c:pt>
                   <c:pt idx="1">
-                    <c:v>HATCN (CN 자리)</c:v>
+                    <c:v>F4TCNQ</c:v>
                   </c:pt>
                   <c:pt idx="2">
-                    <c:v>F4TCNQ</c:v>
+                    <c:v>Cs2CO3</c:v>
                   </c:pt>
                   <c:pt idx="3">
-                    <c:v>Al2O3</c:v>
+                    <c:v>TPBi</c:v>
                   </c:pt>
                   <c:pt idx="4">
-                    <c:v>TPBi</c:v>
+                    <c:v>p-bPPhenB</c:v>
                   </c:pt>
                   <c:pt idx="5">
-                    <c:v>p-bPPhenB</c:v>
+                    <c:v>B3PyMPM</c:v>
                   </c:pt>
                   <c:pt idx="6">
-                    <c:v>Cu4I4 (Cu 자리)</c:v>
+                    <c:v>Bphen</c:v>
                   </c:pt>
                   <c:pt idx="7">
-                    <c:v>B3PyMPM</c:v>
+                    <c:v>Liq</c:v>
                   </c:pt>
                   <c:pt idx="8">
-                    <c:v>CuSCN (Cu 자리)</c:v>
-                  </c:pt>
-                  <c:pt idx="9">
-                    <c:v>Bphen</c:v>
-                  </c:pt>
-                  <c:pt idx="10">
-                    <c:v>MoOx (산소공공)</c:v>
-                  </c:pt>
-                  <c:pt idx="11">
-                    <c:v>triazine</c:v>
-                  </c:pt>
-                  <c:pt idx="12">
-                    <c:v>MoO3 (화학량론)</c:v>
-                  </c:pt>
-                  <c:pt idx="13">
-                    <c:v>PhCz</c:v>
-                  </c:pt>
-                  <c:pt idx="14">
-                    <c:v>BTD</c:v>
-                  </c:pt>
-                  <c:pt idx="15">
-                    <c:v>TPA</c:v>
-                  </c:pt>
-                  <c:pt idx="16">
-                    <c:v>Me3P=O</c:v>
-                  </c:pt>
-                  <c:pt idx="17">
-                    <c:v>LiF</c:v>
-                  </c:pt>
-                  <c:pt idx="18">
-                    <c:v>TAPC</c:v>
-                  </c:pt>
-                  <c:pt idx="19">
-                    <c:v>benzene</c:v>
-                  </c:pt>
-                  <c:pt idx="20">
-                    <c:v>thiophene</c:v>
+                    <c:v>HATCN  (분자면)</c:v>
                   </c:pt>
                 </c:lvl>
               </c:multiLvlStrCache>
@@ -741,72 +573,36 @@
           </c:cat>
           <c:val>
             <c:numRef>
-              <c:f>Sheet1!$B$2:$B$22</c:f>
+              <c:f>Sheet1!$B$2:$B$10</c:f>
               <c:numCache>
                 <c:formatCode>General</c:formatCode>
-                <c:ptCount val="21"/>
+                <c:ptCount val="9"/>
                 <c:pt idx="0">
-                  <c:v>1.858</c:v>
+                  <c:v>1.029</c:v>
                 </c:pt>
                 <c:pt idx="1">
-                  <c:v>1.029</c:v>
+                  <c:v>0.966</c:v>
                 </c:pt>
                 <c:pt idx="2">
-                  <c:v>0.966</c:v>
+                  <c:v>0.9</c:v>
                 </c:pt>
                 <c:pt idx="3">
-                  <c:v>0.91</c:v>
+                  <c:v>0.889</c:v>
                 </c:pt>
                 <c:pt idx="4">
-                  <c:v>0.889</c:v>
+                  <c:v>0.87</c:v>
                 </c:pt>
                 <c:pt idx="5">
-                  <c:v>0.87</c:v>
+                  <c:v>0.626</c:v>
                 </c:pt>
                 <c:pt idx="6">
-                  <c:v>0.819</c:v>
+                  <c:v>0.49</c:v>
                 </c:pt>
                 <c:pt idx="7">
-                  <c:v>0.626</c:v>
+                  <c:v>0.167</c:v>
                 </c:pt>
                 <c:pt idx="8">
-                  <c:v>0.567</c:v>
-                </c:pt>
-                <c:pt idx="9">
-                  <c:v>0.49</c:v>
-                </c:pt>
-                <c:pt idx="10">
-                  <c:v>0.445</c:v>
-                </c:pt>
-                <c:pt idx="11">
-                  <c:v>0.291</c:v>
-                </c:pt>
-                <c:pt idx="12">
-                  <c:v>0.284</c:v>
-                </c:pt>
-                <c:pt idx="13">
-                  <c:v>0.279</c:v>
-                </c:pt>
-                <c:pt idx="14">
-                  <c:v>0.277</c:v>
-                </c:pt>
-                <c:pt idx="15">
-                  <c:v>0.254</c:v>
-                </c:pt>
-                <c:pt idx="16">
-                  <c:v>0.253</c:v>
-                </c:pt>
-                <c:pt idx="17">
-                  <c:v>0.249</c:v>
-                </c:pt>
-                <c:pt idx="18">
-                  <c:v>0.25</c:v>
-                </c:pt>
-                <c:pt idx="19">
-                  <c:v>0.167</c:v>
-                </c:pt>
-                <c:pt idx="20">
-                  <c:v>0.169</c:v>
+                  <c:v>-0.024</c:v>
                 </c:pt>
               </c:numCache>
             </c:numRef>
@@ -836,7 +632,7 @@
           <c:showBubbleSize val="0"/>
           <c:showLeaderLines val="0"/>
         </c:dLbls>
-        <c:gapWidth val="45"/>
+        <c:gapWidth val="40"/>
         <c:overlap val="0"/>
         <c:axId val="2094734554"/>
         <c:axId val="2094734552"/>
@@ -887,7 +683,8 @@
         <c:axId val="2094734552"/>
         <c:scaling>
           <c:orientation val="minMax"/>
-          <c:max val="2.15"/>
+          <c:max val="1.35"/>
+          <c:min val="-0.2"/>
         </c:scaling>
         <c:delete val="0"/>
         <c:axPos val="b"/>
@@ -959,6 +756,331 @@
 </file>
 
 <file path=ppt/charts/chart11.xml><?xml version="1.0" encoding="utf-8"?>
+<c:chartSpace xmlns:c="http://schemas.openxmlformats.org/drawingml/2006/chart" xmlns:a="http://schemas.openxmlformats.org/drawingml/2006/main" xmlns:r="http://schemas.openxmlformats.org/officeDocument/2006/relationships">
+  <c:date1904 val="0"/>
+  <c:roundedCorners val="1"/>
+  <c:chart>
+    <c:autoTitleDeleted val="1"/>
+    <c:plotArea>
+      <c:layout/>
+      <c:barChart>
+        <c:barDir val="bar"/>
+        <c:grouping val="clustered"/>
+        <c:varyColors val="0"/>
+        <c:ser>
+          <c:idx val="0"/>
+          <c:order val="0"/>
+          <c:tx>
+            <c:strRef>
+              <c:f>Sheet1!$B$1</c:f>
+              <c:strCache>
+                <c:ptCount val="1"/>
+                <c:pt idx="0">
+                  <c:v>E_b</c:v>
+                </c:pt>
+              </c:strCache>
+            </c:strRef>
+          </c:tx>
+          <c:spPr>
+            <a:solidFill>
+              <a:srgbClr val="FF6B35"/>
+            </a:solidFill>
+            <a:effectLst/>
+          </c:spPr>
+          <c:invertIfNegative val="0"/>
+          <c:dLbls>
+            <c:numFmt formatCode="0.00" sourceLinked="0"/>
+            <c:txPr>
+              <a:bodyPr/>
+              <a:lstStyle/>
+              <a:p>
+                <a:pPr>
+                  <a:defRPr b="0" i="0" strike="noStrike" sz="850" u="none">
+                    <a:solidFill>
+                      <a:srgbClr val="1A1F2E"/>
+                    </a:solidFill>
+                    <a:latin typeface="Calibri"/>
+                  </a:defRPr>
+                </a:pPr>
+              </a:p>
+            </c:txPr>
+            <c:showLegendKey val="0"/>
+            <c:showVal val="1"/>
+            <c:showCatName val="0"/>
+            <c:showSerName val="0"/>
+            <c:showPercent val="0"/>
+            <c:showBubbleSize val="0"/>
+            <c:showLeaderLines val="0"/>
+          </c:dLbls>
+          <c:dPt>
+            <c:idx val="0"/>
+            <c:invertIfNegative val="0"/>
+            <c:bubble3D val="0"/>
+            <c:spPr>
+              <a:solidFill>
+                <a:srgbClr val="FF6B35"/>
+              </a:solidFill>
+              <a:effectLst/>
+            </c:spPr>
+          </c:dPt>
+          <c:dPt>
+            <c:idx val="1"/>
+            <c:invertIfNegative val="0"/>
+            <c:bubble3D val="0"/>
+            <c:spPr>
+              <a:solidFill>
+                <a:srgbClr val="9AA5BC"/>
+              </a:solidFill>
+              <a:effectLst/>
+            </c:spPr>
+          </c:dPt>
+          <c:dPt>
+            <c:idx val="2"/>
+            <c:invertIfNegative val="0"/>
+            <c:bubble3D val="0"/>
+            <c:spPr>
+              <a:solidFill>
+                <a:srgbClr val="9AA5BC"/>
+              </a:solidFill>
+              <a:effectLst/>
+            </c:spPr>
+          </c:dPt>
+          <c:dPt>
+            <c:idx val="3"/>
+            <c:invertIfNegative val="0"/>
+            <c:bubble3D val="0"/>
+            <c:spPr>
+              <a:solidFill>
+                <a:srgbClr val="C5CEDE"/>
+              </a:solidFill>
+              <a:effectLst/>
+            </c:spPr>
+          </c:dPt>
+          <c:dPt>
+            <c:idx val="4"/>
+            <c:invertIfNegative val="0"/>
+            <c:bubble3D val="0"/>
+            <c:spPr>
+              <a:solidFill>
+                <a:srgbClr val="C5CEDE"/>
+              </a:solidFill>
+              <a:effectLst/>
+            </c:spPr>
+          </c:dPt>
+          <c:dPt>
+            <c:idx val="5"/>
+            <c:invertIfNegative val="0"/>
+            <c:bubble3D val="0"/>
+            <c:spPr>
+              <a:solidFill>
+                <a:srgbClr val="C5CEDE"/>
+              </a:solidFill>
+              <a:effectLst/>
+            </c:spPr>
+          </c:dPt>
+          <c:cat>
+            <c:multiLvlStrRef>
+              <c:f>Sheet1!$A$2:$A$7</c:f>
+              <c:multiLvlStrCache>
+                <c:ptCount val="6"/>
+                <c:lvl>
+                  <c:pt idx="0">
+                    <c:v>MoOx  Mo3O8 산소공공</c:v>
+                  </c:pt>
+                  <c:pt idx="1">
+                    <c:v>Al2O3  Al4O6 화학량론</c:v>
+                  </c:pt>
+                  <c:pt idx="2">
+                    <c:v>MoO3  Mo3O9 화학량론</c:v>
+                  </c:pt>
+                  <c:pt idx="3">
+                    <c:v>LiF  LiF32</c:v>
+                  </c:pt>
+                  <c:pt idx="4">
+                    <c:v>CuI  Cu4I4 @I</c:v>
+                  </c:pt>
+                  <c:pt idx="5">
+                    <c:v>CuSCN  (CuSCN)3 @S</c:v>
+                  </c:pt>
+                </c:lvl>
+              </c:multiLvlStrCache>
+            </c:multiLvlStrRef>
+          </c:cat>
+          <c:val>
+            <c:numRef>
+              <c:f>Sheet1!$B$2:$B$7</c:f>
+              <c:numCache>
+                <c:formatCode>General</c:formatCode>
+                <c:ptCount val="6"/>
+                <c:pt idx="0">
+                  <c:v>0.445</c:v>
+                </c:pt>
+                <c:pt idx="1">
+                  <c:v>0.422</c:v>
+                </c:pt>
+                <c:pt idx="2">
+                  <c:v>0.284</c:v>
+                </c:pt>
+                <c:pt idx="3">
+                  <c:v>0.249</c:v>
+                </c:pt>
+                <c:pt idx="4">
+                  <c:v>0.222</c:v>
+                </c:pt>
+                <c:pt idx="5">
+                  <c:v>0.136</c:v>
+                </c:pt>
+              </c:numCache>
+            </c:numRef>
+          </c:val>
+        </c:ser>
+        <c:dLbls>
+          <c:numFmt formatCode="0.00" sourceLinked="0"/>
+          <c:txPr>
+            <a:bodyPr/>
+            <a:lstStyle/>
+            <a:p>
+              <a:pPr>
+                <a:defRPr b="0" i="0" strike="noStrike" sz="850" u="none">
+                  <a:solidFill>
+                    <a:srgbClr val="1A1F2E"/>
+                  </a:solidFill>
+                  <a:latin typeface="Calibri"/>
+                </a:defRPr>
+              </a:pPr>
+            </a:p>
+          </c:txPr>
+          <c:showLegendKey val="0"/>
+          <c:showVal val="1"/>
+          <c:showCatName val="0"/>
+          <c:showSerName val="0"/>
+          <c:showPercent val="0"/>
+          <c:showBubbleSize val="0"/>
+          <c:showLeaderLines val="0"/>
+        </c:dLbls>
+        <c:gapWidth val="40"/>
+        <c:overlap val="0"/>
+        <c:axId val="2094734554"/>
+        <c:axId val="2094734552"/>
+        <c:axId val="2094734556"/>
+      </c:barChart>
+      <c:catAx>
+        <c:axId val="2094734554"/>
+        <c:scaling>
+          <c:orientation val="minMax"/>
+        </c:scaling>
+        <c:delete val="0"/>
+        <c:axPos val="l"/>
+        <c:numFmt formatCode="General" sourceLinked="1"/>
+        <c:majorTickMark val="out"/>
+        <c:minorTickMark val="none"/>
+        <c:tickLblPos val="nextTo"/>
+        <c:spPr>
+          <a:ln w="12700" cap="flat">
+            <a:solidFill>
+              <a:srgbClr val="888888"/>
+            </a:solidFill>
+            <a:prstDash val="solid"/>
+            <a:round/>
+          </a:ln>
+        </c:spPr>
+        <c:txPr>
+          <a:bodyPr/>
+          <a:lstStyle/>
+          <a:p>
+            <a:pPr>
+              <a:defRPr sz="800" b="0" i="0" u="none" strike="noStrike">
+                <a:solidFill>
+                  <a:srgbClr val="7A849C"/>
+                </a:solidFill>
+                <a:latin typeface="Malgun Gothic"/>
+              </a:defRPr>
+            </a:pPr>
+            <a:endParaRPr lang="en-US"/>
+          </a:p>
+        </c:txPr>
+        <c:crossAx val="2094734552"/>
+        <c:crosses val="autoZero"/>
+        <c:auto val="1"/>
+        <c:lblAlgn val="ctr"/>
+        <c:noMultiLvlLbl val="1"/>
+      </c:catAx>
+      <c:valAx>
+        <c:axId val="2094734552"/>
+        <c:scaling>
+          <c:orientation val="minMax"/>
+          <c:max val="0.62"/>
+        </c:scaling>
+        <c:delete val="0"/>
+        <c:axPos val="b"/>
+        <c:majorGridlines>
+          <c:spPr>
+            <a:ln w="12700" cap="flat">
+              <a:solidFill>
+                <a:srgbClr val="E2E7F0"/>
+              </a:solidFill>
+              <a:prstDash val="solid"/>
+              <a:round/>
+            </a:ln>
+          </c:spPr>
+        </c:majorGridlines>
+        <c:numFmt formatCode="General" sourceLinked="0"/>
+        <c:majorTickMark val="out"/>
+        <c:minorTickMark val="none"/>
+        <c:tickLblPos val="low"/>
+        <c:spPr>
+          <a:ln w="12700" cap="flat">
+            <a:solidFill>
+              <a:srgbClr val="888888"/>
+            </a:solidFill>
+            <a:prstDash val="solid"/>
+            <a:round/>
+          </a:ln>
+        </c:spPr>
+        <c:txPr>
+          <a:bodyPr/>
+          <a:lstStyle/>
+          <a:p>
+            <a:pPr>
+              <a:defRPr sz="1000" b="0" i="0" u="none" strike="noStrike">
+                <a:solidFill>
+                  <a:srgbClr val="7A849C"/>
+                </a:solidFill>
+                <a:latin typeface="Calibri"/>
+              </a:defRPr>
+            </a:pPr>
+            <a:endParaRPr lang="en-US"/>
+          </a:p>
+        </c:txPr>
+        <c:crossAx val="2094734554"/>
+        <c:crosses val="autoZero"/>
+        <c:crossBetween val="between"/>
+      </c:valAx>
+      <c:spPr>
+        <a:noFill/>
+        <a:ln>
+          <a:noFill/>
+        </a:ln>
+        <a:effectLst/>
+      </c:spPr>
+    </c:plotArea>
+    <c:plotVisOnly val="1"/>
+    <c:dispBlanksAs val="span"/>
+  </c:chart>
+  <c:spPr>
+    <a:noFill/>
+    <a:ln>
+      <a:noFill/>
+    </a:ln>
+    <a:effectLst/>
+  </c:spPr>
+  <c:externalData r:id="rId1">
+    <c:autoUpdate val="0"/>
+  </c:externalData>
+</c:chartSpace>
+</file>
+
+<file path=ppt/charts/chart12.xml><?xml version="1.0" encoding="utf-8"?>
 <c:chartSpace xmlns:c="http://schemas.openxmlformats.org/drawingml/2006/chart" xmlns:a="http://schemas.openxmlformats.org/drawingml/2006/main" xmlns:r="http://schemas.openxmlformats.org/officeDocument/2006/relationships">
   <c:date1904 val="0"/>
   <c:roundedCorners val="1"/>
@@ -1283,7 +1405,7 @@
 </c:chartSpace>
 </file>
 
-<file path=ppt/charts/chart12.xml><?xml version="1.0" encoding="utf-8"?>
+<file path=ppt/charts/chart13.xml><?xml version="1.0" encoding="utf-8"?>
 <c:chartSpace xmlns:c="http://schemas.openxmlformats.org/drawingml/2006/chart" xmlns:a="http://schemas.openxmlformats.org/drawingml/2006/main" xmlns:r="http://schemas.openxmlformats.org/officeDocument/2006/relationships">
   <c:date1904 val="0"/>
   <c:roundedCorners val="1"/>
@@ -1780,7 +1902,7 @@
 </c:chartSpace>
 </file>
 
-<file path=ppt/charts/chart13.xml><?xml version="1.0" encoding="utf-8"?>
+<file path=ppt/charts/chart14.xml><?xml version="1.0" encoding="utf-8"?>
 <c:chartSpace xmlns:c="http://schemas.openxmlformats.org/drawingml/2006/chart" xmlns:a="http://schemas.openxmlformats.org/drawingml/2006/main" xmlns:r="http://schemas.openxmlformats.org/officeDocument/2006/relationships">
   <c:date1904 val="0"/>
   <c:roundedCorners val="1"/>
@@ -2998,7 +3120,7 @@
 </c:chartSpace>
 </file>
 
-<file path=ppt/charts/chart14.xml><?xml version="1.0" encoding="utf-8"?>
+<file path=ppt/charts/chart15.xml><?xml version="1.0" encoding="utf-8"?>
 <c:chartSpace xmlns:c="http://schemas.openxmlformats.org/drawingml/2006/chart" xmlns:a="http://schemas.openxmlformats.org/drawingml/2006/main" xmlns:r="http://schemas.openxmlformats.org/officeDocument/2006/relationships">
   <c:date1904 val="0"/>
   <c:roundedCorners val="1"/>
@@ -3479,444 +3601,6 @@
         <c:scaling>
           <c:orientation val="minMax"/>
           <c:max val="0.8"/>
-        </c:scaling>
-        <c:delete val="0"/>
-        <c:axPos val="l"/>
-        <c:majorGridlines>
-          <c:spPr>
-            <a:ln w="12700" cap="flat">
-              <a:solidFill>
-                <a:srgbClr val="E2E7F0"/>
-              </a:solidFill>
-              <a:prstDash val="solid"/>
-              <a:round/>
-            </a:ln>
-          </c:spPr>
-        </c:majorGridlines>
-        <c:numFmt formatCode="General" sourceLinked="0"/>
-        <c:majorTickMark val="out"/>
-        <c:minorTickMark val="none"/>
-        <c:tickLblPos val="nextTo"/>
-        <c:spPr>
-          <a:ln w="12700" cap="flat">
-            <a:solidFill>
-              <a:srgbClr val="888888"/>
-            </a:solidFill>
-            <a:prstDash val="solid"/>
-            <a:round/>
-          </a:ln>
-        </c:spPr>
-        <c:txPr>
-          <a:bodyPr/>
-          <a:lstStyle/>
-          <a:p>
-            <a:pPr>
-              <a:defRPr sz="1000" b="0" i="0" u="none" strike="noStrike">
-                <a:solidFill>
-                  <a:srgbClr val="7A849C"/>
-                </a:solidFill>
-                <a:latin typeface="Calibri"/>
-              </a:defRPr>
-            </a:pPr>
-            <a:endParaRPr lang="en-US"/>
-          </a:p>
-        </c:txPr>
-        <c:crossAx val="2094734554"/>
-        <c:crosses val="autoZero"/>
-        <c:crossBetween val="between"/>
-      </c:valAx>
-      <c:spPr>
-        <a:noFill/>
-        <a:ln>
-          <a:noFill/>
-        </a:ln>
-        <a:effectLst/>
-      </c:spPr>
-    </c:plotArea>
-    <c:legend>
-      <c:legendPos val="b"/>
-      <c:overlay val="0"/>
-      <c:txPr>
-        <a:bodyPr/>
-        <a:lstStyle/>
-        <a:p>
-          <a:pPr>
-            <a:defRPr sz="950">
-              <a:solidFill>
-                <a:srgbClr val="7A849C"/>
-              </a:solidFill>
-              <a:latin typeface="Calibri"/>
-              <a:cs typeface="Calibri"/>
-            </a:defRPr>
-          </a:pPr>
-          <a:endParaRPr lang="en-US"/>
-        </a:p>
-      </c:txPr>
-    </c:legend>
-    <c:plotVisOnly val="1"/>
-    <c:dispBlanksAs val="span"/>
-  </c:chart>
-  <c:spPr>
-    <a:noFill/>
-    <a:ln>
-      <a:noFill/>
-    </a:ln>
-    <a:effectLst/>
-  </c:spPr>
-  <c:externalData r:id="rId1">
-    <c:autoUpdate val="0"/>
-  </c:externalData>
-</c:chartSpace>
-</file>
-
-<file path=ppt/charts/chart15.xml><?xml version="1.0" encoding="utf-8"?>
-<c:chartSpace xmlns:c="http://schemas.openxmlformats.org/drawingml/2006/chart" xmlns:a="http://schemas.openxmlformats.org/drawingml/2006/main" xmlns:r="http://schemas.openxmlformats.org/officeDocument/2006/relationships">
-  <c:date1904 val="0"/>
-  <c:roundedCorners val="1"/>
-  <c:chart>
-    <c:autoTitleDeleted val="1"/>
-    <c:plotArea>
-      <c:layout/>
-      <c:lineChart>
-        <c:varyColors val="0"/>
-        <c:ser>
-          <c:idx val="0"/>
-          <c:order val="0"/>
-          <c:tx>
-            <c:strRef>
-              <c:f>Sheet1!$B$1</c:f>
-              <c:strCache>
-                <c:ptCount val="1"/>
-                <c:pt idx="0">
-                  <c:v>Ag 8 nm</c:v>
-                </c:pt>
-              </c:strCache>
-            </c:strRef>
-          </c:tx>
-          <c:spPr>
-            <a:solidFill>
-              <a:srgbClr val="1E2761"/>
-            </a:solidFill>
-            <a:ln w="38100" cap="flat">
-              <a:solidFill>
-                <a:srgbClr val="1E2761"/>
-              </a:solidFill>
-              <a:prstDash val="solid"/>
-              <a:round/>
-            </a:ln>
-            <a:effectLst/>
-          </c:spPr>
-          <c:invertIfNegative val="0"/>
-          <c:dLbls>
-            <c:numFmt formatCode="#,##0" sourceLinked="0"/>
-            <c:txPr>
-              <a:bodyPr/>
-              <a:lstStyle/>
-              <a:p>
-                <a:pPr>
-                  <a:defRPr b="0" i="0" strike="noStrike" sz="1200" u="none">
-                    <a:solidFill>
-                      <a:srgbClr val="000000"/>
-                    </a:solidFill>
-                    <a:latin typeface="Arial"/>
-                  </a:defRPr>
-                </a:pPr>
-              </a:p>
-            </c:txPr>
-            <c:showLegendKey val="0"/>
-            <c:showVal val="0"/>
-            <c:showCatName val="0"/>
-            <c:showSerName val="0"/>
-            <c:showPercent val="0"/>
-            <c:showBubbleSize val="0"/>
-            <c:showLeaderLines val="0"/>
-          </c:dLbls>
-          <c:marker>
-            <c:symbol val="circle"/>
-            <c:size val="6"/>
-            <c:spPr>
-              <a:solidFill>
-                <a:srgbClr val="1E2761"/>
-              </a:solidFill>
-              <a:ln w="9525" cap="flat">
-                <a:solidFill>
-                  <a:srgbClr val="1E2761"/>
-                </a:solidFill>
-                <a:prstDash val="solid"/>
-                <a:round/>
-              </a:ln>
-              <a:effectLst/>
-            </c:spPr>
-          </c:marker>
-          <c:cat>
-            <c:multiLvlStrRef>
-              <c:f>Sheet1!$A$2:$A$8</c:f>
-              <c:multiLvlStrCache>
-                <c:ptCount val="7"/>
-                <c:lvl>
-                  <c:pt idx="0">
-                    <c:v>400</c:v>
-                  </c:pt>
-                  <c:pt idx="1">
-                    <c:v>450</c:v>
-                  </c:pt>
-                  <c:pt idx="2">
-                    <c:v>500</c:v>
-                  </c:pt>
-                  <c:pt idx="3">
-                    <c:v>550</c:v>
-                  </c:pt>
-                  <c:pt idx="4">
-                    <c:v>600</c:v>
-                  </c:pt>
-                  <c:pt idx="5">
-                    <c:v>650</c:v>
-                  </c:pt>
-                  <c:pt idx="6">
-                    <c:v>700</c:v>
-                  </c:pt>
-                </c:lvl>
-              </c:multiLvlStrCache>
-            </c:multiLvlStrRef>
-          </c:cat>
-          <c:val>
-            <c:numRef>
-              <c:f>Sheet1!$B$2:$B$8</c:f>
-              <c:numCache>
-                <c:formatCode>General</c:formatCode>
-                <c:ptCount val="7"/>
-                <c:pt idx="0">
-                  <c:v>2.271</c:v>
-                </c:pt>
-                <c:pt idx="1">
-                  <c:v>2.675</c:v>
-                </c:pt>
-                <c:pt idx="2">
-                  <c:v>3.11</c:v>
-                </c:pt>
-                <c:pt idx="3">
-                  <c:v>3.574</c:v>
-                </c:pt>
-                <c:pt idx="4">
-                  <c:v>4.014</c:v>
-                </c:pt>
-                <c:pt idx="5">
-                  <c:v>4.457</c:v>
-                </c:pt>
-                <c:pt idx="6">
-                  <c:v>4.879</c:v>
-                </c:pt>
-              </c:numCache>
-            </c:numRef>
-          </c:val>
-          <c:smooth val="1"/>
-        </c:ser>
-        <c:ser>
-          <c:idx val="1"/>
-          <c:order val="1"/>
-          <c:tx>
-            <c:strRef>
-              <c:f>Sheet1!$C$1</c:f>
-              <c:strCache>
-                <c:ptCount val="1"/>
-                <c:pt idx="0">
-                  <c:v>McPeak 벌크</c:v>
-                </c:pt>
-              </c:strCache>
-            </c:strRef>
-          </c:tx>
-          <c:spPr>
-            <a:solidFill>
-              <a:srgbClr val="2EC4B6"/>
-            </a:solidFill>
-            <a:ln w="38100" cap="flat">
-              <a:solidFill>
-                <a:srgbClr val="2EC4B6"/>
-              </a:solidFill>
-              <a:prstDash val="solid"/>
-              <a:round/>
-            </a:ln>
-            <a:effectLst/>
-          </c:spPr>
-          <c:invertIfNegative val="0"/>
-          <c:dLbls>
-            <c:numFmt formatCode="#,##0" sourceLinked="0"/>
-            <c:txPr>
-              <a:bodyPr/>
-              <a:lstStyle/>
-              <a:p>
-                <a:pPr>
-                  <a:defRPr b="0" i="0" strike="noStrike" sz="1200" u="none">
-                    <a:solidFill>
-                      <a:srgbClr val="000000"/>
-                    </a:solidFill>
-                    <a:latin typeface="Arial"/>
-                  </a:defRPr>
-                </a:pPr>
-              </a:p>
-            </c:txPr>
-            <c:showLegendKey val="0"/>
-            <c:showVal val="0"/>
-            <c:showCatName val="0"/>
-            <c:showSerName val="0"/>
-            <c:showPercent val="0"/>
-            <c:showBubbleSize val="0"/>
-            <c:showLeaderLines val="0"/>
-          </c:dLbls>
-          <c:marker>
-            <c:symbol val="circle"/>
-            <c:size val="6"/>
-            <c:spPr>
-              <a:solidFill>
-                <a:srgbClr val="2EC4B6"/>
-              </a:solidFill>
-              <a:ln w="9525" cap="flat">
-                <a:solidFill>
-                  <a:srgbClr val="2EC4B6"/>
-                </a:solidFill>
-                <a:prstDash val="solid"/>
-                <a:round/>
-              </a:ln>
-              <a:effectLst/>
-            </c:spPr>
-          </c:marker>
-          <c:cat>
-            <c:multiLvlStrRef>
-              <c:f>Sheet1!$A$2:$A$8</c:f>
-              <c:multiLvlStrCache>
-                <c:ptCount val="7"/>
-                <c:lvl>
-                  <c:pt idx="0">
-                    <c:v>400</c:v>
-                  </c:pt>
-                  <c:pt idx="1">
-                    <c:v>450</c:v>
-                  </c:pt>
-                  <c:pt idx="2">
-                    <c:v>500</c:v>
-                  </c:pt>
-                  <c:pt idx="3">
-                    <c:v>550</c:v>
-                  </c:pt>
-                  <c:pt idx="4">
-                    <c:v>600</c:v>
-                  </c:pt>
-                  <c:pt idx="5">
-                    <c:v>650</c:v>
-                  </c:pt>
-                  <c:pt idx="6">
-                    <c:v>700</c:v>
-                  </c:pt>
-                </c:lvl>
-              </c:multiLvlStrCache>
-            </c:multiLvlStrRef>
-          </c:cat>
-          <c:val>
-            <c:numRef>
-              <c:f>Sheet1!$C$2:$C$8</c:f>
-              <c:numCache>
-                <c:formatCode>General</c:formatCode>
-                <c:ptCount val="7"/>
-                <c:pt idx="0">
-                  <c:v>2.123</c:v>
-                </c:pt>
-                <c:pt idx="1">
-                  <c:v>2.676</c:v>
-                </c:pt>
-                <c:pt idx="2">
-                  <c:v>3.159</c:v>
-                </c:pt>
-                <c:pt idx="3">
-                  <c:v>3.61</c:v>
-                </c:pt>
-                <c:pt idx="4">
-                  <c:v>4.042</c:v>
-                </c:pt>
-                <c:pt idx="5">
-                  <c:v>4.46</c:v>
-                </c:pt>
-                <c:pt idx="6">
-                  <c:v>4.869</c:v>
-                </c:pt>
-              </c:numCache>
-            </c:numRef>
-          </c:val>
-          <c:smooth val="1"/>
-        </c:ser>
-        <c:dLbls>
-          <c:numFmt formatCode="#,##0" sourceLinked="0"/>
-          <c:txPr>
-            <a:bodyPr/>
-            <a:lstStyle/>
-            <a:p>
-              <a:pPr>
-                <a:defRPr b="0" i="0" strike="noStrike" sz="1200" u="none">
-                  <a:solidFill>
-                    <a:srgbClr val="000000"/>
-                  </a:solidFill>
-                  <a:latin typeface="Arial"/>
-                </a:defRPr>
-              </a:pPr>
-            </a:p>
-          </c:txPr>
-          <c:showLegendKey val="0"/>
-          <c:showVal val="0"/>
-          <c:showCatName val="0"/>
-          <c:showSerName val="0"/>
-          <c:showPercent val="0"/>
-          <c:showBubbleSize val="0"/>
-          <c:showLeaderLines val="0"/>
-        </c:dLbls>
-        <c:marker val="1"/>
-        <c:axId val="2094734554"/>
-        <c:axId val="2094734552"/>
-        <c:axId val="2094734556"/>
-      </c:lineChart>
-      <c:catAx>
-        <c:axId val="2094734554"/>
-        <c:scaling>
-          <c:orientation val="minMax"/>
-        </c:scaling>
-        <c:delete val="0"/>
-        <c:axPos val="b"/>
-        <c:numFmt formatCode="General" sourceLinked="1"/>
-        <c:majorTickMark val="out"/>
-        <c:minorTickMark val="none"/>
-        <c:tickLblPos val="low"/>
-        <c:spPr>
-          <a:ln w="12700" cap="flat">
-            <a:solidFill>
-              <a:srgbClr val="888888"/>
-            </a:solidFill>
-            <a:prstDash val="solid"/>
-            <a:round/>
-          </a:ln>
-        </c:spPr>
-        <c:txPr>
-          <a:bodyPr/>
-          <a:lstStyle/>
-          <a:p>
-            <a:pPr>
-              <a:defRPr sz="900" b="0" i="0" u="none" strike="noStrike">
-                <a:solidFill>
-                  <a:srgbClr val="7A849C"/>
-                </a:solidFill>
-                <a:latin typeface="Calibri"/>
-              </a:defRPr>
-            </a:pPr>
-            <a:endParaRPr lang="en-US"/>
-          </a:p>
-        </c:txPr>
-        <c:crossAx val="2094734552"/>
-        <c:crosses val="autoZero"/>
-        <c:auto val="1"/>
-        <c:lblAlgn val="ctr"/>
-        <c:noMultiLvlLbl val="1"/>
-      </c:catAx>
-      <c:valAx>
-        <c:axId val="2094734552"/>
-        <c:scaling>
-          <c:orientation val="minMax"/>
         </c:scaling>
         <c:delete val="0"/>
         <c:axPos val="l"/>
@@ -4015,6 +3699,444 @@
     <c:autoTitleDeleted val="1"/>
     <c:plotArea>
       <c:layout/>
+      <c:lineChart>
+        <c:varyColors val="0"/>
+        <c:ser>
+          <c:idx val="0"/>
+          <c:order val="0"/>
+          <c:tx>
+            <c:strRef>
+              <c:f>Sheet1!$B$1</c:f>
+              <c:strCache>
+                <c:ptCount val="1"/>
+                <c:pt idx="0">
+                  <c:v>Ag 8 nm</c:v>
+                </c:pt>
+              </c:strCache>
+            </c:strRef>
+          </c:tx>
+          <c:spPr>
+            <a:solidFill>
+              <a:srgbClr val="1E2761"/>
+            </a:solidFill>
+            <a:ln w="38100" cap="flat">
+              <a:solidFill>
+                <a:srgbClr val="1E2761"/>
+              </a:solidFill>
+              <a:prstDash val="solid"/>
+              <a:round/>
+            </a:ln>
+            <a:effectLst/>
+          </c:spPr>
+          <c:invertIfNegative val="0"/>
+          <c:dLbls>
+            <c:numFmt formatCode="#,##0" sourceLinked="0"/>
+            <c:txPr>
+              <a:bodyPr/>
+              <a:lstStyle/>
+              <a:p>
+                <a:pPr>
+                  <a:defRPr b="0" i="0" strike="noStrike" sz="1200" u="none">
+                    <a:solidFill>
+                      <a:srgbClr val="000000"/>
+                    </a:solidFill>
+                    <a:latin typeface="Arial"/>
+                  </a:defRPr>
+                </a:pPr>
+              </a:p>
+            </c:txPr>
+            <c:showLegendKey val="0"/>
+            <c:showVal val="0"/>
+            <c:showCatName val="0"/>
+            <c:showSerName val="0"/>
+            <c:showPercent val="0"/>
+            <c:showBubbleSize val="0"/>
+            <c:showLeaderLines val="0"/>
+          </c:dLbls>
+          <c:marker>
+            <c:symbol val="circle"/>
+            <c:size val="6"/>
+            <c:spPr>
+              <a:solidFill>
+                <a:srgbClr val="1E2761"/>
+              </a:solidFill>
+              <a:ln w="9525" cap="flat">
+                <a:solidFill>
+                  <a:srgbClr val="1E2761"/>
+                </a:solidFill>
+                <a:prstDash val="solid"/>
+                <a:round/>
+              </a:ln>
+              <a:effectLst/>
+            </c:spPr>
+          </c:marker>
+          <c:cat>
+            <c:multiLvlStrRef>
+              <c:f>Sheet1!$A$2:$A$8</c:f>
+              <c:multiLvlStrCache>
+                <c:ptCount val="7"/>
+                <c:lvl>
+                  <c:pt idx="0">
+                    <c:v>400</c:v>
+                  </c:pt>
+                  <c:pt idx="1">
+                    <c:v>450</c:v>
+                  </c:pt>
+                  <c:pt idx="2">
+                    <c:v>500</c:v>
+                  </c:pt>
+                  <c:pt idx="3">
+                    <c:v>550</c:v>
+                  </c:pt>
+                  <c:pt idx="4">
+                    <c:v>600</c:v>
+                  </c:pt>
+                  <c:pt idx="5">
+                    <c:v>650</c:v>
+                  </c:pt>
+                  <c:pt idx="6">
+                    <c:v>700</c:v>
+                  </c:pt>
+                </c:lvl>
+              </c:multiLvlStrCache>
+            </c:multiLvlStrRef>
+          </c:cat>
+          <c:val>
+            <c:numRef>
+              <c:f>Sheet1!$B$2:$B$8</c:f>
+              <c:numCache>
+                <c:formatCode>General</c:formatCode>
+                <c:ptCount val="7"/>
+                <c:pt idx="0">
+                  <c:v>2.271</c:v>
+                </c:pt>
+                <c:pt idx="1">
+                  <c:v>2.675</c:v>
+                </c:pt>
+                <c:pt idx="2">
+                  <c:v>3.11</c:v>
+                </c:pt>
+                <c:pt idx="3">
+                  <c:v>3.574</c:v>
+                </c:pt>
+                <c:pt idx="4">
+                  <c:v>4.014</c:v>
+                </c:pt>
+                <c:pt idx="5">
+                  <c:v>4.457</c:v>
+                </c:pt>
+                <c:pt idx="6">
+                  <c:v>4.879</c:v>
+                </c:pt>
+              </c:numCache>
+            </c:numRef>
+          </c:val>
+          <c:smooth val="1"/>
+        </c:ser>
+        <c:ser>
+          <c:idx val="1"/>
+          <c:order val="1"/>
+          <c:tx>
+            <c:strRef>
+              <c:f>Sheet1!$C$1</c:f>
+              <c:strCache>
+                <c:ptCount val="1"/>
+                <c:pt idx="0">
+                  <c:v>McPeak 벌크</c:v>
+                </c:pt>
+              </c:strCache>
+            </c:strRef>
+          </c:tx>
+          <c:spPr>
+            <a:solidFill>
+              <a:srgbClr val="2EC4B6"/>
+            </a:solidFill>
+            <a:ln w="38100" cap="flat">
+              <a:solidFill>
+                <a:srgbClr val="2EC4B6"/>
+              </a:solidFill>
+              <a:prstDash val="solid"/>
+              <a:round/>
+            </a:ln>
+            <a:effectLst/>
+          </c:spPr>
+          <c:invertIfNegative val="0"/>
+          <c:dLbls>
+            <c:numFmt formatCode="#,##0" sourceLinked="0"/>
+            <c:txPr>
+              <a:bodyPr/>
+              <a:lstStyle/>
+              <a:p>
+                <a:pPr>
+                  <a:defRPr b="0" i="0" strike="noStrike" sz="1200" u="none">
+                    <a:solidFill>
+                      <a:srgbClr val="000000"/>
+                    </a:solidFill>
+                    <a:latin typeface="Arial"/>
+                  </a:defRPr>
+                </a:pPr>
+              </a:p>
+            </c:txPr>
+            <c:showLegendKey val="0"/>
+            <c:showVal val="0"/>
+            <c:showCatName val="0"/>
+            <c:showSerName val="0"/>
+            <c:showPercent val="0"/>
+            <c:showBubbleSize val="0"/>
+            <c:showLeaderLines val="0"/>
+          </c:dLbls>
+          <c:marker>
+            <c:symbol val="circle"/>
+            <c:size val="6"/>
+            <c:spPr>
+              <a:solidFill>
+                <a:srgbClr val="2EC4B6"/>
+              </a:solidFill>
+              <a:ln w="9525" cap="flat">
+                <a:solidFill>
+                  <a:srgbClr val="2EC4B6"/>
+                </a:solidFill>
+                <a:prstDash val="solid"/>
+                <a:round/>
+              </a:ln>
+              <a:effectLst/>
+            </c:spPr>
+          </c:marker>
+          <c:cat>
+            <c:multiLvlStrRef>
+              <c:f>Sheet1!$A$2:$A$8</c:f>
+              <c:multiLvlStrCache>
+                <c:ptCount val="7"/>
+                <c:lvl>
+                  <c:pt idx="0">
+                    <c:v>400</c:v>
+                  </c:pt>
+                  <c:pt idx="1">
+                    <c:v>450</c:v>
+                  </c:pt>
+                  <c:pt idx="2">
+                    <c:v>500</c:v>
+                  </c:pt>
+                  <c:pt idx="3">
+                    <c:v>550</c:v>
+                  </c:pt>
+                  <c:pt idx="4">
+                    <c:v>600</c:v>
+                  </c:pt>
+                  <c:pt idx="5">
+                    <c:v>650</c:v>
+                  </c:pt>
+                  <c:pt idx="6">
+                    <c:v>700</c:v>
+                  </c:pt>
+                </c:lvl>
+              </c:multiLvlStrCache>
+            </c:multiLvlStrRef>
+          </c:cat>
+          <c:val>
+            <c:numRef>
+              <c:f>Sheet1!$C$2:$C$8</c:f>
+              <c:numCache>
+                <c:formatCode>General</c:formatCode>
+                <c:ptCount val="7"/>
+                <c:pt idx="0">
+                  <c:v>2.123</c:v>
+                </c:pt>
+                <c:pt idx="1">
+                  <c:v>2.676</c:v>
+                </c:pt>
+                <c:pt idx="2">
+                  <c:v>3.159</c:v>
+                </c:pt>
+                <c:pt idx="3">
+                  <c:v>3.61</c:v>
+                </c:pt>
+                <c:pt idx="4">
+                  <c:v>4.042</c:v>
+                </c:pt>
+                <c:pt idx="5">
+                  <c:v>4.46</c:v>
+                </c:pt>
+                <c:pt idx="6">
+                  <c:v>4.869</c:v>
+                </c:pt>
+              </c:numCache>
+            </c:numRef>
+          </c:val>
+          <c:smooth val="1"/>
+        </c:ser>
+        <c:dLbls>
+          <c:numFmt formatCode="#,##0" sourceLinked="0"/>
+          <c:txPr>
+            <a:bodyPr/>
+            <a:lstStyle/>
+            <a:p>
+              <a:pPr>
+                <a:defRPr b="0" i="0" strike="noStrike" sz="1200" u="none">
+                  <a:solidFill>
+                    <a:srgbClr val="000000"/>
+                  </a:solidFill>
+                  <a:latin typeface="Arial"/>
+                </a:defRPr>
+              </a:pPr>
+            </a:p>
+          </c:txPr>
+          <c:showLegendKey val="0"/>
+          <c:showVal val="0"/>
+          <c:showCatName val="0"/>
+          <c:showSerName val="0"/>
+          <c:showPercent val="0"/>
+          <c:showBubbleSize val="0"/>
+          <c:showLeaderLines val="0"/>
+        </c:dLbls>
+        <c:marker val="1"/>
+        <c:axId val="2094734554"/>
+        <c:axId val="2094734552"/>
+        <c:axId val="2094734556"/>
+      </c:lineChart>
+      <c:catAx>
+        <c:axId val="2094734554"/>
+        <c:scaling>
+          <c:orientation val="minMax"/>
+        </c:scaling>
+        <c:delete val="0"/>
+        <c:axPos val="b"/>
+        <c:numFmt formatCode="General" sourceLinked="1"/>
+        <c:majorTickMark val="out"/>
+        <c:minorTickMark val="none"/>
+        <c:tickLblPos val="low"/>
+        <c:spPr>
+          <a:ln w="12700" cap="flat">
+            <a:solidFill>
+              <a:srgbClr val="888888"/>
+            </a:solidFill>
+            <a:prstDash val="solid"/>
+            <a:round/>
+          </a:ln>
+        </c:spPr>
+        <c:txPr>
+          <a:bodyPr/>
+          <a:lstStyle/>
+          <a:p>
+            <a:pPr>
+              <a:defRPr sz="900" b="0" i="0" u="none" strike="noStrike">
+                <a:solidFill>
+                  <a:srgbClr val="7A849C"/>
+                </a:solidFill>
+                <a:latin typeface="Calibri"/>
+              </a:defRPr>
+            </a:pPr>
+            <a:endParaRPr lang="en-US"/>
+          </a:p>
+        </c:txPr>
+        <c:crossAx val="2094734552"/>
+        <c:crosses val="autoZero"/>
+        <c:auto val="1"/>
+        <c:lblAlgn val="ctr"/>
+        <c:noMultiLvlLbl val="1"/>
+      </c:catAx>
+      <c:valAx>
+        <c:axId val="2094734552"/>
+        <c:scaling>
+          <c:orientation val="minMax"/>
+        </c:scaling>
+        <c:delete val="0"/>
+        <c:axPos val="l"/>
+        <c:majorGridlines>
+          <c:spPr>
+            <a:ln w="12700" cap="flat">
+              <a:solidFill>
+                <a:srgbClr val="E2E7F0"/>
+              </a:solidFill>
+              <a:prstDash val="solid"/>
+              <a:round/>
+            </a:ln>
+          </c:spPr>
+        </c:majorGridlines>
+        <c:numFmt formatCode="General" sourceLinked="0"/>
+        <c:majorTickMark val="out"/>
+        <c:minorTickMark val="none"/>
+        <c:tickLblPos val="nextTo"/>
+        <c:spPr>
+          <a:ln w="12700" cap="flat">
+            <a:solidFill>
+              <a:srgbClr val="888888"/>
+            </a:solidFill>
+            <a:prstDash val="solid"/>
+            <a:round/>
+          </a:ln>
+        </c:spPr>
+        <c:txPr>
+          <a:bodyPr/>
+          <a:lstStyle/>
+          <a:p>
+            <a:pPr>
+              <a:defRPr sz="1000" b="0" i="0" u="none" strike="noStrike">
+                <a:solidFill>
+                  <a:srgbClr val="7A849C"/>
+                </a:solidFill>
+                <a:latin typeface="Calibri"/>
+              </a:defRPr>
+            </a:pPr>
+            <a:endParaRPr lang="en-US"/>
+          </a:p>
+        </c:txPr>
+        <c:crossAx val="2094734554"/>
+        <c:crosses val="autoZero"/>
+        <c:crossBetween val="between"/>
+      </c:valAx>
+      <c:spPr>
+        <a:noFill/>
+        <a:ln>
+          <a:noFill/>
+        </a:ln>
+        <a:effectLst/>
+      </c:spPr>
+    </c:plotArea>
+    <c:legend>
+      <c:legendPos val="b"/>
+      <c:overlay val="0"/>
+      <c:txPr>
+        <a:bodyPr/>
+        <a:lstStyle/>
+        <a:p>
+          <a:pPr>
+            <a:defRPr sz="950">
+              <a:solidFill>
+                <a:srgbClr val="7A849C"/>
+              </a:solidFill>
+              <a:latin typeface="Calibri"/>
+              <a:cs typeface="Calibri"/>
+            </a:defRPr>
+          </a:pPr>
+          <a:endParaRPr lang="en-US"/>
+        </a:p>
+      </c:txPr>
+    </c:legend>
+    <c:plotVisOnly val="1"/>
+    <c:dispBlanksAs val="span"/>
+  </c:chart>
+  <c:spPr>
+    <a:noFill/>
+    <a:ln>
+      <a:noFill/>
+    </a:ln>
+    <a:effectLst/>
+  </c:spPr>
+  <c:externalData r:id="rId1">
+    <c:autoUpdate val="0"/>
+  </c:externalData>
+</c:chartSpace>
+</file>
+
+<file path=ppt/charts/chart17.xml><?xml version="1.0" encoding="utf-8"?>
+<c:chartSpace xmlns:c="http://schemas.openxmlformats.org/drawingml/2006/chart" xmlns:a="http://schemas.openxmlformats.org/drawingml/2006/main" xmlns:r="http://schemas.openxmlformats.org/officeDocument/2006/relationships">
+  <c:date1904 val="0"/>
+  <c:roundedCorners val="1"/>
+  <c:chart>
+    <c:autoTitleDeleted val="1"/>
+    <c:plotArea>
+      <c:layout/>
       <c:barChart>
         <c:barDir val="col"/>
         <c:grouping val="clustered"/>
@@ -4400,7 +4522,7 @@
 </c:chartSpace>
 </file>
 
-<file path=ppt/charts/chart17.xml><?xml version="1.0" encoding="utf-8"?>
+<file path=ppt/charts/chart18.xml><?xml version="1.0" encoding="utf-8"?>
 <c:chartSpace xmlns:c="http://schemas.openxmlformats.org/drawingml/2006/chart" xmlns:a="http://schemas.openxmlformats.org/drawingml/2006/main" xmlns:r="http://schemas.openxmlformats.org/officeDocument/2006/relationships">
   <c:date1904 val="0"/>
   <c:roundedCorners val="1"/>
@@ -4797,7 +4919,7 @@
 </c:chartSpace>
 </file>
 
-<file path=ppt/charts/chart18.xml><?xml version="1.0" encoding="utf-8"?>
+<file path=ppt/charts/chart19.xml><?xml version="1.0" encoding="utf-8"?>
 <c:chartSpace xmlns:c="http://schemas.openxmlformats.org/drawingml/2006/chart" xmlns:a="http://schemas.openxmlformats.org/drawingml/2006/main" xmlns:r="http://schemas.openxmlformats.org/officeDocument/2006/relationships">
   <c:date1904 val="0"/>
   <c:roundedCorners val="1"/>
@@ -5265,7 +5387,266 @@
 </c:chartSpace>
 </file>
 
-<file path=ppt/charts/chart19.xml><?xml version="1.0" encoding="utf-8"?>
+<file path=ppt/charts/chart2.xml><?xml version="1.0" encoding="utf-8"?>
+<c:chartSpace xmlns:c="http://schemas.openxmlformats.org/drawingml/2006/chart" xmlns:a="http://schemas.openxmlformats.org/drawingml/2006/main" xmlns:r="http://schemas.openxmlformats.org/officeDocument/2006/relationships">
+  <c:date1904 val="0"/>
+  <c:roundedCorners val="1"/>
+  <c:chart>
+    <c:autoTitleDeleted val="1"/>
+    <c:plotArea>
+      <c:layout/>
+      <c:barChart>
+        <c:barDir val="bar"/>
+        <c:grouping val="clustered"/>
+        <c:varyColors val="0"/>
+        <c:ser>
+          <c:idx val="0"/>
+          <c:order val="0"/>
+          <c:tx>
+            <c:strRef>
+              <c:f>Sheet1!$B$1</c:f>
+              <c:strCache>
+                <c:ptCount val="1"/>
+                <c:pt idx="0">
+                  <c:v>EQE</c:v>
+                </c:pt>
+              </c:strCache>
+            </c:strRef>
+          </c:tx>
+          <c:spPr>
+            <a:solidFill>
+              <a:srgbClr val="FF6B35"/>
+            </a:solidFill>
+            <a:effectLst/>
+          </c:spPr>
+          <c:invertIfNegative val="0"/>
+          <c:dLbls>
+            <c:numFmt formatCode="0&quot;%&quot;" sourceLinked="0"/>
+            <c:txPr>
+              <a:bodyPr/>
+              <a:lstStyle/>
+              <a:p>
+                <a:pPr>
+                  <a:defRPr b="0" i="0" strike="noStrike" sz="1100" u="none">
+                    <a:solidFill>
+                      <a:srgbClr val="FFFFFF"/>
+                    </a:solidFill>
+                    <a:latin typeface="Calibri"/>
+                  </a:defRPr>
+                </a:pPr>
+              </a:p>
+            </c:txPr>
+            <c:dLblPos val="inEnd"/>
+            <c:showLegendKey val="0"/>
+            <c:showVal val="1"/>
+            <c:showCatName val="0"/>
+            <c:showSerName val="0"/>
+            <c:showPercent val="0"/>
+            <c:showBubbleSize val="0"/>
+            <c:showLeaderLines val="0"/>
+          </c:dLbls>
+          <c:dPt>
+            <c:idx val="0"/>
+            <c:invertIfNegative val="0"/>
+            <c:bubble3D val="0"/>
+            <c:spPr>
+              <a:solidFill>
+                <a:srgbClr val="FF6B35"/>
+              </a:solidFill>
+              <a:effectLst/>
+            </c:spPr>
+          </c:dPt>
+          <c:dPt>
+            <c:idx val="1"/>
+            <c:invertIfNegative val="0"/>
+            <c:bubble3D val="0"/>
+            <c:spPr>
+              <a:solidFill>
+                <a:srgbClr val="2EC4B6"/>
+              </a:solidFill>
+              <a:effectLst/>
+            </c:spPr>
+          </c:dPt>
+          <c:cat>
+            <c:multiLvlStrRef>
+              <c:f>Sheet1!$A$2:$A$3</c:f>
+              <c:multiLvlStrCache>
+                <c:ptCount val="2"/>
+                <c:lvl>
+                  <c:pt idx="0">
+                    <c:v>측정 Ag</c:v>
+                  </c:pt>
+                  <c:pt idx="1">
+                    <c:v>이상 Ag</c:v>
+                  </c:pt>
+                </c:lvl>
+              </c:multiLvlStrCache>
+            </c:multiLvlStrRef>
+          </c:cat>
+          <c:val>
+            <c:numRef>
+              <c:f>Sheet1!$B$2:$B$3</c:f>
+              <c:numCache>
+                <c:formatCode>General</c:formatCode>
+                <c:ptCount val="2"/>
+                <c:pt idx="0">
+                  <c:v>55</c:v>
+                </c:pt>
+                <c:pt idx="1">
+                  <c:v>73</c:v>
+                </c:pt>
+              </c:numCache>
+            </c:numRef>
+          </c:val>
+        </c:ser>
+        <c:dLbls>
+          <c:numFmt formatCode="0&quot;%&quot;" sourceLinked="0"/>
+          <c:txPr>
+            <a:bodyPr/>
+            <a:lstStyle/>
+            <a:p>
+              <a:pPr>
+                <a:defRPr b="0" i="0" strike="noStrike" sz="1100" u="none">
+                  <a:solidFill>
+                    <a:srgbClr val="FFFFFF"/>
+                  </a:solidFill>
+                  <a:latin typeface="Calibri"/>
+                </a:defRPr>
+              </a:pPr>
+            </a:p>
+          </c:txPr>
+          <c:dLblPos val="inEnd"/>
+          <c:showLegendKey val="0"/>
+          <c:showVal val="1"/>
+          <c:showCatName val="0"/>
+          <c:showSerName val="0"/>
+          <c:showPercent val="0"/>
+          <c:showBubbleSize val="0"/>
+          <c:showLeaderLines val="0"/>
+        </c:dLbls>
+        <c:gapWidth val="150"/>
+        <c:overlap val="0"/>
+        <c:axId val="2094734554"/>
+        <c:axId val="2094734552"/>
+        <c:axId val="2094734556"/>
+      </c:barChart>
+      <c:catAx>
+        <c:axId val="2094734554"/>
+        <c:scaling>
+          <c:orientation val="minMax"/>
+        </c:scaling>
+        <c:delete val="0"/>
+        <c:axPos val="l"/>
+        <c:numFmt formatCode="General" sourceLinked="1"/>
+        <c:majorTickMark val="out"/>
+        <c:minorTickMark val="none"/>
+        <c:tickLblPos val="nextTo"/>
+        <c:spPr>
+          <a:ln w="12700" cap="flat">
+            <a:solidFill>
+              <a:srgbClr val="888888"/>
+            </a:solidFill>
+            <a:prstDash val="solid"/>
+            <a:round/>
+          </a:ln>
+        </c:spPr>
+        <c:txPr>
+          <a:bodyPr/>
+          <a:lstStyle/>
+          <a:p>
+            <a:pPr>
+              <a:defRPr sz="1000" b="0" i="0" u="none" strike="noStrike">
+                <a:solidFill>
+                  <a:srgbClr val="7A849C"/>
+                </a:solidFill>
+                <a:latin typeface="Malgun Gothic"/>
+              </a:defRPr>
+            </a:pPr>
+            <a:endParaRPr lang="en-US"/>
+          </a:p>
+        </c:txPr>
+        <c:crossAx val="2094734552"/>
+        <c:crosses val="autoZero"/>
+        <c:auto val="1"/>
+        <c:lblAlgn val="ctr"/>
+        <c:noMultiLvlLbl val="1"/>
+      </c:catAx>
+      <c:valAx>
+        <c:axId val="2094734552"/>
+        <c:scaling>
+          <c:orientation val="minMax"/>
+          <c:max val="90"/>
+        </c:scaling>
+        <c:delete val="0"/>
+        <c:axPos val="b"/>
+        <c:majorGridlines>
+          <c:spPr>
+            <a:ln w="12700" cap="flat">
+              <a:solidFill>
+                <a:srgbClr val="E2E7F0"/>
+              </a:solidFill>
+              <a:prstDash val="solid"/>
+              <a:round/>
+            </a:ln>
+          </c:spPr>
+        </c:majorGridlines>
+        <c:numFmt formatCode="General" sourceLinked="0"/>
+        <c:majorTickMark val="out"/>
+        <c:minorTickMark val="none"/>
+        <c:tickLblPos val="low"/>
+        <c:spPr>
+          <a:ln w="12700" cap="flat">
+            <a:solidFill>
+              <a:srgbClr val="888888"/>
+            </a:solidFill>
+            <a:prstDash val="solid"/>
+            <a:round/>
+          </a:ln>
+        </c:spPr>
+        <c:txPr>
+          <a:bodyPr/>
+          <a:lstStyle/>
+          <a:p>
+            <a:pPr>
+              <a:defRPr sz="1000" b="0" i="0" u="none" strike="noStrike">
+                <a:solidFill>
+                  <a:srgbClr val="7A849C"/>
+                </a:solidFill>
+                <a:latin typeface="Calibri"/>
+              </a:defRPr>
+            </a:pPr>
+            <a:endParaRPr lang="en-US"/>
+          </a:p>
+        </c:txPr>
+        <c:crossAx val="2094734554"/>
+        <c:crosses val="autoZero"/>
+        <c:crossBetween val="between"/>
+      </c:valAx>
+      <c:spPr>
+        <a:noFill/>
+        <a:ln>
+          <a:noFill/>
+        </a:ln>
+        <a:effectLst/>
+      </c:spPr>
+    </c:plotArea>
+    <c:plotVisOnly val="1"/>
+    <c:dispBlanksAs val="span"/>
+  </c:chart>
+  <c:spPr>
+    <a:noFill/>
+    <a:ln>
+      <a:noFill/>
+    </a:ln>
+    <a:effectLst/>
+  </c:spPr>
+  <c:externalData r:id="rId1">
+    <c:autoUpdate val="0"/>
+  </c:externalData>
+</c:chartSpace>
+</file>
+
+<file path=ppt/charts/chart20.xml><?xml version="1.0" encoding="utf-8"?>
 <c:chartSpace xmlns:c="http://schemas.openxmlformats.org/drawingml/2006/chart" xmlns:a="http://schemas.openxmlformats.org/drawingml/2006/main" xmlns:r="http://schemas.openxmlformats.org/officeDocument/2006/relationships">
   <c:date1904 val="0"/>
   <c:roundedCorners val="1"/>
@@ -5894,266 +6275,7 @@
 </c:chartSpace>
 </file>
 
-<file path=ppt/charts/chart2.xml><?xml version="1.0" encoding="utf-8"?>
-<c:chartSpace xmlns:c="http://schemas.openxmlformats.org/drawingml/2006/chart" xmlns:a="http://schemas.openxmlformats.org/drawingml/2006/main" xmlns:r="http://schemas.openxmlformats.org/officeDocument/2006/relationships">
-  <c:date1904 val="0"/>
-  <c:roundedCorners val="1"/>
-  <c:chart>
-    <c:autoTitleDeleted val="1"/>
-    <c:plotArea>
-      <c:layout/>
-      <c:barChart>
-        <c:barDir val="bar"/>
-        <c:grouping val="clustered"/>
-        <c:varyColors val="0"/>
-        <c:ser>
-          <c:idx val="0"/>
-          <c:order val="0"/>
-          <c:tx>
-            <c:strRef>
-              <c:f>Sheet1!$B$1</c:f>
-              <c:strCache>
-                <c:ptCount val="1"/>
-                <c:pt idx="0">
-                  <c:v>EQE</c:v>
-                </c:pt>
-              </c:strCache>
-            </c:strRef>
-          </c:tx>
-          <c:spPr>
-            <a:solidFill>
-              <a:srgbClr val="FF6B35"/>
-            </a:solidFill>
-            <a:effectLst/>
-          </c:spPr>
-          <c:invertIfNegative val="0"/>
-          <c:dLbls>
-            <c:numFmt formatCode="0&quot;%&quot;" sourceLinked="0"/>
-            <c:txPr>
-              <a:bodyPr/>
-              <a:lstStyle/>
-              <a:p>
-                <a:pPr>
-                  <a:defRPr b="0" i="0" strike="noStrike" sz="1100" u="none">
-                    <a:solidFill>
-                      <a:srgbClr val="FFFFFF"/>
-                    </a:solidFill>
-                    <a:latin typeface="Calibri"/>
-                  </a:defRPr>
-                </a:pPr>
-              </a:p>
-            </c:txPr>
-            <c:dLblPos val="inEnd"/>
-            <c:showLegendKey val="0"/>
-            <c:showVal val="1"/>
-            <c:showCatName val="0"/>
-            <c:showSerName val="0"/>
-            <c:showPercent val="0"/>
-            <c:showBubbleSize val="0"/>
-            <c:showLeaderLines val="0"/>
-          </c:dLbls>
-          <c:dPt>
-            <c:idx val="0"/>
-            <c:invertIfNegative val="0"/>
-            <c:bubble3D val="0"/>
-            <c:spPr>
-              <a:solidFill>
-                <a:srgbClr val="FF6B35"/>
-              </a:solidFill>
-              <a:effectLst/>
-            </c:spPr>
-          </c:dPt>
-          <c:dPt>
-            <c:idx val="1"/>
-            <c:invertIfNegative val="0"/>
-            <c:bubble3D val="0"/>
-            <c:spPr>
-              <a:solidFill>
-                <a:srgbClr val="2EC4B6"/>
-              </a:solidFill>
-              <a:effectLst/>
-            </c:spPr>
-          </c:dPt>
-          <c:cat>
-            <c:multiLvlStrRef>
-              <c:f>Sheet1!$A$2:$A$3</c:f>
-              <c:multiLvlStrCache>
-                <c:ptCount val="2"/>
-                <c:lvl>
-                  <c:pt idx="0">
-                    <c:v>측정 Ag</c:v>
-                  </c:pt>
-                  <c:pt idx="1">
-                    <c:v>이상 Ag</c:v>
-                  </c:pt>
-                </c:lvl>
-              </c:multiLvlStrCache>
-            </c:multiLvlStrRef>
-          </c:cat>
-          <c:val>
-            <c:numRef>
-              <c:f>Sheet1!$B$2:$B$3</c:f>
-              <c:numCache>
-                <c:formatCode>General</c:formatCode>
-                <c:ptCount val="2"/>
-                <c:pt idx="0">
-                  <c:v>55</c:v>
-                </c:pt>
-                <c:pt idx="1">
-                  <c:v>73</c:v>
-                </c:pt>
-              </c:numCache>
-            </c:numRef>
-          </c:val>
-        </c:ser>
-        <c:dLbls>
-          <c:numFmt formatCode="0&quot;%&quot;" sourceLinked="0"/>
-          <c:txPr>
-            <a:bodyPr/>
-            <a:lstStyle/>
-            <a:p>
-              <a:pPr>
-                <a:defRPr b="0" i="0" strike="noStrike" sz="1100" u="none">
-                  <a:solidFill>
-                    <a:srgbClr val="FFFFFF"/>
-                  </a:solidFill>
-                  <a:latin typeface="Calibri"/>
-                </a:defRPr>
-              </a:pPr>
-            </a:p>
-          </c:txPr>
-          <c:dLblPos val="inEnd"/>
-          <c:showLegendKey val="0"/>
-          <c:showVal val="1"/>
-          <c:showCatName val="0"/>
-          <c:showSerName val="0"/>
-          <c:showPercent val="0"/>
-          <c:showBubbleSize val="0"/>
-          <c:showLeaderLines val="0"/>
-        </c:dLbls>
-        <c:gapWidth val="150"/>
-        <c:overlap val="0"/>
-        <c:axId val="2094734554"/>
-        <c:axId val="2094734552"/>
-        <c:axId val="2094734556"/>
-      </c:barChart>
-      <c:catAx>
-        <c:axId val="2094734554"/>
-        <c:scaling>
-          <c:orientation val="minMax"/>
-        </c:scaling>
-        <c:delete val="0"/>
-        <c:axPos val="l"/>
-        <c:numFmt formatCode="General" sourceLinked="1"/>
-        <c:majorTickMark val="out"/>
-        <c:minorTickMark val="none"/>
-        <c:tickLblPos val="nextTo"/>
-        <c:spPr>
-          <a:ln w="12700" cap="flat">
-            <a:solidFill>
-              <a:srgbClr val="888888"/>
-            </a:solidFill>
-            <a:prstDash val="solid"/>
-            <a:round/>
-          </a:ln>
-        </c:spPr>
-        <c:txPr>
-          <a:bodyPr/>
-          <a:lstStyle/>
-          <a:p>
-            <a:pPr>
-              <a:defRPr sz="1000" b="0" i="0" u="none" strike="noStrike">
-                <a:solidFill>
-                  <a:srgbClr val="7A849C"/>
-                </a:solidFill>
-                <a:latin typeface="Malgun Gothic"/>
-              </a:defRPr>
-            </a:pPr>
-            <a:endParaRPr lang="en-US"/>
-          </a:p>
-        </c:txPr>
-        <c:crossAx val="2094734552"/>
-        <c:crosses val="autoZero"/>
-        <c:auto val="1"/>
-        <c:lblAlgn val="ctr"/>
-        <c:noMultiLvlLbl val="1"/>
-      </c:catAx>
-      <c:valAx>
-        <c:axId val="2094734552"/>
-        <c:scaling>
-          <c:orientation val="minMax"/>
-          <c:max val="90"/>
-        </c:scaling>
-        <c:delete val="0"/>
-        <c:axPos val="b"/>
-        <c:majorGridlines>
-          <c:spPr>
-            <a:ln w="12700" cap="flat">
-              <a:solidFill>
-                <a:srgbClr val="E2E7F0"/>
-              </a:solidFill>
-              <a:prstDash val="solid"/>
-              <a:round/>
-            </a:ln>
-          </c:spPr>
-        </c:majorGridlines>
-        <c:numFmt formatCode="General" sourceLinked="0"/>
-        <c:majorTickMark val="out"/>
-        <c:minorTickMark val="none"/>
-        <c:tickLblPos val="low"/>
-        <c:spPr>
-          <a:ln w="12700" cap="flat">
-            <a:solidFill>
-              <a:srgbClr val="888888"/>
-            </a:solidFill>
-            <a:prstDash val="solid"/>
-            <a:round/>
-          </a:ln>
-        </c:spPr>
-        <c:txPr>
-          <a:bodyPr/>
-          <a:lstStyle/>
-          <a:p>
-            <a:pPr>
-              <a:defRPr sz="1000" b="0" i="0" u="none" strike="noStrike">
-                <a:solidFill>
-                  <a:srgbClr val="7A849C"/>
-                </a:solidFill>
-                <a:latin typeface="Calibri"/>
-              </a:defRPr>
-            </a:pPr>
-            <a:endParaRPr lang="en-US"/>
-          </a:p>
-        </c:txPr>
-        <c:crossAx val="2094734554"/>
-        <c:crosses val="autoZero"/>
-        <c:crossBetween val="between"/>
-      </c:valAx>
-      <c:spPr>
-        <a:noFill/>
-        <a:ln>
-          <a:noFill/>
-        </a:ln>
-        <a:effectLst/>
-      </c:spPr>
-    </c:plotArea>
-    <c:plotVisOnly val="1"/>
-    <c:dispBlanksAs val="span"/>
-  </c:chart>
-  <c:spPr>
-    <a:noFill/>
-    <a:ln>
-      <a:noFill/>
-    </a:ln>
-    <a:effectLst/>
-  </c:spPr>
-  <c:externalData r:id="rId1">
-    <c:autoUpdate val="0"/>
-  </c:externalData>
-</c:chartSpace>
-</file>
-
-<file path=ppt/charts/chart20.xml><?xml version="1.0" encoding="utf-8"?>
+<file path=ppt/charts/chart21.xml><?xml version="1.0" encoding="utf-8"?>
 <c:chartSpace xmlns:c="http://schemas.openxmlformats.org/drawingml/2006/chart" xmlns:a="http://schemas.openxmlformats.org/drawingml/2006/main" xmlns:r="http://schemas.openxmlformats.org/officeDocument/2006/relationships">
   <c:date1904 val="0"/>
   <c:roundedCorners val="1"/>
@@ -10391,7 +10513,7 @@
           <a:p>
             <a:r>
               <a:rPr lang="en-US" dirty="0"/>
-              <a:t>ETL 계열이 상위에 있지만 양극쪽 상부전극에는 쓸 수 없다. 그 제약 안에서 HATCN이 압도적.</a:t>
+              <a:t>Al2O3 0.910 은 Al-rich 클러스터의 과결합이었다. 화학량론 Al4O6 는 0.422 로 MoOx 수준.</a:t>
             </a:r>
             <a:endParaRPr lang="en-US" dirty="0"/>
           </a:p>
@@ -16391,7 +16513,7 @@
                 <a:ea typeface="Malgun Gothic" pitchFamily="34" charset="-122"/>
                 <a:cs typeface="Malgun Gothic" pitchFamily="34" charset="-120"/>
               </a:rPr>
-              <a:t>HATCN 은 왜 압도적인가 ②  후보 20종 스크리닝</a:t>
+              <a:t>HATCN 은 왜 압도적인가 ②  후보 스크리닝</a:t>
             </a:r>
             <a:endParaRPr lang="en-US" sz="3200" dirty="0"/>
           </a:p>
@@ -16430,7 +16552,7 @@
                 <a:ea typeface="Malgun Gothic" pitchFamily="34" charset="-122"/>
                 <a:cs typeface="Malgun Gothic" pitchFamily="34" charset="-120"/>
               </a:rPr>
-              <a:t>PBE-D3(BJ) counterpoise 보정 Ag 결합에너지. 청록 = 양극쪽에서 실제로 쓸 수 있는 재료</a:t>
+              <a:t>PBE-D3(BJ) counterpoise 보정. 모델 품질이 다른 값을 한 줄에 세우면 안 된다</a:t>
             </a:r>
             <a:endParaRPr lang="en-US" sz="1400" dirty="0"/>
           </a:p>
@@ -16445,11 +16567,11 @@
         <p:spPr>
           <a:xfrm>
             <a:off x="566928" y="1691640"/>
-            <a:ext cx="7863840" cy="4160520"/>
+            <a:ext cx="3703320" cy="4160520"/>
           </a:xfrm>
           <a:prstGeom prst="roundRect">
             <a:avLst>
-              <a:gd name="adj" fmla="val 1319"/>
+              <a:gd name="adj" fmla="val 1481"/>
             </a:avLst>
           </a:prstGeom>
           <a:solidFill>
@@ -16465,15 +16587,93 @@
           </a:effectLst>
         </p:spPr>
       </p:sp>
+      <p:sp>
+        <p:nvSpPr>
+          <p:cNvPr id="5" name="Text 3"/>
+          <p:cNvSpPr/>
+          <p:nvPr/>
+        </p:nvSpPr>
+        <p:spPr>
+          <a:xfrm>
+            <a:off x="822960" y="1856232"/>
+            <a:ext cx="3200400" cy="274320"/>
+          </a:xfrm>
+          <a:prstGeom prst="rect">
+            <a:avLst/>
+          </a:prstGeom>
+          <a:noFill/>
+          <a:ln/>
+        </p:spPr>
+        <p:txBody>
+          <a:bodyPr wrap="square" lIns="0" tIns="0" rIns="0" bIns="0" rtlCol="0" anchor="ctr"/>
+          <a:lstStyle/>
+          <a:p>
+            <a:pPr indent="0" marL="0">
+              <a:buNone/>
+            </a:pPr>
+            <a:r>
+              <a:rPr lang="en-US" sz="1300" b="1" dirty="0">
+                <a:solidFill>
+                  <a:srgbClr val="2EC4B6"/>
+                </a:solidFill>
+                <a:latin typeface="Malgun Gothic" pitchFamily="34" charset="0"/>
+                <a:ea typeface="Malgun Gothic" pitchFamily="34" charset="-122"/>
+                <a:cs typeface="Malgun Gothic" pitchFamily="34" charset="-120"/>
+              </a:rPr>
+              <a:t>A · 전분자 DFT</a:t>
+            </a:r>
+            <a:endParaRPr lang="en-US" sz="1300" dirty="0"/>
+          </a:p>
+        </p:txBody>
+      </p:sp>
+      <p:sp>
+        <p:nvSpPr>
+          <p:cNvPr id="6" name="Text 4"/>
+          <p:cNvSpPr/>
+          <p:nvPr/>
+        </p:nvSpPr>
+        <p:spPr>
+          <a:xfrm>
+            <a:off x="822960" y="2121408"/>
+            <a:ext cx="3200400" cy="219456"/>
+          </a:xfrm>
+          <a:prstGeom prst="rect">
+            <a:avLst/>
+          </a:prstGeom>
+          <a:noFill/>
+          <a:ln/>
+        </p:spPr>
+        <p:txBody>
+          <a:bodyPr wrap="square" lIns="0" tIns="0" rIns="0" bIns="0" rtlCol="0" anchor="ctr"/>
+          <a:lstStyle/>
+          <a:p>
+            <a:pPr indent="0" marL="0">
+              <a:buNone/>
+            </a:pPr>
+            <a:r>
+              <a:rPr lang="en-US" sz="950" dirty="0">
+                <a:solidFill>
+                  <a:srgbClr val="7A849C"/>
+                </a:solidFill>
+                <a:latin typeface="Malgun Gothic" pitchFamily="34" charset="0"/>
+                <a:ea typeface="Malgun Gothic" pitchFamily="34" charset="-122"/>
+                <a:cs typeface="Malgun Gothic" pitchFamily="34" charset="-120"/>
+              </a:rPr>
+              <a:t>실제 재료, 직접 비교 가능</a:t>
+            </a:r>
+            <a:endParaRPr lang="en-US" sz="950" dirty="0"/>
+          </a:p>
+        </p:txBody>
+      </p:sp>
       <p:graphicFrame>
         <p:nvGraphicFramePr>
-          <p:cNvPr id="5" name="Chart 0" descr=""/>
+          <p:cNvPr id="7" name="Chart 0" descr=""/>
           <p:cNvGraphicFramePr/>
           <p:nvPr/>
         </p:nvGraphicFramePr>
         <p:xfrm>
-          <a:off x="777240" y="1847088"/>
-          <a:ext cx="7452360" cy="3840480"/>
+          <a:off x="822960" y="2377440"/>
+          <a:ext cx="3200400" cy="3291840"/>
         </p:xfrm>
         <a:graphic xmlns:a="http://schemas.openxmlformats.org/drawingml/2006/main">
           <a:graphicData uri="http://schemas.openxmlformats.org/drawingml/2006/chart">
@@ -16483,18 +16683,18 @@
       </p:graphicFrame>
       <p:sp>
         <p:nvSpPr>
-          <p:cNvPr id="6" name="Shape 3"/>
-          <p:cNvSpPr/>
-          <p:nvPr/>
-        </p:nvSpPr>
-        <p:spPr>
-          <a:xfrm>
-            <a:off x="8686800" y="1691640"/>
-            <a:ext cx="2944368" cy="4160520"/>
+          <p:cNvPr id="8" name="Shape 5"/>
+          <p:cNvSpPr/>
+          <p:nvPr/>
+        </p:nvSpPr>
+        <p:spPr>
+          <a:xfrm>
+            <a:off x="4526280" y="1691640"/>
+            <a:ext cx="3703320" cy="4160520"/>
           </a:xfrm>
           <a:prstGeom prst="roundRect">
             <a:avLst>
-              <a:gd name="adj" fmla="val 1863"/>
+              <a:gd name="adj" fmla="val 1481"/>
             </a:avLst>
           </a:prstGeom>
           <a:solidFill>
@@ -16512,14 +16712,14 @@
       </p:sp>
       <p:sp>
         <p:nvSpPr>
-          <p:cNvPr id="7" name="Text 4"/>
-          <p:cNvSpPr/>
-          <p:nvPr/>
-        </p:nvSpPr>
-        <p:spPr>
-          <a:xfrm>
-            <a:off x="8942832" y="1874520"/>
-            <a:ext cx="2468880" cy="292608"/>
+          <p:cNvPr id="9" name="Text 6"/>
+          <p:cNvSpPr/>
+          <p:nvPr/>
+        </p:nvSpPr>
+        <p:spPr>
+          <a:xfrm>
+            <a:off x="4782312" y="1856232"/>
+            <a:ext cx="3200400" cy="274320"/>
           </a:xfrm>
           <a:prstGeom prst="rect">
             <a:avLst/>
@@ -16535,30 +16735,30 @@
               <a:buNone/>
             </a:pPr>
             <a:r>
-              <a:rPr lang="en-US" sz="1350" b="1" dirty="0">
-                <a:solidFill>
-                  <a:srgbClr val="1A1F2E"/>
+              <a:rPr lang="en-US" sz="1300" b="1" dirty="0">
+                <a:solidFill>
+                  <a:srgbClr val="1E2761"/>
                 </a:solidFill>
                 <a:latin typeface="Malgun Gothic" pitchFamily="34" charset="0"/>
                 <a:ea typeface="Malgun Gothic" pitchFamily="34" charset="-122"/>
                 <a:cs typeface="Malgun Gothic" pitchFamily="34" charset="-120"/>
               </a:rPr>
-              <a:t>읽는 법</a:t>
+              <a:t>B · 무기물 클러스터</a:t>
             </a:r>
-            <a:endParaRPr lang="en-US" sz="1350" dirty="0"/>
+            <a:endParaRPr lang="en-US" sz="1300" dirty="0"/>
           </a:p>
         </p:txBody>
       </p:sp>
       <p:sp>
         <p:nvSpPr>
-          <p:cNvPr id="8" name="Text 5"/>
-          <p:cNvSpPr/>
-          <p:nvPr/>
-        </p:nvSpPr>
-        <p:spPr>
-          <a:xfrm>
-            <a:off x="8942832" y="2240280"/>
-            <a:ext cx="2468880" cy="2377440"/>
+          <p:cNvPr id="10" name="Text 7"/>
+          <p:cNvSpPr/>
+          <p:nvPr/>
+        </p:nvSpPr>
+        <p:spPr>
+          <a:xfrm>
+            <a:off x="4782312" y="2121408"/>
+            <a:ext cx="3200400" cy="219456"/>
           </a:xfrm>
           <a:prstGeom prst="rect">
             <a:avLst/>
@@ -16570,123 +16770,196 @@
           <a:bodyPr wrap="square" lIns="0" tIns="0" rIns="0" bIns="0" rtlCol="0" anchor="ctr"/>
           <a:lstStyle/>
           <a:p>
-            <a:pPr marL="342900" indent="-342900">
-              <a:spcAft>
-                <a:spcPts val="800"/>
-              </a:spcAft>
-              <a:buSzPct val="100000"/>
-              <a:buChar char="•"/>
+            <a:pPr indent="0" marL="0">
+              <a:buNone/>
             </a:pPr>
             <a:r>
-              <a:rPr lang="en-US" sz="1050" dirty="0">
-                <a:solidFill>
-                  <a:srgbClr val="1A1F2E"/>
+              <a:rPr lang="en-US" sz="950" dirty="0">
+                <a:solidFill>
+                  <a:srgbClr val="7A849C"/>
                 </a:solidFill>
                 <a:latin typeface="Malgun Gothic" pitchFamily="34" charset="0"/>
                 <a:ea typeface="Malgun Gothic" pitchFamily="34" charset="-122"/>
                 <a:cs typeface="Malgun Gothic" pitchFamily="34" charset="-120"/>
               </a:rPr>
-              <a:t>HATCN 1.03 eV — 양극쪽 최고</a:t>
+              <a:t>모델 의존성 큼 — 조성·배위수에 민감</a:t>
             </a:r>
-            <a:endParaRPr lang="en-US" sz="1050" dirty="0"/>
-          </a:p>
-          <a:p>
-            <a:pPr marL="342900" indent="-342900">
-              <a:spcAft>
-                <a:spcPts val="800"/>
-              </a:spcAft>
-              <a:buSzPct val="100000"/>
-              <a:buChar char="•"/>
+            <a:endParaRPr lang="en-US" sz="950" dirty="0"/>
+          </a:p>
+        </p:txBody>
+      </p:sp>
+      <p:graphicFrame>
+        <p:nvGraphicFramePr>
+          <p:cNvPr id="11" name="Chart 1" descr=""/>
+          <p:cNvGraphicFramePr/>
+          <p:nvPr/>
+        </p:nvGraphicFramePr>
+        <p:xfrm>
+          <a:off x="4782312" y="2377440"/>
+          <a:ext cx="3200400" cy="2286000"/>
+        </p:xfrm>
+        <a:graphic xmlns:a="http://schemas.openxmlformats.org/drawingml/2006/main">
+          <a:graphicData uri="http://schemas.openxmlformats.org/drawingml/2006/chart">
+            <c:chart xmlns:c="http://schemas.openxmlformats.org/drawingml/2006/chart" r:id="rId2"/>
+          </a:graphicData>
+        </a:graphic>
+      </p:graphicFrame>
+      <p:sp>
+        <p:nvSpPr>
+          <p:cNvPr id="12" name="Text 8"/>
+          <p:cNvSpPr/>
+          <p:nvPr/>
+        </p:nvSpPr>
+        <p:spPr>
+          <a:xfrm>
+            <a:off x="4782312" y="4736592"/>
+            <a:ext cx="3200400" cy="256032"/>
+          </a:xfrm>
+          <a:prstGeom prst="rect">
+            <a:avLst/>
+          </a:prstGeom>
+          <a:noFill/>
+          <a:ln/>
+        </p:spPr>
+        <p:txBody>
+          <a:bodyPr wrap="square" lIns="0" tIns="0" rIns="0" bIns="0" rtlCol="0" anchor="ctr"/>
+          <a:lstStyle/>
+          <a:p>
+            <a:pPr indent="0" marL="0">
+              <a:buNone/>
             </a:pPr>
             <a:r>
-              <a:rPr lang="en-US" sz="1050" dirty="0">
-                <a:solidFill>
-                  <a:srgbClr val="1A1F2E"/>
+              <a:rPr lang="en-US" sz="1200" b="1" dirty="0">
+                <a:solidFill>
+                  <a:srgbClr val="7A849C"/>
                 </a:solidFill>
                 <a:latin typeface="Malgun Gothic" pitchFamily="34" charset="0"/>
                 <a:ea typeface="Malgun Gothic" pitchFamily="34" charset="-122"/>
                 <a:cs typeface="Malgun Gothic" pitchFamily="34" charset="-120"/>
               </a:rPr>
-              <a:t>MoOx 는 산소공공이 있어야 0.45, 화학량론이면 0.28</a:t>
+              <a:t>C · 작용기 모델 화합물</a:t>
             </a:r>
-            <a:endParaRPr lang="en-US" sz="1050" dirty="0"/>
-          </a:p>
-          <a:p>
-            <a:pPr marL="342900" indent="-342900">
-              <a:spcAft>
-                <a:spcPts val="800"/>
-              </a:spcAft>
-              <a:buSzPct val="100000"/>
-              <a:buChar char="•"/>
+            <a:endParaRPr lang="en-US" sz="1200" dirty="0"/>
+          </a:p>
+        </p:txBody>
+      </p:sp>
+      <p:sp>
+        <p:nvSpPr>
+          <p:cNvPr id="13" name="Text 9"/>
+          <p:cNvSpPr/>
+          <p:nvPr/>
+        </p:nvSpPr>
+        <p:spPr>
+          <a:xfrm>
+            <a:off x="4782312" y="5010912"/>
+            <a:ext cx="3200400" cy="777240"/>
+          </a:xfrm>
+          <a:prstGeom prst="rect">
+            <a:avLst/>
+          </a:prstGeom>
+          <a:noFill/>
+          <a:ln/>
+        </p:spPr>
+        <p:txBody>
+          <a:bodyPr wrap="square" lIns="0" tIns="0" rIns="0" bIns="0" rtlCol="0" anchor="ctr"/>
+          <a:lstStyle/>
+          <a:p>
+            <a:pPr indent="0" marL="0">
+              <a:buNone/>
             </a:pPr>
             <a:r>
-              <a:rPr lang="en-US" sz="1050" dirty="0">
-                <a:solidFill>
-                  <a:srgbClr val="1A1F2E"/>
+              <a:rPr lang="en-US" sz="900" dirty="0">
+                <a:solidFill>
+                  <a:srgbClr val="7A849C"/>
                 </a:solidFill>
                 <a:latin typeface="Malgun Gothic" pitchFamily="34" charset="0"/>
                 <a:ea typeface="Malgun Gothic" pitchFamily="34" charset="-122"/>
                 <a:cs typeface="Malgun Gothic" pitchFamily="34" charset="-120"/>
               </a:rPr>
-              <a:t>HTL 계열(TPA, PhCz, TAPC)은 0.25~0.28 로 무력</a:t>
+              <a:t>재료가 아니라 대리 지표 — pyridine 0.34, triazine 0.29, PhCz(→TCTA) 0.28, TPA(→TAPC) 0.25, benzene 0.17</a:t>
             </a:r>
-            <a:endParaRPr lang="en-US" sz="1050" dirty="0"/>
-          </a:p>
-          <a:p>
-            <a:pPr marL="342900" indent="-342900">
-              <a:spcAft>
-                <a:spcPts val="800"/>
-              </a:spcAft>
-              <a:buSzPct val="100000"/>
-              <a:buChar char="•"/>
+            <a:endParaRPr lang="en-US" sz="900" dirty="0"/>
+          </a:p>
+        </p:txBody>
+      </p:sp>
+      <p:sp>
+        <p:nvSpPr>
+          <p:cNvPr id="14" name="Shape 10"/>
+          <p:cNvSpPr/>
+          <p:nvPr/>
+        </p:nvSpPr>
+        <p:spPr>
+          <a:xfrm>
+            <a:off x="8485632" y="1691640"/>
+            <a:ext cx="3145536" cy="4160520"/>
+          </a:xfrm>
+          <a:prstGeom prst="roundRect">
+            <a:avLst>
+              <a:gd name="adj" fmla="val 1744"/>
+            </a:avLst>
+          </a:prstGeom>
+          <a:solidFill>
+            <a:srgbClr val="FFF6F3"/>
+          </a:solidFill>
+          <a:ln/>
+          <a:effectLst>
+            <a:outerShdw sx="100000" sy="100000" kx="0" ky="0" algn="bl" rotWithShape="0" blurRad="114300" dist="12700" dir="5400000">
+              <a:srgbClr val="9AA5BC">
+                <a:alpha val="22000"/>
+              </a:srgbClr>
+            </a:outerShdw>
+          </a:effectLst>
+        </p:spPr>
+      </p:sp>
+      <p:sp>
+        <p:nvSpPr>
+          <p:cNvPr id="15" name="Text 11"/>
+          <p:cNvSpPr/>
+          <p:nvPr/>
+        </p:nvSpPr>
+        <p:spPr>
+          <a:xfrm>
+            <a:off x="8732520" y="1874520"/>
+            <a:ext cx="2651760" cy="274320"/>
+          </a:xfrm>
+          <a:prstGeom prst="rect">
+            <a:avLst/>
+          </a:prstGeom>
+          <a:noFill/>
+          <a:ln/>
+        </p:spPr>
+        <p:txBody>
+          <a:bodyPr wrap="square" lIns="0" tIns="0" rIns="0" bIns="0" rtlCol="0" anchor="ctr"/>
+          <a:lstStyle/>
+          <a:p>
+            <a:pPr indent="0" marL="0">
+              <a:buNone/>
             </a:pPr>
             <a:r>
-              <a:rPr lang="en-US" sz="1050" dirty="0">
-                <a:solidFill>
-                  <a:srgbClr val="1A1F2E"/>
+              <a:rPr lang="en-US" sz="1250" b="1" dirty="0">
+                <a:solidFill>
+                  <a:srgbClr val="C0392B"/>
                 </a:solidFill>
                 <a:latin typeface="Malgun Gothic" pitchFamily="34" charset="0"/>
                 <a:ea typeface="Malgun Gothic" pitchFamily="34" charset="-122"/>
                 <a:cs typeface="Malgun Gothic" pitchFamily="34" charset="-120"/>
               </a:rPr>
-              <a:t>TPBi·Bphen 등 상위권은 전부 ETL — 양극에 못 쓴다</a:t>
+              <a:t>이번 재감사에서 철회한 값</a:t>
             </a:r>
-            <a:endParaRPr lang="en-US" sz="1050" dirty="0"/>
+            <a:endParaRPr lang="en-US" sz="1250" dirty="0"/>
           </a:p>
         </p:txBody>
       </p:sp>
       <p:sp>
         <p:nvSpPr>
-          <p:cNvPr id="9" name="Shape 6"/>
-          <p:cNvSpPr/>
-          <p:nvPr/>
-        </p:nvSpPr>
-        <p:spPr>
-          <a:xfrm>
-            <a:off x="8942832" y="4709160"/>
-            <a:ext cx="2468880" cy="960120"/>
-          </a:xfrm>
-          <a:prstGeom prst="roundRect">
-            <a:avLst>
-              <a:gd name="adj" fmla="val 5714"/>
-            </a:avLst>
-          </a:prstGeom>
-          <a:solidFill>
-            <a:srgbClr val="E8F7F5"/>
-          </a:solidFill>
-          <a:ln/>
-        </p:spPr>
-      </p:sp>
-      <p:sp>
-        <p:nvSpPr>
-          <p:cNvPr id="10" name="Text 7"/>
-          <p:cNvSpPr/>
-          <p:nvPr/>
-        </p:nvSpPr>
-        <p:spPr>
-          <a:xfrm>
-            <a:off x="8942832" y="4709160"/>
-            <a:ext cx="2468880" cy="960120"/>
+          <p:cNvPr id="16" name="Text 12"/>
+          <p:cNvSpPr/>
+          <p:nvPr/>
+        </p:nvSpPr>
+        <p:spPr>
+          <a:xfrm>
+            <a:off x="8732520" y="2240280"/>
+            <a:ext cx="2651760" cy="219456"/>
           </a:xfrm>
           <a:prstGeom prst="rect">
             <a:avLst/>
@@ -16698,38 +16971,372 @@
           <a:bodyPr wrap="square" lIns="0" tIns="0" rIns="0" bIns="0" rtlCol="0" anchor="ctr"/>
           <a:lstStyle/>
           <a:p>
-            <a:pPr algn="ctr" indent="0" marL="0">
+            <a:pPr indent="0" marL="0">
               <a:buNone/>
             </a:pPr>
             <a:r>
-              <a:rPr lang="en-US" sz="1200" b="1" dirty="0">
-                <a:solidFill>
-                  <a:srgbClr val="0E8074"/>
+              <a:rPr lang="en-US" sz="950" b="1" dirty="0">
+                <a:solidFill>
+                  <a:srgbClr val="C0392B"/>
+                </a:solidFill>
+                <a:latin typeface="Calibri" pitchFamily="34" charset="0"/>
+                <a:ea typeface="Calibri" pitchFamily="34" charset="-122"/>
+                <a:cs typeface="Calibri" pitchFamily="34" charset="-120"/>
+              </a:rPr>
+              <a:t>Al2O3  0.910</a:t>
+            </a:r>
+            <a:endParaRPr lang="en-US" sz="950" dirty="0"/>
+          </a:p>
+        </p:txBody>
+      </p:sp>
+      <p:sp>
+        <p:nvSpPr>
+          <p:cNvPr id="17" name="Text 13"/>
+          <p:cNvSpPr/>
+          <p:nvPr/>
+        </p:nvSpPr>
+        <p:spPr>
+          <a:xfrm>
+            <a:off x="8732520" y="2441448"/>
+            <a:ext cx="2651760" cy="475488"/>
+          </a:xfrm>
+          <a:prstGeom prst="rect">
+            <a:avLst/>
+          </a:prstGeom>
+          <a:noFill/>
+          <a:ln/>
+        </p:spPr>
+        <p:txBody>
+          <a:bodyPr wrap="square" lIns="0" tIns="0" rIns="0" bIns="0" rtlCol="0" anchor="ctr"/>
+          <a:lstStyle/>
+          <a:p>
+            <a:pPr indent="0" marL="0">
+              <a:buNone/>
+            </a:pPr>
+            <a:r>
+              <a:rPr lang="en-US" sz="800" dirty="0">
+                <a:solidFill>
+                  <a:srgbClr val="7A849C"/>
                 </a:solidFill>
                 <a:latin typeface="Malgun Gothic" pitchFamily="34" charset="0"/>
                 <a:ea typeface="Malgun Gothic" pitchFamily="34" charset="-122"/>
                 <a:cs typeface="Malgun Gothic" pitchFamily="34" charset="-120"/>
               </a:rPr>
-              <a:t>양극 호환 재료 중</a:t>
+              <a:t>Al-rich Al10O10 클러스터 — 프로젝트 자체가 과결합으로 기록. 화학량론 Al4O6 는 0.422</a:t>
             </a:r>
-            <a:endParaRPr lang="en-US" sz="1200" dirty="0"/>
-          </a:p>
-          <a:p>
-            <a:pPr algn="ctr" indent="0" marL="0">
+            <a:endParaRPr lang="en-US" sz="800" dirty="0"/>
+          </a:p>
+        </p:txBody>
+      </p:sp>
+      <p:sp>
+        <p:nvSpPr>
+          <p:cNvPr id="18" name="Text 14"/>
+          <p:cNvSpPr/>
+          <p:nvPr/>
+        </p:nvSpPr>
+        <p:spPr>
+          <a:xfrm>
+            <a:off x="8732520" y="2953512"/>
+            <a:ext cx="2651760" cy="219456"/>
+          </a:xfrm>
+          <a:prstGeom prst="rect">
+            <a:avLst/>
+          </a:prstGeom>
+          <a:noFill/>
+          <a:ln/>
+        </p:spPr>
+        <p:txBody>
+          <a:bodyPr wrap="square" lIns="0" tIns="0" rIns="0" bIns="0" rtlCol="0" anchor="ctr"/>
+          <a:lstStyle/>
+          <a:p>
+            <a:pPr indent="0" marL="0">
               <a:buNone/>
             </a:pPr>
             <a:r>
-              <a:rPr lang="en-US" sz="1200" b="1" dirty="0">
-                <a:solidFill>
-                  <a:srgbClr val="0E8074"/>
+              <a:rPr lang="en-US" sz="950" b="1" dirty="0">
+                <a:solidFill>
+                  <a:srgbClr val="C0392B"/>
+                </a:solidFill>
+                <a:latin typeface="Calibri" pitchFamily="34" charset="0"/>
+                <a:ea typeface="Calibri" pitchFamily="34" charset="-122"/>
+                <a:cs typeface="Calibri" pitchFamily="34" charset="-120"/>
+              </a:rPr>
+              <a:t>MoO3  −0.718</a:t>
+            </a:r>
+            <a:endParaRPr lang="en-US" sz="950" dirty="0"/>
+          </a:p>
+        </p:txBody>
+      </p:sp>
+      <p:sp>
+        <p:nvSpPr>
+          <p:cNvPr id="19" name="Text 15"/>
+          <p:cNvSpPr/>
+          <p:nvPr/>
+        </p:nvSpPr>
+        <p:spPr>
+          <a:xfrm>
+            <a:off x="8732520" y="3154680"/>
+            <a:ext cx="2651760" cy="475488"/>
+          </a:xfrm>
+          <a:prstGeom prst="rect">
+            <a:avLst/>
+          </a:prstGeom>
+          <a:noFill/>
+          <a:ln/>
+        </p:spPr>
+        <p:txBody>
+          <a:bodyPr wrap="square" lIns="0" tIns="0" rIns="0" bIns="0" rtlCol="0" anchor="ctr"/>
+          <a:lstStyle/>
+          <a:p>
+            <a:pPr indent="0" marL="0">
+              <a:buNone/>
+            </a:pPr>
+            <a:r>
+              <a:rPr lang="en-US" sz="800" dirty="0">
+                <a:solidFill>
+                  <a:srgbClr val="7A849C"/>
                 </a:solidFill>
                 <a:latin typeface="Malgun Gothic" pitchFamily="34" charset="0"/>
                 <a:ea typeface="Malgun Gothic" pitchFamily="34" charset="-122"/>
                 <a:cs typeface="Malgun Gothic" pitchFamily="34" charset="-120"/>
               </a:rPr>
-              <a:t>2위(MoOx)의 2.3배</a:t>
+              <a:t>미정련(xTB 기하 + DFT 단일점). Ag 위치를 DFT 로 완화하면 +0.284</a:t>
             </a:r>
-            <a:endParaRPr lang="en-US" sz="1200" dirty="0"/>
+            <a:endParaRPr lang="en-US" sz="800" dirty="0"/>
+          </a:p>
+        </p:txBody>
+      </p:sp>
+      <p:sp>
+        <p:nvSpPr>
+          <p:cNvPr id="20" name="Text 16"/>
+          <p:cNvSpPr/>
+          <p:nvPr/>
+        </p:nvSpPr>
+        <p:spPr>
+          <a:xfrm>
+            <a:off x="8732520" y="3666744"/>
+            <a:ext cx="2651760" cy="219456"/>
+          </a:xfrm>
+          <a:prstGeom prst="rect">
+            <a:avLst/>
+          </a:prstGeom>
+          <a:noFill/>
+          <a:ln/>
+        </p:spPr>
+        <p:txBody>
+          <a:bodyPr wrap="square" lIns="0" tIns="0" rIns="0" bIns="0" rtlCol="0" anchor="ctr"/>
+          <a:lstStyle/>
+          <a:p>
+            <a:pPr indent="0" marL="0">
+              <a:buNone/>
+            </a:pPr>
+            <a:r>
+              <a:rPr lang="en-US" sz="950" b="1" dirty="0">
+                <a:solidFill>
+                  <a:srgbClr val="C0392B"/>
+                </a:solidFill>
+                <a:latin typeface="Calibri" pitchFamily="34" charset="0"/>
+                <a:ea typeface="Calibri" pitchFamily="34" charset="-122"/>
+                <a:cs typeface="Calibri" pitchFamily="34" charset="-120"/>
+              </a:rPr>
+              <a:t>CuI @Cu 0.819 / CuSCN @Cu 0.567</a:t>
+            </a:r>
+            <a:endParaRPr lang="en-US" sz="950" dirty="0"/>
+          </a:p>
+        </p:txBody>
+      </p:sp>
+      <p:sp>
+        <p:nvSpPr>
+          <p:cNvPr id="21" name="Text 17"/>
+          <p:cNvSpPr/>
+          <p:nvPr/>
+        </p:nvSpPr>
+        <p:spPr>
+          <a:xfrm>
+            <a:off x="8732520" y="3867912"/>
+            <a:ext cx="2651760" cy="475488"/>
+          </a:xfrm>
+          <a:prstGeom prst="rect">
+            <a:avLst/>
+          </a:prstGeom>
+          <a:noFill/>
+          <a:ln/>
+        </p:spPr>
+        <p:txBody>
+          <a:bodyPr wrap="square" lIns="0" tIns="0" rIns="0" bIns="0" rtlCol="0" anchor="ctr"/>
+          <a:lstStyle/>
+          <a:p>
+            <a:pPr indent="0" marL="0">
+              <a:buNone/>
+            </a:pPr>
+            <a:r>
+              <a:rPr lang="en-US" sz="800" dirty="0">
+                <a:solidFill>
+                  <a:srgbClr val="7A849C"/>
+                </a:solidFill>
+                <a:latin typeface="Malgun Gothic" pitchFamily="34" charset="0"/>
+                <a:ea typeface="Malgun Gothic" pitchFamily="34" charset="-122"/>
+                <a:cs typeface="Malgun Gothic" pitchFamily="34" charset="-120"/>
+              </a:rPr>
+              <a:t>Ag–Cu 금속간 접촉. 표면 화학이 아니라 합금 결합</a:t>
+            </a:r>
+            <a:endParaRPr lang="en-US" sz="800" dirty="0"/>
+          </a:p>
+        </p:txBody>
+      </p:sp>
+      <p:sp>
+        <p:nvSpPr>
+          <p:cNvPr id="22" name="Text 18"/>
+          <p:cNvSpPr/>
+          <p:nvPr/>
+        </p:nvSpPr>
+        <p:spPr>
+          <a:xfrm>
+            <a:off x="8732520" y="4379976"/>
+            <a:ext cx="2651760" cy="219456"/>
+          </a:xfrm>
+          <a:prstGeom prst="rect">
+            <a:avLst/>
+          </a:prstGeom>
+          <a:noFill/>
+          <a:ln/>
+        </p:spPr>
+        <p:txBody>
+          <a:bodyPr wrap="square" lIns="0" tIns="0" rIns="0" bIns="0" rtlCol="0" anchor="ctr"/>
+          <a:lstStyle/>
+          <a:p>
+            <a:pPr indent="0" marL="0">
+              <a:buNone/>
+            </a:pPr>
+            <a:r>
+              <a:rPr lang="en-US" sz="950" b="1" dirty="0">
+                <a:solidFill>
+                  <a:srgbClr val="C0392B"/>
+                </a:solidFill>
+                <a:latin typeface="Calibri" pitchFamily="34" charset="0"/>
+                <a:ea typeface="Calibri" pitchFamily="34" charset="-122"/>
+                <a:cs typeface="Calibri" pitchFamily="34" charset="-120"/>
+              </a:rPr>
+              <a:t>ZnS 1.60</a:t>
+            </a:r>
+            <a:endParaRPr lang="en-US" sz="950" dirty="0"/>
+          </a:p>
+        </p:txBody>
+      </p:sp>
+      <p:sp>
+        <p:nvSpPr>
+          <p:cNvPr id="23" name="Text 19"/>
+          <p:cNvSpPr/>
+          <p:nvPr/>
+        </p:nvSpPr>
+        <p:spPr>
+          <a:xfrm>
+            <a:off x="8732520" y="4581144"/>
+            <a:ext cx="2651760" cy="475488"/>
+          </a:xfrm>
+          <a:prstGeom prst="rect">
+            <a:avLst/>
+          </a:prstGeom>
+          <a:noFill/>
+          <a:ln/>
+        </p:spPr>
+        <p:txBody>
+          <a:bodyPr wrap="square" lIns="0" tIns="0" rIns="0" bIns="0" rtlCol="0" anchor="ctr"/>
+          <a:lstStyle/>
+          <a:p>
+            <a:pPr indent="0" marL="0">
+              <a:buNone/>
+            </a:pPr>
+            <a:r>
+              <a:rPr lang="en-US" sz="800" dirty="0">
+                <a:solidFill>
+                  <a:srgbClr val="7A849C"/>
+                </a:solidFill>
+                <a:latin typeface="Malgun Gothic" pitchFamily="34" charset="0"/>
+                <a:ea typeface="Malgun Gothic" pitchFamily="34" charset="-122"/>
+                <a:cs typeface="Malgun Gothic" pitchFamily="34" charset="-120"/>
+              </a:rPr>
+              <a:t>우리 계산이 아님 — 문헌 prior (Kim AFM 2015)</a:t>
+            </a:r>
+            <a:endParaRPr lang="en-US" sz="800" dirty="0"/>
+          </a:p>
+        </p:txBody>
+      </p:sp>
+      <p:sp>
+        <p:nvSpPr>
+          <p:cNvPr id="24" name="Text 20"/>
+          <p:cNvSpPr/>
+          <p:nvPr/>
+        </p:nvSpPr>
+        <p:spPr>
+          <a:xfrm>
+            <a:off x="8732520" y="5093208"/>
+            <a:ext cx="2651760" cy="219456"/>
+          </a:xfrm>
+          <a:prstGeom prst="rect">
+            <a:avLst/>
+          </a:prstGeom>
+          <a:noFill/>
+          <a:ln/>
+        </p:spPr>
+        <p:txBody>
+          <a:bodyPr wrap="square" lIns="0" tIns="0" rIns="0" bIns="0" rtlCol="0" anchor="ctr"/>
+          <a:lstStyle/>
+          <a:p>
+            <a:pPr indent="0" marL="0">
+              <a:buNone/>
+            </a:pPr>
+            <a:r>
+              <a:rPr lang="en-US" sz="950" b="1" dirty="0">
+                <a:solidFill>
+                  <a:srgbClr val="C0392B"/>
+                </a:solidFill>
+                <a:latin typeface="Calibri" pitchFamily="34" charset="0"/>
+                <a:ea typeface="Calibri" pitchFamily="34" charset="-122"/>
+                <a:cs typeface="Calibri" pitchFamily="34" charset="-120"/>
+              </a:rPr>
+              <a:t>PhCN·ZnS 1.218</a:t>
+            </a:r>
+            <a:endParaRPr lang="en-US" sz="950" dirty="0"/>
+          </a:p>
+        </p:txBody>
+      </p:sp>
+      <p:sp>
+        <p:nvSpPr>
+          <p:cNvPr id="25" name="Text 21"/>
+          <p:cNvSpPr/>
+          <p:nvPr/>
+        </p:nvSpPr>
+        <p:spPr>
+          <a:xfrm>
+            <a:off x="8732520" y="5294376"/>
+            <a:ext cx="2651760" cy="475488"/>
+          </a:xfrm>
+          <a:prstGeom prst="rect">
+            <a:avLst/>
+          </a:prstGeom>
+          <a:noFill/>
+          <a:ln/>
+        </p:spPr>
+        <p:txBody>
+          <a:bodyPr wrap="square" lIns="0" tIns="0" rIns="0" bIns="0" rtlCol="0" anchor="ctr"/>
+          <a:lstStyle/>
+          <a:p>
+            <a:pPr indent="0" marL="0">
+              <a:buNone/>
+            </a:pPr>
+            <a:r>
+              <a:rPr lang="en-US" sz="800" dirty="0">
+                <a:solidFill>
+                  <a:srgbClr val="7A849C"/>
+                </a:solidFill>
+                <a:latin typeface="Malgun Gothic" pitchFamily="34" charset="0"/>
+                <a:ea typeface="Malgun Gothic" pitchFamily="34" charset="-122"/>
+                <a:cs typeface="Malgun Gothic" pitchFamily="34" charset="-120"/>
+              </a:rPr>
+              <a:t>ZnS 가 나이트릴에 붙는 에너지. Ag 결합이 아님</a:t>
+            </a:r>
+            <a:endParaRPr lang="en-US" sz="800" dirty="0"/>
           </a:p>
         </p:txBody>
       </p:sp>

--- a/dft_seedlayer_screen/ppt/Ag_electrode_summary.pptx
+++ b/dft_seedlayer_screen/ppt/Ag_electrode_summary.pptx
@@ -20,9 +20,10 @@
     <p:sldId id="268" r:id="rId14"/>
     <p:sldId id="269" r:id="rId15"/>
     <p:sldId id="270" r:id="rId16"/>
+    <p:sldId id="271" r:id="rId17"/>
   </p:sldIdLst>
   <p:notesMasterIdLst>
-    <p:notesMasterId r:id="rId17"/>
+    <p:notesMasterId r:id="rId18"/>
   </p:notesMasterIdLst>
   <p:sldSz cx="12192000" cy="6858000"/>
   <p:notesSz cx="6858000" cy="12192000"/>
@@ -399,7 +400,7 @@
               <c:strCache>
                 <c:ptCount val="1"/>
                 <c:pt idx="0">
-                  <c:v>E_b</c:v>
+                  <c:v>E_b (eV)</c:v>
                 </c:pt>
               </c:strCache>
             </c:strRef>
@@ -452,7 +453,7 @@
             <c:bubble3D val="0"/>
             <c:spPr>
               <a:solidFill>
-                <a:srgbClr val="3FA9A0"/>
+                <a:srgbClr val="2EC4B6"/>
               </a:solidFill>
               <a:effectLst/>
             </c:spPr>
@@ -463,7 +464,7 @@
             <c:bubble3D val="0"/>
             <c:spPr>
               <a:solidFill>
-                <a:srgbClr val="9AA5BC"/>
+                <a:srgbClr val="1E2761"/>
               </a:solidFill>
               <a:effectLst/>
             </c:spPr>
@@ -474,7 +475,7 @@
             <c:bubble3D val="0"/>
             <c:spPr>
               <a:solidFill>
-                <a:srgbClr val="9AA5BC"/>
+                <a:srgbClr val="1E2761"/>
               </a:solidFill>
               <a:effectLst/>
             </c:spPr>
@@ -485,7 +486,7 @@
             <c:bubble3D val="0"/>
             <c:spPr>
               <a:solidFill>
-                <a:srgbClr val="9AA5BC"/>
+                <a:srgbClr val="1E2761"/>
               </a:solidFill>
               <a:effectLst/>
             </c:spPr>
@@ -496,7 +497,7 @@
             <c:bubble3D val="0"/>
             <c:spPr>
               <a:solidFill>
-                <a:srgbClr val="9AA5BC"/>
+                <a:srgbClr val="7FCFC8"/>
               </a:solidFill>
               <a:effectLst/>
             </c:spPr>
@@ -507,7 +508,7 @@
             <c:bubble3D val="0"/>
             <c:spPr>
               <a:solidFill>
-                <a:srgbClr val="9AA5BC"/>
+                <a:srgbClr val="1E2761"/>
               </a:solidFill>
               <a:effectLst/>
             </c:spPr>
@@ -518,7 +519,7 @@
             <c:bubble3D val="0"/>
             <c:spPr>
               <a:solidFill>
-                <a:srgbClr val="C5CEDE"/>
+                <a:srgbClr val="7FCFC8"/>
               </a:solidFill>
               <a:effectLst/>
             </c:spPr>
@@ -529,43 +530,99 @@
             <c:bubble3D val="0"/>
             <c:spPr>
               <a:solidFill>
-                <a:srgbClr val="C0392B"/>
+                <a:srgbClr val="7FCFC8"/>
+              </a:solidFill>
+              <a:effectLst/>
+            </c:spPr>
+          </c:dPt>
+          <c:dPt>
+            <c:idx val="9"/>
+            <c:invertIfNegative val="0"/>
+            <c:bubble3D val="0"/>
+            <c:spPr>
+              <a:solidFill>
+                <a:srgbClr val="7FCFC8"/>
+              </a:solidFill>
+              <a:effectLst/>
+            </c:spPr>
+          </c:dPt>
+          <c:dPt>
+            <c:idx val="10"/>
+            <c:invertIfNegative val="0"/>
+            <c:bubble3D val="0"/>
+            <c:spPr>
+              <a:solidFill>
+                <a:srgbClr val="7FCFC8"/>
+              </a:solidFill>
+              <a:effectLst/>
+            </c:spPr>
+          </c:dPt>
+          <c:dPt>
+            <c:idx val="11"/>
+            <c:invertIfNegative val="0"/>
+            <c:bubble3D val="0"/>
+            <c:spPr>
+              <a:solidFill>
+                <a:srgbClr val="7FCFC8"/>
+              </a:solidFill>
+              <a:effectLst/>
+            </c:spPr>
+          </c:dPt>
+          <c:dPt>
+            <c:idx val="12"/>
+            <c:invertIfNegative val="0"/>
+            <c:bubble3D val="0"/>
+            <c:spPr>
+              <a:solidFill>
+                <a:srgbClr val="C5CEDE"/>
               </a:solidFill>
               <a:effectLst/>
             </c:spPr>
           </c:dPt>
           <c:cat>
             <c:multiLvlStrRef>
-              <c:f>Sheet1!$A$2:$A$10</c:f>
+              <c:f>Sheet1!$A$2:$A$14</c:f>
               <c:multiLvlStrCache>
-                <c:ptCount val="9"/>
+                <c:ptCount val="13"/>
                 <c:lvl>
                   <c:pt idx="0">
-                    <c:v>HATCN  (CN 자리)</c:v>
+                    <c:v>HATCN  (CN 나이트릴)</c:v>
                   </c:pt>
                   <c:pt idx="1">
-                    <c:v>F4TCNQ</c:v>
+                    <c:v>F4TCNQ  (CN 나이트릴)</c:v>
                   </c:pt>
                   <c:pt idx="2">
-                    <c:v>Cs2CO3</c:v>
+                    <c:v>Cs2CO3  (카보네이트)</c:v>
                   </c:pt>
                   <c:pt idx="3">
-                    <c:v>TPBi</c:v>
+                    <c:v>TPBi  (벤즈이미다졸)</c:v>
                   </c:pt>
                   <c:pt idx="4">
-                    <c:v>p-bPPhenB</c:v>
+                    <c:v>p-bPPhenB  (페난트롤린)</c:v>
                   </c:pt>
                   <c:pt idx="5">
-                    <c:v>B3PyMPM</c:v>
+                    <c:v>B3PyMPM  (피리미딘)</c:v>
                   </c:pt>
                   <c:pt idx="6">
-                    <c:v>Bphen</c:v>
+                    <c:v>Bphen  (페난트롤린)</c:v>
                   </c:pt>
                   <c:pt idx="7">
-                    <c:v>Liq</c:v>
+                    <c:v>pyridine  (기준)</c:v>
                   </c:pt>
                   <c:pt idx="8">
-                    <c:v>HATCN  (분자면)</c:v>
+                    <c:v>triazine</c:v>
+                  </c:pt>
+                  <c:pt idx="9">
+                    <c:v>BTD</c:v>
+                  </c:pt>
+                  <c:pt idx="10">
+                    <c:v>Me3P=O</c:v>
+                  </c:pt>
+                  <c:pt idx="11">
+                    <c:v>thiophene</c:v>
+                  </c:pt>
+                  <c:pt idx="12">
+                    <c:v>benzene  (분산력 바닥)</c:v>
                   </c:pt>
                 </c:lvl>
               </c:multiLvlStrCache>
@@ -573,10 +630,10 @@
           </c:cat>
           <c:val>
             <c:numRef>
-              <c:f>Sheet1!$B$2:$B$10</c:f>
+              <c:f>Sheet1!$B$2:$B$14</c:f>
               <c:numCache>
                 <c:formatCode>General</c:formatCode>
-                <c:ptCount val="9"/>
+                <c:ptCount val="13"/>
                 <c:pt idx="0">
                   <c:v>1.029</c:v>
                 </c:pt>
@@ -599,10 +656,22 @@
                   <c:v>0.49</c:v>
                 </c:pt>
                 <c:pt idx="7">
+                  <c:v>0.342</c:v>
+                </c:pt>
+                <c:pt idx="8">
+                  <c:v>0.291</c:v>
+                </c:pt>
+                <c:pt idx="9">
+                  <c:v>0.277</c:v>
+                </c:pt>
+                <c:pt idx="10">
+                  <c:v>0.253</c:v>
+                </c:pt>
+                <c:pt idx="11">
+                  <c:v>0.169</c:v>
+                </c:pt>
+                <c:pt idx="12">
                   <c:v>0.167</c:v>
-                </c:pt>
-                <c:pt idx="8">
-                  <c:v>-0.024</c:v>
                 </c:pt>
               </c:numCache>
             </c:numRef>
@@ -663,7 +732,7 @@
           <a:lstStyle/>
           <a:p>
             <a:pPr>
-              <a:defRPr sz="850" b="0" i="0" u="none" strike="noStrike">
+              <a:defRPr sz="800" b="0" i="0" u="none" strike="noStrike">
                 <a:solidFill>
                   <a:srgbClr val="7A849C"/>
                 </a:solidFill>
@@ -683,8 +752,7 @@
         <c:axId val="2094734552"/>
         <c:scaling>
           <c:orientation val="minMax"/>
-          <c:max val="1.35"/>
-          <c:min val="-0.2"/>
+          <c:max val="1.32"/>
         </c:scaling>
         <c:delete val="0"/>
         <c:axPos val="b"/>
@@ -989,7 +1057,7 @@
           <a:lstStyle/>
           <a:p>
             <a:pPr>
-              <a:defRPr sz="800" b="0" i="0" u="none" strike="noStrike">
+              <a:defRPr sz="750" b="0" i="0" u="none" strike="noStrike">
                 <a:solidFill>
                   <a:srgbClr val="7A849C"/>
                 </a:solidFill>
@@ -1081,6 +1149,277 @@
 </file>
 
 <file path=ppt/charts/chart12.xml><?xml version="1.0" encoding="utf-8"?>
+<c:chartSpace xmlns:c="http://schemas.openxmlformats.org/drawingml/2006/chart" xmlns:a="http://schemas.openxmlformats.org/drawingml/2006/main" xmlns:r="http://schemas.openxmlformats.org/officeDocument/2006/relationships">
+  <c:date1904 val="0"/>
+  <c:roundedCorners val="1"/>
+  <c:chart>
+    <c:autoTitleDeleted val="1"/>
+    <c:plotArea>
+      <c:layout/>
+      <c:barChart>
+        <c:barDir val="bar"/>
+        <c:grouping val="clustered"/>
+        <c:varyColors val="0"/>
+        <c:ser>
+          <c:idx val="0"/>
+          <c:order val="0"/>
+          <c:tx>
+            <c:strRef>
+              <c:f>Sheet1!$B$1</c:f>
+              <c:strCache>
+                <c:ptCount val="1"/>
+                <c:pt idx="0">
+                  <c:v>E_b</c:v>
+                </c:pt>
+              </c:strCache>
+            </c:strRef>
+          </c:tx>
+          <c:spPr>
+            <a:solidFill>
+              <a:srgbClr val="9AA5BC"/>
+            </a:solidFill>
+            <a:effectLst/>
+          </c:spPr>
+          <c:invertIfNegative val="0"/>
+          <c:dLbls>
+            <c:numFmt formatCode="0.00" sourceLinked="0"/>
+            <c:txPr>
+              <a:bodyPr/>
+              <a:lstStyle/>
+              <a:p>
+                <a:pPr>
+                  <a:defRPr b="0" i="0" strike="noStrike" sz="850" u="none">
+                    <a:solidFill>
+                      <a:srgbClr val="1A1F2E"/>
+                    </a:solidFill>
+                    <a:latin typeface="Calibri"/>
+                  </a:defRPr>
+                </a:pPr>
+              </a:p>
+            </c:txPr>
+            <c:showLegendKey val="0"/>
+            <c:showVal val="1"/>
+            <c:showCatName val="0"/>
+            <c:showSerName val="0"/>
+            <c:showPercent val="0"/>
+            <c:showBubbleSize val="0"/>
+            <c:showLeaderLines val="0"/>
+          </c:dLbls>
+          <c:cat>
+            <c:multiLvlStrRef>
+              <c:f>Sheet1!$A$2:$A$9</c:f>
+              <c:multiLvlStrCache>
+                <c:ptCount val="8"/>
+                <c:lvl>
+                  <c:pt idx="0">
+                    <c:v>pyridine  (피리딘 N)</c:v>
+                  </c:pt>
+                  <c:pt idx="1">
+                    <c:v>triazine  (ETL 코어)</c:v>
+                  </c:pt>
+                  <c:pt idx="2">
+                    <c:v>PhCz  → TCTA 대리</c:v>
+                  </c:pt>
+                  <c:pt idx="3">
+                    <c:v>BTD  (수용체 단위)</c:v>
+                  </c:pt>
+                  <c:pt idx="4">
+                    <c:v>TPA  → TAPC 대리</c:v>
+                  </c:pt>
+                  <c:pt idx="5">
+                    <c:v>Me3P=O  → DPEPO 대리</c:v>
+                  </c:pt>
+                  <c:pt idx="6">
+                    <c:v>thiophene  → PEDOT</c:v>
+                  </c:pt>
+                  <c:pt idx="7">
+                    <c:v>benzene  (탄화수소 기준)</c:v>
+                  </c:pt>
+                </c:lvl>
+              </c:multiLvlStrCache>
+            </c:multiLvlStrRef>
+          </c:cat>
+          <c:val>
+            <c:numRef>
+              <c:f>Sheet1!$B$2:$B$9</c:f>
+              <c:numCache>
+                <c:formatCode>General</c:formatCode>
+                <c:ptCount val="8"/>
+                <c:pt idx="0">
+                  <c:v>0.342</c:v>
+                </c:pt>
+                <c:pt idx="1">
+                  <c:v>0.291</c:v>
+                </c:pt>
+                <c:pt idx="2">
+                  <c:v>0.279</c:v>
+                </c:pt>
+                <c:pt idx="3">
+                  <c:v>0.277</c:v>
+                </c:pt>
+                <c:pt idx="4">
+                  <c:v>0.254</c:v>
+                </c:pt>
+                <c:pt idx="5">
+                  <c:v>0.253</c:v>
+                </c:pt>
+                <c:pt idx="6">
+                  <c:v>0.169</c:v>
+                </c:pt>
+                <c:pt idx="7">
+                  <c:v>0.167</c:v>
+                </c:pt>
+              </c:numCache>
+            </c:numRef>
+          </c:val>
+        </c:ser>
+        <c:dLbls>
+          <c:numFmt formatCode="0.00" sourceLinked="0"/>
+          <c:txPr>
+            <a:bodyPr/>
+            <a:lstStyle/>
+            <a:p>
+              <a:pPr>
+                <a:defRPr b="0" i="0" strike="noStrike" sz="850" u="none">
+                  <a:solidFill>
+                    <a:srgbClr val="1A1F2E"/>
+                  </a:solidFill>
+                  <a:latin typeface="Calibri"/>
+                </a:defRPr>
+              </a:pPr>
+            </a:p>
+          </c:txPr>
+          <c:showLegendKey val="0"/>
+          <c:showVal val="1"/>
+          <c:showCatName val="0"/>
+          <c:showSerName val="0"/>
+          <c:showPercent val="0"/>
+          <c:showBubbleSize val="0"/>
+          <c:showLeaderLines val="0"/>
+        </c:dLbls>
+        <c:gapWidth val="40"/>
+        <c:overlap val="0"/>
+        <c:axId val="2094734554"/>
+        <c:axId val="2094734552"/>
+        <c:axId val="2094734556"/>
+      </c:barChart>
+      <c:catAx>
+        <c:axId val="2094734554"/>
+        <c:scaling>
+          <c:orientation val="minMax"/>
+        </c:scaling>
+        <c:delete val="0"/>
+        <c:axPos val="l"/>
+        <c:numFmt formatCode="General" sourceLinked="1"/>
+        <c:majorTickMark val="out"/>
+        <c:minorTickMark val="none"/>
+        <c:tickLblPos val="nextTo"/>
+        <c:spPr>
+          <a:ln w="12700" cap="flat">
+            <a:solidFill>
+              <a:srgbClr val="888888"/>
+            </a:solidFill>
+            <a:prstDash val="solid"/>
+            <a:round/>
+          </a:ln>
+        </c:spPr>
+        <c:txPr>
+          <a:bodyPr/>
+          <a:lstStyle/>
+          <a:p>
+            <a:pPr>
+              <a:defRPr sz="750" b="0" i="0" u="none" strike="noStrike">
+                <a:solidFill>
+                  <a:srgbClr val="7A849C"/>
+                </a:solidFill>
+                <a:latin typeface="Malgun Gothic"/>
+              </a:defRPr>
+            </a:pPr>
+            <a:endParaRPr lang="en-US"/>
+          </a:p>
+        </c:txPr>
+        <c:crossAx val="2094734552"/>
+        <c:crosses val="autoZero"/>
+        <c:auto val="1"/>
+        <c:lblAlgn val="ctr"/>
+        <c:noMultiLvlLbl val="1"/>
+      </c:catAx>
+      <c:valAx>
+        <c:axId val="2094734552"/>
+        <c:scaling>
+          <c:orientation val="minMax"/>
+          <c:max val="0.46"/>
+        </c:scaling>
+        <c:delete val="0"/>
+        <c:axPos val="b"/>
+        <c:majorGridlines>
+          <c:spPr>
+            <a:ln w="12700" cap="flat">
+              <a:solidFill>
+                <a:srgbClr val="E2E7F0"/>
+              </a:solidFill>
+              <a:prstDash val="solid"/>
+              <a:round/>
+            </a:ln>
+          </c:spPr>
+        </c:majorGridlines>
+        <c:numFmt formatCode="General" sourceLinked="0"/>
+        <c:majorTickMark val="out"/>
+        <c:minorTickMark val="none"/>
+        <c:tickLblPos val="low"/>
+        <c:spPr>
+          <a:ln w="12700" cap="flat">
+            <a:solidFill>
+              <a:srgbClr val="888888"/>
+            </a:solidFill>
+            <a:prstDash val="solid"/>
+            <a:round/>
+          </a:ln>
+        </c:spPr>
+        <c:txPr>
+          <a:bodyPr/>
+          <a:lstStyle/>
+          <a:p>
+            <a:pPr>
+              <a:defRPr sz="1000" b="0" i="0" u="none" strike="noStrike">
+                <a:solidFill>
+                  <a:srgbClr val="7A849C"/>
+                </a:solidFill>
+                <a:latin typeface="Calibri"/>
+              </a:defRPr>
+            </a:pPr>
+            <a:endParaRPr lang="en-US"/>
+          </a:p>
+        </c:txPr>
+        <c:crossAx val="2094734554"/>
+        <c:crosses val="autoZero"/>
+        <c:crossBetween val="between"/>
+      </c:valAx>
+      <c:spPr>
+        <a:noFill/>
+        <a:ln>
+          <a:noFill/>
+        </a:ln>
+        <a:effectLst/>
+      </c:spPr>
+    </c:plotArea>
+    <c:plotVisOnly val="1"/>
+    <c:dispBlanksAs val="span"/>
+  </c:chart>
+  <c:spPr>
+    <a:noFill/>
+    <a:ln>
+      <a:noFill/>
+    </a:ln>
+    <a:effectLst/>
+  </c:spPr>
+  <c:externalData r:id="rId1">
+    <c:autoUpdate val="0"/>
+  </c:externalData>
+</c:chartSpace>
+</file>
+
+<file path=ppt/charts/chart13.xml><?xml version="1.0" encoding="utf-8"?>
 <c:chartSpace xmlns:c="http://schemas.openxmlformats.org/drawingml/2006/chart" xmlns:a="http://schemas.openxmlformats.org/drawingml/2006/main" xmlns:r="http://schemas.openxmlformats.org/officeDocument/2006/relationships">
   <c:date1904 val="0"/>
   <c:roundedCorners val="1"/>
@@ -1405,7 +1744,7 @@
 </c:chartSpace>
 </file>
 
-<file path=ppt/charts/chart13.xml><?xml version="1.0" encoding="utf-8"?>
+<file path=ppt/charts/chart14.xml><?xml version="1.0" encoding="utf-8"?>
 <c:chartSpace xmlns:c="http://schemas.openxmlformats.org/drawingml/2006/chart" xmlns:a="http://schemas.openxmlformats.org/drawingml/2006/main" xmlns:r="http://schemas.openxmlformats.org/officeDocument/2006/relationships">
   <c:date1904 val="0"/>
   <c:roundedCorners val="1"/>
@@ -1902,7 +2241,7 @@
 </c:chartSpace>
 </file>
 
-<file path=ppt/charts/chart14.xml><?xml version="1.0" encoding="utf-8"?>
+<file path=ppt/charts/chart15.xml><?xml version="1.0" encoding="utf-8"?>
 <c:chartSpace xmlns:c="http://schemas.openxmlformats.org/drawingml/2006/chart" xmlns:a="http://schemas.openxmlformats.org/drawingml/2006/main" xmlns:r="http://schemas.openxmlformats.org/officeDocument/2006/relationships">
   <c:date1904 val="0"/>
   <c:roundedCorners val="1"/>
@@ -3120,7 +3459,7 @@
 </c:chartSpace>
 </file>
 
-<file path=ppt/charts/chart15.xml><?xml version="1.0" encoding="utf-8"?>
+<file path=ppt/charts/chart16.xml><?xml version="1.0" encoding="utf-8"?>
 <c:chartSpace xmlns:c="http://schemas.openxmlformats.org/drawingml/2006/chart" xmlns:a="http://schemas.openxmlformats.org/drawingml/2006/main" xmlns:r="http://schemas.openxmlformats.org/officeDocument/2006/relationships">
   <c:date1904 val="0"/>
   <c:roundedCorners val="1"/>
@@ -3601,444 +3940,6 @@
         <c:scaling>
           <c:orientation val="minMax"/>
           <c:max val="0.8"/>
-        </c:scaling>
-        <c:delete val="0"/>
-        <c:axPos val="l"/>
-        <c:majorGridlines>
-          <c:spPr>
-            <a:ln w="12700" cap="flat">
-              <a:solidFill>
-                <a:srgbClr val="E2E7F0"/>
-              </a:solidFill>
-              <a:prstDash val="solid"/>
-              <a:round/>
-            </a:ln>
-          </c:spPr>
-        </c:majorGridlines>
-        <c:numFmt formatCode="General" sourceLinked="0"/>
-        <c:majorTickMark val="out"/>
-        <c:minorTickMark val="none"/>
-        <c:tickLblPos val="nextTo"/>
-        <c:spPr>
-          <a:ln w="12700" cap="flat">
-            <a:solidFill>
-              <a:srgbClr val="888888"/>
-            </a:solidFill>
-            <a:prstDash val="solid"/>
-            <a:round/>
-          </a:ln>
-        </c:spPr>
-        <c:txPr>
-          <a:bodyPr/>
-          <a:lstStyle/>
-          <a:p>
-            <a:pPr>
-              <a:defRPr sz="1000" b="0" i="0" u="none" strike="noStrike">
-                <a:solidFill>
-                  <a:srgbClr val="7A849C"/>
-                </a:solidFill>
-                <a:latin typeface="Calibri"/>
-              </a:defRPr>
-            </a:pPr>
-            <a:endParaRPr lang="en-US"/>
-          </a:p>
-        </c:txPr>
-        <c:crossAx val="2094734554"/>
-        <c:crosses val="autoZero"/>
-        <c:crossBetween val="between"/>
-      </c:valAx>
-      <c:spPr>
-        <a:noFill/>
-        <a:ln>
-          <a:noFill/>
-        </a:ln>
-        <a:effectLst/>
-      </c:spPr>
-    </c:plotArea>
-    <c:legend>
-      <c:legendPos val="b"/>
-      <c:overlay val="0"/>
-      <c:txPr>
-        <a:bodyPr/>
-        <a:lstStyle/>
-        <a:p>
-          <a:pPr>
-            <a:defRPr sz="950">
-              <a:solidFill>
-                <a:srgbClr val="7A849C"/>
-              </a:solidFill>
-              <a:latin typeface="Calibri"/>
-              <a:cs typeface="Calibri"/>
-            </a:defRPr>
-          </a:pPr>
-          <a:endParaRPr lang="en-US"/>
-        </a:p>
-      </c:txPr>
-    </c:legend>
-    <c:plotVisOnly val="1"/>
-    <c:dispBlanksAs val="span"/>
-  </c:chart>
-  <c:spPr>
-    <a:noFill/>
-    <a:ln>
-      <a:noFill/>
-    </a:ln>
-    <a:effectLst/>
-  </c:spPr>
-  <c:externalData r:id="rId1">
-    <c:autoUpdate val="0"/>
-  </c:externalData>
-</c:chartSpace>
-</file>
-
-<file path=ppt/charts/chart16.xml><?xml version="1.0" encoding="utf-8"?>
-<c:chartSpace xmlns:c="http://schemas.openxmlformats.org/drawingml/2006/chart" xmlns:a="http://schemas.openxmlformats.org/drawingml/2006/main" xmlns:r="http://schemas.openxmlformats.org/officeDocument/2006/relationships">
-  <c:date1904 val="0"/>
-  <c:roundedCorners val="1"/>
-  <c:chart>
-    <c:autoTitleDeleted val="1"/>
-    <c:plotArea>
-      <c:layout/>
-      <c:lineChart>
-        <c:varyColors val="0"/>
-        <c:ser>
-          <c:idx val="0"/>
-          <c:order val="0"/>
-          <c:tx>
-            <c:strRef>
-              <c:f>Sheet1!$B$1</c:f>
-              <c:strCache>
-                <c:ptCount val="1"/>
-                <c:pt idx="0">
-                  <c:v>Ag 8 nm</c:v>
-                </c:pt>
-              </c:strCache>
-            </c:strRef>
-          </c:tx>
-          <c:spPr>
-            <a:solidFill>
-              <a:srgbClr val="1E2761"/>
-            </a:solidFill>
-            <a:ln w="38100" cap="flat">
-              <a:solidFill>
-                <a:srgbClr val="1E2761"/>
-              </a:solidFill>
-              <a:prstDash val="solid"/>
-              <a:round/>
-            </a:ln>
-            <a:effectLst/>
-          </c:spPr>
-          <c:invertIfNegative val="0"/>
-          <c:dLbls>
-            <c:numFmt formatCode="#,##0" sourceLinked="0"/>
-            <c:txPr>
-              <a:bodyPr/>
-              <a:lstStyle/>
-              <a:p>
-                <a:pPr>
-                  <a:defRPr b="0" i="0" strike="noStrike" sz="1200" u="none">
-                    <a:solidFill>
-                      <a:srgbClr val="000000"/>
-                    </a:solidFill>
-                    <a:latin typeface="Arial"/>
-                  </a:defRPr>
-                </a:pPr>
-              </a:p>
-            </c:txPr>
-            <c:showLegendKey val="0"/>
-            <c:showVal val="0"/>
-            <c:showCatName val="0"/>
-            <c:showSerName val="0"/>
-            <c:showPercent val="0"/>
-            <c:showBubbleSize val="0"/>
-            <c:showLeaderLines val="0"/>
-          </c:dLbls>
-          <c:marker>
-            <c:symbol val="circle"/>
-            <c:size val="6"/>
-            <c:spPr>
-              <a:solidFill>
-                <a:srgbClr val="1E2761"/>
-              </a:solidFill>
-              <a:ln w="9525" cap="flat">
-                <a:solidFill>
-                  <a:srgbClr val="1E2761"/>
-                </a:solidFill>
-                <a:prstDash val="solid"/>
-                <a:round/>
-              </a:ln>
-              <a:effectLst/>
-            </c:spPr>
-          </c:marker>
-          <c:cat>
-            <c:multiLvlStrRef>
-              <c:f>Sheet1!$A$2:$A$8</c:f>
-              <c:multiLvlStrCache>
-                <c:ptCount val="7"/>
-                <c:lvl>
-                  <c:pt idx="0">
-                    <c:v>400</c:v>
-                  </c:pt>
-                  <c:pt idx="1">
-                    <c:v>450</c:v>
-                  </c:pt>
-                  <c:pt idx="2">
-                    <c:v>500</c:v>
-                  </c:pt>
-                  <c:pt idx="3">
-                    <c:v>550</c:v>
-                  </c:pt>
-                  <c:pt idx="4">
-                    <c:v>600</c:v>
-                  </c:pt>
-                  <c:pt idx="5">
-                    <c:v>650</c:v>
-                  </c:pt>
-                  <c:pt idx="6">
-                    <c:v>700</c:v>
-                  </c:pt>
-                </c:lvl>
-              </c:multiLvlStrCache>
-            </c:multiLvlStrRef>
-          </c:cat>
-          <c:val>
-            <c:numRef>
-              <c:f>Sheet1!$B$2:$B$8</c:f>
-              <c:numCache>
-                <c:formatCode>General</c:formatCode>
-                <c:ptCount val="7"/>
-                <c:pt idx="0">
-                  <c:v>2.271</c:v>
-                </c:pt>
-                <c:pt idx="1">
-                  <c:v>2.675</c:v>
-                </c:pt>
-                <c:pt idx="2">
-                  <c:v>3.11</c:v>
-                </c:pt>
-                <c:pt idx="3">
-                  <c:v>3.574</c:v>
-                </c:pt>
-                <c:pt idx="4">
-                  <c:v>4.014</c:v>
-                </c:pt>
-                <c:pt idx="5">
-                  <c:v>4.457</c:v>
-                </c:pt>
-                <c:pt idx="6">
-                  <c:v>4.879</c:v>
-                </c:pt>
-              </c:numCache>
-            </c:numRef>
-          </c:val>
-          <c:smooth val="1"/>
-        </c:ser>
-        <c:ser>
-          <c:idx val="1"/>
-          <c:order val="1"/>
-          <c:tx>
-            <c:strRef>
-              <c:f>Sheet1!$C$1</c:f>
-              <c:strCache>
-                <c:ptCount val="1"/>
-                <c:pt idx="0">
-                  <c:v>McPeak 벌크</c:v>
-                </c:pt>
-              </c:strCache>
-            </c:strRef>
-          </c:tx>
-          <c:spPr>
-            <a:solidFill>
-              <a:srgbClr val="2EC4B6"/>
-            </a:solidFill>
-            <a:ln w="38100" cap="flat">
-              <a:solidFill>
-                <a:srgbClr val="2EC4B6"/>
-              </a:solidFill>
-              <a:prstDash val="solid"/>
-              <a:round/>
-            </a:ln>
-            <a:effectLst/>
-          </c:spPr>
-          <c:invertIfNegative val="0"/>
-          <c:dLbls>
-            <c:numFmt formatCode="#,##0" sourceLinked="0"/>
-            <c:txPr>
-              <a:bodyPr/>
-              <a:lstStyle/>
-              <a:p>
-                <a:pPr>
-                  <a:defRPr b="0" i="0" strike="noStrike" sz="1200" u="none">
-                    <a:solidFill>
-                      <a:srgbClr val="000000"/>
-                    </a:solidFill>
-                    <a:latin typeface="Arial"/>
-                  </a:defRPr>
-                </a:pPr>
-              </a:p>
-            </c:txPr>
-            <c:showLegendKey val="0"/>
-            <c:showVal val="0"/>
-            <c:showCatName val="0"/>
-            <c:showSerName val="0"/>
-            <c:showPercent val="0"/>
-            <c:showBubbleSize val="0"/>
-            <c:showLeaderLines val="0"/>
-          </c:dLbls>
-          <c:marker>
-            <c:symbol val="circle"/>
-            <c:size val="6"/>
-            <c:spPr>
-              <a:solidFill>
-                <a:srgbClr val="2EC4B6"/>
-              </a:solidFill>
-              <a:ln w="9525" cap="flat">
-                <a:solidFill>
-                  <a:srgbClr val="2EC4B6"/>
-                </a:solidFill>
-                <a:prstDash val="solid"/>
-                <a:round/>
-              </a:ln>
-              <a:effectLst/>
-            </c:spPr>
-          </c:marker>
-          <c:cat>
-            <c:multiLvlStrRef>
-              <c:f>Sheet1!$A$2:$A$8</c:f>
-              <c:multiLvlStrCache>
-                <c:ptCount val="7"/>
-                <c:lvl>
-                  <c:pt idx="0">
-                    <c:v>400</c:v>
-                  </c:pt>
-                  <c:pt idx="1">
-                    <c:v>450</c:v>
-                  </c:pt>
-                  <c:pt idx="2">
-                    <c:v>500</c:v>
-                  </c:pt>
-                  <c:pt idx="3">
-                    <c:v>550</c:v>
-                  </c:pt>
-                  <c:pt idx="4">
-                    <c:v>600</c:v>
-                  </c:pt>
-                  <c:pt idx="5">
-                    <c:v>650</c:v>
-                  </c:pt>
-                  <c:pt idx="6">
-                    <c:v>700</c:v>
-                  </c:pt>
-                </c:lvl>
-              </c:multiLvlStrCache>
-            </c:multiLvlStrRef>
-          </c:cat>
-          <c:val>
-            <c:numRef>
-              <c:f>Sheet1!$C$2:$C$8</c:f>
-              <c:numCache>
-                <c:formatCode>General</c:formatCode>
-                <c:ptCount val="7"/>
-                <c:pt idx="0">
-                  <c:v>2.123</c:v>
-                </c:pt>
-                <c:pt idx="1">
-                  <c:v>2.676</c:v>
-                </c:pt>
-                <c:pt idx="2">
-                  <c:v>3.159</c:v>
-                </c:pt>
-                <c:pt idx="3">
-                  <c:v>3.61</c:v>
-                </c:pt>
-                <c:pt idx="4">
-                  <c:v>4.042</c:v>
-                </c:pt>
-                <c:pt idx="5">
-                  <c:v>4.46</c:v>
-                </c:pt>
-                <c:pt idx="6">
-                  <c:v>4.869</c:v>
-                </c:pt>
-              </c:numCache>
-            </c:numRef>
-          </c:val>
-          <c:smooth val="1"/>
-        </c:ser>
-        <c:dLbls>
-          <c:numFmt formatCode="#,##0" sourceLinked="0"/>
-          <c:txPr>
-            <a:bodyPr/>
-            <a:lstStyle/>
-            <a:p>
-              <a:pPr>
-                <a:defRPr b="0" i="0" strike="noStrike" sz="1200" u="none">
-                  <a:solidFill>
-                    <a:srgbClr val="000000"/>
-                  </a:solidFill>
-                  <a:latin typeface="Arial"/>
-                </a:defRPr>
-              </a:pPr>
-            </a:p>
-          </c:txPr>
-          <c:showLegendKey val="0"/>
-          <c:showVal val="0"/>
-          <c:showCatName val="0"/>
-          <c:showSerName val="0"/>
-          <c:showPercent val="0"/>
-          <c:showBubbleSize val="0"/>
-          <c:showLeaderLines val="0"/>
-        </c:dLbls>
-        <c:marker val="1"/>
-        <c:axId val="2094734554"/>
-        <c:axId val="2094734552"/>
-        <c:axId val="2094734556"/>
-      </c:lineChart>
-      <c:catAx>
-        <c:axId val="2094734554"/>
-        <c:scaling>
-          <c:orientation val="minMax"/>
-        </c:scaling>
-        <c:delete val="0"/>
-        <c:axPos val="b"/>
-        <c:numFmt formatCode="General" sourceLinked="1"/>
-        <c:majorTickMark val="out"/>
-        <c:minorTickMark val="none"/>
-        <c:tickLblPos val="low"/>
-        <c:spPr>
-          <a:ln w="12700" cap="flat">
-            <a:solidFill>
-              <a:srgbClr val="888888"/>
-            </a:solidFill>
-            <a:prstDash val="solid"/>
-            <a:round/>
-          </a:ln>
-        </c:spPr>
-        <c:txPr>
-          <a:bodyPr/>
-          <a:lstStyle/>
-          <a:p>
-            <a:pPr>
-              <a:defRPr sz="900" b="0" i="0" u="none" strike="noStrike">
-                <a:solidFill>
-                  <a:srgbClr val="7A849C"/>
-                </a:solidFill>
-                <a:latin typeface="Calibri"/>
-              </a:defRPr>
-            </a:pPr>
-            <a:endParaRPr lang="en-US"/>
-          </a:p>
-        </c:txPr>
-        <c:crossAx val="2094734552"/>
-        <c:crosses val="autoZero"/>
-        <c:auto val="1"/>
-        <c:lblAlgn val="ctr"/>
-        <c:noMultiLvlLbl val="1"/>
-      </c:catAx>
-      <c:valAx>
-        <c:axId val="2094734552"/>
-        <c:scaling>
-          <c:orientation val="minMax"/>
         </c:scaling>
         <c:delete val="0"/>
         <c:axPos val="l"/>
@@ -4137,6 +4038,444 @@
     <c:autoTitleDeleted val="1"/>
     <c:plotArea>
       <c:layout/>
+      <c:lineChart>
+        <c:varyColors val="0"/>
+        <c:ser>
+          <c:idx val="0"/>
+          <c:order val="0"/>
+          <c:tx>
+            <c:strRef>
+              <c:f>Sheet1!$B$1</c:f>
+              <c:strCache>
+                <c:ptCount val="1"/>
+                <c:pt idx="0">
+                  <c:v>Ag 8 nm</c:v>
+                </c:pt>
+              </c:strCache>
+            </c:strRef>
+          </c:tx>
+          <c:spPr>
+            <a:solidFill>
+              <a:srgbClr val="1E2761"/>
+            </a:solidFill>
+            <a:ln w="38100" cap="flat">
+              <a:solidFill>
+                <a:srgbClr val="1E2761"/>
+              </a:solidFill>
+              <a:prstDash val="solid"/>
+              <a:round/>
+            </a:ln>
+            <a:effectLst/>
+          </c:spPr>
+          <c:invertIfNegative val="0"/>
+          <c:dLbls>
+            <c:numFmt formatCode="#,##0" sourceLinked="0"/>
+            <c:txPr>
+              <a:bodyPr/>
+              <a:lstStyle/>
+              <a:p>
+                <a:pPr>
+                  <a:defRPr b="0" i="0" strike="noStrike" sz="1200" u="none">
+                    <a:solidFill>
+                      <a:srgbClr val="000000"/>
+                    </a:solidFill>
+                    <a:latin typeface="Arial"/>
+                  </a:defRPr>
+                </a:pPr>
+              </a:p>
+            </c:txPr>
+            <c:showLegendKey val="0"/>
+            <c:showVal val="0"/>
+            <c:showCatName val="0"/>
+            <c:showSerName val="0"/>
+            <c:showPercent val="0"/>
+            <c:showBubbleSize val="0"/>
+            <c:showLeaderLines val="0"/>
+          </c:dLbls>
+          <c:marker>
+            <c:symbol val="circle"/>
+            <c:size val="6"/>
+            <c:spPr>
+              <a:solidFill>
+                <a:srgbClr val="1E2761"/>
+              </a:solidFill>
+              <a:ln w="9525" cap="flat">
+                <a:solidFill>
+                  <a:srgbClr val="1E2761"/>
+                </a:solidFill>
+                <a:prstDash val="solid"/>
+                <a:round/>
+              </a:ln>
+              <a:effectLst/>
+            </c:spPr>
+          </c:marker>
+          <c:cat>
+            <c:multiLvlStrRef>
+              <c:f>Sheet1!$A$2:$A$8</c:f>
+              <c:multiLvlStrCache>
+                <c:ptCount val="7"/>
+                <c:lvl>
+                  <c:pt idx="0">
+                    <c:v>400</c:v>
+                  </c:pt>
+                  <c:pt idx="1">
+                    <c:v>450</c:v>
+                  </c:pt>
+                  <c:pt idx="2">
+                    <c:v>500</c:v>
+                  </c:pt>
+                  <c:pt idx="3">
+                    <c:v>550</c:v>
+                  </c:pt>
+                  <c:pt idx="4">
+                    <c:v>600</c:v>
+                  </c:pt>
+                  <c:pt idx="5">
+                    <c:v>650</c:v>
+                  </c:pt>
+                  <c:pt idx="6">
+                    <c:v>700</c:v>
+                  </c:pt>
+                </c:lvl>
+              </c:multiLvlStrCache>
+            </c:multiLvlStrRef>
+          </c:cat>
+          <c:val>
+            <c:numRef>
+              <c:f>Sheet1!$B$2:$B$8</c:f>
+              <c:numCache>
+                <c:formatCode>General</c:formatCode>
+                <c:ptCount val="7"/>
+                <c:pt idx="0">
+                  <c:v>2.271</c:v>
+                </c:pt>
+                <c:pt idx="1">
+                  <c:v>2.675</c:v>
+                </c:pt>
+                <c:pt idx="2">
+                  <c:v>3.11</c:v>
+                </c:pt>
+                <c:pt idx="3">
+                  <c:v>3.574</c:v>
+                </c:pt>
+                <c:pt idx="4">
+                  <c:v>4.014</c:v>
+                </c:pt>
+                <c:pt idx="5">
+                  <c:v>4.457</c:v>
+                </c:pt>
+                <c:pt idx="6">
+                  <c:v>4.879</c:v>
+                </c:pt>
+              </c:numCache>
+            </c:numRef>
+          </c:val>
+          <c:smooth val="1"/>
+        </c:ser>
+        <c:ser>
+          <c:idx val="1"/>
+          <c:order val="1"/>
+          <c:tx>
+            <c:strRef>
+              <c:f>Sheet1!$C$1</c:f>
+              <c:strCache>
+                <c:ptCount val="1"/>
+                <c:pt idx="0">
+                  <c:v>McPeak 벌크</c:v>
+                </c:pt>
+              </c:strCache>
+            </c:strRef>
+          </c:tx>
+          <c:spPr>
+            <a:solidFill>
+              <a:srgbClr val="2EC4B6"/>
+            </a:solidFill>
+            <a:ln w="38100" cap="flat">
+              <a:solidFill>
+                <a:srgbClr val="2EC4B6"/>
+              </a:solidFill>
+              <a:prstDash val="solid"/>
+              <a:round/>
+            </a:ln>
+            <a:effectLst/>
+          </c:spPr>
+          <c:invertIfNegative val="0"/>
+          <c:dLbls>
+            <c:numFmt formatCode="#,##0" sourceLinked="0"/>
+            <c:txPr>
+              <a:bodyPr/>
+              <a:lstStyle/>
+              <a:p>
+                <a:pPr>
+                  <a:defRPr b="0" i="0" strike="noStrike" sz="1200" u="none">
+                    <a:solidFill>
+                      <a:srgbClr val="000000"/>
+                    </a:solidFill>
+                    <a:latin typeface="Arial"/>
+                  </a:defRPr>
+                </a:pPr>
+              </a:p>
+            </c:txPr>
+            <c:showLegendKey val="0"/>
+            <c:showVal val="0"/>
+            <c:showCatName val="0"/>
+            <c:showSerName val="0"/>
+            <c:showPercent val="0"/>
+            <c:showBubbleSize val="0"/>
+            <c:showLeaderLines val="0"/>
+          </c:dLbls>
+          <c:marker>
+            <c:symbol val="circle"/>
+            <c:size val="6"/>
+            <c:spPr>
+              <a:solidFill>
+                <a:srgbClr val="2EC4B6"/>
+              </a:solidFill>
+              <a:ln w="9525" cap="flat">
+                <a:solidFill>
+                  <a:srgbClr val="2EC4B6"/>
+                </a:solidFill>
+                <a:prstDash val="solid"/>
+                <a:round/>
+              </a:ln>
+              <a:effectLst/>
+            </c:spPr>
+          </c:marker>
+          <c:cat>
+            <c:multiLvlStrRef>
+              <c:f>Sheet1!$A$2:$A$8</c:f>
+              <c:multiLvlStrCache>
+                <c:ptCount val="7"/>
+                <c:lvl>
+                  <c:pt idx="0">
+                    <c:v>400</c:v>
+                  </c:pt>
+                  <c:pt idx="1">
+                    <c:v>450</c:v>
+                  </c:pt>
+                  <c:pt idx="2">
+                    <c:v>500</c:v>
+                  </c:pt>
+                  <c:pt idx="3">
+                    <c:v>550</c:v>
+                  </c:pt>
+                  <c:pt idx="4">
+                    <c:v>600</c:v>
+                  </c:pt>
+                  <c:pt idx="5">
+                    <c:v>650</c:v>
+                  </c:pt>
+                  <c:pt idx="6">
+                    <c:v>700</c:v>
+                  </c:pt>
+                </c:lvl>
+              </c:multiLvlStrCache>
+            </c:multiLvlStrRef>
+          </c:cat>
+          <c:val>
+            <c:numRef>
+              <c:f>Sheet1!$C$2:$C$8</c:f>
+              <c:numCache>
+                <c:formatCode>General</c:formatCode>
+                <c:ptCount val="7"/>
+                <c:pt idx="0">
+                  <c:v>2.123</c:v>
+                </c:pt>
+                <c:pt idx="1">
+                  <c:v>2.676</c:v>
+                </c:pt>
+                <c:pt idx="2">
+                  <c:v>3.159</c:v>
+                </c:pt>
+                <c:pt idx="3">
+                  <c:v>3.61</c:v>
+                </c:pt>
+                <c:pt idx="4">
+                  <c:v>4.042</c:v>
+                </c:pt>
+                <c:pt idx="5">
+                  <c:v>4.46</c:v>
+                </c:pt>
+                <c:pt idx="6">
+                  <c:v>4.869</c:v>
+                </c:pt>
+              </c:numCache>
+            </c:numRef>
+          </c:val>
+          <c:smooth val="1"/>
+        </c:ser>
+        <c:dLbls>
+          <c:numFmt formatCode="#,##0" sourceLinked="0"/>
+          <c:txPr>
+            <a:bodyPr/>
+            <a:lstStyle/>
+            <a:p>
+              <a:pPr>
+                <a:defRPr b="0" i="0" strike="noStrike" sz="1200" u="none">
+                  <a:solidFill>
+                    <a:srgbClr val="000000"/>
+                  </a:solidFill>
+                  <a:latin typeface="Arial"/>
+                </a:defRPr>
+              </a:pPr>
+            </a:p>
+          </c:txPr>
+          <c:showLegendKey val="0"/>
+          <c:showVal val="0"/>
+          <c:showCatName val="0"/>
+          <c:showSerName val="0"/>
+          <c:showPercent val="0"/>
+          <c:showBubbleSize val="0"/>
+          <c:showLeaderLines val="0"/>
+        </c:dLbls>
+        <c:marker val="1"/>
+        <c:axId val="2094734554"/>
+        <c:axId val="2094734552"/>
+        <c:axId val="2094734556"/>
+      </c:lineChart>
+      <c:catAx>
+        <c:axId val="2094734554"/>
+        <c:scaling>
+          <c:orientation val="minMax"/>
+        </c:scaling>
+        <c:delete val="0"/>
+        <c:axPos val="b"/>
+        <c:numFmt formatCode="General" sourceLinked="1"/>
+        <c:majorTickMark val="out"/>
+        <c:minorTickMark val="none"/>
+        <c:tickLblPos val="low"/>
+        <c:spPr>
+          <a:ln w="12700" cap="flat">
+            <a:solidFill>
+              <a:srgbClr val="888888"/>
+            </a:solidFill>
+            <a:prstDash val="solid"/>
+            <a:round/>
+          </a:ln>
+        </c:spPr>
+        <c:txPr>
+          <a:bodyPr/>
+          <a:lstStyle/>
+          <a:p>
+            <a:pPr>
+              <a:defRPr sz="900" b="0" i="0" u="none" strike="noStrike">
+                <a:solidFill>
+                  <a:srgbClr val="7A849C"/>
+                </a:solidFill>
+                <a:latin typeface="Calibri"/>
+              </a:defRPr>
+            </a:pPr>
+            <a:endParaRPr lang="en-US"/>
+          </a:p>
+        </c:txPr>
+        <c:crossAx val="2094734552"/>
+        <c:crosses val="autoZero"/>
+        <c:auto val="1"/>
+        <c:lblAlgn val="ctr"/>
+        <c:noMultiLvlLbl val="1"/>
+      </c:catAx>
+      <c:valAx>
+        <c:axId val="2094734552"/>
+        <c:scaling>
+          <c:orientation val="minMax"/>
+        </c:scaling>
+        <c:delete val="0"/>
+        <c:axPos val="l"/>
+        <c:majorGridlines>
+          <c:spPr>
+            <a:ln w="12700" cap="flat">
+              <a:solidFill>
+                <a:srgbClr val="E2E7F0"/>
+              </a:solidFill>
+              <a:prstDash val="solid"/>
+              <a:round/>
+            </a:ln>
+          </c:spPr>
+        </c:majorGridlines>
+        <c:numFmt formatCode="General" sourceLinked="0"/>
+        <c:majorTickMark val="out"/>
+        <c:minorTickMark val="none"/>
+        <c:tickLblPos val="nextTo"/>
+        <c:spPr>
+          <a:ln w="12700" cap="flat">
+            <a:solidFill>
+              <a:srgbClr val="888888"/>
+            </a:solidFill>
+            <a:prstDash val="solid"/>
+            <a:round/>
+          </a:ln>
+        </c:spPr>
+        <c:txPr>
+          <a:bodyPr/>
+          <a:lstStyle/>
+          <a:p>
+            <a:pPr>
+              <a:defRPr sz="1000" b="0" i="0" u="none" strike="noStrike">
+                <a:solidFill>
+                  <a:srgbClr val="7A849C"/>
+                </a:solidFill>
+                <a:latin typeface="Calibri"/>
+              </a:defRPr>
+            </a:pPr>
+            <a:endParaRPr lang="en-US"/>
+          </a:p>
+        </c:txPr>
+        <c:crossAx val="2094734554"/>
+        <c:crosses val="autoZero"/>
+        <c:crossBetween val="between"/>
+      </c:valAx>
+      <c:spPr>
+        <a:noFill/>
+        <a:ln>
+          <a:noFill/>
+        </a:ln>
+        <a:effectLst/>
+      </c:spPr>
+    </c:plotArea>
+    <c:legend>
+      <c:legendPos val="b"/>
+      <c:overlay val="0"/>
+      <c:txPr>
+        <a:bodyPr/>
+        <a:lstStyle/>
+        <a:p>
+          <a:pPr>
+            <a:defRPr sz="950">
+              <a:solidFill>
+                <a:srgbClr val="7A849C"/>
+              </a:solidFill>
+              <a:latin typeface="Calibri"/>
+              <a:cs typeface="Calibri"/>
+            </a:defRPr>
+          </a:pPr>
+          <a:endParaRPr lang="en-US"/>
+        </a:p>
+      </c:txPr>
+    </c:legend>
+    <c:plotVisOnly val="1"/>
+    <c:dispBlanksAs val="span"/>
+  </c:chart>
+  <c:spPr>
+    <a:noFill/>
+    <a:ln>
+      <a:noFill/>
+    </a:ln>
+    <a:effectLst/>
+  </c:spPr>
+  <c:externalData r:id="rId1">
+    <c:autoUpdate val="0"/>
+  </c:externalData>
+</c:chartSpace>
+</file>
+
+<file path=ppt/charts/chart18.xml><?xml version="1.0" encoding="utf-8"?>
+<c:chartSpace xmlns:c="http://schemas.openxmlformats.org/drawingml/2006/chart" xmlns:a="http://schemas.openxmlformats.org/drawingml/2006/main" xmlns:r="http://schemas.openxmlformats.org/officeDocument/2006/relationships">
+  <c:date1904 val="0"/>
+  <c:roundedCorners val="1"/>
+  <c:chart>
+    <c:autoTitleDeleted val="1"/>
+    <c:plotArea>
+      <c:layout/>
       <c:barChart>
         <c:barDir val="col"/>
         <c:grouping val="clustered"/>
@@ -4522,7 +4861,7 @@
 </c:chartSpace>
 </file>
 
-<file path=ppt/charts/chart18.xml><?xml version="1.0" encoding="utf-8"?>
+<file path=ppt/charts/chart19.xml><?xml version="1.0" encoding="utf-8"?>
 <c:chartSpace xmlns:c="http://schemas.openxmlformats.org/drawingml/2006/chart" xmlns:a="http://schemas.openxmlformats.org/drawingml/2006/main" xmlns:r="http://schemas.openxmlformats.org/officeDocument/2006/relationships">
   <c:date1904 val="0"/>
   <c:roundedCorners val="1"/>
@@ -4919,7 +5258,266 @@
 </c:chartSpace>
 </file>
 
-<file path=ppt/charts/chart19.xml><?xml version="1.0" encoding="utf-8"?>
+<file path=ppt/charts/chart2.xml><?xml version="1.0" encoding="utf-8"?>
+<c:chartSpace xmlns:c="http://schemas.openxmlformats.org/drawingml/2006/chart" xmlns:a="http://schemas.openxmlformats.org/drawingml/2006/main" xmlns:r="http://schemas.openxmlformats.org/officeDocument/2006/relationships">
+  <c:date1904 val="0"/>
+  <c:roundedCorners val="1"/>
+  <c:chart>
+    <c:autoTitleDeleted val="1"/>
+    <c:plotArea>
+      <c:layout/>
+      <c:barChart>
+        <c:barDir val="bar"/>
+        <c:grouping val="clustered"/>
+        <c:varyColors val="0"/>
+        <c:ser>
+          <c:idx val="0"/>
+          <c:order val="0"/>
+          <c:tx>
+            <c:strRef>
+              <c:f>Sheet1!$B$1</c:f>
+              <c:strCache>
+                <c:ptCount val="1"/>
+                <c:pt idx="0">
+                  <c:v>EQE</c:v>
+                </c:pt>
+              </c:strCache>
+            </c:strRef>
+          </c:tx>
+          <c:spPr>
+            <a:solidFill>
+              <a:srgbClr val="FF6B35"/>
+            </a:solidFill>
+            <a:effectLst/>
+          </c:spPr>
+          <c:invertIfNegative val="0"/>
+          <c:dLbls>
+            <c:numFmt formatCode="0&quot;%&quot;" sourceLinked="0"/>
+            <c:txPr>
+              <a:bodyPr/>
+              <a:lstStyle/>
+              <a:p>
+                <a:pPr>
+                  <a:defRPr b="0" i="0" strike="noStrike" sz="1100" u="none">
+                    <a:solidFill>
+                      <a:srgbClr val="FFFFFF"/>
+                    </a:solidFill>
+                    <a:latin typeface="Calibri"/>
+                  </a:defRPr>
+                </a:pPr>
+              </a:p>
+            </c:txPr>
+            <c:dLblPos val="inEnd"/>
+            <c:showLegendKey val="0"/>
+            <c:showVal val="1"/>
+            <c:showCatName val="0"/>
+            <c:showSerName val="0"/>
+            <c:showPercent val="0"/>
+            <c:showBubbleSize val="0"/>
+            <c:showLeaderLines val="0"/>
+          </c:dLbls>
+          <c:dPt>
+            <c:idx val="0"/>
+            <c:invertIfNegative val="0"/>
+            <c:bubble3D val="0"/>
+            <c:spPr>
+              <a:solidFill>
+                <a:srgbClr val="FF6B35"/>
+              </a:solidFill>
+              <a:effectLst/>
+            </c:spPr>
+          </c:dPt>
+          <c:dPt>
+            <c:idx val="1"/>
+            <c:invertIfNegative val="0"/>
+            <c:bubble3D val="0"/>
+            <c:spPr>
+              <a:solidFill>
+                <a:srgbClr val="2EC4B6"/>
+              </a:solidFill>
+              <a:effectLst/>
+            </c:spPr>
+          </c:dPt>
+          <c:cat>
+            <c:multiLvlStrRef>
+              <c:f>Sheet1!$A$2:$A$3</c:f>
+              <c:multiLvlStrCache>
+                <c:ptCount val="2"/>
+                <c:lvl>
+                  <c:pt idx="0">
+                    <c:v>측정 Ag</c:v>
+                  </c:pt>
+                  <c:pt idx="1">
+                    <c:v>이상 Ag</c:v>
+                  </c:pt>
+                </c:lvl>
+              </c:multiLvlStrCache>
+            </c:multiLvlStrRef>
+          </c:cat>
+          <c:val>
+            <c:numRef>
+              <c:f>Sheet1!$B$2:$B$3</c:f>
+              <c:numCache>
+                <c:formatCode>General</c:formatCode>
+                <c:ptCount val="2"/>
+                <c:pt idx="0">
+                  <c:v>55</c:v>
+                </c:pt>
+                <c:pt idx="1">
+                  <c:v>73</c:v>
+                </c:pt>
+              </c:numCache>
+            </c:numRef>
+          </c:val>
+        </c:ser>
+        <c:dLbls>
+          <c:numFmt formatCode="0&quot;%&quot;" sourceLinked="0"/>
+          <c:txPr>
+            <a:bodyPr/>
+            <a:lstStyle/>
+            <a:p>
+              <a:pPr>
+                <a:defRPr b="0" i="0" strike="noStrike" sz="1100" u="none">
+                  <a:solidFill>
+                    <a:srgbClr val="FFFFFF"/>
+                  </a:solidFill>
+                  <a:latin typeface="Calibri"/>
+                </a:defRPr>
+              </a:pPr>
+            </a:p>
+          </c:txPr>
+          <c:dLblPos val="inEnd"/>
+          <c:showLegendKey val="0"/>
+          <c:showVal val="1"/>
+          <c:showCatName val="0"/>
+          <c:showSerName val="0"/>
+          <c:showPercent val="0"/>
+          <c:showBubbleSize val="0"/>
+          <c:showLeaderLines val="0"/>
+        </c:dLbls>
+        <c:gapWidth val="150"/>
+        <c:overlap val="0"/>
+        <c:axId val="2094734554"/>
+        <c:axId val="2094734552"/>
+        <c:axId val="2094734556"/>
+      </c:barChart>
+      <c:catAx>
+        <c:axId val="2094734554"/>
+        <c:scaling>
+          <c:orientation val="minMax"/>
+        </c:scaling>
+        <c:delete val="0"/>
+        <c:axPos val="l"/>
+        <c:numFmt formatCode="General" sourceLinked="1"/>
+        <c:majorTickMark val="out"/>
+        <c:minorTickMark val="none"/>
+        <c:tickLblPos val="nextTo"/>
+        <c:spPr>
+          <a:ln w="12700" cap="flat">
+            <a:solidFill>
+              <a:srgbClr val="888888"/>
+            </a:solidFill>
+            <a:prstDash val="solid"/>
+            <a:round/>
+          </a:ln>
+        </c:spPr>
+        <c:txPr>
+          <a:bodyPr/>
+          <a:lstStyle/>
+          <a:p>
+            <a:pPr>
+              <a:defRPr sz="1000" b="0" i="0" u="none" strike="noStrike">
+                <a:solidFill>
+                  <a:srgbClr val="7A849C"/>
+                </a:solidFill>
+                <a:latin typeface="Malgun Gothic"/>
+              </a:defRPr>
+            </a:pPr>
+            <a:endParaRPr lang="en-US"/>
+          </a:p>
+        </c:txPr>
+        <c:crossAx val="2094734552"/>
+        <c:crosses val="autoZero"/>
+        <c:auto val="1"/>
+        <c:lblAlgn val="ctr"/>
+        <c:noMultiLvlLbl val="1"/>
+      </c:catAx>
+      <c:valAx>
+        <c:axId val="2094734552"/>
+        <c:scaling>
+          <c:orientation val="minMax"/>
+          <c:max val="90"/>
+        </c:scaling>
+        <c:delete val="0"/>
+        <c:axPos val="b"/>
+        <c:majorGridlines>
+          <c:spPr>
+            <a:ln w="12700" cap="flat">
+              <a:solidFill>
+                <a:srgbClr val="E2E7F0"/>
+              </a:solidFill>
+              <a:prstDash val="solid"/>
+              <a:round/>
+            </a:ln>
+          </c:spPr>
+        </c:majorGridlines>
+        <c:numFmt formatCode="General" sourceLinked="0"/>
+        <c:majorTickMark val="out"/>
+        <c:minorTickMark val="none"/>
+        <c:tickLblPos val="low"/>
+        <c:spPr>
+          <a:ln w="12700" cap="flat">
+            <a:solidFill>
+              <a:srgbClr val="888888"/>
+            </a:solidFill>
+            <a:prstDash val="solid"/>
+            <a:round/>
+          </a:ln>
+        </c:spPr>
+        <c:txPr>
+          <a:bodyPr/>
+          <a:lstStyle/>
+          <a:p>
+            <a:pPr>
+              <a:defRPr sz="1000" b="0" i="0" u="none" strike="noStrike">
+                <a:solidFill>
+                  <a:srgbClr val="7A849C"/>
+                </a:solidFill>
+                <a:latin typeface="Calibri"/>
+              </a:defRPr>
+            </a:pPr>
+            <a:endParaRPr lang="en-US"/>
+          </a:p>
+        </c:txPr>
+        <c:crossAx val="2094734554"/>
+        <c:crosses val="autoZero"/>
+        <c:crossBetween val="between"/>
+      </c:valAx>
+      <c:spPr>
+        <a:noFill/>
+        <a:ln>
+          <a:noFill/>
+        </a:ln>
+        <a:effectLst/>
+      </c:spPr>
+    </c:plotArea>
+    <c:plotVisOnly val="1"/>
+    <c:dispBlanksAs val="span"/>
+  </c:chart>
+  <c:spPr>
+    <a:noFill/>
+    <a:ln>
+      <a:noFill/>
+    </a:ln>
+    <a:effectLst/>
+  </c:spPr>
+  <c:externalData r:id="rId1">
+    <c:autoUpdate val="0"/>
+  </c:externalData>
+</c:chartSpace>
+</file>
+
+<file path=ppt/charts/chart20.xml><?xml version="1.0" encoding="utf-8"?>
 <c:chartSpace xmlns:c="http://schemas.openxmlformats.org/drawingml/2006/chart" xmlns:a="http://schemas.openxmlformats.org/drawingml/2006/main" xmlns:r="http://schemas.openxmlformats.org/officeDocument/2006/relationships">
   <c:date1904 val="0"/>
   <c:roundedCorners val="1"/>
@@ -5387,266 +5985,7 @@
 </c:chartSpace>
 </file>
 
-<file path=ppt/charts/chart2.xml><?xml version="1.0" encoding="utf-8"?>
-<c:chartSpace xmlns:c="http://schemas.openxmlformats.org/drawingml/2006/chart" xmlns:a="http://schemas.openxmlformats.org/drawingml/2006/main" xmlns:r="http://schemas.openxmlformats.org/officeDocument/2006/relationships">
-  <c:date1904 val="0"/>
-  <c:roundedCorners val="1"/>
-  <c:chart>
-    <c:autoTitleDeleted val="1"/>
-    <c:plotArea>
-      <c:layout/>
-      <c:barChart>
-        <c:barDir val="bar"/>
-        <c:grouping val="clustered"/>
-        <c:varyColors val="0"/>
-        <c:ser>
-          <c:idx val="0"/>
-          <c:order val="0"/>
-          <c:tx>
-            <c:strRef>
-              <c:f>Sheet1!$B$1</c:f>
-              <c:strCache>
-                <c:ptCount val="1"/>
-                <c:pt idx="0">
-                  <c:v>EQE</c:v>
-                </c:pt>
-              </c:strCache>
-            </c:strRef>
-          </c:tx>
-          <c:spPr>
-            <a:solidFill>
-              <a:srgbClr val="FF6B35"/>
-            </a:solidFill>
-            <a:effectLst/>
-          </c:spPr>
-          <c:invertIfNegative val="0"/>
-          <c:dLbls>
-            <c:numFmt formatCode="0&quot;%&quot;" sourceLinked="0"/>
-            <c:txPr>
-              <a:bodyPr/>
-              <a:lstStyle/>
-              <a:p>
-                <a:pPr>
-                  <a:defRPr b="0" i="0" strike="noStrike" sz="1100" u="none">
-                    <a:solidFill>
-                      <a:srgbClr val="FFFFFF"/>
-                    </a:solidFill>
-                    <a:latin typeface="Calibri"/>
-                  </a:defRPr>
-                </a:pPr>
-              </a:p>
-            </c:txPr>
-            <c:dLblPos val="inEnd"/>
-            <c:showLegendKey val="0"/>
-            <c:showVal val="1"/>
-            <c:showCatName val="0"/>
-            <c:showSerName val="0"/>
-            <c:showPercent val="0"/>
-            <c:showBubbleSize val="0"/>
-            <c:showLeaderLines val="0"/>
-          </c:dLbls>
-          <c:dPt>
-            <c:idx val="0"/>
-            <c:invertIfNegative val="0"/>
-            <c:bubble3D val="0"/>
-            <c:spPr>
-              <a:solidFill>
-                <a:srgbClr val="FF6B35"/>
-              </a:solidFill>
-              <a:effectLst/>
-            </c:spPr>
-          </c:dPt>
-          <c:dPt>
-            <c:idx val="1"/>
-            <c:invertIfNegative val="0"/>
-            <c:bubble3D val="0"/>
-            <c:spPr>
-              <a:solidFill>
-                <a:srgbClr val="2EC4B6"/>
-              </a:solidFill>
-              <a:effectLst/>
-            </c:spPr>
-          </c:dPt>
-          <c:cat>
-            <c:multiLvlStrRef>
-              <c:f>Sheet1!$A$2:$A$3</c:f>
-              <c:multiLvlStrCache>
-                <c:ptCount val="2"/>
-                <c:lvl>
-                  <c:pt idx="0">
-                    <c:v>측정 Ag</c:v>
-                  </c:pt>
-                  <c:pt idx="1">
-                    <c:v>이상 Ag</c:v>
-                  </c:pt>
-                </c:lvl>
-              </c:multiLvlStrCache>
-            </c:multiLvlStrRef>
-          </c:cat>
-          <c:val>
-            <c:numRef>
-              <c:f>Sheet1!$B$2:$B$3</c:f>
-              <c:numCache>
-                <c:formatCode>General</c:formatCode>
-                <c:ptCount val="2"/>
-                <c:pt idx="0">
-                  <c:v>55</c:v>
-                </c:pt>
-                <c:pt idx="1">
-                  <c:v>73</c:v>
-                </c:pt>
-              </c:numCache>
-            </c:numRef>
-          </c:val>
-        </c:ser>
-        <c:dLbls>
-          <c:numFmt formatCode="0&quot;%&quot;" sourceLinked="0"/>
-          <c:txPr>
-            <a:bodyPr/>
-            <a:lstStyle/>
-            <a:p>
-              <a:pPr>
-                <a:defRPr b="0" i="0" strike="noStrike" sz="1100" u="none">
-                  <a:solidFill>
-                    <a:srgbClr val="FFFFFF"/>
-                  </a:solidFill>
-                  <a:latin typeface="Calibri"/>
-                </a:defRPr>
-              </a:pPr>
-            </a:p>
-          </c:txPr>
-          <c:dLblPos val="inEnd"/>
-          <c:showLegendKey val="0"/>
-          <c:showVal val="1"/>
-          <c:showCatName val="0"/>
-          <c:showSerName val="0"/>
-          <c:showPercent val="0"/>
-          <c:showBubbleSize val="0"/>
-          <c:showLeaderLines val="0"/>
-        </c:dLbls>
-        <c:gapWidth val="150"/>
-        <c:overlap val="0"/>
-        <c:axId val="2094734554"/>
-        <c:axId val="2094734552"/>
-        <c:axId val="2094734556"/>
-      </c:barChart>
-      <c:catAx>
-        <c:axId val="2094734554"/>
-        <c:scaling>
-          <c:orientation val="minMax"/>
-        </c:scaling>
-        <c:delete val="0"/>
-        <c:axPos val="l"/>
-        <c:numFmt formatCode="General" sourceLinked="1"/>
-        <c:majorTickMark val="out"/>
-        <c:minorTickMark val="none"/>
-        <c:tickLblPos val="nextTo"/>
-        <c:spPr>
-          <a:ln w="12700" cap="flat">
-            <a:solidFill>
-              <a:srgbClr val="888888"/>
-            </a:solidFill>
-            <a:prstDash val="solid"/>
-            <a:round/>
-          </a:ln>
-        </c:spPr>
-        <c:txPr>
-          <a:bodyPr/>
-          <a:lstStyle/>
-          <a:p>
-            <a:pPr>
-              <a:defRPr sz="1000" b="0" i="0" u="none" strike="noStrike">
-                <a:solidFill>
-                  <a:srgbClr val="7A849C"/>
-                </a:solidFill>
-                <a:latin typeface="Malgun Gothic"/>
-              </a:defRPr>
-            </a:pPr>
-            <a:endParaRPr lang="en-US"/>
-          </a:p>
-        </c:txPr>
-        <c:crossAx val="2094734552"/>
-        <c:crosses val="autoZero"/>
-        <c:auto val="1"/>
-        <c:lblAlgn val="ctr"/>
-        <c:noMultiLvlLbl val="1"/>
-      </c:catAx>
-      <c:valAx>
-        <c:axId val="2094734552"/>
-        <c:scaling>
-          <c:orientation val="minMax"/>
-          <c:max val="90"/>
-        </c:scaling>
-        <c:delete val="0"/>
-        <c:axPos val="b"/>
-        <c:majorGridlines>
-          <c:spPr>
-            <a:ln w="12700" cap="flat">
-              <a:solidFill>
-                <a:srgbClr val="E2E7F0"/>
-              </a:solidFill>
-              <a:prstDash val="solid"/>
-              <a:round/>
-            </a:ln>
-          </c:spPr>
-        </c:majorGridlines>
-        <c:numFmt formatCode="General" sourceLinked="0"/>
-        <c:majorTickMark val="out"/>
-        <c:minorTickMark val="none"/>
-        <c:tickLblPos val="low"/>
-        <c:spPr>
-          <a:ln w="12700" cap="flat">
-            <a:solidFill>
-              <a:srgbClr val="888888"/>
-            </a:solidFill>
-            <a:prstDash val="solid"/>
-            <a:round/>
-          </a:ln>
-        </c:spPr>
-        <c:txPr>
-          <a:bodyPr/>
-          <a:lstStyle/>
-          <a:p>
-            <a:pPr>
-              <a:defRPr sz="1000" b="0" i="0" u="none" strike="noStrike">
-                <a:solidFill>
-                  <a:srgbClr val="7A849C"/>
-                </a:solidFill>
-                <a:latin typeface="Calibri"/>
-              </a:defRPr>
-            </a:pPr>
-            <a:endParaRPr lang="en-US"/>
-          </a:p>
-        </c:txPr>
-        <c:crossAx val="2094734554"/>
-        <c:crosses val="autoZero"/>
-        <c:crossBetween val="between"/>
-      </c:valAx>
-      <c:spPr>
-        <a:noFill/>
-        <a:ln>
-          <a:noFill/>
-        </a:ln>
-        <a:effectLst/>
-      </c:spPr>
-    </c:plotArea>
-    <c:plotVisOnly val="1"/>
-    <c:dispBlanksAs val="span"/>
-  </c:chart>
-  <c:spPr>
-    <a:noFill/>
-    <a:ln>
-      <a:noFill/>
-    </a:ln>
-    <a:effectLst/>
-  </c:spPr>
-  <c:externalData r:id="rId1">
-    <c:autoUpdate val="0"/>
-  </c:externalData>
-</c:chartSpace>
-</file>
-
-<file path=ppt/charts/chart20.xml><?xml version="1.0" encoding="utf-8"?>
+<file path=ppt/charts/chart21.xml><?xml version="1.0" encoding="utf-8"?>
 <c:chartSpace xmlns:c="http://schemas.openxmlformats.org/drawingml/2006/chart" xmlns:a="http://schemas.openxmlformats.org/drawingml/2006/main" xmlns:r="http://schemas.openxmlformats.org/officeDocument/2006/relationships">
   <c:date1904 val="0"/>
   <c:roundedCorners val="1"/>
@@ -6275,7 +6614,7 @@
 </c:chartSpace>
 </file>
 
-<file path=ppt/charts/chart21.xml><?xml version="1.0" encoding="utf-8"?>
+<file path=ppt/charts/chart22.xml><?xml version="1.0" encoding="utf-8"?>
 <c:chartSpace xmlns:c="http://schemas.openxmlformats.org/drawingml/2006/chart" xmlns:a="http://schemas.openxmlformats.org/drawingml/2006/main" xmlns:r="http://schemas.openxmlformats.org/officeDocument/2006/relationships">
   <c:date1904 val="0"/>
   <c:roundedCorners val="1"/>
@@ -9545,7 +9884,7 @@
           <a:p>
             <a:r>
               <a:rPr lang="en-US" dirty="0"/>
-              <a:t>HATCN 위 Ag는 전 파장에서 MoOx의 1/3 수준.</a:t>
+              <a:t>측정 조건과 보정은 notes/HANDOFF_TR_20260820.md 에 전부 기록.</a:t>
             </a:r>
             <a:endParaRPr lang="en-US" dirty="0"/>
           </a:p>
@@ -9633,7 +9972,7 @@
           <a:p>
             <a:r>
               <a:rPr lang="en-US" dirty="0"/>
-              <a:t>k는 벌크와 같고 n만 5~12배. 즉 벌크 밀도의 진짜 은인데 전자 산란만 많다.</a:t>
+              <a:t>HATCN 위 Ag는 전 파장에서 MoOx의 1/3 수준.</a:t>
             </a:r>
             <a:endParaRPr lang="en-US" dirty="0"/>
           </a:p>
@@ -9721,7 +10060,7 @@
           <a:p>
             <a:r>
               <a:rPr lang="en-US" dirty="0"/>
-              <a:t>HATCN이 Ag 2 nm를 절약한다. 전기·광학 독립 확인.</a:t>
+              <a:t>k는 벌크와 같고 n만 5~12배. 즉 벌크 밀도의 진짜 은인데 전자 산란만 많다.</a:t>
             </a:r>
             <a:endParaRPr lang="en-US" dirty="0"/>
           </a:p>
@@ -9809,7 +10148,7 @@
           <a:p>
             <a:r>
               <a:rPr lang="en-US" dirty="0"/>
-              <a:t>이상적 Ag는 두께에 선형. 실제 막은 7~8 nm에 최소점.</a:t>
+              <a:t>HATCN이 Ag 2 nm를 절약한다. 전기·광학 독립 확인.</a:t>
             </a:r>
             <a:endParaRPr lang="en-US" dirty="0"/>
           </a:p>
@@ -9897,7 +10236,7 @@
           <a:p>
             <a:r>
               <a:rPr lang="en-US" dirty="0"/>
-              <a:t>여러분 MATLAB PSO 두 점(55%, 73%)에 보정한 재순환 모델 기준.</a:t>
+              <a:t>이상적 Ag는 두께에 선형. 실제 막은 7~8 nm에 최소점.</a:t>
             </a:r>
             <a:endParaRPr lang="en-US" dirty="0"/>
           </a:p>
@@ -9985,7 +10324,7 @@
           <a:p>
             <a:r>
               <a:rPr lang="en-US" dirty="0"/>
-              <a:t>결론 슬라이드. 닫힘이 아니라 미세구조가 목표라는 전환.</a:t>
+              <a:t>여러분 MATLAB PSO 두 점(55%, 73%)에 보정한 재순환 모델 기준.</a:t>
             </a:r>
             <a:endParaRPr lang="en-US" dirty="0"/>
           </a:p>
@@ -10009,6 +10348,94 @@
             <a:fld id="{F7021451-1387-4CA6-816F-3879F97B5CBC}" type="slidenum">
               <a:rPr lang="en-US"/>
               <a:t>15</a:t>
+            </a:fld>
+            <a:endParaRPr lang="en-US"/>
+          </a:p>
+        </p:txBody>
+      </p:sp>
+    </p:spTree>
+    <p:extLst>
+      <p:ext uri="{BB962C8B-B14F-4D97-AF65-F5344CB8AC3E}">
+        <p14:creationId xmlns:p14="http://schemas.microsoft.com/office/powerpoint/2010/main" val="1024086991"/>
+      </p:ext>
+    </p:extLst>
+  </p:cSld>
+  <p:clrMapOvr>
+    <a:masterClrMapping/>
+  </p:clrMapOvr>
+</p:notes>
+</file>
+
+<file path=ppt/notesSlides/notesSlide16.xml><?xml version="1.0" encoding="utf-8"?>
+<p:notes xmlns:a="http://schemas.openxmlformats.org/drawingml/2006/main" xmlns:r="http://schemas.openxmlformats.org/officeDocument/2006/relationships" xmlns:p="http://schemas.openxmlformats.org/presentationml/2006/main">
+  <p:cSld>
+    <p:spTree>
+      <p:nvGrpSpPr>
+        <p:cNvPr id="1" name=""/>
+        <p:cNvGrpSpPr/>
+        <p:nvPr/>
+      </p:nvGrpSpPr>
+      <p:grpSpPr>
+        <a:xfrm>
+          <a:off x="0" y="0"/>
+          <a:ext cx="0" cy="0"/>
+          <a:chOff x="0" y="0"/>
+          <a:chExt cx="0" cy="0"/>
+        </a:xfrm>
+      </p:grpSpPr>
+      <p:sp>
+        <p:nvSpPr>
+          <p:cNvPr id="2" name="Slide Image Placeholder 1"/>
+          <p:cNvSpPr>
+            <a:spLocks noGrp="1" noRot="1" noChangeAspect="1"/>
+          </p:cNvSpPr>
+          <p:nvPr>
+            <p:ph type="sldImg"/>
+          </p:nvPr>
+        </p:nvSpPr>
+        <p:spPr/>
+      </p:sp>
+      <p:sp>
+        <p:nvSpPr>
+          <p:cNvPr id="3" name="Notes Placeholder 2"/>
+          <p:cNvSpPr>
+            <a:spLocks noGrp="1"/>
+          </p:cNvSpPr>
+          <p:nvPr>
+            <p:ph type="body" idx="1"/>
+          </p:nvPr>
+        </p:nvSpPr>
+        <p:spPr/>
+        <p:txBody>
+          <a:bodyPr/>
+          <a:lstStyle/>
+          <a:p>
+            <a:r>
+              <a:rPr lang="en-US" dirty="0"/>
+              <a:t>결론 슬라이드. 닫힘이 아니라 미세구조가 목표라는 전환.</a:t>
+            </a:r>
+            <a:endParaRPr lang="en-US" dirty="0"/>
+          </a:p>
+        </p:txBody>
+      </p:sp>
+      <p:sp>
+        <p:nvSpPr>
+          <p:cNvPr id="4" name="Slide Number Placeholder 3"/>
+          <p:cNvSpPr>
+            <a:spLocks noGrp="1"/>
+          </p:cNvSpPr>
+          <p:nvPr>
+            <p:ph type="sldNum" sz="quarter" idx="10"/>
+          </p:nvPr>
+        </p:nvSpPr>
+        <p:spPr/>
+        <p:txBody>
+          <a:bodyPr/>
+          <a:lstStyle/>
+          <a:p>
+            <a:fld id="{F7021451-1387-4CA6-816F-3879F97B5CBC}" type="slidenum">
+              <a:rPr lang="en-US"/>
+              <a:t>16</a:t>
             </a:fld>
             <a:endParaRPr lang="en-US"/>
           </a:p>
@@ -10513,7 +10940,7 @@
           <a:p>
             <a:r>
               <a:rPr lang="en-US" dirty="0"/>
-              <a:t>Al2O3 0.910 은 Al-rich 클러스터의 과결합이었다. 화학량론 Al4O6 는 0.422 로 MoOx 수준.</a:t>
+              <a:t>TPBi 0.889는 단일 N이 아니라 이좌 킬레이트(N 2.33/2.34). HATCN은 단좌 N 2.30 하나로 그보다 높다.</a:t>
             </a:r>
             <a:endParaRPr lang="en-US" dirty="0"/>
           </a:p>
@@ -10601,7 +11028,7 @@
           <a:p>
             <a:r>
               <a:rPr lang="en-US" dirty="0"/>
-              <a:t>DFT 순위는 신뢰, 절대 크기는 실측으로. 정직하게 한계를 명시.</a:t>
+              <a:t>Al2O3 0.910은 Al-rich 클러스터 과결합. 화학량론 Al4O6는 0.422.</a:t>
             </a:r>
             <a:endParaRPr lang="en-US" dirty="0"/>
           </a:p>
@@ -10689,7 +11116,7 @@
           <a:p>
             <a:r>
               <a:rPr lang="en-US" dirty="0"/>
-              <a:t>측정 조건과 보정은 notes/HANDOFF_TR_20260820.md 에 전부 기록.</a:t>
+              <a:t>DFT 순위는 신뢰, 절대 크기는 실측으로. 정직하게 한계를 명시.</a:t>
             </a:r>
             <a:endParaRPr lang="en-US" dirty="0"/>
           </a:p>
@@ -11333,7 +11760,7 @@
                 <a:ea typeface="Malgun Gothic" pitchFamily="34" charset="-122"/>
                 <a:cs typeface="Malgun Gothic" pitchFamily="34" charset="-120"/>
               </a:rPr>
-              <a:t>흡수 스펙트럼 — seed가 만드는 차이</a:t>
+              <a:t>확보한 실측 데이터</a:t>
             </a:r>
             <a:endParaRPr lang="en-US" sz="3200" dirty="0"/>
           </a:p>
@@ -11372,7 +11799,7 @@
                 <a:ea typeface="Malgun Gothic" pitchFamily="34" charset="-122"/>
                 <a:cs typeface="Malgun Gothic" pitchFamily="34" charset="-120"/>
               </a:rPr>
-              <a:t>glass / seed 5 nm / Ag, 절대 T·R 로부터 A = 1 − T − R</a:t>
+              <a:t>2 seed × 7 두께 = 15 시료, 절대 T/R 분광 + 4-point probe</a:t>
             </a:r>
             <a:endParaRPr lang="en-US" sz="1400" dirty="0"/>
           </a:p>
@@ -11387,7 +11814,7 @@
         <p:spPr>
           <a:xfrm>
             <a:off x="566928" y="1691640"/>
-            <a:ext cx="11064240" cy="4160520"/>
+            <a:ext cx="5394960" cy="4160520"/>
           </a:xfrm>
           <a:prstGeom prst="roundRect">
             <a:avLst>
@@ -11407,15 +11834,54 @@
           </a:effectLst>
         </p:spPr>
       </p:sp>
+      <p:sp>
+        <p:nvSpPr>
+          <p:cNvPr id="5" name="Text 3"/>
+          <p:cNvSpPr/>
+          <p:nvPr/>
+        </p:nvSpPr>
+        <p:spPr>
+          <a:xfrm>
+            <a:off x="868680" y="1874520"/>
+            <a:ext cx="4846320" cy="320040"/>
+          </a:xfrm>
+          <a:prstGeom prst="rect">
+            <a:avLst/>
+          </a:prstGeom>
+          <a:noFill/>
+          <a:ln/>
+        </p:spPr>
+        <p:txBody>
+          <a:bodyPr wrap="square" lIns="0" tIns="0" rIns="0" bIns="0" rtlCol="0" anchor="ctr"/>
+          <a:lstStyle/>
+          <a:p>
+            <a:pPr indent="0" marL="0">
+              <a:buNone/>
+            </a:pPr>
+            <a:r>
+              <a:rPr lang="en-US" sz="1400" b="1" dirty="0">
+                <a:solidFill>
+                  <a:srgbClr val="1A1F2E"/>
+                </a:solidFill>
+                <a:latin typeface="Malgun Gothic" pitchFamily="34" charset="0"/>
+                <a:ea typeface="Malgun Gothic" pitchFamily="34" charset="-122"/>
+                <a:cs typeface="Malgun Gothic" pitchFamily="34" charset="-120"/>
+              </a:rPr>
+              <a:t>면저항 — 두 seed 비교</a:t>
+            </a:r>
+            <a:endParaRPr lang="en-US" sz="1400" dirty="0"/>
+          </a:p>
+        </p:txBody>
+      </p:sp>
       <p:graphicFrame>
         <p:nvGraphicFramePr>
-          <p:cNvPr id="5" name="Chart 0" descr=""/>
+          <p:cNvPr id="6" name="Chart 0" descr=""/>
           <p:cNvGraphicFramePr/>
           <p:nvPr/>
         </p:nvGraphicFramePr>
         <p:xfrm>
-          <a:off x="868680" y="2011680"/>
-          <a:ext cx="10469880" cy="3657600"/>
+          <a:off x="868680" y="2240280"/>
+          <a:ext cx="4846320" cy="3383280"/>
         </p:xfrm>
         <a:graphic xmlns:a="http://schemas.openxmlformats.org/drawingml/2006/main">
           <a:graphicData uri="http://schemas.openxmlformats.org/drawingml/2006/chart">
@@ -11423,6 +11889,1033 @@
           </a:graphicData>
         </a:graphic>
       </p:graphicFrame>
+      <p:sp>
+        <p:nvSpPr>
+          <p:cNvPr id="7" name="Shape 4"/>
+          <p:cNvSpPr/>
+          <p:nvPr/>
+        </p:nvSpPr>
+        <p:spPr>
+          <a:xfrm>
+            <a:off x="6217920" y="1691640"/>
+            <a:ext cx="5413248" cy="4160520"/>
+          </a:xfrm>
+          <a:prstGeom prst="roundRect">
+            <a:avLst>
+              <a:gd name="adj" fmla="val 1319"/>
+            </a:avLst>
+          </a:prstGeom>
+          <a:solidFill>
+            <a:srgbClr val="FFFFFF"/>
+          </a:solidFill>
+          <a:ln/>
+          <a:effectLst>
+            <a:outerShdw sx="100000" sy="100000" kx="0" ky="0" algn="bl" rotWithShape="0" blurRad="114300" dist="12700" dir="5400000">
+              <a:srgbClr val="9AA5BC">
+                <a:alpha val="22000"/>
+              </a:srgbClr>
+            </a:outerShdw>
+          </a:effectLst>
+        </p:spPr>
+      </p:sp>
+      <p:sp>
+        <p:nvSpPr>
+          <p:cNvPr id="8" name="Text 5"/>
+          <p:cNvSpPr/>
+          <p:nvPr/>
+        </p:nvSpPr>
+        <p:spPr>
+          <a:xfrm>
+            <a:off x="6510528" y="1874520"/>
+            <a:ext cx="4846320" cy="320040"/>
+          </a:xfrm>
+          <a:prstGeom prst="rect">
+            <a:avLst/>
+          </a:prstGeom>
+          <a:noFill/>
+          <a:ln/>
+        </p:spPr>
+        <p:txBody>
+          <a:bodyPr wrap="square" lIns="0" tIns="0" rIns="0" bIns="0" rtlCol="0" anchor="ctr"/>
+          <a:lstStyle/>
+          <a:p>
+            <a:pPr indent="0" marL="0">
+              <a:buNone/>
+            </a:pPr>
+            <a:r>
+              <a:rPr lang="en-US" sz="1400" b="1" dirty="0">
+                <a:solidFill>
+                  <a:srgbClr val="1A1F2E"/>
+                </a:solidFill>
+                <a:latin typeface="Malgun Gothic" pitchFamily="34" charset="0"/>
+                <a:ea typeface="Malgun Gothic" pitchFamily="34" charset="-122"/>
+                <a:cs typeface="Malgun Gothic" pitchFamily="34" charset="-120"/>
+              </a:rPr>
+              <a:t>데이터 구성</a:t>
+            </a:r>
+            <a:endParaRPr lang="en-US" sz="1400" dirty="0"/>
+          </a:p>
+        </p:txBody>
+      </p:sp>
+      <p:sp>
+        <p:nvSpPr>
+          <p:cNvPr id="9" name="Shape 6"/>
+          <p:cNvSpPr/>
+          <p:nvPr/>
+        </p:nvSpPr>
+        <p:spPr>
+          <a:xfrm>
+            <a:off x="6510528" y="2286000"/>
+            <a:ext cx="384048" cy="384048"/>
+          </a:xfrm>
+          <a:prstGeom prst="ellipse">
+            <a:avLst/>
+          </a:prstGeom>
+          <a:solidFill>
+            <a:srgbClr val="1E2761"/>
+          </a:solidFill>
+          <a:ln/>
+        </p:spPr>
+      </p:sp>
+      <p:sp>
+        <p:nvSpPr>
+          <p:cNvPr id="10" name="Text 7"/>
+          <p:cNvSpPr/>
+          <p:nvPr/>
+        </p:nvSpPr>
+        <p:spPr>
+          <a:xfrm>
+            <a:off x="6510528" y="2286000"/>
+            <a:ext cx="384048" cy="384048"/>
+          </a:xfrm>
+          <a:prstGeom prst="rect">
+            <a:avLst/>
+          </a:prstGeom>
+          <a:noFill/>
+          <a:ln/>
+        </p:spPr>
+        <p:txBody>
+          <a:bodyPr wrap="square" lIns="0" tIns="0" rIns="0" bIns="0" rtlCol="0" anchor="ctr"/>
+          <a:lstStyle/>
+          <a:p>
+            <a:pPr algn="ctr" indent="0" marL="0">
+              <a:buNone/>
+            </a:pPr>
+            <a:r>
+              <a:rPr lang="en-US" sz="1500" b="1" dirty="0">
+                <a:solidFill>
+                  <a:srgbClr val="FFFFFF"/>
+                </a:solidFill>
+                <a:latin typeface="Calibri" pitchFamily="34" charset="0"/>
+                <a:ea typeface="Calibri" pitchFamily="34" charset="-122"/>
+                <a:cs typeface="Calibri" pitchFamily="34" charset="-120"/>
+              </a:rPr>
+              <a:t>1</a:t>
+            </a:r>
+            <a:endParaRPr lang="en-US" sz="1500" dirty="0"/>
+          </a:p>
+        </p:txBody>
+      </p:sp>
+      <p:sp>
+        <p:nvSpPr>
+          <p:cNvPr id="11" name="Text 8"/>
+          <p:cNvSpPr/>
+          <p:nvPr/>
+        </p:nvSpPr>
+        <p:spPr>
+          <a:xfrm>
+            <a:off x="7004304" y="2267712"/>
+            <a:ext cx="1828800" cy="256032"/>
+          </a:xfrm>
+          <a:prstGeom prst="rect">
+            <a:avLst/>
+          </a:prstGeom>
+          <a:noFill/>
+          <a:ln/>
+        </p:spPr>
+        <p:txBody>
+          <a:bodyPr wrap="square" lIns="0" tIns="0" rIns="0" bIns="0" rtlCol="0" anchor="ctr"/>
+          <a:lstStyle/>
+          <a:p>
+            <a:pPr indent="0" marL="0">
+              <a:buNone/>
+            </a:pPr>
+            <a:r>
+              <a:rPr lang="en-US" sz="1150" b="1" dirty="0">
+                <a:solidFill>
+                  <a:srgbClr val="1A1F2E"/>
+                </a:solidFill>
+                <a:latin typeface="Malgun Gothic" pitchFamily="34" charset="0"/>
+                <a:ea typeface="Malgun Gothic" pitchFamily="34" charset="-122"/>
+                <a:cs typeface="Malgun Gothic" pitchFamily="34" charset="-120"/>
+              </a:rPr>
+              <a:t>절대 투과도 T</a:t>
+            </a:r>
+            <a:endParaRPr lang="en-US" sz="1150" dirty="0"/>
+          </a:p>
+        </p:txBody>
+      </p:sp>
+      <p:sp>
+        <p:nvSpPr>
+          <p:cNvPr id="12" name="Text 9"/>
+          <p:cNvSpPr/>
+          <p:nvPr/>
+        </p:nvSpPr>
+        <p:spPr>
+          <a:xfrm>
+            <a:off x="7004304" y="2468880"/>
+            <a:ext cx="4297680" cy="237744"/>
+          </a:xfrm>
+          <a:prstGeom prst="rect">
+            <a:avLst/>
+          </a:prstGeom>
+          <a:noFill/>
+          <a:ln/>
+        </p:spPr>
+        <p:txBody>
+          <a:bodyPr wrap="square" lIns="0" tIns="0" rIns="0" bIns="0" rtlCol="0" anchor="ctr"/>
+          <a:lstStyle/>
+          <a:p>
+            <a:pPr indent="0" marL="0">
+              <a:buNone/>
+            </a:pPr>
+            <a:r>
+              <a:rPr lang="en-US" sz="950" dirty="0">
+                <a:solidFill>
+                  <a:srgbClr val="7A849C"/>
+                </a:solidFill>
+                <a:latin typeface="Calibri" pitchFamily="34" charset="0"/>
+                <a:ea typeface="Calibri" pitchFamily="34" charset="-122"/>
+                <a:cs typeface="Calibri" pitchFamily="34" charset="-120"/>
+              </a:rPr>
+              <a:t>0° / 180°, 350–850 nm, 2 nm</a:t>
+            </a:r>
+            <a:endParaRPr lang="en-US" sz="950" dirty="0"/>
+          </a:p>
+        </p:txBody>
+      </p:sp>
+      <p:sp>
+        <p:nvSpPr>
+          <p:cNvPr id="13" name="Shape 10"/>
+          <p:cNvSpPr/>
+          <p:nvPr/>
+        </p:nvSpPr>
+        <p:spPr>
+          <a:xfrm>
+            <a:off x="6510528" y="2788920"/>
+            <a:ext cx="384048" cy="384048"/>
+          </a:xfrm>
+          <a:prstGeom prst="ellipse">
+            <a:avLst/>
+          </a:prstGeom>
+          <a:solidFill>
+            <a:srgbClr val="1E2761"/>
+          </a:solidFill>
+          <a:ln/>
+        </p:spPr>
+      </p:sp>
+      <p:sp>
+        <p:nvSpPr>
+          <p:cNvPr id="14" name="Text 11"/>
+          <p:cNvSpPr/>
+          <p:nvPr/>
+        </p:nvSpPr>
+        <p:spPr>
+          <a:xfrm>
+            <a:off x="6510528" y="2788920"/>
+            <a:ext cx="384048" cy="384048"/>
+          </a:xfrm>
+          <a:prstGeom prst="rect">
+            <a:avLst/>
+          </a:prstGeom>
+          <a:noFill/>
+          <a:ln/>
+        </p:spPr>
+        <p:txBody>
+          <a:bodyPr wrap="square" lIns="0" tIns="0" rIns="0" bIns="0" rtlCol="0" anchor="ctr"/>
+          <a:lstStyle/>
+          <a:p>
+            <a:pPr algn="ctr" indent="0" marL="0">
+              <a:buNone/>
+            </a:pPr>
+            <a:r>
+              <a:rPr lang="en-US" sz="1500" b="1" dirty="0">
+                <a:solidFill>
+                  <a:srgbClr val="FFFFFF"/>
+                </a:solidFill>
+                <a:latin typeface="Calibri" pitchFamily="34" charset="0"/>
+                <a:ea typeface="Calibri" pitchFamily="34" charset="-122"/>
+                <a:cs typeface="Calibri" pitchFamily="34" charset="-120"/>
+              </a:rPr>
+              <a:t>2</a:t>
+            </a:r>
+            <a:endParaRPr lang="en-US" sz="1500" dirty="0"/>
+          </a:p>
+        </p:txBody>
+      </p:sp>
+      <p:sp>
+        <p:nvSpPr>
+          <p:cNvPr id="15" name="Text 12"/>
+          <p:cNvSpPr/>
+          <p:nvPr/>
+        </p:nvSpPr>
+        <p:spPr>
+          <a:xfrm>
+            <a:off x="7004304" y="2770632"/>
+            <a:ext cx="1828800" cy="256032"/>
+          </a:xfrm>
+          <a:prstGeom prst="rect">
+            <a:avLst/>
+          </a:prstGeom>
+          <a:noFill/>
+          <a:ln/>
+        </p:spPr>
+        <p:txBody>
+          <a:bodyPr wrap="square" lIns="0" tIns="0" rIns="0" bIns="0" rtlCol="0" anchor="ctr"/>
+          <a:lstStyle/>
+          <a:p>
+            <a:pPr indent="0" marL="0">
+              <a:buNone/>
+            </a:pPr>
+            <a:r>
+              <a:rPr lang="en-US" sz="1150" b="1" dirty="0">
+                <a:solidFill>
+                  <a:srgbClr val="1A1F2E"/>
+                </a:solidFill>
+                <a:latin typeface="Malgun Gothic" pitchFamily="34" charset="0"/>
+                <a:ea typeface="Malgun Gothic" pitchFamily="34" charset="-122"/>
+                <a:cs typeface="Malgun Gothic" pitchFamily="34" charset="-120"/>
+              </a:rPr>
+              <a:t>절대 반사도 R</a:t>
+            </a:r>
+            <a:endParaRPr lang="en-US" sz="1150" dirty="0"/>
+          </a:p>
+        </p:txBody>
+      </p:sp>
+      <p:sp>
+        <p:nvSpPr>
+          <p:cNvPr id="16" name="Text 13"/>
+          <p:cNvSpPr/>
+          <p:nvPr/>
+        </p:nvSpPr>
+        <p:spPr>
+          <a:xfrm>
+            <a:off x="7004304" y="2971800"/>
+            <a:ext cx="4297680" cy="237744"/>
+          </a:xfrm>
+          <a:prstGeom prst="rect">
+            <a:avLst/>
+          </a:prstGeom>
+          <a:noFill/>
+          <a:ln/>
+        </p:spPr>
+        <p:txBody>
+          <a:bodyPr wrap="square" lIns="0" tIns="0" rIns="0" bIns="0" rtlCol="0" anchor="ctr"/>
+          <a:lstStyle/>
+          <a:p>
+            <a:pPr indent="0" marL="0">
+              <a:buNone/>
+            </a:pPr>
+            <a:r>
+              <a:rPr lang="en-US" sz="950" dirty="0">
+                <a:solidFill>
+                  <a:srgbClr val="7A849C"/>
+                </a:solidFill>
+                <a:latin typeface="Calibri" pitchFamily="34" charset="0"/>
+                <a:ea typeface="Calibri" pitchFamily="34" charset="-122"/>
+                <a:cs typeface="Calibri" pitchFamily="34" charset="-120"/>
+              </a:rPr>
+              <a:t>6° / 12°, 뒷면 보정 84.3 %</a:t>
+            </a:r>
+            <a:endParaRPr lang="en-US" sz="950" dirty="0"/>
+          </a:p>
+        </p:txBody>
+      </p:sp>
+      <p:sp>
+        <p:nvSpPr>
+          <p:cNvPr id="17" name="Shape 14"/>
+          <p:cNvSpPr/>
+          <p:nvPr/>
+        </p:nvSpPr>
+        <p:spPr>
+          <a:xfrm>
+            <a:off x="6510528" y="3291840"/>
+            <a:ext cx="384048" cy="384048"/>
+          </a:xfrm>
+          <a:prstGeom prst="ellipse">
+            <a:avLst/>
+          </a:prstGeom>
+          <a:solidFill>
+            <a:srgbClr val="1E2761"/>
+          </a:solidFill>
+          <a:ln/>
+        </p:spPr>
+      </p:sp>
+      <p:sp>
+        <p:nvSpPr>
+          <p:cNvPr id="18" name="Text 15"/>
+          <p:cNvSpPr/>
+          <p:nvPr/>
+        </p:nvSpPr>
+        <p:spPr>
+          <a:xfrm>
+            <a:off x="6510528" y="3291840"/>
+            <a:ext cx="384048" cy="384048"/>
+          </a:xfrm>
+          <a:prstGeom prst="rect">
+            <a:avLst/>
+          </a:prstGeom>
+          <a:noFill/>
+          <a:ln/>
+        </p:spPr>
+        <p:txBody>
+          <a:bodyPr wrap="square" lIns="0" tIns="0" rIns="0" bIns="0" rtlCol="0" anchor="ctr"/>
+          <a:lstStyle/>
+          <a:p>
+            <a:pPr algn="ctr" indent="0" marL="0">
+              <a:buNone/>
+            </a:pPr>
+            <a:r>
+              <a:rPr lang="en-US" sz="1500" b="1" dirty="0">
+                <a:solidFill>
+                  <a:srgbClr val="FFFFFF"/>
+                </a:solidFill>
+                <a:latin typeface="Calibri" pitchFamily="34" charset="0"/>
+                <a:ea typeface="Calibri" pitchFamily="34" charset="-122"/>
+                <a:cs typeface="Calibri" pitchFamily="34" charset="-120"/>
+              </a:rPr>
+              <a:t>3</a:t>
+            </a:r>
+            <a:endParaRPr lang="en-US" sz="1500" dirty="0"/>
+          </a:p>
+        </p:txBody>
+      </p:sp>
+      <p:sp>
+        <p:nvSpPr>
+          <p:cNvPr id="19" name="Text 16"/>
+          <p:cNvSpPr/>
+          <p:nvPr/>
+        </p:nvSpPr>
+        <p:spPr>
+          <a:xfrm>
+            <a:off x="7004304" y="3273552"/>
+            <a:ext cx="1828800" cy="256032"/>
+          </a:xfrm>
+          <a:prstGeom prst="rect">
+            <a:avLst/>
+          </a:prstGeom>
+          <a:noFill/>
+          <a:ln/>
+        </p:spPr>
+        <p:txBody>
+          <a:bodyPr wrap="square" lIns="0" tIns="0" rIns="0" bIns="0" rtlCol="0" anchor="ctr"/>
+          <a:lstStyle/>
+          <a:p>
+            <a:pPr indent="0" marL="0">
+              <a:buNone/>
+            </a:pPr>
+            <a:r>
+              <a:rPr lang="en-US" sz="1150" b="1" dirty="0">
+                <a:solidFill>
+                  <a:srgbClr val="1A1F2E"/>
+                </a:solidFill>
+                <a:latin typeface="Malgun Gothic" pitchFamily="34" charset="0"/>
+                <a:ea typeface="Malgun Gothic" pitchFamily="34" charset="-122"/>
+                <a:cs typeface="Malgun Gothic" pitchFamily="34" charset="-120"/>
+              </a:rPr>
+              <a:t>흡수도 A</a:t>
+            </a:r>
+            <a:endParaRPr lang="en-US" sz="1150" dirty="0"/>
+          </a:p>
+        </p:txBody>
+      </p:sp>
+      <p:sp>
+        <p:nvSpPr>
+          <p:cNvPr id="20" name="Text 17"/>
+          <p:cNvSpPr/>
+          <p:nvPr/>
+        </p:nvSpPr>
+        <p:spPr>
+          <a:xfrm>
+            <a:off x="7004304" y="3474720"/>
+            <a:ext cx="4297680" cy="237744"/>
+          </a:xfrm>
+          <a:prstGeom prst="rect">
+            <a:avLst/>
+          </a:prstGeom>
+          <a:noFill/>
+          <a:ln/>
+        </p:spPr>
+        <p:txBody>
+          <a:bodyPr wrap="square" lIns="0" tIns="0" rIns="0" bIns="0" rtlCol="0" anchor="ctr"/>
+          <a:lstStyle/>
+          <a:p>
+            <a:pPr indent="0" marL="0">
+              <a:buNone/>
+            </a:pPr>
+            <a:r>
+              <a:rPr lang="en-US" sz="950" dirty="0">
+                <a:solidFill>
+                  <a:srgbClr val="7A849C"/>
+                </a:solidFill>
+                <a:latin typeface="Calibri" pitchFamily="34" charset="0"/>
+                <a:ea typeface="Calibri" pitchFamily="34" charset="-122"/>
+                <a:cs typeface="Calibri" pitchFamily="34" charset="-120"/>
+              </a:rPr>
+              <a:t>1 − T − R, σ = 0.15 %p</a:t>
+            </a:r>
+            <a:endParaRPr lang="en-US" sz="950" dirty="0"/>
+          </a:p>
+        </p:txBody>
+      </p:sp>
+      <p:sp>
+        <p:nvSpPr>
+          <p:cNvPr id="21" name="Shape 18"/>
+          <p:cNvSpPr/>
+          <p:nvPr/>
+        </p:nvSpPr>
+        <p:spPr>
+          <a:xfrm>
+            <a:off x="6510528" y="3794760"/>
+            <a:ext cx="384048" cy="384048"/>
+          </a:xfrm>
+          <a:prstGeom prst="ellipse">
+            <a:avLst/>
+          </a:prstGeom>
+          <a:solidFill>
+            <a:srgbClr val="1E2761"/>
+          </a:solidFill>
+          <a:ln/>
+        </p:spPr>
+      </p:sp>
+      <p:sp>
+        <p:nvSpPr>
+          <p:cNvPr id="22" name="Text 19"/>
+          <p:cNvSpPr/>
+          <p:nvPr/>
+        </p:nvSpPr>
+        <p:spPr>
+          <a:xfrm>
+            <a:off x="6510528" y="3794760"/>
+            <a:ext cx="384048" cy="384048"/>
+          </a:xfrm>
+          <a:prstGeom prst="rect">
+            <a:avLst/>
+          </a:prstGeom>
+          <a:noFill/>
+          <a:ln/>
+        </p:spPr>
+        <p:txBody>
+          <a:bodyPr wrap="square" lIns="0" tIns="0" rIns="0" bIns="0" rtlCol="0" anchor="ctr"/>
+          <a:lstStyle/>
+          <a:p>
+            <a:pPr algn="ctr" indent="0" marL="0">
+              <a:buNone/>
+            </a:pPr>
+            <a:r>
+              <a:rPr lang="en-US" sz="1500" b="1" dirty="0">
+                <a:solidFill>
+                  <a:srgbClr val="FFFFFF"/>
+                </a:solidFill>
+                <a:latin typeface="Calibri" pitchFamily="34" charset="0"/>
+                <a:ea typeface="Calibri" pitchFamily="34" charset="-122"/>
+                <a:cs typeface="Calibri" pitchFamily="34" charset="-120"/>
+              </a:rPr>
+              <a:t>4</a:t>
+            </a:r>
+            <a:endParaRPr lang="en-US" sz="1500" dirty="0"/>
+          </a:p>
+        </p:txBody>
+      </p:sp>
+      <p:sp>
+        <p:nvSpPr>
+          <p:cNvPr id="23" name="Text 20"/>
+          <p:cNvSpPr/>
+          <p:nvPr/>
+        </p:nvSpPr>
+        <p:spPr>
+          <a:xfrm>
+            <a:off x="7004304" y="3776472"/>
+            <a:ext cx="1828800" cy="256032"/>
+          </a:xfrm>
+          <a:prstGeom prst="rect">
+            <a:avLst/>
+          </a:prstGeom>
+          <a:noFill/>
+          <a:ln/>
+        </p:spPr>
+        <p:txBody>
+          <a:bodyPr wrap="square" lIns="0" tIns="0" rIns="0" bIns="0" rtlCol="0" anchor="ctr"/>
+          <a:lstStyle/>
+          <a:p>
+            <a:pPr indent="0" marL="0">
+              <a:buNone/>
+            </a:pPr>
+            <a:r>
+              <a:rPr lang="en-US" sz="1150" b="1" dirty="0">
+                <a:solidFill>
+                  <a:srgbClr val="1A1F2E"/>
+                </a:solidFill>
+                <a:latin typeface="Malgun Gothic" pitchFamily="34" charset="0"/>
+                <a:ea typeface="Malgun Gothic" pitchFamily="34" charset="-122"/>
+                <a:cs typeface="Malgun Gothic" pitchFamily="34" charset="-120"/>
+              </a:rPr>
+              <a:t>면저항</a:t>
+            </a:r>
+            <a:endParaRPr lang="en-US" sz="1150" dirty="0"/>
+          </a:p>
+        </p:txBody>
+      </p:sp>
+      <p:sp>
+        <p:nvSpPr>
+          <p:cNvPr id="24" name="Text 21"/>
+          <p:cNvSpPr/>
+          <p:nvPr/>
+        </p:nvSpPr>
+        <p:spPr>
+          <a:xfrm>
+            <a:off x="7004304" y="3977640"/>
+            <a:ext cx="4297680" cy="237744"/>
+          </a:xfrm>
+          <a:prstGeom prst="rect">
+            <a:avLst/>
+          </a:prstGeom>
+          <a:noFill/>
+          <a:ln/>
+        </p:spPr>
+        <p:txBody>
+          <a:bodyPr wrap="square" lIns="0" tIns="0" rIns="0" bIns="0" rtlCol="0" anchor="ctr"/>
+          <a:lstStyle/>
+          <a:p>
+            <a:pPr indent="0" marL="0">
+              <a:buNone/>
+            </a:pPr>
+            <a:r>
+              <a:rPr lang="en-US" sz="950" dirty="0">
+                <a:solidFill>
+                  <a:srgbClr val="7A849C"/>
+                </a:solidFill>
+                <a:latin typeface="Calibri" pitchFamily="34" charset="0"/>
+                <a:ea typeface="Calibri" pitchFamily="34" charset="-122"/>
+                <a:cs typeface="Calibri" pitchFamily="34" charset="-120"/>
+              </a:rPr>
+              <a:t>15 시료, 4-point probe</a:t>
+            </a:r>
+            <a:endParaRPr lang="en-US" sz="950" dirty="0"/>
+          </a:p>
+        </p:txBody>
+      </p:sp>
+      <p:sp>
+        <p:nvSpPr>
+          <p:cNvPr id="25" name="Shape 22"/>
+          <p:cNvSpPr/>
+          <p:nvPr/>
+        </p:nvSpPr>
+        <p:spPr>
+          <a:xfrm>
+            <a:off x="6510528" y="4297680"/>
+            <a:ext cx="384048" cy="384048"/>
+          </a:xfrm>
+          <a:prstGeom prst="ellipse">
+            <a:avLst/>
+          </a:prstGeom>
+          <a:solidFill>
+            <a:srgbClr val="1E2761"/>
+          </a:solidFill>
+          <a:ln/>
+        </p:spPr>
+      </p:sp>
+      <p:sp>
+        <p:nvSpPr>
+          <p:cNvPr id="26" name="Text 23"/>
+          <p:cNvSpPr/>
+          <p:nvPr/>
+        </p:nvSpPr>
+        <p:spPr>
+          <a:xfrm>
+            <a:off x="6510528" y="4297680"/>
+            <a:ext cx="384048" cy="384048"/>
+          </a:xfrm>
+          <a:prstGeom prst="rect">
+            <a:avLst/>
+          </a:prstGeom>
+          <a:noFill/>
+          <a:ln/>
+        </p:spPr>
+        <p:txBody>
+          <a:bodyPr wrap="square" lIns="0" tIns="0" rIns="0" bIns="0" rtlCol="0" anchor="ctr"/>
+          <a:lstStyle/>
+          <a:p>
+            <a:pPr algn="ctr" indent="0" marL="0">
+              <a:buNone/>
+            </a:pPr>
+            <a:r>
+              <a:rPr lang="en-US" sz="1500" b="1" dirty="0">
+                <a:solidFill>
+                  <a:srgbClr val="FFFFFF"/>
+                </a:solidFill>
+                <a:latin typeface="Calibri" pitchFamily="34" charset="0"/>
+                <a:ea typeface="Calibri" pitchFamily="34" charset="-122"/>
+                <a:cs typeface="Calibri" pitchFamily="34" charset="-120"/>
+              </a:rPr>
+              <a:t>5</a:t>
+            </a:r>
+            <a:endParaRPr lang="en-US" sz="1500" dirty="0"/>
+          </a:p>
+        </p:txBody>
+      </p:sp>
+      <p:sp>
+        <p:nvSpPr>
+          <p:cNvPr id="27" name="Text 24"/>
+          <p:cNvSpPr/>
+          <p:nvPr/>
+        </p:nvSpPr>
+        <p:spPr>
+          <a:xfrm>
+            <a:off x="7004304" y="4279392"/>
+            <a:ext cx="1828800" cy="256032"/>
+          </a:xfrm>
+          <a:prstGeom prst="rect">
+            <a:avLst/>
+          </a:prstGeom>
+          <a:noFill/>
+          <a:ln/>
+        </p:spPr>
+        <p:txBody>
+          <a:bodyPr wrap="square" lIns="0" tIns="0" rIns="0" bIns="0" rtlCol="0" anchor="ctr"/>
+          <a:lstStyle/>
+          <a:p>
+            <a:pPr indent="0" marL="0">
+              <a:buNone/>
+            </a:pPr>
+            <a:r>
+              <a:rPr lang="en-US" sz="1150" b="1" dirty="0">
+                <a:solidFill>
+                  <a:srgbClr val="1A1F2E"/>
+                </a:solidFill>
+                <a:latin typeface="Malgun Gothic" pitchFamily="34" charset="0"/>
+                <a:ea typeface="Malgun Gothic" pitchFamily="34" charset="-122"/>
+                <a:cs typeface="Malgun Gothic" pitchFamily="34" charset="-120"/>
+              </a:rPr>
+              <a:t>추출 n, k</a:t>
+            </a:r>
+            <a:endParaRPr lang="en-US" sz="1150" dirty="0"/>
+          </a:p>
+        </p:txBody>
+      </p:sp>
+      <p:sp>
+        <p:nvSpPr>
+          <p:cNvPr id="28" name="Text 25"/>
+          <p:cNvSpPr/>
+          <p:nvPr/>
+        </p:nvSpPr>
+        <p:spPr>
+          <a:xfrm>
+            <a:off x="7004304" y="4480560"/>
+            <a:ext cx="4297680" cy="237744"/>
+          </a:xfrm>
+          <a:prstGeom prst="rect">
+            <a:avLst/>
+          </a:prstGeom>
+          <a:noFill/>
+          <a:ln/>
+        </p:spPr>
+        <p:txBody>
+          <a:bodyPr wrap="square" lIns="0" tIns="0" rIns="0" bIns="0" rtlCol="0" anchor="ctr"/>
+          <a:lstStyle/>
+          <a:p>
+            <a:pPr indent="0" marL="0">
+              <a:buNone/>
+            </a:pPr>
+            <a:r>
+              <a:rPr lang="en-US" sz="950" dirty="0">
+                <a:solidFill>
+                  <a:srgbClr val="7A849C"/>
+                </a:solidFill>
+                <a:latin typeface="Calibri" pitchFamily="34" charset="0"/>
+                <a:ea typeface="Calibri" pitchFamily="34" charset="-122"/>
+                <a:cs typeface="Calibri" pitchFamily="34" charset="-120"/>
+              </a:rPr>
+              <a:t>Ag 5·7·8 nm, 400–800 nm</a:t>
+            </a:r>
+            <a:endParaRPr lang="en-US" sz="950" dirty="0"/>
+          </a:p>
+        </p:txBody>
+      </p:sp>
+      <p:sp>
+        <p:nvSpPr>
+          <p:cNvPr id="29" name="Shape 26"/>
+          <p:cNvSpPr/>
+          <p:nvPr/>
+        </p:nvSpPr>
+        <p:spPr>
+          <a:xfrm>
+            <a:off x="6510528" y="4800600"/>
+            <a:ext cx="384048" cy="384048"/>
+          </a:xfrm>
+          <a:prstGeom prst="ellipse">
+            <a:avLst/>
+          </a:prstGeom>
+          <a:solidFill>
+            <a:srgbClr val="2EC4B6"/>
+          </a:solidFill>
+          <a:ln/>
+        </p:spPr>
+      </p:sp>
+      <p:sp>
+        <p:nvSpPr>
+          <p:cNvPr id="30" name="Text 27"/>
+          <p:cNvSpPr/>
+          <p:nvPr/>
+        </p:nvSpPr>
+        <p:spPr>
+          <a:xfrm>
+            <a:off x="6510528" y="4800600"/>
+            <a:ext cx="384048" cy="384048"/>
+          </a:xfrm>
+          <a:prstGeom prst="rect">
+            <a:avLst/>
+          </a:prstGeom>
+          <a:noFill/>
+          <a:ln/>
+        </p:spPr>
+        <p:txBody>
+          <a:bodyPr wrap="square" lIns="0" tIns="0" rIns="0" bIns="0" rtlCol="0" anchor="ctr"/>
+          <a:lstStyle/>
+          <a:p>
+            <a:pPr algn="ctr" indent="0" marL="0">
+              <a:buNone/>
+            </a:pPr>
+            <a:r>
+              <a:rPr lang="en-US" sz="1500" b="1" dirty="0">
+                <a:solidFill>
+                  <a:srgbClr val="FFFFFF"/>
+                </a:solidFill>
+                <a:latin typeface="Calibri" pitchFamily="34" charset="0"/>
+                <a:ea typeface="Calibri" pitchFamily="34" charset="-122"/>
+                <a:cs typeface="Calibri" pitchFamily="34" charset="-120"/>
+              </a:rPr>
+              <a:t>6</a:t>
+            </a:r>
+            <a:endParaRPr lang="en-US" sz="1500" dirty="0"/>
+          </a:p>
+        </p:txBody>
+      </p:sp>
+      <p:sp>
+        <p:nvSpPr>
+          <p:cNvPr id="31" name="Text 28"/>
+          <p:cNvSpPr/>
+          <p:nvPr/>
+        </p:nvSpPr>
+        <p:spPr>
+          <a:xfrm>
+            <a:off x="7004304" y="4782312"/>
+            <a:ext cx="1828800" cy="256032"/>
+          </a:xfrm>
+          <a:prstGeom prst="rect">
+            <a:avLst/>
+          </a:prstGeom>
+          <a:noFill/>
+          <a:ln/>
+        </p:spPr>
+        <p:txBody>
+          <a:bodyPr wrap="square" lIns="0" tIns="0" rIns="0" bIns="0" rtlCol="0" anchor="ctr"/>
+          <a:lstStyle/>
+          <a:p>
+            <a:pPr indent="0" marL="0">
+              <a:buNone/>
+            </a:pPr>
+            <a:r>
+              <a:rPr lang="en-US" sz="1150" b="1" dirty="0">
+                <a:solidFill>
+                  <a:srgbClr val="1A1F2E"/>
+                </a:solidFill>
+                <a:latin typeface="Malgun Gothic" pitchFamily="34" charset="0"/>
+                <a:ea typeface="Malgun Gothic" pitchFamily="34" charset="-122"/>
+                <a:cs typeface="Malgun Gothic" pitchFamily="34" charset="-120"/>
+              </a:rPr>
+              <a:t>DFT 결합에너지</a:t>
+            </a:r>
+            <a:endParaRPr lang="en-US" sz="1150" dirty="0"/>
+          </a:p>
+        </p:txBody>
+      </p:sp>
+      <p:sp>
+        <p:nvSpPr>
+          <p:cNvPr id="32" name="Text 29"/>
+          <p:cNvSpPr/>
+          <p:nvPr/>
+        </p:nvSpPr>
+        <p:spPr>
+          <a:xfrm>
+            <a:off x="7004304" y="4983480"/>
+            <a:ext cx="4297680" cy="237744"/>
+          </a:xfrm>
+          <a:prstGeom prst="rect">
+            <a:avLst/>
+          </a:prstGeom>
+          <a:noFill/>
+          <a:ln/>
+        </p:spPr>
+        <p:txBody>
+          <a:bodyPr wrap="square" lIns="0" tIns="0" rIns="0" bIns="0" rtlCol="0" anchor="ctr"/>
+          <a:lstStyle/>
+          <a:p>
+            <a:pPr indent="0" marL="0">
+              <a:buNone/>
+            </a:pPr>
+            <a:r>
+              <a:rPr lang="en-US" sz="950" dirty="0">
+                <a:solidFill>
+                  <a:srgbClr val="7A849C"/>
+                </a:solidFill>
+                <a:latin typeface="Calibri" pitchFamily="34" charset="0"/>
+                <a:ea typeface="Calibri" pitchFamily="34" charset="-122"/>
+                <a:cs typeface="Calibri" pitchFamily="34" charset="-120"/>
+              </a:rPr>
+              <a:t>seed 후보 20종</a:t>
+            </a:r>
+            <a:endParaRPr lang="en-US" sz="950" dirty="0"/>
+          </a:p>
+        </p:txBody>
+      </p:sp>
+      <p:sp>
+        <p:nvSpPr>
+          <p:cNvPr id="33" name="Shape 30"/>
+          <p:cNvSpPr/>
+          <p:nvPr/>
+        </p:nvSpPr>
+        <p:spPr>
+          <a:xfrm>
+            <a:off x="6510528" y="5303520"/>
+            <a:ext cx="384048" cy="384048"/>
+          </a:xfrm>
+          <a:prstGeom prst="ellipse">
+            <a:avLst/>
+          </a:prstGeom>
+          <a:solidFill>
+            <a:srgbClr val="2EC4B6"/>
+          </a:solidFill>
+          <a:ln/>
+        </p:spPr>
+      </p:sp>
+      <p:sp>
+        <p:nvSpPr>
+          <p:cNvPr id="34" name="Text 31"/>
+          <p:cNvSpPr/>
+          <p:nvPr/>
+        </p:nvSpPr>
+        <p:spPr>
+          <a:xfrm>
+            <a:off x="6510528" y="5303520"/>
+            <a:ext cx="384048" cy="384048"/>
+          </a:xfrm>
+          <a:prstGeom prst="rect">
+            <a:avLst/>
+          </a:prstGeom>
+          <a:noFill/>
+          <a:ln/>
+        </p:spPr>
+        <p:txBody>
+          <a:bodyPr wrap="square" lIns="0" tIns="0" rIns="0" bIns="0" rtlCol="0" anchor="ctr"/>
+          <a:lstStyle/>
+          <a:p>
+            <a:pPr algn="ctr" indent="0" marL="0">
+              <a:buNone/>
+            </a:pPr>
+            <a:r>
+              <a:rPr lang="en-US" sz="1500" b="1" dirty="0">
+                <a:solidFill>
+                  <a:srgbClr val="FFFFFF"/>
+                </a:solidFill>
+                <a:latin typeface="Calibri" pitchFamily="34" charset="0"/>
+                <a:ea typeface="Calibri" pitchFamily="34" charset="-122"/>
+                <a:cs typeface="Calibri" pitchFamily="34" charset="-120"/>
+              </a:rPr>
+              <a:t>7</a:t>
+            </a:r>
+            <a:endParaRPr lang="en-US" sz="1500" dirty="0"/>
+          </a:p>
+        </p:txBody>
+      </p:sp>
+      <p:sp>
+        <p:nvSpPr>
+          <p:cNvPr id="35" name="Text 32"/>
+          <p:cNvSpPr/>
+          <p:nvPr/>
+        </p:nvSpPr>
+        <p:spPr>
+          <a:xfrm>
+            <a:off x="7004304" y="5285232"/>
+            <a:ext cx="1828800" cy="256032"/>
+          </a:xfrm>
+          <a:prstGeom prst="rect">
+            <a:avLst/>
+          </a:prstGeom>
+          <a:noFill/>
+          <a:ln/>
+        </p:spPr>
+        <p:txBody>
+          <a:bodyPr wrap="square" lIns="0" tIns="0" rIns="0" bIns="0" rtlCol="0" anchor="ctr"/>
+          <a:lstStyle/>
+          <a:p>
+            <a:pPr indent="0" marL="0">
+              <a:buNone/>
+            </a:pPr>
+            <a:r>
+              <a:rPr lang="en-US" sz="1150" b="1" dirty="0">
+                <a:solidFill>
+                  <a:srgbClr val="1A1F2E"/>
+                </a:solidFill>
+                <a:latin typeface="Malgun Gothic" pitchFamily="34" charset="0"/>
+                <a:ea typeface="Malgun Gothic" pitchFamily="34" charset="-122"/>
+                <a:cs typeface="Malgun Gothic" pitchFamily="34" charset="-120"/>
+              </a:rPr>
+              <a:t>소자 광학 모델</a:t>
+            </a:r>
+            <a:endParaRPr lang="en-US" sz="1150" dirty="0"/>
+          </a:p>
+        </p:txBody>
+      </p:sp>
+      <p:sp>
+        <p:nvSpPr>
+          <p:cNvPr id="36" name="Text 33"/>
+          <p:cNvSpPr/>
+          <p:nvPr/>
+        </p:nvSpPr>
+        <p:spPr>
+          <a:xfrm>
+            <a:off x="7004304" y="5486400"/>
+            <a:ext cx="4297680" cy="237744"/>
+          </a:xfrm>
+          <a:prstGeom prst="rect">
+            <a:avLst/>
+          </a:prstGeom>
+          <a:noFill/>
+          <a:ln/>
+        </p:spPr>
+        <p:txBody>
+          <a:bodyPr wrap="square" lIns="0" tIns="0" rIns="0" bIns="0" rtlCol="0" anchor="ctr"/>
+          <a:lstStyle/>
+          <a:p>
+            <a:pPr indent="0" marL="0">
+              <a:buNone/>
+            </a:pPr>
+            <a:r>
+              <a:rPr lang="en-US" sz="950" dirty="0">
+                <a:solidFill>
+                  <a:srgbClr val="7A849C"/>
+                </a:solidFill>
+                <a:latin typeface="Calibri" pitchFamily="34" charset="0"/>
+                <a:ea typeface="Calibri" pitchFamily="34" charset="-122"/>
+                <a:cs typeface="Calibri" pitchFamily="34" charset="-120"/>
+              </a:rPr>
+              <a:t>TMM + MLA 재순환</a:t>
+            </a:r>
+            <a:endParaRPr lang="en-US" sz="950" dirty="0"/>
+          </a:p>
+        </p:txBody>
+      </p:sp>
     </p:spTree>
   </p:cSld>
   <p:clrMapOvr>
@@ -11488,7 +12981,7 @@
                 <a:ea typeface="Malgun Gothic" pitchFamily="34" charset="-122"/>
                 <a:cs typeface="Malgun Gothic" pitchFamily="34" charset="-120"/>
               </a:rPr>
-              <a:t>추출된 광학상수 — 벌크 은에 근접</a:t>
+              <a:t>흡수 스펙트럼 — seed가 만드는 차이</a:t>
             </a:r>
             <a:endParaRPr lang="en-US" sz="3200" dirty="0"/>
           </a:p>
@@ -11527,7 +13020,7 @@
                 <a:ea typeface="Malgun Gothic" pitchFamily="34" charset="-122"/>
                 <a:cs typeface="Malgun Gothic" pitchFamily="34" charset="-120"/>
               </a:rPr>
-              <a:t>T·R 파장별 역산. k는 벌크와 거의 같고, 차이는 전부 n 에 있다</a:t>
+              <a:t>glass / seed 5 nm / Ag, 절대 T·R 로부터 A = 1 − T − R</a:t>
             </a:r>
             <a:endParaRPr lang="en-US" sz="1400" dirty="0"/>
           </a:p>
@@ -11542,7 +13035,7 @@
         <p:spPr>
           <a:xfrm>
             <a:off x="566928" y="1691640"/>
-            <a:ext cx="5669280" cy="4160520"/>
+            <a:ext cx="11064240" cy="4160520"/>
           </a:xfrm>
           <a:prstGeom prst="roundRect">
             <a:avLst>
@@ -11562,54 +13055,15 @@
           </a:effectLst>
         </p:spPr>
       </p:sp>
-      <p:sp>
-        <p:nvSpPr>
-          <p:cNvPr id="5" name="Text 3"/>
-          <p:cNvSpPr/>
-          <p:nvPr/>
-        </p:nvSpPr>
-        <p:spPr>
-          <a:xfrm>
-            <a:off x="868680" y="1874520"/>
-            <a:ext cx="5120640" cy="292608"/>
-          </a:xfrm>
-          <a:prstGeom prst="rect">
-            <a:avLst/>
-          </a:prstGeom>
-          <a:noFill/>
-          <a:ln/>
-        </p:spPr>
-        <p:txBody>
-          <a:bodyPr wrap="square" lIns="0" tIns="0" rIns="0" bIns="0" rtlCol="0" anchor="ctr"/>
-          <a:lstStyle/>
-          <a:p>
-            <a:pPr indent="0" marL="0">
-              <a:buNone/>
-            </a:pPr>
-            <a:r>
-              <a:rPr lang="en-US" sz="1350" b="1" dirty="0">
-                <a:solidFill>
-                  <a:srgbClr val="1A1F2E"/>
-                </a:solidFill>
-                <a:latin typeface="Malgun Gothic" pitchFamily="34" charset="0"/>
-                <a:ea typeface="Malgun Gothic" pitchFamily="34" charset="-122"/>
-                <a:cs typeface="Malgun Gothic" pitchFamily="34" charset="-120"/>
-              </a:rPr>
-              <a:t>n (550 nm 부근)</a:t>
-            </a:r>
-            <a:endParaRPr lang="en-US" sz="1350" dirty="0"/>
-          </a:p>
-        </p:txBody>
-      </p:sp>
       <p:graphicFrame>
         <p:nvGraphicFramePr>
-          <p:cNvPr id="6" name="Chart 0" descr=""/>
+          <p:cNvPr id="5" name="Chart 0" descr=""/>
           <p:cNvGraphicFramePr/>
           <p:nvPr/>
         </p:nvGraphicFramePr>
         <p:xfrm>
-          <a:off x="868680" y="2212848"/>
-          <a:ext cx="5120640" cy="1691640"/>
+          <a:off x="868680" y="2011680"/>
+          <a:ext cx="10469880" cy="3657600"/>
         </p:xfrm>
         <a:graphic xmlns:a="http://schemas.openxmlformats.org/drawingml/2006/main">
           <a:graphicData uri="http://schemas.openxmlformats.org/drawingml/2006/chart">
@@ -11617,206 +13071,6 @@
           </a:graphicData>
         </a:graphic>
       </p:graphicFrame>
-      <p:sp>
-        <p:nvSpPr>
-          <p:cNvPr id="7" name="Text 4"/>
-          <p:cNvSpPr/>
-          <p:nvPr/>
-        </p:nvSpPr>
-        <p:spPr>
-          <a:xfrm>
-            <a:off x="868680" y="3977640"/>
-            <a:ext cx="5120640" cy="292608"/>
-          </a:xfrm>
-          <a:prstGeom prst="rect">
-            <a:avLst/>
-          </a:prstGeom>
-          <a:noFill/>
-          <a:ln/>
-        </p:spPr>
-        <p:txBody>
-          <a:bodyPr wrap="square" lIns="0" tIns="0" rIns="0" bIns="0" rtlCol="0" anchor="ctr"/>
-          <a:lstStyle/>
-          <a:p>
-            <a:pPr indent="0" marL="0">
-              <a:buNone/>
-            </a:pPr>
-            <a:r>
-              <a:rPr lang="en-US" sz="1350" b="1" dirty="0">
-                <a:solidFill>
-                  <a:srgbClr val="1A1F2E"/>
-                </a:solidFill>
-                <a:latin typeface="Malgun Gothic" pitchFamily="34" charset="0"/>
-                <a:ea typeface="Malgun Gothic" pitchFamily="34" charset="-122"/>
-                <a:cs typeface="Malgun Gothic" pitchFamily="34" charset="-120"/>
-              </a:rPr>
-              <a:t>k (전 파장)</a:t>
-            </a:r>
-            <a:endParaRPr lang="en-US" sz="1350" dirty="0"/>
-          </a:p>
-        </p:txBody>
-      </p:sp>
-      <p:graphicFrame>
-        <p:nvGraphicFramePr>
-          <p:cNvPr id="8" name="Chart 1" descr=""/>
-          <p:cNvGraphicFramePr/>
-          <p:nvPr/>
-        </p:nvGraphicFramePr>
-        <p:xfrm>
-          <a:off x="868680" y="4297680"/>
-          <a:ext cx="5120640" cy="1371600"/>
-        </p:xfrm>
-        <a:graphic xmlns:a="http://schemas.openxmlformats.org/drawingml/2006/main">
-          <a:graphicData uri="http://schemas.openxmlformats.org/drawingml/2006/chart">
-            <c:chart xmlns:c="http://schemas.openxmlformats.org/drawingml/2006/chart" r:id="rId2"/>
-          </a:graphicData>
-        </a:graphic>
-      </p:graphicFrame>
-      <p:sp>
-        <p:nvSpPr>
-          <p:cNvPr id="9" name="Shape 5"/>
-          <p:cNvSpPr/>
-          <p:nvPr/>
-        </p:nvSpPr>
-        <p:spPr>
-          <a:xfrm>
-            <a:off x="6492240" y="1691640"/>
-            <a:ext cx="5138928" cy="4160520"/>
-          </a:xfrm>
-          <a:prstGeom prst="roundRect">
-            <a:avLst>
-              <a:gd name="adj" fmla="val 1319"/>
-            </a:avLst>
-          </a:prstGeom>
-          <a:solidFill>
-            <a:srgbClr val="FFFFFF"/>
-          </a:solidFill>
-          <a:ln/>
-          <a:effectLst>
-            <a:outerShdw sx="100000" sy="100000" kx="0" ky="0" algn="bl" rotWithShape="0" blurRad="114300" dist="12700" dir="5400000">
-              <a:srgbClr val="9AA5BC">
-                <a:alpha val="22000"/>
-              </a:srgbClr>
-            </a:outerShdw>
-          </a:effectLst>
-        </p:spPr>
-      </p:sp>
-      <p:sp>
-        <p:nvSpPr>
-          <p:cNvPr id="10" name="Text 6"/>
-          <p:cNvSpPr/>
-          <p:nvPr/>
-        </p:nvSpPr>
-        <p:spPr>
-          <a:xfrm>
-            <a:off x="6784848" y="1874520"/>
-            <a:ext cx="4572000" cy="292608"/>
-          </a:xfrm>
-          <a:prstGeom prst="rect">
-            <a:avLst/>
-          </a:prstGeom>
-          <a:noFill/>
-          <a:ln/>
-        </p:spPr>
-        <p:txBody>
-          <a:bodyPr wrap="square" lIns="0" tIns="0" rIns="0" bIns="0" rtlCol="0" anchor="ctr"/>
-          <a:lstStyle/>
-          <a:p>
-            <a:pPr indent="0" marL="0">
-              <a:buNone/>
-            </a:pPr>
-            <a:r>
-              <a:rPr lang="en-US" sz="1350" b="1" dirty="0">
-                <a:solidFill>
-                  <a:srgbClr val="1A1F2E"/>
-                </a:solidFill>
-                <a:latin typeface="Malgun Gothic" pitchFamily="34" charset="0"/>
-                <a:ea typeface="Malgun Gothic" pitchFamily="34" charset="-122"/>
-                <a:cs typeface="Malgun Gothic" pitchFamily="34" charset="-120"/>
-              </a:rPr>
-              <a:t>ε₁ — 금속성의 지표</a:t>
-            </a:r>
-            <a:endParaRPr lang="en-US" sz="1350" dirty="0"/>
-          </a:p>
-        </p:txBody>
-      </p:sp>
-      <p:graphicFrame>
-        <p:nvGraphicFramePr>
-          <p:cNvPr id="11" name="Chart 2" descr=""/>
-          <p:cNvGraphicFramePr/>
-          <p:nvPr/>
-        </p:nvGraphicFramePr>
-        <p:xfrm>
-          <a:off x="6784848" y="2212848"/>
-          <a:ext cx="4572000" cy="2651760"/>
-        </p:xfrm>
-        <a:graphic xmlns:a="http://schemas.openxmlformats.org/drawingml/2006/main">
-          <a:graphicData uri="http://schemas.openxmlformats.org/drawingml/2006/chart">
-            <c:chart xmlns:c="http://schemas.openxmlformats.org/drawingml/2006/chart" r:id="rId3"/>
-          </a:graphicData>
-        </a:graphic>
-      </p:graphicFrame>
-      <p:sp>
-        <p:nvSpPr>
-          <p:cNvPr id="12" name="Shape 7"/>
-          <p:cNvSpPr/>
-          <p:nvPr/>
-        </p:nvSpPr>
-        <p:spPr>
-          <a:xfrm>
-            <a:off x="6784848" y="4983480"/>
-            <a:ext cx="4572000" cy="713232"/>
-          </a:xfrm>
-          <a:prstGeom prst="roundRect">
-            <a:avLst>
-              <a:gd name="adj" fmla="val 7692"/>
-            </a:avLst>
-          </a:prstGeom>
-          <a:solidFill>
-            <a:srgbClr val="E8F7F5"/>
-          </a:solidFill>
-          <a:ln/>
-        </p:spPr>
-      </p:sp>
-      <p:sp>
-        <p:nvSpPr>
-          <p:cNvPr id="13" name="Text 8"/>
-          <p:cNvSpPr/>
-          <p:nvPr/>
-        </p:nvSpPr>
-        <p:spPr>
-          <a:xfrm>
-            <a:off x="6949440" y="4983480"/>
-            <a:ext cx="4242816" cy="713232"/>
-          </a:xfrm>
-          <a:prstGeom prst="rect">
-            <a:avLst/>
-          </a:prstGeom>
-          <a:noFill/>
-          <a:ln/>
-        </p:spPr>
-        <p:txBody>
-          <a:bodyPr wrap="square" lIns="0" tIns="0" rIns="0" bIns="0" rtlCol="0" anchor="ctr"/>
-          <a:lstStyle/>
-          <a:p>
-            <a:pPr indent="0" marL="0">
-              <a:buNone/>
-            </a:pPr>
-            <a:r>
-              <a:rPr lang="en-US" sz="1100" b="1" dirty="0">
-                <a:solidFill>
-                  <a:srgbClr val="0E8074"/>
-                </a:solidFill>
-                <a:latin typeface="Malgun Gothic" pitchFamily="34" charset="0"/>
-                <a:ea typeface="Malgun Gothic" pitchFamily="34" charset="-122"/>
-                <a:cs typeface="Malgun Gothic" pitchFamily="34" charset="-120"/>
-              </a:rPr>
-              <a:t>벌크 은 ε₁ = -13.03  ·  HATCN 위 Ag 는 4 nm 부터 오차 8 % 이내</a:t>
-            </a:r>
-            <a:endParaRPr lang="en-US" sz="1100" dirty="0"/>
-          </a:p>
-        </p:txBody>
-      </p:sp>
     </p:spTree>
   </p:cSld>
   <p:clrMapOvr>
@@ -11882,7 +13136,7 @@
                 <a:ea typeface="Malgun Gothic" pitchFamily="34" charset="-122"/>
                 <a:cs typeface="Malgun Gothic" pitchFamily="34" charset="-120"/>
               </a:rPr>
-              <a:t>닫힘 두께 — 두 독립 측정이 일치한다</a:t>
+              <a:t>추출된 광학상수 — 벌크 은에 근접</a:t>
             </a:r>
             <a:endParaRPr lang="en-US" sz="3200" dirty="0"/>
           </a:p>
@@ -11921,7 +13175,7 @@
                 <a:ea typeface="Malgun Gothic" pitchFamily="34" charset="-122"/>
                 <a:cs typeface="Malgun Gothic" pitchFamily="34" charset="-120"/>
               </a:rPr>
-              <a:t>전기(면저항)와 광학(흡수)이 서로를 모른 채 같은 답을 준다</a:t>
+              <a:t>T·R 파장별 역산. k는 벌크와 거의 같고, 차이는 전부 n 에 있다</a:t>
             </a:r>
             <a:endParaRPr lang="en-US" sz="1400" dirty="0"/>
           </a:p>
@@ -11936,7 +13190,7 @@
         <p:spPr>
           <a:xfrm>
             <a:off x="566928" y="1691640"/>
-            <a:ext cx="5349240" cy="4160520"/>
+            <a:ext cx="5669280" cy="4160520"/>
           </a:xfrm>
           <a:prstGeom prst="roundRect">
             <a:avLst>
@@ -11965,7 +13219,7 @@
         <p:spPr>
           <a:xfrm>
             <a:off x="868680" y="1874520"/>
-            <a:ext cx="4800600" cy="457200"/>
+            <a:ext cx="5120640" cy="292608"/>
           </a:xfrm>
           <a:prstGeom prst="rect">
             <a:avLst/>
@@ -11981,7 +13235,7 @@
               <a:buNone/>
             </a:pPr>
             <a:r>
-              <a:rPr lang="en-US" sz="1200" b="1" dirty="0">
+              <a:rPr lang="en-US" sz="1350" b="1" dirty="0">
                 <a:solidFill>
                   <a:srgbClr val="1A1F2E"/>
                 </a:solidFill>
@@ -11989,9 +13243,9 @@
                 <a:ea typeface="Malgun Gothic" pitchFamily="34" charset="-122"/>
                 <a:cs typeface="Malgun Gothic" pitchFamily="34" charset="-120"/>
               </a:rPr>
-              <a:t>① 전기 — 닫힌 막의 ρ = ρ₀ + C/d 선에서 벗어나는 지점</a:t>
-            </a:r>
-            <a:endParaRPr lang="en-US" sz="1200" dirty="0"/>
+              <a:t>n (550 nm 부근)</a:t>
+            </a:r>
+            <a:endParaRPr lang="en-US" sz="1350" dirty="0"/>
           </a:p>
         </p:txBody>
       </p:sp>
@@ -12002,8 +13256,8 @@
           <p:nvPr/>
         </p:nvGraphicFramePr>
         <p:xfrm>
-          <a:off x="868680" y="2395728"/>
-          <a:ext cx="4800600" cy="3200400"/>
+          <a:off x="868680" y="2212848"/>
+          <a:ext cx="5120640" cy="1691640"/>
         </p:xfrm>
         <a:graphic xmlns:a="http://schemas.openxmlformats.org/drawingml/2006/main">
           <a:graphicData uri="http://schemas.openxmlformats.org/drawingml/2006/chart">
@@ -12013,14 +13267,69 @@
       </p:graphicFrame>
       <p:sp>
         <p:nvSpPr>
-          <p:cNvPr id="7" name="Shape 4"/>
-          <p:cNvSpPr/>
-          <p:nvPr/>
-        </p:nvSpPr>
-        <p:spPr>
-          <a:xfrm>
-            <a:off x="6172200" y="1691640"/>
-            <a:ext cx="5458968" cy="4160520"/>
+          <p:cNvPr id="7" name="Text 4"/>
+          <p:cNvSpPr/>
+          <p:nvPr/>
+        </p:nvSpPr>
+        <p:spPr>
+          <a:xfrm>
+            <a:off x="868680" y="3977640"/>
+            <a:ext cx="5120640" cy="292608"/>
+          </a:xfrm>
+          <a:prstGeom prst="rect">
+            <a:avLst/>
+          </a:prstGeom>
+          <a:noFill/>
+          <a:ln/>
+        </p:spPr>
+        <p:txBody>
+          <a:bodyPr wrap="square" lIns="0" tIns="0" rIns="0" bIns="0" rtlCol="0" anchor="ctr"/>
+          <a:lstStyle/>
+          <a:p>
+            <a:pPr indent="0" marL="0">
+              <a:buNone/>
+            </a:pPr>
+            <a:r>
+              <a:rPr lang="en-US" sz="1350" b="1" dirty="0">
+                <a:solidFill>
+                  <a:srgbClr val="1A1F2E"/>
+                </a:solidFill>
+                <a:latin typeface="Malgun Gothic" pitchFamily="34" charset="0"/>
+                <a:ea typeface="Malgun Gothic" pitchFamily="34" charset="-122"/>
+                <a:cs typeface="Malgun Gothic" pitchFamily="34" charset="-120"/>
+              </a:rPr>
+              <a:t>k (전 파장)</a:t>
+            </a:r>
+            <a:endParaRPr lang="en-US" sz="1350" dirty="0"/>
+          </a:p>
+        </p:txBody>
+      </p:sp>
+      <p:graphicFrame>
+        <p:nvGraphicFramePr>
+          <p:cNvPr id="8" name="Chart 1" descr=""/>
+          <p:cNvGraphicFramePr/>
+          <p:nvPr/>
+        </p:nvGraphicFramePr>
+        <p:xfrm>
+          <a:off x="868680" y="4297680"/>
+          <a:ext cx="5120640" cy="1371600"/>
+        </p:xfrm>
+        <a:graphic xmlns:a="http://schemas.openxmlformats.org/drawingml/2006/main">
+          <a:graphicData uri="http://schemas.openxmlformats.org/drawingml/2006/chart">
+            <c:chart xmlns:c="http://schemas.openxmlformats.org/drawingml/2006/chart" r:id="rId2"/>
+          </a:graphicData>
+        </a:graphic>
+      </p:graphicFrame>
+      <p:sp>
+        <p:nvSpPr>
+          <p:cNvPr id="9" name="Shape 5"/>
+          <p:cNvSpPr/>
+          <p:nvPr/>
+        </p:nvSpPr>
+        <p:spPr>
+          <a:xfrm>
+            <a:off x="6492240" y="1691640"/>
+            <a:ext cx="5138928" cy="4160520"/>
           </a:xfrm>
           <a:prstGeom prst="roundRect">
             <a:avLst>
@@ -12042,14 +13351,14 @@
       </p:sp>
       <p:sp>
         <p:nvSpPr>
-          <p:cNvPr id="8" name="Text 5"/>
-          <p:cNvSpPr/>
-          <p:nvPr/>
-        </p:nvSpPr>
-        <p:spPr>
-          <a:xfrm>
-            <a:off x="6464808" y="1874520"/>
-            <a:ext cx="4892040" cy="292608"/>
+          <p:cNvPr id="10" name="Text 6"/>
+          <p:cNvSpPr/>
+          <p:nvPr/>
+        </p:nvSpPr>
+        <p:spPr>
+          <a:xfrm>
+            <a:off x="6784848" y="1874520"/>
+            <a:ext cx="4572000" cy="292608"/>
           </a:xfrm>
           <a:prstGeom prst="rect">
             <a:avLst/>
@@ -12065,7 +13374,7 @@
               <a:buNone/>
             </a:pPr>
             <a:r>
-              <a:rPr lang="en-US" sz="1200" b="1" dirty="0">
+              <a:rPr lang="en-US" sz="1350" b="1" dirty="0">
                 <a:solidFill>
                   <a:srgbClr val="1A1F2E"/>
                 </a:solidFill>
@@ -12073,38 +13382,60 @@
                 <a:ea typeface="Malgun Gothic" pitchFamily="34" charset="-122"/>
                 <a:cs typeface="Malgun Gothic" pitchFamily="34" charset="-120"/>
               </a:rPr>
-              <a:t>② 광학 — 흡수도의 계단</a:t>
-            </a:r>
-            <a:endParaRPr lang="en-US" sz="1200" dirty="0"/>
+              <a:t>ε₁ — 금속성의 지표</a:t>
+            </a:r>
+            <a:endParaRPr lang="en-US" sz="1350" dirty="0"/>
           </a:p>
         </p:txBody>
       </p:sp>
       <p:graphicFrame>
         <p:nvGraphicFramePr>
-          <p:cNvPr id="9" name="Chart 1" descr=""/>
+          <p:cNvPr id="11" name="Chart 2" descr=""/>
           <p:cNvGraphicFramePr/>
           <p:nvPr/>
         </p:nvGraphicFramePr>
         <p:xfrm>
-          <a:off x="6464808" y="2212848"/>
-          <a:ext cx="4892040" cy="2331720"/>
+          <a:off x="6784848" y="2212848"/>
+          <a:ext cx="4572000" cy="2651760"/>
         </p:xfrm>
         <a:graphic xmlns:a="http://schemas.openxmlformats.org/drawingml/2006/main">
           <a:graphicData uri="http://schemas.openxmlformats.org/drawingml/2006/chart">
-            <c:chart xmlns:c="http://schemas.openxmlformats.org/drawingml/2006/chart" r:id="rId2"/>
+            <c:chart xmlns:c="http://schemas.openxmlformats.org/drawingml/2006/chart" r:id="rId3"/>
           </a:graphicData>
         </a:graphic>
       </p:graphicFrame>
       <p:sp>
         <p:nvSpPr>
-          <p:cNvPr id="10" name="Text 6"/>
-          <p:cNvSpPr/>
-          <p:nvPr/>
-        </p:nvSpPr>
-        <p:spPr>
-          <a:xfrm>
-            <a:off x="6464808" y="4617720"/>
-            <a:ext cx="4892040" cy="457200"/>
+          <p:cNvPr id="12" name="Shape 7"/>
+          <p:cNvSpPr/>
+          <p:nvPr/>
+        </p:nvSpPr>
+        <p:spPr>
+          <a:xfrm>
+            <a:off x="6784848" y="4983480"/>
+            <a:ext cx="4572000" cy="713232"/>
+          </a:xfrm>
+          <a:prstGeom prst="roundRect">
+            <a:avLst>
+              <a:gd name="adj" fmla="val 7692"/>
+            </a:avLst>
+          </a:prstGeom>
+          <a:solidFill>
+            <a:srgbClr val="E8F7F5"/>
+          </a:solidFill>
+          <a:ln/>
+        </p:spPr>
+      </p:sp>
+      <p:sp>
+        <p:nvSpPr>
+          <p:cNvPr id="13" name="Text 8"/>
+          <p:cNvSpPr/>
+          <p:nvPr/>
+        </p:nvSpPr>
+        <p:spPr>
+          <a:xfrm>
+            <a:off x="6949440" y="4983480"/>
+            <a:ext cx="4242816" cy="713232"/>
           </a:xfrm>
           <a:prstGeom prst="rect">
             <a:avLst/>
@@ -12120,156 +13451,17 @@
               <a:buNone/>
             </a:pPr>
             <a:r>
-              <a:rPr lang="en-US" sz="1050" dirty="0">
-                <a:solidFill>
-                  <a:srgbClr val="7A849C"/>
+              <a:rPr lang="en-US" sz="1100" b="1" dirty="0">
+                <a:solidFill>
+                  <a:srgbClr val="0E8074"/>
                 </a:solidFill>
                 <a:latin typeface="Malgun Gothic" pitchFamily="34" charset="0"/>
                 <a:ea typeface="Malgun Gothic" pitchFamily="34" charset="-122"/>
                 <a:cs typeface="Malgun Gothic" pitchFamily="34" charset="-120"/>
               </a:rPr>
-              <a:t>MoOx 는 4–6 nm 에서 28 % 평평 → 7 nm 에서 23 % 로 계단.  HATCN 은 4 nm 부터 단조 감소.</a:t>
-            </a:r>
-            <a:endParaRPr lang="en-US" sz="1050" dirty="0"/>
-          </a:p>
-          <a:p>
-            <a:pPr indent="0" marL="0">
-              <a:buNone/>
-            </a:pPr>
-            <a:r>
-              <a:rPr lang="en-US" sz="1050" dirty="0">
-                <a:solidFill>
-                  <a:srgbClr val="7A849C"/>
-                </a:solidFill>
-                <a:latin typeface="Malgun Gothic" pitchFamily="34" charset="0"/>
-                <a:ea typeface="Malgun Gothic" pitchFamily="34" charset="-122"/>
-                <a:cs typeface="Malgun Gothic" pitchFamily="34" charset="-120"/>
-              </a:rPr>
-              <a:t>※ MoOx 12 nm 은 반사도 파일 결측.</a:t>
-            </a:r>
-            <a:endParaRPr lang="en-US" sz="1050" dirty="0"/>
-          </a:p>
-        </p:txBody>
-      </p:sp>
-      <p:sp>
-        <p:nvSpPr>
-          <p:cNvPr id="11" name="Shape 7"/>
-          <p:cNvSpPr/>
-          <p:nvPr/>
-        </p:nvSpPr>
-        <p:spPr>
-          <a:xfrm>
-            <a:off x="6464808" y="5120640"/>
-            <a:ext cx="2331720" cy="685800"/>
-          </a:xfrm>
-          <a:prstGeom prst="roundRect">
-            <a:avLst>
-              <a:gd name="adj" fmla="val 8000"/>
-            </a:avLst>
-          </a:prstGeom>
-          <a:solidFill>
-            <a:srgbClr val="E8F7F5"/>
-          </a:solidFill>
-          <a:ln/>
-        </p:spPr>
-      </p:sp>
-      <p:sp>
-        <p:nvSpPr>
-          <p:cNvPr id="12" name="Text 8"/>
-          <p:cNvSpPr/>
-          <p:nvPr/>
-        </p:nvSpPr>
-        <p:spPr>
-          <a:xfrm>
-            <a:off x="6464808" y="5120640"/>
-            <a:ext cx="2331720" cy="685800"/>
-          </a:xfrm>
-          <a:prstGeom prst="rect">
-            <a:avLst/>
-          </a:prstGeom>
-          <a:noFill/>
-          <a:ln/>
-        </p:spPr>
-        <p:txBody>
-          <a:bodyPr wrap="square" lIns="0" tIns="0" rIns="0" bIns="0" rtlCol="0" anchor="ctr"/>
-          <a:lstStyle/>
-          <a:p>
-            <a:pPr algn="ctr" indent="0" marL="0">
-              <a:buNone/>
-            </a:pPr>
-            <a:r>
-              <a:rPr lang="en-US" sz="1500" b="1" dirty="0">
-                <a:solidFill>
-                  <a:srgbClr val="0E8074"/>
-                </a:solidFill>
-                <a:latin typeface="Malgun Gothic" pitchFamily="34" charset="0"/>
-                <a:ea typeface="Malgun Gothic" pitchFamily="34" charset="-122"/>
-                <a:cs typeface="Malgun Gothic" pitchFamily="34" charset="-120"/>
-              </a:rPr>
-              <a:t>HATCN  5 nm</a:t>
-            </a:r>
-            <a:endParaRPr lang="en-US" sz="1500" dirty="0"/>
-          </a:p>
-        </p:txBody>
-      </p:sp>
-      <p:sp>
-        <p:nvSpPr>
-          <p:cNvPr id="13" name="Shape 9"/>
-          <p:cNvSpPr/>
-          <p:nvPr/>
-        </p:nvSpPr>
-        <p:spPr>
-          <a:xfrm>
-            <a:off x="9025128" y="5120640"/>
-            <a:ext cx="2331720" cy="685800"/>
-          </a:xfrm>
-          <a:prstGeom prst="roundRect">
-            <a:avLst>
-              <a:gd name="adj" fmla="val 8000"/>
-            </a:avLst>
-          </a:prstGeom>
-          <a:solidFill>
-            <a:srgbClr val="FFF1EC"/>
-          </a:solidFill>
-          <a:ln/>
-        </p:spPr>
-      </p:sp>
-      <p:sp>
-        <p:nvSpPr>
-          <p:cNvPr id="14" name="Text 10"/>
-          <p:cNvSpPr/>
-          <p:nvPr/>
-        </p:nvSpPr>
-        <p:spPr>
-          <a:xfrm>
-            <a:off x="9025128" y="5120640"/>
-            <a:ext cx="2331720" cy="685800"/>
-          </a:xfrm>
-          <a:prstGeom prst="rect">
-            <a:avLst/>
-          </a:prstGeom>
-          <a:noFill/>
-          <a:ln/>
-        </p:spPr>
-        <p:txBody>
-          <a:bodyPr wrap="square" lIns="0" tIns="0" rIns="0" bIns="0" rtlCol="0" anchor="ctr"/>
-          <a:lstStyle/>
-          <a:p>
-            <a:pPr algn="ctr" indent="0" marL="0">
-              <a:buNone/>
-            </a:pPr>
-            <a:r>
-              <a:rPr lang="en-US" sz="1500" b="1" dirty="0">
-                <a:solidFill>
-                  <a:srgbClr val="FF6B35"/>
-                </a:solidFill>
-                <a:latin typeface="Malgun Gothic" pitchFamily="34" charset="0"/>
-                <a:ea typeface="Malgun Gothic" pitchFamily="34" charset="-122"/>
-                <a:cs typeface="Malgun Gothic" pitchFamily="34" charset="-120"/>
-              </a:rPr>
-              <a:t>MoOx  7 nm</a:t>
-            </a:r>
-            <a:endParaRPr lang="en-US" sz="1500" dirty="0"/>
+              <a:t>벌크 은 ε₁ = -13.03  ·  HATCN 위 Ag 는 4 nm 부터 오차 8 % 이내</a:t>
+            </a:r>
+            <a:endParaRPr lang="en-US" sz="1100" dirty="0"/>
           </a:p>
         </p:txBody>
       </p:sp>
@@ -12338,6 +13530,462 @@
                 <a:ea typeface="Malgun Gothic" pitchFamily="34" charset="-122"/>
                 <a:cs typeface="Malgun Gothic" pitchFamily="34" charset="-120"/>
               </a:rPr>
+              <a:t>닫힘 두께 — 두 독립 측정이 일치한다</a:t>
+            </a:r>
+            <a:endParaRPr lang="en-US" sz="3200" dirty="0"/>
+          </a:p>
+        </p:txBody>
+      </p:sp>
+      <p:sp>
+        <p:nvSpPr>
+          <p:cNvPr id="3" name="Text 1"/>
+          <p:cNvSpPr/>
+          <p:nvPr/>
+        </p:nvSpPr>
+        <p:spPr>
+          <a:xfrm>
+            <a:off x="566928" y="1042416"/>
+            <a:ext cx="11064240" cy="384048"/>
+          </a:xfrm>
+          <a:prstGeom prst="rect">
+            <a:avLst/>
+          </a:prstGeom>
+          <a:noFill/>
+          <a:ln/>
+        </p:spPr>
+        <p:txBody>
+          <a:bodyPr wrap="square" lIns="0" tIns="0" rIns="0" bIns="0" rtlCol="0" anchor="ctr"/>
+          <a:lstStyle/>
+          <a:p>
+            <a:pPr indent="0" marL="0">
+              <a:buNone/>
+            </a:pPr>
+            <a:r>
+              <a:rPr lang="en-US" sz="1400" dirty="0">
+                <a:solidFill>
+                  <a:srgbClr val="7A849C"/>
+                </a:solidFill>
+                <a:latin typeface="Malgun Gothic" pitchFamily="34" charset="0"/>
+                <a:ea typeface="Malgun Gothic" pitchFamily="34" charset="-122"/>
+                <a:cs typeface="Malgun Gothic" pitchFamily="34" charset="-120"/>
+              </a:rPr>
+              <a:t>전기(면저항)와 광학(흡수)이 서로를 모른 채 같은 답을 준다</a:t>
+            </a:r>
+            <a:endParaRPr lang="en-US" sz="1400" dirty="0"/>
+          </a:p>
+        </p:txBody>
+      </p:sp>
+      <p:sp>
+        <p:nvSpPr>
+          <p:cNvPr id="4" name="Shape 2"/>
+          <p:cNvSpPr/>
+          <p:nvPr/>
+        </p:nvSpPr>
+        <p:spPr>
+          <a:xfrm>
+            <a:off x="566928" y="1691640"/>
+            <a:ext cx="5349240" cy="4160520"/>
+          </a:xfrm>
+          <a:prstGeom prst="roundRect">
+            <a:avLst>
+              <a:gd name="adj" fmla="val 1319"/>
+            </a:avLst>
+          </a:prstGeom>
+          <a:solidFill>
+            <a:srgbClr val="FFFFFF"/>
+          </a:solidFill>
+          <a:ln/>
+          <a:effectLst>
+            <a:outerShdw sx="100000" sy="100000" kx="0" ky="0" algn="bl" rotWithShape="0" blurRad="114300" dist="12700" dir="5400000">
+              <a:srgbClr val="9AA5BC">
+                <a:alpha val="22000"/>
+              </a:srgbClr>
+            </a:outerShdw>
+          </a:effectLst>
+        </p:spPr>
+      </p:sp>
+      <p:sp>
+        <p:nvSpPr>
+          <p:cNvPr id="5" name="Text 3"/>
+          <p:cNvSpPr/>
+          <p:nvPr/>
+        </p:nvSpPr>
+        <p:spPr>
+          <a:xfrm>
+            <a:off x="868680" y="1874520"/>
+            <a:ext cx="4800600" cy="457200"/>
+          </a:xfrm>
+          <a:prstGeom prst="rect">
+            <a:avLst/>
+          </a:prstGeom>
+          <a:noFill/>
+          <a:ln/>
+        </p:spPr>
+        <p:txBody>
+          <a:bodyPr wrap="square" lIns="0" tIns="0" rIns="0" bIns="0" rtlCol="0" anchor="ctr"/>
+          <a:lstStyle/>
+          <a:p>
+            <a:pPr indent="0" marL="0">
+              <a:buNone/>
+            </a:pPr>
+            <a:r>
+              <a:rPr lang="en-US" sz="1200" b="1" dirty="0">
+                <a:solidFill>
+                  <a:srgbClr val="1A1F2E"/>
+                </a:solidFill>
+                <a:latin typeface="Malgun Gothic" pitchFamily="34" charset="0"/>
+                <a:ea typeface="Malgun Gothic" pitchFamily="34" charset="-122"/>
+                <a:cs typeface="Malgun Gothic" pitchFamily="34" charset="-120"/>
+              </a:rPr>
+              <a:t>① 전기 — 닫힌 막의 ρ = ρ₀ + C/d 선에서 벗어나는 지점</a:t>
+            </a:r>
+            <a:endParaRPr lang="en-US" sz="1200" dirty="0"/>
+          </a:p>
+        </p:txBody>
+      </p:sp>
+      <p:graphicFrame>
+        <p:nvGraphicFramePr>
+          <p:cNvPr id="6" name="Chart 0" descr=""/>
+          <p:cNvGraphicFramePr/>
+          <p:nvPr/>
+        </p:nvGraphicFramePr>
+        <p:xfrm>
+          <a:off x="868680" y="2395728"/>
+          <a:ext cx="4800600" cy="3200400"/>
+        </p:xfrm>
+        <a:graphic xmlns:a="http://schemas.openxmlformats.org/drawingml/2006/main">
+          <a:graphicData uri="http://schemas.openxmlformats.org/drawingml/2006/chart">
+            <c:chart xmlns:c="http://schemas.openxmlformats.org/drawingml/2006/chart" r:id="rId1"/>
+          </a:graphicData>
+        </a:graphic>
+      </p:graphicFrame>
+      <p:sp>
+        <p:nvSpPr>
+          <p:cNvPr id="7" name="Shape 4"/>
+          <p:cNvSpPr/>
+          <p:nvPr/>
+        </p:nvSpPr>
+        <p:spPr>
+          <a:xfrm>
+            <a:off x="6172200" y="1691640"/>
+            <a:ext cx="5458968" cy="4160520"/>
+          </a:xfrm>
+          <a:prstGeom prst="roundRect">
+            <a:avLst>
+              <a:gd name="adj" fmla="val 1319"/>
+            </a:avLst>
+          </a:prstGeom>
+          <a:solidFill>
+            <a:srgbClr val="FFFFFF"/>
+          </a:solidFill>
+          <a:ln/>
+          <a:effectLst>
+            <a:outerShdw sx="100000" sy="100000" kx="0" ky="0" algn="bl" rotWithShape="0" blurRad="114300" dist="12700" dir="5400000">
+              <a:srgbClr val="9AA5BC">
+                <a:alpha val="22000"/>
+              </a:srgbClr>
+            </a:outerShdw>
+          </a:effectLst>
+        </p:spPr>
+      </p:sp>
+      <p:sp>
+        <p:nvSpPr>
+          <p:cNvPr id="8" name="Text 5"/>
+          <p:cNvSpPr/>
+          <p:nvPr/>
+        </p:nvSpPr>
+        <p:spPr>
+          <a:xfrm>
+            <a:off x="6464808" y="1874520"/>
+            <a:ext cx="4892040" cy="292608"/>
+          </a:xfrm>
+          <a:prstGeom prst="rect">
+            <a:avLst/>
+          </a:prstGeom>
+          <a:noFill/>
+          <a:ln/>
+        </p:spPr>
+        <p:txBody>
+          <a:bodyPr wrap="square" lIns="0" tIns="0" rIns="0" bIns="0" rtlCol="0" anchor="ctr"/>
+          <a:lstStyle/>
+          <a:p>
+            <a:pPr indent="0" marL="0">
+              <a:buNone/>
+            </a:pPr>
+            <a:r>
+              <a:rPr lang="en-US" sz="1200" b="1" dirty="0">
+                <a:solidFill>
+                  <a:srgbClr val="1A1F2E"/>
+                </a:solidFill>
+                <a:latin typeface="Malgun Gothic" pitchFamily="34" charset="0"/>
+                <a:ea typeface="Malgun Gothic" pitchFamily="34" charset="-122"/>
+                <a:cs typeface="Malgun Gothic" pitchFamily="34" charset="-120"/>
+              </a:rPr>
+              <a:t>② 광학 — 흡수도의 계단</a:t>
+            </a:r>
+            <a:endParaRPr lang="en-US" sz="1200" dirty="0"/>
+          </a:p>
+        </p:txBody>
+      </p:sp>
+      <p:graphicFrame>
+        <p:nvGraphicFramePr>
+          <p:cNvPr id="9" name="Chart 1" descr=""/>
+          <p:cNvGraphicFramePr/>
+          <p:nvPr/>
+        </p:nvGraphicFramePr>
+        <p:xfrm>
+          <a:off x="6464808" y="2212848"/>
+          <a:ext cx="4892040" cy="2331720"/>
+        </p:xfrm>
+        <a:graphic xmlns:a="http://schemas.openxmlformats.org/drawingml/2006/main">
+          <a:graphicData uri="http://schemas.openxmlformats.org/drawingml/2006/chart">
+            <c:chart xmlns:c="http://schemas.openxmlformats.org/drawingml/2006/chart" r:id="rId2"/>
+          </a:graphicData>
+        </a:graphic>
+      </p:graphicFrame>
+      <p:sp>
+        <p:nvSpPr>
+          <p:cNvPr id="10" name="Text 6"/>
+          <p:cNvSpPr/>
+          <p:nvPr/>
+        </p:nvSpPr>
+        <p:spPr>
+          <a:xfrm>
+            <a:off x="6464808" y="4617720"/>
+            <a:ext cx="4892040" cy="457200"/>
+          </a:xfrm>
+          <a:prstGeom prst="rect">
+            <a:avLst/>
+          </a:prstGeom>
+          <a:noFill/>
+          <a:ln/>
+        </p:spPr>
+        <p:txBody>
+          <a:bodyPr wrap="square" lIns="0" tIns="0" rIns="0" bIns="0" rtlCol="0" anchor="ctr"/>
+          <a:lstStyle/>
+          <a:p>
+            <a:pPr indent="0" marL="0">
+              <a:buNone/>
+            </a:pPr>
+            <a:r>
+              <a:rPr lang="en-US" sz="1050" dirty="0">
+                <a:solidFill>
+                  <a:srgbClr val="7A849C"/>
+                </a:solidFill>
+                <a:latin typeface="Malgun Gothic" pitchFamily="34" charset="0"/>
+                <a:ea typeface="Malgun Gothic" pitchFamily="34" charset="-122"/>
+                <a:cs typeface="Malgun Gothic" pitchFamily="34" charset="-120"/>
+              </a:rPr>
+              <a:t>MoOx 는 4–6 nm 에서 28 % 평평 → 7 nm 에서 23 % 로 계단.  HATCN 은 4 nm 부터 단조 감소.</a:t>
+            </a:r>
+            <a:endParaRPr lang="en-US" sz="1050" dirty="0"/>
+          </a:p>
+          <a:p>
+            <a:pPr indent="0" marL="0">
+              <a:buNone/>
+            </a:pPr>
+            <a:r>
+              <a:rPr lang="en-US" sz="1050" dirty="0">
+                <a:solidFill>
+                  <a:srgbClr val="7A849C"/>
+                </a:solidFill>
+                <a:latin typeface="Malgun Gothic" pitchFamily="34" charset="0"/>
+                <a:ea typeface="Malgun Gothic" pitchFamily="34" charset="-122"/>
+                <a:cs typeface="Malgun Gothic" pitchFamily="34" charset="-120"/>
+              </a:rPr>
+              <a:t>※ MoOx 12 nm 은 반사도 파일 결측.</a:t>
+            </a:r>
+            <a:endParaRPr lang="en-US" sz="1050" dirty="0"/>
+          </a:p>
+        </p:txBody>
+      </p:sp>
+      <p:sp>
+        <p:nvSpPr>
+          <p:cNvPr id="11" name="Shape 7"/>
+          <p:cNvSpPr/>
+          <p:nvPr/>
+        </p:nvSpPr>
+        <p:spPr>
+          <a:xfrm>
+            <a:off x="6464808" y="5120640"/>
+            <a:ext cx="2331720" cy="685800"/>
+          </a:xfrm>
+          <a:prstGeom prst="roundRect">
+            <a:avLst>
+              <a:gd name="adj" fmla="val 8000"/>
+            </a:avLst>
+          </a:prstGeom>
+          <a:solidFill>
+            <a:srgbClr val="E8F7F5"/>
+          </a:solidFill>
+          <a:ln/>
+        </p:spPr>
+      </p:sp>
+      <p:sp>
+        <p:nvSpPr>
+          <p:cNvPr id="12" name="Text 8"/>
+          <p:cNvSpPr/>
+          <p:nvPr/>
+        </p:nvSpPr>
+        <p:spPr>
+          <a:xfrm>
+            <a:off x="6464808" y="5120640"/>
+            <a:ext cx="2331720" cy="685800"/>
+          </a:xfrm>
+          <a:prstGeom prst="rect">
+            <a:avLst/>
+          </a:prstGeom>
+          <a:noFill/>
+          <a:ln/>
+        </p:spPr>
+        <p:txBody>
+          <a:bodyPr wrap="square" lIns="0" tIns="0" rIns="0" bIns="0" rtlCol="0" anchor="ctr"/>
+          <a:lstStyle/>
+          <a:p>
+            <a:pPr algn="ctr" indent="0" marL="0">
+              <a:buNone/>
+            </a:pPr>
+            <a:r>
+              <a:rPr lang="en-US" sz="1500" b="1" dirty="0">
+                <a:solidFill>
+                  <a:srgbClr val="0E8074"/>
+                </a:solidFill>
+                <a:latin typeface="Malgun Gothic" pitchFamily="34" charset="0"/>
+                <a:ea typeface="Malgun Gothic" pitchFamily="34" charset="-122"/>
+                <a:cs typeface="Malgun Gothic" pitchFamily="34" charset="-120"/>
+              </a:rPr>
+              <a:t>HATCN  5 nm</a:t>
+            </a:r>
+            <a:endParaRPr lang="en-US" sz="1500" dirty="0"/>
+          </a:p>
+        </p:txBody>
+      </p:sp>
+      <p:sp>
+        <p:nvSpPr>
+          <p:cNvPr id="13" name="Shape 9"/>
+          <p:cNvSpPr/>
+          <p:nvPr/>
+        </p:nvSpPr>
+        <p:spPr>
+          <a:xfrm>
+            <a:off x="9025128" y="5120640"/>
+            <a:ext cx="2331720" cy="685800"/>
+          </a:xfrm>
+          <a:prstGeom prst="roundRect">
+            <a:avLst>
+              <a:gd name="adj" fmla="val 8000"/>
+            </a:avLst>
+          </a:prstGeom>
+          <a:solidFill>
+            <a:srgbClr val="FFF1EC"/>
+          </a:solidFill>
+          <a:ln/>
+        </p:spPr>
+      </p:sp>
+      <p:sp>
+        <p:nvSpPr>
+          <p:cNvPr id="14" name="Text 10"/>
+          <p:cNvSpPr/>
+          <p:nvPr/>
+        </p:nvSpPr>
+        <p:spPr>
+          <a:xfrm>
+            <a:off x="9025128" y="5120640"/>
+            <a:ext cx="2331720" cy="685800"/>
+          </a:xfrm>
+          <a:prstGeom prst="rect">
+            <a:avLst/>
+          </a:prstGeom>
+          <a:noFill/>
+          <a:ln/>
+        </p:spPr>
+        <p:txBody>
+          <a:bodyPr wrap="square" lIns="0" tIns="0" rIns="0" bIns="0" rtlCol="0" anchor="ctr"/>
+          <a:lstStyle/>
+          <a:p>
+            <a:pPr algn="ctr" indent="0" marL="0">
+              <a:buNone/>
+            </a:pPr>
+            <a:r>
+              <a:rPr lang="en-US" sz="1500" b="1" dirty="0">
+                <a:solidFill>
+                  <a:srgbClr val="FF6B35"/>
+                </a:solidFill>
+                <a:latin typeface="Malgun Gothic" pitchFamily="34" charset="0"/>
+                <a:ea typeface="Malgun Gothic" pitchFamily="34" charset="-122"/>
+                <a:cs typeface="Malgun Gothic" pitchFamily="34" charset="-120"/>
+              </a:rPr>
+              <a:t>MoOx  7 nm</a:t>
+            </a:r>
+            <a:endParaRPr lang="en-US" sz="1500" dirty="0"/>
+          </a:p>
+        </p:txBody>
+      </p:sp>
+    </p:spTree>
+  </p:cSld>
+  <p:clrMapOvr>
+    <a:masterClrMapping/>
+  </p:clrMapOvr>
+</p:sld>
+</file>
+
+<file path=ppt/slides/slide14.xml><?xml version="1.0" encoding="utf-8"?>
+<p:sld xmlns:a="http://schemas.openxmlformats.org/drawingml/2006/main" xmlns:r="http://schemas.openxmlformats.org/officeDocument/2006/relationships" xmlns:p="http://schemas.openxmlformats.org/presentationml/2006/main">
+  <p:cSld name="Slide 14">
+    <p:bg>
+      <p:bgPr>
+        <a:solidFill>
+          <a:srgbClr val="F7F9FC"/>
+        </a:solidFill>
+      </p:bgPr>
+    </p:bg>
+    <p:spTree>
+      <p:nvGrpSpPr>
+        <p:cNvPr id="1" name=""/>
+        <p:cNvGrpSpPr/>
+        <p:nvPr/>
+      </p:nvGrpSpPr>
+      <p:grpSpPr>
+        <a:xfrm>
+          <a:off x="0" y="0"/>
+          <a:ext cx="0" cy="0"/>
+          <a:chOff x="0" y="0"/>
+          <a:chExt cx="0" cy="0"/>
+        </a:xfrm>
+      </p:grpSpPr>
+      <p:sp>
+        <p:nvSpPr>
+          <p:cNvPr id="2" name="Text 0"/>
+          <p:cNvSpPr/>
+          <p:nvPr/>
+        </p:nvSpPr>
+        <p:spPr>
+          <a:xfrm>
+            <a:off x="566928" y="384048"/>
+            <a:ext cx="11064240" cy="658368"/>
+          </a:xfrm>
+          <a:prstGeom prst="rect">
+            <a:avLst/>
+          </a:prstGeom>
+          <a:noFill/>
+          <a:ln/>
+        </p:spPr>
+        <p:txBody>
+          <a:bodyPr wrap="square" lIns="0" tIns="0" rIns="0" bIns="0" rtlCol="0" anchor="ctr"/>
+          <a:lstStyle/>
+          <a:p>
+            <a:pPr indent="0" marL="0">
+              <a:buNone/>
+            </a:pPr>
+            <a:r>
+              <a:rPr lang="en-US" sz="3200" b="1" dirty="0">
+                <a:solidFill>
+                  <a:srgbClr val="1A1F2E"/>
+                </a:solidFill>
+                <a:latin typeface="Malgun Gothic" pitchFamily="34" charset="0"/>
+                <a:ea typeface="Malgun Gothic" pitchFamily="34" charset="-122"/>
+                <a:cs typeface="Malgun Gothic" pitchFamily="34" charset="-120"/>
+              </a:rPr>
               <a:t>소자 흡수 — 최적 두께와 남은 여지</a:t>
             </a:r>
             <a:endParaRPr lang="en-US" sz="3200" dirty="0"/>
@@ -12738,9 +14386,9 @@
 </p:sld>
 </file>
 
-<file path=ppt/slides/slide14.xml><?xml version="1.0" encoding="utf-8"?>
+<file path=ppt/slides/slide15.xml><?xml version="1.0" encoding="utf-8"?>
 <p:sld xmlns:a="http://schemas.openxmlformats.org/drawingml/2006/main" xmlns:r="http://schemas.openxmlformats.org/officeDocument/2006/relationships" xmlns:p="http://schemas.openxmlformats.org/presentationml/2006/main">
-  <p:cSld name="Slide 14">
+  <p:cSld name="Slide 15">
     <p:bg>
       <p:bgPr>
         <a:solidFill>
@@ -13171,9 +14819,9 @@
 </p:sld>
 </file>
 
-<file path=ppt/slides/slide15.xml><?xml version="1.0" encoding="utf-8"?>
+<file path=ppt/slides/slide16.xml><?xml version="1.0" encoding="utf-8"?>
 <p:sld xmlns:a="http://schemas.openxmlformats.org/drawingml/2006/main" xmlns:r="http://schemas.openxmlformats.org/officeDocument/2006/relationships" xmlns:p="http://schemas.openxmlformats.org/presentationml/2006/main">
-  <p:cSld name="Slide 15">
+  <p:cSld name="Slide 16">
     <p:bg>
       <p:bgPr>
         <a:solidFill>
@@ -16552,7 +18200,7 @@
                 <a:ea typeface="Malgun Gothic" pitchFamily="34" charset="-122"/>
                 <a:cs typeface="Malgun Gothic" pitchFamily="34" charset="-120"/>
               </a:rPr>
-              <a:t>PBE-D3(BJ) counterpoise 보정. 모델 품질이 다른 값을 한 줄에 세우면 안 된다</a:t>
+              <a:t>최적화된 구조에서 Ag 가 실제로 어디 앉았는지로 분류. 단좌·이좌를 한 줄에 세우면 안 된다</a:t>
             </a:r>
             <a:endParaRPr lang="en-US" sz="1400" dirty="0"/>
           </a:p>
@@ -16567,11 +18215,11 @@
         <p:spPr>
           <a:xfrm>
             <a:off x="566928" y="1691640"/>
-            <a:ext cx="3703320" cy="4160520"/>
+            <a:ext cx="6858000" cy="4160520"/>
           </a:xfrm>
           <a:prstGeom prst="roundRect">
             <a:avLst>
-              <a:gd name="adj" fmla="val 1481"/>
+              <a:gd name="adj" fmla="val 1319"/>
             </a:avLst>
           </a:prstGeom>
           <a:solidFill>
@@ -16587,93 +18235,15 @@
           </a:effectLst>
         </p:spPr>
       </p:sp>
-      <p:sp>
-        <p:nvSpPr>
-          <p:cNvPr id="5" name="Text 3"/>
-          <p:cNvSpPr/>
-          <p:nvPr/>
-        </p:nvSpPr>
-        <p:spPr>
-          <a:xfrm>
-            <a:off x="822960" y="1856232"/>
-            <a:ext cx="3200400" cy="274320"/>
-          </a:xfrm>
-          <a:prstGeom prst="rect">
-            <a:avLst/>
-          </a:prstGeom>
-          <a:noFill/>
-          <a:ln/>
-        </p:spPr>
-        <p:txBody>
-          <a:bodyPr wrap="square" lIns="0" tIns="0" rIns="0" bIns="0" rtlCol="0" anchor="ctr"/>
-          <a:lstStyle/>
-          <a:p>
-            <a:pPr indent="0" marL="0">
-              <a:buNone/>
-            </a:pPr>
-            <a:r>
-              <a:rPr lang="en-US" sz="1300" b="1" dirty="0">
-                <a:solidFill>
-                  <a:srgbClr val="2EC4B6"/>
-                </a:solidFill>
-                <a:latin typeface="Malgun Gothic" pitchFamily="34" charset="0"/>
-                <a:ea typeface="Malgun Gothic" pitchFamily="34" charset="-122"/>
-                <a:cs typeface="Malgun Gothic" pitchFamily="34" charset="-120"/>
-              </a:rPr>
-              <a:t>A · 전분자 DFT</a:t>
-            </a:r>
-            <a:endParaRPr lang="en-US" sz="1300" dirty="0"/>
-          </a:p>
-        </p:txBody>
-      </p:sp>
-      <p:sp>
-        <p:nvSpPr>
-          <p:cNvPr id="6" name="Text 4"/>
-          <p:cNvSpPr/>
-          <p:nvPr/>
-        </p:nvSpPr>
-        <p:spPr>
-          <a:xfrm>
-            <a:off x="822960" y="2121408"/>
-            <a:ext cx="3200400" cy="219456"/>
-          </a:xfrm>
-          <a:prstGeom prst="rect">
-            <a:avLst/>
-          </a:prstGeom>
-          <a:noFill/>
-          <a:ln/>
-        </p:spPr>
-        <p:txBody>
-          <a:bodyPr wrap="square" lIns="0" tIns="0" rIns="0" bIns="0" rtlCol="0" anchor="ctr"/>
-          <a:lstStyle/>
-          <a:p>
-            <a:pPr indent="0" marL="0">
-              <a:buNone/>
-            </a:pPr>
-            <a:r>
-              <a:rPr lang="en-US" sz="950" dirty="0">
-                <a:solidFill>
-                  <a:srgbClr val="7A849C"/>
-                </a:solidFill>
-                <a:latin typeface="Malgun Gothic" pitchFamily="34" charset="0"/>
-                <a:ea typeface="Malgun Gothic" pitchFamily="34" charset="-122"/>
-                <a:cs typeface="Malgun Gothic" pitchFamily="34" charset="-120"/>
-              </a:rPr>
-              <a:t>실제 재료, 직접 비교 가능</a:t>
-            </a:r>
-            <a:endParaRPr lang="en-US" sz="950" dirty="0"/>
-          </a:p>
-        </p:txBody>
-      </p:sp>
       <p:graphicFrame>
         <p:nvGraphicFramePr>
-          <p:cNvPr id="7" name="Chart 0" descr=""/>
+          <p:cNvPr id="5" name="Chart 0" descr=""/>
           <p:cNvGraphicFramePr/>
           <p:nvPr/>
         </p:nvGraphicFramePr>
         <p:xfrm>
-          <a:off x="822960" y="2377440"/>
-          <a:ext cx="3200400" cy="3291840"/>
+          <a:off x="777240" y="1847088"/>
+          <a:ext cx="4663440" cy="3840480"/>
         </p:xfrm>
         <a:graphic xmlns:a="http://schemas.openxmlformats.org/drawingml/2006/main">
           <a:graphicData uri="http://schemas.openxmlformats.org/drawingml/2006/chart">
@@ -16683,22 +18253,647 @@
       </p:graphicFrame>
       <p:sp>
         <p:nvSpPr>
-          <p:cNvPr id="8" name="Shape 5"/>
-          <p:cNvSpPr/>
-          <p:nvPr/>
-        </p:nvSpPr>
-        <p:spPr>
-          <a:xfrm>
-            <a:off x="4526280" y="1691640"/>
-            <a:ext cx="3703320" cy="4160520"/>
+          <p:cNvPr id="6" name="Text 3"/>
+          <p:cNvSpPr/>
+          <p:nvPr/>
+        </p:nvSpPr>
+        <p:spPr>
+          <a:xfrm>
+            <a:off x="5486400" y="1947672"/>
+            <a:ext cx="1874520" cy="274320"/>
+          </a:xfrm>
+          <a:prstGeom prst="rect">
+            <a:avLst/>
+          </a:prstGeom>
+          <a:noFill/>
+          <a:ln/>
+        </p:spPr>
+        <p:txBody>
+          <a:bodyPr wrap="square" lIns="0" tIns="0" rIns="0" bIns="0" rtlCol="0" anchor="ctr"/>
+          <a:lstStyle/>
+          <a:p>
+            <a:pPr indent="0" marL="0">
+              <a:buNone/>
+            </a:pPr>
+            <a:r>
+              <a:rPr lang="en-US" sz="750" dirty="0">
+                <a:solidFill>
+                  <a:srgbClr val="7A849C"/>
+                </a:solidFill>
+                <a:latin typeface="Malgun Gothic" pitchFamily="34" charset="0"/>
+                <a:ea typeface="Malgun Gothic" pitchFamily="34" charset="-122"/>
+                <a:cs typeface="Malgun Gothic" pitchFamily="34" charset="-120"/>
+              </a:rPr>
+              <a:t>단좌 · N 2.30 Å · 6 자리/분자</a:t>
+            </a:r>
+            <a:endParaRPr lang="en-US" sz="750" dirty="0"/>
+          </a:p>
+        </p:txBody>
+      </p:sp>
+      <p:sp>
+        <p:nvSpPr>
+          <p:cNvPr id="7" name="Text 4"/>
+          <p:cNvSpPr/>
+          <p:nvPr/>
+        </p:nvSpPr>
+        <p:spPr>
+          <a:xfrm>
+            <a:off x="5486400" y="2242109"/>
+            <a:ext cx="1874520" cy="274320"/>
+          </a:xfrm>
+          <a:prstGeom prst="rect">
+            <a:avLst/>
+          </a:prstGeom>
+          <a:noFill/>
+          <a:ln/>
+        </p:spPr>
+        <p:txBody>
+          <a:bodyPr wrap="square" lIns="0" tIns="0" rIns="0" bIns="0" rtlCol="0" anchor="ctr"/>
+          <a:lstStyle/>
+          <a:p>
+            <a:pPr indent="0" marL="0">
+              <a:buNone/>
+            </a:pPr>
+            <a:r>
+              <a:rPr lang="en-US" sz="750" dirty="0">
+                <a:solidFill>
+                  <a:srgbClr val="7A849C"/>
+                </a:solidFill>
+                <a:latin typeface="Malgun Gothic" pitchFamily="34" charset="0"/>
+                <a:ea typeface="Malgun Gothic" pitchFamily="34" charset="-122"/>
+                <a:cs typeface="Malgun Gothic" pitchFamily="34" charset="-120"/>
+              </a:rPr>
+              <a:t>단좌 · N 2.04 Å · 4 자리/분자</a:t>
+            </a:r>
+            <a:endParaRPr lang="en-US" sz="750" dirty="0"/>
+          </a:p>
+        </p:txBody>
+      </p:sp>
+      <p:sp>
+        <p:nvSpPr>
+          <p:cNvPr id="8" name="Text 5"/>
+          <p:cNvSpPr/>
+          <p:nvPr/>
+        </p:nvSpPr>
+        <p:spPr>
+          <a:xfrm>
+            <a:off x="5486400" y="2536546"/>
+            <a:ext cx="1874520" cy="274320"/>
+          </a:xfrm>
+          <a:prstGeom prst="rect">
+            <a:avLst/>
+          </a:prstGeom>
+          <a:noFill/>
+          <a:ln/>
+        </p:spPr>
+        <p:txBody>
+          <a:bodyPr wrap="square" lIns="0" tIns="0" rIns="0" bIns="0" rtlCol="0" anchor="ctr"/>
+          <a:lstStyle/>
+          <a:p>
+            <a:pPr indent="0" marL="0">
+              <a:buNone/>
+            </a:pPr>
+            <a:r>
+              <a:rPr lang="en-US" sz="750" dirty="0">
+                <a:solidFill>
+                  <a:srgbClr val="1E2761"/>
+                </a:solidFill>
+                <a:latin typeface="Malgun Gothic" pitchFamily="34" charset="0"/>
+                <a:ea typeface="Malgun Gothic" pitchFamily="34" charset="-122"/>
+                <a:cs typeface="Malgun Gothic" pitchFamily="34" charset="-120"/>
+              </a:rPr>
+              <a:t>이좌 · O 2.44 / 2.53 Å</a:t>
+            </a:r>
+            <a:endParaRPr lang="en-US" sz="750" dirty="0"/>
+          </a:p>
+        </p:txBody>
+      </p:sp>
+      <p:sp>
+        <p:nvSpPr>
+          <p:cNvPr id="9" name="Text 6"/>
+          <p:cNvSpPr/>
+          <p:nvPr/>
+        </p:nvSpPr>
+        <p:spPr>
+          <a:xfrm>
+            <a:off x="5486400" y="2830982"/>
+            <a:ext cx="1874520" cy="274320"/>
+          </a:xfrm>
+          <a:prstGeom prst="rect">
+            <a:avLst/>
+          </a:prstGeom>
+          <a:noFill/>
+          <a:ln/>
+        </p:spPr>
+        <p:txBody>
+          <a:bodyPr wrap="square" lIns="0" tIns="0" rIns="0" bIns="0" rtlCol="0" anchor="ctr"/>
+          <a:lstStyle/>
+          <a:p>
+            <a:pPr indent="0" marL="0">
+              <a:buNone/>
+            </a:pPr>
+            <a:r>
+              <a:rPr lang="en-US" sz="750" dirty="0">
+                <a:solidFill>
+                  <a:srgbClr val="1E2761"/>
+                </a:solidFill>
+                <a:latin typeface="Malgun Gothic" pitchFamily="34" charset="0"/>
+                <a:ea typeface="Malgun Gothic" pitchFamily="34" charset="-122"/>
+                <a:cs typeface="Malgun Gothic" pitchFamily="34" charset="-120"/>
+              </a:rPr>
+              <a:t>이좌 · N 2.33 / 2.34 Å</a:t>
+            </a:r>
+            <a:endParaRPr lang="en-US" sz="750" dirty="0"/>
+          </a:p>
+        </p:txBody>
+      </p:sp>
+      <p:sp>
+        <p:nvSpPr>
+          <p:cNvPr id="10" name="Text 7"/>
+          <p:cNvSpPr/>
+          <p:nvPr/>
+        </p:nvSpPr>
+        <p:spPr>
+          <a:xfrm>
+            <a:off x="5486400" y="3125419"/>
+            <a:ext cx="1874520" cy="274320"/>
+          </a:xfrm>
+          <a:prstGeom prst="rect">
+            <a:avLst/>
+          </a:prstGeom>
+          <a:noFill/>
+          <a:ln/>
+        </p:spPr>
+        <p:txBody>
+          <a:bodyPr wrap="square" lIns="0" tIns="0" rIns="0" bIns="0" rtlCol="0" anchor="ctr"/>
+          <a:lstStyle/>
+          <a:p>
+            <a:pPr indent="0" marL="0">
+              <a:buNone/>
+            </a:pPr>
+            <a:r>
+              <a:rPr lang="en-US" sz="750" dirty="0">
+                <a:solidFill>
+                  <a:srgbClr val="1E2761"/>
+                </a:solidFill>
+                <a:latin typeface="Malgun Gothic" pitchFamily="34" charset="0"/>
+                <a:ea typeface="Malgun Gothic" pitchFamily="34" charset="-122"/>
+                <a:cs typeface="Malgun Gothic" pitchFamily="34" charset="-120"/>
+              </a:rPr>
+              <a:t>이좌 · N 2.28 / 2.39 Å</a:t>
+            </a:r>
+            <a:endParaRPr lang="en-US" sz="750" dirty="0"/>
+          </a:p>
+        </p:txBody>
+      </p:sp>
+      <p:sp>
+        <p:nvSpPr>
+          <p:cNvPr id="11" name="Text 8"/>
+          <p:cNvSpPr/>
+          <p:nvPr/>
+        </p:nvSpPr>
+        <p:spPr>
+          <a:xfrm>
+            <a:off x="5486400" y="3419856"/>
+            <a:ext cx="1874520" cy="274320"/>
+          </a:xfrm>
+          <a:prstGeom prst="rect">
+            <a:avLst/>
+          </a:prstGeom>
+          <a:noFill/>
+          <a:ln/>
+        </p:spPr>
+        <p:txBody>
+          <a:bodyPr wrap="square" lIns="0" tIns="0" rIns="0" bIns="0" rtlCol="0" anchor="ctr"/>
+          <a:lstStyle/>
+          <a:p>
+            <a:pPr indent="0" marL="0">
+              <a:buNone/>
+            </a:pPr>
+            <a:r>
+              <a:rPr lang="en-US" sz="750" dirty="0">
+                <a:solidFill>
+                  <a:srgbClr val="7A849C"/>
+                </a:solidFill>
+                <a:latin typeface="Malgun Gothic" pitchFamily="34" charset="0"/>
+                <a:ea typeface="Malgun Gothic" pitchFamily="34" charset="-122"/>
+                <a:cs typeface="Malgun Gothic" pitchFamily="34" charset="-120"/>
+              </a:rPr>
+              <a:t>단좌 · N 2.31 Å</a:t>
+            </a:r>
+            <a:endParaRPr lang="en-US" sz="750" dirty="0"/>
+          </a:p>
+        </p:txBody>
+      </p:sp>
+      <p:sp>
+        <p:nvSpPr>
+          <p:cNvPr id="12" name="Text 9"/>
+          <p:cNvSpPr/>
+          <p:nvPr/>
+        </p:nvSpPr>
+        <p:spPr>
+          <a:xfrm>
+            <a:off x="5486400" y="3714293"/>
+            <a:ext cx="1874520" cy="274320"/>
+          </a:xfrm>
+          <a:prstGeom prst="rect">
+            <a:avLst/>
+          </a:prstGeom>
+          <a:noFill/>
+          <a:ln/>
+        </p:spPr>
+        <p:txBody>
+          <a:bodyPr wrap="square" lIns="0" tIns="0" rIns="0" bIns="0" rtlCol="0" anchor="ctr"/>
+          <a:lstStyle/>
+          <a:p>
+            <a:pPr indent="0" marL="0">
+              <a:buNone/>
+            </a:pPr>
+            <a:r>
+              <a:rPr lang="en-US" sz="750" dirty="0">
+                <a:solidFill>
+                  <a:srgbClr val="1E2761"/>
+                </a:solidFill>
+                <a:latin typeface="Malgun Gothic" pitchFamily="34" charset="0"/>
+                <a:ea typeface="Malgun Gothic" pitchFamily="34" charset="-122"/>
+                <a:cs typeface="Malgun Gothic" pitchFamily="34" charset="-120"/>
+              </a:rPr>
+              <a:t>이좌 · N 2.28 / 2.28 Å</a:t>
+            </a:r>
+            <a:endParaRPr lang="en-US" sz="750" dirty="0"/>
+          </a:p>
+        </p:txBody>
+      </p:sp>
+      <p:sp>
+        <p:nvSpPr>
+          <p:cNvPr id="13" name="Text 10"/>
+          <p:cNvSpPr/>
+          <p:nvPr/>
+        </p:nvSpPr>
+        <p:spPr>
+          <a:xfrm>
+            <a:off x="5486400" y="4008730"/>
+            <a:ext cx="1874520" cy="274320"/>
+          </a:xfrm>
+          <a:prstGeom prst="rect">
+            <a:avLst/>
+          </a:prstGeom>
+          <a:noFill/>
+          <a:ln/>
+        </p:spPr>
+        <p:txBody>
+          <a:bodyPr wrap="square" lIns="0" tIns="0" rIns="0" bIns="0" rtlCol="0" anchor="ctr"/>
+          <a:lstStyle/>
+          <a:p>
+            <a:pPr indent="0" marL="0">
+              <a:buNone/>
+            </a:pPr>
+            <a:r>
+              <a:rPr lang="en-US" sz="750" dirty="0">
+                <a:solidFill>
+                  <a:srgbClr val="7A849C"/>
+                </a:solidFill>
+                <a:latin typeface="Malgun Gothic" pitchFamily="34" charset="0"/>
+                <a:ea typeface="Malgun Gothic" pitchFamily="34" charset="-122"/>
+                <a:cs typeface="Malgun Gothic" pitchFamily="34" charset="-120"/>
+              </a:rPr>
+              <a:t>단좌 · N 2.59 Å</a:t>
+            </a:r>
+            <a:endParaRPr lang="en-US" sz="750" dirty="0"/>
+          </a:p>
+        </p:txBody>
+      </p:sp>
+      <p:sp>
+        <p:nvSpPr>
+          <p:cNvPr id="14" name="Text 11"/>
+          <p:cNvSpPr/>
+          <p:nvPr/>
+        </p:nvSpPr>
+        <p:spPr>
+          <a:xfrm>
+            <a:off x="5486400" y="4303166"/>
+            <a:ext cx="1874520" cy="274320"/>
+          </a:xfrm>
+          <a:prstGeom prst="rect">
+            <a:avLst/>
+          </a:prstGeom>
+          <a:noFill/>
+          <a:ln/>
+        </p:spPr>
+        <p:txBody>
+          <a:bodyPr wrap="square" lIns="0" tIns="0" rIns="0" bIns="0" rtlCol="0" anchor="ctr"/>
+          <a:lstStyle/>
+          <a:p>
+            <a:pPr indent="0" marL="0">
+              <a:buNone/>
+            </a:pPr>
+            <a:r>
+              <a:rPr lang="en-US" sz="750" dirty="0">
+                <a:solidFill>
+                  <a:srgbClr val="7A849C"/>
+                </a:solidFill>
+                <a:latin typeface="Malgun Gothic" pitchFamily="34" charset="0"/>
+                <a:ea typeface="Malgun Gothic" pitchFamily="34" charset="-122"/>
+                <a:cs typeface="Malgun Gothic" pitchFamily="34" charset="-120"/>
+              </a:rPr>
+              <a:t>단좌 · N 2.24 Å</a:t>
+            </a:r>
+            <a:endParaRPr lang="en-US" sz="750" dirty="0"/>
+          </a:p>
+        </p:txBody>
+      </p:sp>
+      <p:sp>
+        <p:nvSpPr>
+          <p:cNvPr id="15" name="Text 12"/>
+          <p:cNvSpPr/>
+          <p:nvPr/>
+        </p:nvSpPr>
+        <p:spPr>
+          <a:xfrm>
+            <a:off x="5486400" y="4597603"/>
+            <a:ext cx="1874520" cy="274320"/>
+          </a:xfrm>
+          <a:prstGeom prst="rect">
+            <a:avLst/>
+          </a:prstGeom>
+          <a:noFill/>
+          <a:ln/>
+        </p:spPr>
+        <p:txBody>
+          <a:bodyPr wrap="square" lIns="0" tIns="0" rIns="0" bIns="0" rtlCol="0" anchor="ctr"/>
+          <a:lstStyle/>
+          <a:p>
+            <a:pPr indent="0" marL="0">
+              <a:buNone/>
+            </a:pPr>
+            <a:r>
+              <a:rPr lang="en-US" sz="750" dirty="0">
+                <a:solidFill>
+                  <a:srgbClr val="7A849C"/>
+                </a:solidFill>
+                <a:latin typeface="Malgun Gothic" pitchFamily="34" charset="0"/>
+                <a:ea typeface="Malgun Gothic" pitchFamily="34" charset="-122"/>
+                <a:cs typeface="Malgun Gothic" pitchFamily="34" charset="-120"/>
+              </a:rPr>
+              <a:t>단좌 · N 2.09 Å</a:t>
+            </a:r>
+            <a:endParaRPr lang="en-US" sz="750" dirty="0"/>
+          </a:p>
+        </p:txBody>
+      </p:sp>
+      <p:sp>
+        <p:nvSpPr>
+          <p:cNvPr id="16" name="Text 13"/>
+          <p:cNvSpPr/>
+          <p:nvPr/>
+        </p:nvSpPr>
+        <p:spPr>
+          <a:xfrm>
+            <a:off x="5486400" y="4892040"/>
+            <a:ext cx="1874520" cy="274320"/>
+          </a:xfrm>
+          <a:prstGeom prst="rect">
+            <a:avLst/>
+          </a:prstGeom>
+          <a:noFill/>
+          <a:ln/>
+        </p:spPr>
+        <p:txBody>
+          <a:bodyPr wrap="square" lIns="0" tIns="0" rIns="0" bIns="0" rtlCol="0" anchor="ctr"/>
+          <a:lstStyle/>
+          <a:p>
+            <a:pPr indent="0" marL="0">
+              <a:buNone/>
+            </a:pPr>
+            <a:r>
+              <a:rPr lang="en-US" sz="750" dirty="0">
+                <a:solidFill>
+                  <a:srgbClr val="7A849C"/>
+                </a:solidFill>
+                <a:latin typeface="Malgun Gothic" pitchFamily="34" charset="0"/>
+                <a:ea typeface="Malgun Gothic" pitchFamily="34" charset="-122"/>
+                <a:cs typeface="Malgun Gothic" pitchFamily="34" charset="-120"/>
+              </a:rPr>
+              <a:t>단좌 · O 2.64 Å (약함)</a:t>
+            </a:r>
+            <a:endParaRPr lang="en-US" sz="750" dirty="0"/>
+          </a:p>
+        </p:txBody>
+      </p:sp>
+      <p:sp>
+        <p:nvSpPr>
+          <p:cNvPr id="17" name="Text 14"/>
+          <p:cNvSpPr/>
+          <p:nvPr/>
+        </p:nvSpPr>
+        <p:spPr>
+          <a:xfrm>
+            <a:off x="5486400" y="5186477"/>
+            <a:ext cx="1874520" cy="274320"/>
+          </a:xfrm>
+          <a:prstGeom prst="rect">
+            <a:avLst/>
+          </a:prstGeom>
+          <a:noFill/>
+          <a:ln/>
+        </p:spPr>
+        <p:txBody>
+          <a:bodyPr wrap="square" lIns="0" tIns="0" rIns="0" bIns="0" rtlCol="0" anchor="ctr"/>
+          <a:lstStyle/>
+          <a:p>
+            <a:pPr indent="0" marL="0">
+              <a:buNone/>
+            </a:pPr>
+            <a:r>
+              <a:rPr lang="en-US" sz="750" dirty="0">
+                <a:solidFill>
+                  <a:srgbClr val="7A849C"/>
+                </a:solidFill>
+                <a:latin typeface="Malgun Gothic" pitchFamily="34" charset="0"/>
+                <a:ea typeface="Malgun Gothic" pitchFamily="34" charset="-122"/>
+                <a:cs typeface="Malgun Gothic" pitchFamily="34" charset="-120"/>
+              </a:rPr>
+              <a:t>단좌 · S 2.90 Å (약함)</a:t>
+            </a:r>
+            <a:endParaRPr lang="en-US" sz="750" dirty="0"/>
+          </a:p>
+        </p:txBody>
+      </p:sp>
+      <p:sp>
+        <p:nvSpPr>
+          <p:cNvPr id="18" name="Text 15"/>
+          <p:cNvSpPr/>
+          <p:nvPr/>
+        </p:nvSpPr>
+        <p:spPr>
+          <a:xfrm>
+            <a:off x="5486400" y="5480914"/>
+            <a:ext cx="1874520" cy="274320"/>
+          </a:xfrm>
+          <a:prstGeom prst="rect">
+            <a:avLst/>
+          </a:prstGeom>
+          <a:noFill/>
+          <a:ln/>
+        </p:spPr>
+        <p:txBody>
+          <a:bodyPr wrap="square" lIns="0" tIns="0" rIns="0" bIns="0" rtlCol="0" anchor="ctr"/>
+          <a:lstStyle/>
+          <a:p>
+            <a:pPr indent="0" marL="0">
+              <a:buNone/>
+            </a:pPr>
+            <a:r>
+              <a:rPr lang="en-US" sz="750" dirty="0">
+                <a:solidFill>
+                  <a:srgbClr val="7A849C"/>
+                </a:solidFill>
+                <a:latin typeface="Malgun Gothic" pitchFamily="34" charset="0"/>
+                <a:ea typeface="Malgun Gothic" pitchFamily="34" charset="-122"/>
+                <a:cs typeface="Malgun Gothic" pitchFamily="34" charset="-120"/>
+              </a:rPr>
+              <a:t>π 면 · C 3.36 Å</a:t>
+            </a:r>
+            <a:endParaRPr lang="en-US" sz="750" dirty="0"/>
+          </a:p>
+        </p:txBody>
+      </p:sp>
+      <p:sp>
+        <p:nvSpPr>
+          <p:cNvPr id="19" name="Shape 16"/>
+          <p:cNvSpPr/>
+          <p:nvPr/>
+        </p:nvSpPr>
+        <p:spPr>
+          <a:xfrm>
+            <a:off x="822960" y="5486400"/>
+            <a:ext cx="146304" cy="146304"/>
+          </a:xfrm>
+          <a:prstGeom prst="ellipse">
+            <a:avLst/>
+          </a:prstGeom>
+          <a:solidFill>
+            <a:srgbClr val="2EC4B6"/>
+          </a:solidFill>
+          <a:ln/>
+        </p:spPr>
+      </p:sp>
+      <p:sp>
+        <p:nvSpPr>
+          <p:cNvPr id="20" name="Text 17"/>
+          <p:cNvSpPr/>
+          <p:nvPr/>
+        </p:nvSpPr>
+        <p:spPr>
+          <a:xfrm>
+            <a:off x="1042416" y="5449824"/>
+            <a:ext cx="1463040" cy="219456"/>
+          </a:xfrm>
+          <a:prstGeom prst="rect">
+            <a:avLst/>
+          </a:prstGeom>
+          <a:noFill/>
+          <a:ln/>
+        </p:spPr>
+        <p:txBody>
+          <a:bodyPr wrap="square" lIns="0" tIns="0" rIns="0" bIns="0" rtlCol="0" anchor="ctr"/>
+          <a:lstStyle/>
+          <a:p>
+            <a:pPr indent="0" marL="0">
+              <a:buNone/>
+            </a:pPr>
+            <a:r>
+              <a:rPr lang="en-US" sz="900" dirty="0">
+                <a:solidFill>
+                  <a:srgbClr val="7A849C"/>
+                </a:solidFill>
+                <a:latin typeface="Malgun Gothic" pitchFamily="34" charset="0"/>
+                <a:ea typeface="Malgun Gothic" pitchFamily="34" charset="-122"/>
+                <a:cs typeface="Malgun Gothic" pitchFamily="34" charset="-120"/>
+              </a:rPr>
+              <a:t>단좌 (자리 1개)</a:t>
+            </a:r>
+            <a:endParaRPr lang="en-US" sz="900" dirty="0"/>
+          </a:p>
+        </p:txBody>
+      </p:sp>
+      <p:sp>
+        <p:nvSpPr>
+          <p:cNvPr id="21" name="Shape 18"/>
+          <p:cNvSpPr/>
+          <p:nvPr/>
+        </p:nvSpPr>
+        <p:spPr>
+          <a:xfrm>
+            <a:off x="2606040" y="5486400"/>
+            <a:ext cx="146304" cy="146304"/>
+          </a:xfrm>
+          <a:prstGeom prst="ellipse">
+            <a:avLst/>
+          </a:prstGeom>
+          <a:solidFill>
+            <a:srgbClr val="1E2761"/>
+          </a:solidFill>
+          <a:ln/>
+        </p:spPr>
+      </p:sp>
+      <p:sp>
+        <p:nvSpPr>
+          <p:cNvPr id="22" name="Text 19"/>
+          <p:cNvSpPr/>
+          <p:nvPr/>
+        </p:nvSpPr>
+        <p:spPr>
+          <a:xfrm>
+            <a:off x="2825496" y="5449824"/>
+            <a:ext cx="2194560" cy="219456"/>
+          </a:xfrm>
+          <a:prstGeom prst="rect">
+            <a:avLst/>
+          </a:prstGeom>
+          <a:noFill/>
+          <a:ln/>
+        </p:spPr>
+        <p:txBody>
+          <a:bodyPr wrap="square" lIns="0" tIns="0" rIns="0" bIns="0" rtlCol="0" anchor="ctr"/>
+          <a:lstStyle/>
+          <a:p>
+            <a:pPr indent="0" marL="0">
+              <a:buNone/>
+            </a:pPr>
+            <a:r>
+              <a:rPr lang="en-US" sz="900" dirty="0">
+                <a:solidFill>
+                  <a:srgbClr val="7A849C"/>
+                </a:solidFill>
+                <a:latin typeface="Malgun Gothic" pitchFamily="34" charset="0"/>
+                <a:ea typeface="Malgun Gothic" pitchFamily="34" charset="-122"/>
+                <a:cs typeface="Malgun Gothic" pitchFamily="34" charset="-120"/>
+              </a:rPr>
+              <a:t>이좌 킬레이트 (자리 2개)</a:t>
+            </a:r>
+            <a:endParaRPr lang="en-US" sz="900" dirty="0"/>
+          </a:p>
+        </p:txBody>
+      </p:sp>
+      <p:sp>
+        <p:nvSpPr>
+          <p:cNvPr id="23" name="Shape 20"/>
+          <p:cNvSpPr/>
+          <p:nvPr/>
+        </p:nvSpPr>
+        <p:spPr>
+          <a:xfrm>
+            <a:off x="7680960" y="1691640"/>
+            <a:ext cx="3950208" cy="1965960"/>
           </a:xfrm>
           <a:prstGeom prst="roundRect">
             <a:avLst>
-              <a:gd name="adj" fmla="val 1481"/>
+              <a:gd name="adj" fmla="val 2791"/>
             </a:avLst>
           </a:prstGeom>
           <a:solidFill>
-            <a:srgbClr val="FFFFFF"/>
+            <a:srgbClr val="E8F7F5"/>
           </a:solidFill>
           <a:ln/>
           <a:effectLst>
@@ -16712,14 +18907,14 @@
       </p:sp>
       <p:sp>
         <p:nvSpPr>
-          <p:cNvPr id="9" name="Text 6"/>
-          <p:cNvSpPr/>
-          <p:nvPr/>
-        </p:nvSpPr>
-        <p:spPr>
-          <a:xfrm>
-            <a:off x="4782312" y="1856232"/>
-            <a:ext cx="3200400" cy="274320"/>
+          <p:cNvPr id="24" name="Text 21"/>
+          <p:cNvSpPr/>
+          <p:nvPr/>
+        </p:nvSpPr>
+        <p:spPr>
+          <a:xfrm>
+            <a:off x="7936992" y="1847088"/>
+            <a:ext cx="3474720" cy="256032"/>
           </a:xfrm>
           <a:prstGeom prst="rect">
             <a:avLst/>
@@ -16737,13 +18932,13 @@
             <a:r>
               <a:rPr lang="en-US" sz="1300" b="1" dirty="0">
                 <a:solidFill>
-                  <a:srgbClr val="1E2761"/>
+                  <a:srgbClr val="0E8074"/>
                 </a:solidFill>
                 <a:latin typeface="Malgun Gothic" pitchFamily="34" charset="0"/>
                 <a:ea typeface="Malgun Gothic" pitchFamily="34" charset="-122"/>
                 <a:cs typeface="Malgun Gothic" pitchFamily="34" charset="-120"/>
               </a:rPr>
-              <a:t>B · 무기물 클러스터</a:t>
+              <a:t>핵심</a:t>
             </a:r>
             <a:endParaRPr lang="en-US" sz="1300" dirty="0"/>
           </a:p>
@@ -16751,14 +18946,14 @@
       </p:sp>
       <p:sp>
         <p:nvSpPr>
-          <p:cNvPr id="10" name="Text 7"/>
-          <p:cNvSpPr/>
-          <p:nvPr/>
-        </p:nvSpPr>
-        <p:spPr>
-          <a:xfrm>
-            <a:off x="4782312" y="2121408"/>
-            <a:ext cx="3200400" cy="219456"/>
+          <p:cNvPr id="25" name="Text 22"/>
+          <p:cNvSpPr/>
+          <p:nvPr/>
+        </p:nvSpPr>
+        <p:spPr>
+          <a:xfrm>
+            <a:off x="7936992" y="2139696"/>
+            <a:ext cx="3474720" cy="1371600"/>
           </a:xfrm>
           <a:prstGeom prst="rect">
             <a:avLst/>
@@ -16770,132 +18965,84 @@
           <a:bodyPr wrap="square" lIns="0" tIns="0" rIns="0" bIns="0" rtlCol="0" anchor="ctr"/>
           <a:lstStyle/>
           <a:p>
-            <a:pPr indent="0" marL="0">
-              <a:buNone/>
-            </a:pPr>
-            <a:r>
-              <a:rPr lang="en-US" sz="950" dirty="0">
-                <a:solidFill>
-                  <a:srgbClr val="7A849C"/>
+            <a:pPr marL="342900" indent="-342900">
+              <a:spcAft>
+                <a:spcPts val="600"/>
+              </a:spcAft>
+              <a:buSzPct val="100000"/>
+              <a:buChar char="•"/>
+            </a:pPr>
+            <a:r>
+              <a:rPr lang="en-US" sz="1050" dirty="0">
+                <a:solidFill>
+                  <a:srgbClr val="1A1F2E"/>
                 </a:solidFill>
                 <a:latin typeface="Malgun Gothic" pitchFamily="34" charset="0"/>
                 <a:ea typeface="Malgun Gothic" pitchFamily="34" charset="-122"/>
                 <a:cs typeface="Malgun Gothic" pitchFamily="34" charset="-120"/>
               </a:rPr>
-              <a:t>모델 의존성 큼 — 조성·배위수에 민감</a:t>
-            </a:r>
-            <a:endParaRPr lang="en-US" sz="950" dirty="0"/>
-          </a:p>
-        </p:txBody>
-      </p:sp>
-      <p:graphicFrame>
-        <p:nvGraphicFramePr>
-          <p:cNvPr id="11" name="Chart 1" descr=""/>
-          <p:cNvGraphicFramePr/>
-          <p:nvPr/>
-        </p:nvGraphicFramePr>
-        <p:xfrm>
-          <a:off x="4782312" y="2377440"/>
-          <a:ext cx="3200400" cy="2286000"/>
-        </p:xfrm>
-        <a:graphic xmlns:a="http://schemas.openxmlformats.org/drawingml/2006/main">
-          <a:graphicData uri="http://schemas.openxmlformats.org/drawingml/2006/chart">
-            <c:chart xmlns:c="http://schemas.openxmlformats.org/drawingml/2006/chart" r:id="rId2"/>
-          </a:graphicData>
-        </a:graphic>
-      </p:graphicFrame>
-      <p:sp>
-        <p:nvSpPr>
-          <p:cNvPr id="12" name="Text 8"/>
-          <p:cNvSpPr/>
-          <p:nvPr/>
-        </p:nvSpPr>
-        <p:spPr>
-          <a:xfrm>
-            <a:off x="4782312" y="4736592"/>
-            <a:ext cx="3200400" cy="256032"/>
-          </a:xfrm>
-          <a:prstGeom prst="rect">
-            <a:avLst/>
-          </a:prstGeom>
-          <a:noFill/>
-          <a:ln/>
-        </p:spPr>
-        <p:txBody>
-          <a:bodyPr wrap="square" lIns="0" tIns="0" rIns="0" bIns="0" rtlCol="0" anchor="ctr"/>
-          <a:lstStyle/>
-          <a:p>
-            <a:pPr indent="0" marL="0">
-              <a:buNone/>
-            </a:pPr>
-            <a:r>
-              <a:rPr lang="en-US" sz="1200" b="1" dirty="0">
-                <a:solidFill>
-                  <a:srgbClr val="7A849C"/>
+              <a:t>HATCN 은 단좌인데도 모든 이좌 킬레이트를 이긴다</a:t>
+            </a:r>
+            <a:endParaRPr lang="en-US" sz="1050" dirty="0"/>
+          </a:p>
+          <a:p>
+            <a:pPr marL="342900" indent="-342900">
+              <a:spcAft>
+                <a:spcPts val="600"/>
+              </a:spcAft>
+              <a:buSzPct val="100000"/>
+              <a:buChar char="•"/>
+            </a:pPr>
+            <a:r>
+              <a:rPr lang="en-US" sz="1050" dirty="0">
+                <a:solidFill>
+                  <a:srgbClr val="1A1F2E"/>
                 </a:solidFill>
                 <a:latin typeface="Malgun Gothic" pitchFamily="34" charset="0"/>
                 <a:ea typeface="Malgun Gothic" pitchFamily="34" charset="-122"/>
                 <a:cs typeface="Malgun Gothic" pitchFamily="34" charset="-120"/>
               </a:rPr>
-              <a:t>C · 작용기 모델 화합물</a:t>
-            </a:r>
-            <a:endParaRPr lang="en-US" sz="1200" dirty="0"/>
-          </a:p>
-        </p:txBody>
-      </p:sp>
-      <p:sp>
-        <p:nvSpPr>
-          <p:cNvPr id="13" name="Text 9"/>
-          <p:cNvSpPr/>
-          <p:nvPr/>
-        </p:nvSpPr>
-        <p:spPr>
-          <a:xfrm>
-            <a:off x="4782312" y="5010912"/>
-            <a:ext cx="3200400" cy="777240"/>
-          </a:xfrm>
-          <a:prstGeom prst="rect">
-            <a:avLst/>
-          </a:prstGeom>
-          <a:noFill/>
-          <a:ln/>
-        </p:spPr>
-        <p:txBody>
-          <a:bodyPr wrap="square" lIns="0" tIns="0" rIns="0" bIns="0" rtlCol="0" anchor="ctr"/>
-          <a:lstStyle/>
-          <a:p>
-            <a:pPr indent="0" marL="0">
-              <a:buNone/>
-            </a:pPr>
-            <a:r>
-              <a:rPr lang="en-US" sz="900" dirty="0">
-                <a:solidFill>
-                  <a:srgbClr val="7A849C"/>
+              <a:t>나이트릴 N 하나 &gt; 벤즈이미다졸 N 둘</a:t>
+            </a:r>
+            <a:endParaRPr lang="en-US" sz="1050" dirty="0"/>
+          </a:p>
+          <a:p>
+            <a:pPr marL="342900" indent="-342900">
+              <a:spcAft>
+                <a:spcPts val="600"/>
+              </a:spcAft>
+              <a:buSzPct val="100000"/>
+              <a:buChar char="•"/>
+            </a:pPr>
+            <a:r>
+              <a:rPr lang="en-US" sz="1050" dirty="0">
+                <a:solidFill>
+                  <a:srgbClr val="1A1F2E"/>
                 </a:solidFill>
                 <a:latin typeface="Malgun Gothic" pitchFamily="34" charset="0"/>
                 <a:ea typeface="Malgun Gothic" pitchFamily="34" charset="-122"/>
                 <a:cs typeface="Malgun Gothic" pitchFamily="34" charset="-120"/>
               </a:rPr>
-              <a:t>재료가 아니라 대리 지표 — pyridine 0.34, triazine 0.29, PhCz(→TCTA) 0.28, TPA(→TAPC) 0.25, benzene 0.17</a:t>
-            </a:r>
-            <a:endParaRPr lang="en-US" sz="900" dirty="0"/>
-          </a:p>
-        </p:txBody>
-      </p:sp>
-      <p:sp>
-        <p:nvSpPr>
-          <p:cNvPr id="14" name="Shape 10"/>
-          <p:cNvSpPr/>
-          <p:nvPr/>
-        </p:nvSpPr>
-        <p:spPr>
-          <a:xfrm>
-            <a:off x="8485632" y="1691640"/>
-            <a:ext cx="3145536" cy="4160520"/>
+              <a:t>게다가 그 자리를 분자당 6개 갖는다 — 평면 분자라 전부 표면 노출</a:t>
+            </a:r>
+            <a:endParaRPr lang="en-US" sz="1050" dirty="0"/>
+          </a:p>
+        </p:txBody>
+      </p:sp>
+      <p:sp>
+        <p:nvSpPr>
+          <p:cNvPr id="26" name="Shape 23"/>
+          <p:cNvSpPr/>
+          <p:nvPr/>
+        </p:nvSpPr>
+        <p:spPr>
+          <a:xfrm>
+            <a:off x="7680960" y="3840480"/>
+            <a:ext cx="3950208" cy="2011680"/>
           </a:xfrm>
           <a:prstGeom prst="roundRect">
             <a:avLst>
-              <a:gd name="adj" fmla="val 1744"/>
+              <a:gd name="adj" fmla="val 2727"/>
             </a:avLst>
           </a:prstGeom>
           <a:solidFill>
@@ -16913,14 +19060,14 @@
       </p:sp>
       <p:sp>
         <p:nvSpPr>
-          <p:cNvPr id="15" name="Text 11"/>
-          <p:cNvSpPr/>
-          <p:nvPr/>
-        </p:nvSpPr>
-        <p:spPr>
-          <a:xfrm>
-            <a:off x="8732520" y="1874520"/>
-            <a:ext cx="2651760" cy="274320"/>
+          <p:cNvPr id="27" name="Text 24"/>
+          <p:cNvSpPr/>
+          <p:nvPr/>
+        </p:nvSpPr>
+        <p:spPr>
+          <a:xfrm>
+            <a:off x="7936992" y="3986784"/>
+            <a:ext cx="3474720" cy="256032"/>
           </a:xfrm>
           <a:prstGeom prst="rect">
             <a:avLst/>
@@ -16936,7 +19083,7 @@
               <a:buNone/>
             </a:pPr>
             <a:r>
-              <a:rPr lang="en-US" sz="1250" b="1" dirty="0">
+              <a:rPr lang="en-US" sz="1150" b="1" dirty="0">
                 <a:solidFill>
                   <a:srgbClr val="C0392B"/>
                 </a:solidFill>
@@ -16944,22 +19091,22 @@
                 <a:ea typeface="Malgun Gothic" pitchFamily="34" charset="-122"/>
                 <a:cs typeface="Malgun Gothic" pitchFamily="34" charset="-120"/>
               </a:rPr>
-              <a:t>이번 재감사에서 철회한 값</a:t>
-            </a:r>
-            <a:endParaRPr lang="en-US" sz="1250" dirty="0"/>
-          </a:p>
-        </p:txBody>
-      </p:sp>
-      <p:sp>
-        <p:nvSpPr>
-          <p:cNvPr id="16" name="Text 12"/>
-          <p:cNvSpPr/>
-          <p:nvPr/>
-        </p:nvSpPr>
-        <p:spPr>
-          <a:xfrm>
-            <a:off x="8732520" y="2240280"/>
-            <a:ext cx="2651760" cy="219456"/>
+              <a:t>앵커가 없는 값 — 자리 에너지가 아님</a:t>
+            </a:r>
+            <a:endParaRPr lang="en-US" sz="1150" dirty="0"/>
+          </a:p>
+        </p:txBody>
+      </p:sp>
+      <p:sp>
+        <p:nvSpPr>
+          <p:cNvPr id="28" name="Text 25"/>
+          <p:cNvSpPr/>
+          <p:nvPr/>
+        </p:nvSpPr>
+        <p:spPr>
+          <a:xfrm>
+            <a:off x="7936992" y="4297680"/>
+            <a:ext cx="3474720" cy="182880"/>
           </a:xfrm>
           <a:prstGeom prst="rect">
             <a:avLst/>
@@ -16975,69 +19122,30 @@
               <a:buNone/>
             </a:pPr>
             <a:r>
-              <a:rPr lang="en-US" sz="950" b="1" dirty="0">
+              <a:rPr lang="en-US" sz="900" b="1" dirty="0">
                 <a:solidFill>
                   <a:srgbClr val="C0392B"/>
-                </a:solidFill>
-                <a:latin typeface="Calibri" pitchFamily="34" charset="0"/>
-                <a:ea typeface="Calibri" pitchFamily="34" charset="-122"/>
-                <a:cs typeface="Calibri" pitchFamily="34" charset="-120"/>
-              </a:rPr>
-              <a:t>Al2O3  0.910</a:t>
-            </a:r>
-            <a:endParaRPr lang="en-US" sz="950" dirty="0"/>
-          </a:p>
-        </p:txBody>
-      </p:sp>
-      <p:sp>
-        <p:nvSpPr>
-          <p:cNvPr id="17" name="Text 13"/>
-          <p:cNvSpPr/>
-          <p:nvPr/>
-        </p:nvSpPr>
-        <p:spPr>
-          <a:xfrm>
-            <a:off x="8732520" y="2441448"/>
-            <a:ext cx="2651760" cy="475488"/>
-          </a:xfrm>
-          <a:prstGeom prst="rect">
-            <a:avLst/>
-          </a:prstGeom>
-          <a:noFill/>
-          <a:ln/>
-        </p:spPr>
-        <p:txBody>
-          <a:bodyPr wrap="square" lIns="0" tIns="0" rIns="0" bIns="0" rtlCol="0" anchor="ctr"/>
-          <a:lstStyle/>
-          <a:p>
-            <a:pPr indent="0" marL="0">
-              <a:buNone/>
-            </a:pPr>
-            <a:r>
-              <a:rPr lang="en-US" sz="800" dirty="0">
-                <a:solidFill>
-                  <a:srgbClr val="7A849C"/>
                 </a:solidFill>
                 <a:latin typeface="Malgun Gothic" pitchFamily="34" charset="0"/>
                 <a:ea typeface="Malgun Gothic" pitchFamily="34" charset="-122"/>
                 <a:cs typeface="Malgun Gothic" pitchFamily="34" charset="-120"/>
               </a:rPr>
-              <a:t>Al-rich Al10O10 클러스터 — 프로젝트 자체가 과결합으로 기록. 화학량론 Al4O6 는 0.422</a:t>
-            </a:r>
-            <a:endParaRPr lang="en-US" sz="800" dirty="0"/>
-          </a:p>
-        </p:txBody>
-      </p:sp>
-      <p:sp>
-        <p:nvSpPr>
-          <p:cNvPr id="18" name="Text 14"/>
-          <p:cNvSpPr/>
-          <p:nvPr/>
-        </p:nvSpPr>
-        <p:spPr>
-          <a:xfrm>
-            <a:off x="8732520" y="2953512"/>
-            <a:ext cx="2651760" cy="219456"/>
+              <a:t>PhCz → TCTA 대리  0.279</a:t>
+            </a:r>
+            <a:endParaRPr lang="en-US" sz="900" dirty="0"/>
+          </a:p>
+        </p:txBody>
+      </p:sp>
+      <p:sp>
+        <p:nvSpPr>
+          <p:cNvPr id="29" name="Text 26"/>
+          <p:cNvSpPr/>
+          <p:nvPr/>
+        </p:nvSpPr>
+        <p:spPr>
+          <a:xfrm>
+            <a:off x="7936992" y="4462272"/>
+            <a:ext cx="3474720" cy="292608"/>
           </a:xfrm>
           <a:prstGeom prst="rect">
             <a:avLst/>
@@ -17053,46 +19161,7 @@
               <a:buNone/>
             </a:pPr>
             <a:r>
-              <a:rPr lang="en-US" sz="950" b="1" dirty="0">
-                <a:solidFill>
-                  <a:srgbClr val="C0392B"/>
-                </a:solidFill>
-                <a:latin typeface="Calibri" pitchFamily="34" charset="0"/>
-                <a:ea typeface="Calibri" pitchFamily="34" charset="-122"/>
-                <a:cs typeface="Calibri" pitchFamily="34" charset="-120"/>
-              </a:rPr>
-              <a:t>MoO3  −0.718</a:t>
-            </a:r>
-            <a:endParaRPr lang="en-US" sz="950" dirty="0"/>
-          </a:p>
-        </p:txBody>
-      </p:sp>
-      <p:sp>
-        <p:nvSpPr>
-          <p:cNvPr id="19" name="Text 15"/>
-          <p:cNvSpPr/>
-          <p:nvPr/>
-        </p:nvSpPr>
-        <p:spPr>
-          <a:xfrm>
-            <a:off x="8732520" y="3154680"/>
-            <a:ext cx="2651760" cy="475488"/>
-          </a:xfrm>
-          <a:prstGeom prst="rect">
-            <a:avLst/>
-          </a:prstGeom>
-          <a:noFill/>
-          <a:ln/>
-        </p:spPr>
-        <p:txBody>
-          <a:bodyPr wrap="square" lIns="0" tIns="0" rIns="0" bIns="0" rtlCol="0" anchor="ctr"/>
-          <a:lstStyle/>
-          <a:p>
-            <a:pPr indent="0" marL="0">
-              <a:buNone/>
-            </a:pPr>
-            <a:r>
-              <a:rPr lang="en-US" sz="800" dirty="0">
+              <a:rPr lang="en-US" sz="750" dirty="0">
                 <a:solidFill>
                   <a:srgbClr val="7A849C"/>
                 </a:solidFill>
@@ -17100,22 +19169,22 @@
                 <a:ea typeface="Malgun Gothic" pitchFamily="34" charset="-122"/>
                 <a:cs typeface="Malgun Gothic" pitchFamily="34" charset="-120"/>
               </a:rPr>
-              <a:t>미정련(xTB 기하 + DFT 단일점). Ag 위치를 DFT 로 완화하면 +0.284</a:t>
-            </a:r>
-            <a:endParaRPr lang="en-US" sz="800" dirty="0"/>
-          </a:p>
-        </p:txBody>
-      </p:sp>
-      <p:sp>
-        <p:nvSpPr>
-          <p:cNvPr id="20" name="Text 16"/>
-          <p:cNvSpPr/>
-          <p:nvPr/>
-        </p:nvSpPr>
-        <p:spPr>
-          <a:xfrm>
-            <a:off x="8732520" y="3666744"/>
-            <a:ext cx="2651760" cy="219456"/>
+              <a:t>Ag 가 N 에 못 붙음 — π/H 접촉 (C 2.74 Å). 카바졸 N 은 3치환, 고립전자쌍 없음</a:t>
+            </a:r>
+            <a:endParaRPr lang="en-US" sz="750" dirty="0"/>
+          </a:p>
+        </p:txBody>
+      </p:sp>
+      <p:sp>
+        <p:nvSpPr>
+          <p:cNvPr id="30" name="Text 27"/>
+          <p:cNvSpPr/>
+          <p:nvPr/>
+        </p:nvSpPr>
+        <p:spPr>
+          <a:xfrm>
+            <a:off x="7936992" y="4773168"/>
+            <a:ext cx="3474720" cy="182880"/>
           </a:xfrm>
           <a:prstGeom prst="rect">
             <a:avLst/>
@@ -17131,69 +19200,30 @@
               <a:buNone/>
             </a:pPr>
             <a:r>
-              <a:rPr lang="en-US" sz="950" b="1" dirty="0">
+              <a:rPr lang="en-US" sz="900" b="1" dirty="0">
                 <a:solidFill>
                   <a:srgbClr val="C0392B"/>
-                </a:solidFill>
-                <a:latin typeface="Calibri" pitchFamily="34" charset="0"/>
-                <a:ea typeface="Calibri" pitchFamily="34" charset="-122"/>
-                <a:cs typeface="Calibri" pitchFamily="34" charset="-120"/>
-              </a:rPr>
-              <a:t>CuI @Cu 0.819 / CuSCN @Cu 0.567</a:t>
-            </a:r>
-            <a:endParaRPr lang="en-US" sz="950" dirty="0"/>
-          </a:p>
-        </p:txBody>
-      </p:sp>
-      <p:sp>
-        <p:nvSpPr>
-          <p:cNvPr id="21" name="Text 17"/>
-          <p:cNvSpPr/>
-          <p:nvPr/>
-        </p:nvSpPr>
-        <p:spPr>
-          <a:xfrm>
-            <a:off x="8732520" y="3867912"/>
-            <a:ext cx="2651760" cy="475488"/>
-          </a:xfrm>
-          <a:prstGeom prst="rect">
-            <a:avLst/>
-          </a:prstGeom>
-          <a:noFill/>
-          <a:ln/>
-        </p:spPr>
-        <p:txBody>
-          <a:bodyPr wrap="square" lIns="0" tIns="0" rIns="0" bIns="0" rtlCol="0" anchor="ctr"/>
-          <a:lstStyle/>
-          <a:p>
-            <a:pPr indent="0" marL="0">
-              <a:buNone/>
-            </a:pPr>
-            <a:r>
-              <a:rPr lang="en-US" sz="800" dirty="0">
-                <a:solidFill>
-                  <a:srgbClr val="7A849C"/>
                 </a:solidFill>
                 <a:latin typeface="Malgun Gothic" pitchFamily="34" charset="0"/>
                 <a:ea typeface="Malgun Gothic" pitchFamily="34" charset="-122"/>
                 <a:cs typeface="Malgun Gothic" pitchFamily="34" charset="-120"/>
               </a:rPr>
-              <a:t>Ag–Cu 금속간 접촉. 표면 화학이 아니라 합금 결합</a:t>
-            </a:r>
-            <a:endParaRPr lang="en-US" sz="800" dirty="0"/>
-          </a:p>
-        </p:txBody>
-      </p:sp>
-      <p:sp>
-        <p:nvSpPr>
-          <p:cNvPr id="22" name="Text 18"/>
-          <p:cNvSpPr/>
-          <p:nvPr/>
-        </p:nvSpPr>
-        <p:spPr>
-          <a:xfrm>
-            <a:off x="8732520" y="4379976"/>
-            <a:ext cx="2651760" cy="219456"/>
+              <a:t>TPA → TAPC 대리  0.254</a:t>
+            </a:r>
+            <a:endParaRPr lang="en-US" sz="900" dirty="0"/>
+          </a:p>
+        </p:txBody>
+      </p:sp>
+      <p:sp>
+        <p:nvSpPr>
+          <p:cNvPr id="31" name="Text 28"/>
+          <p:cNvSpPr/>
+          <p:nvPr/>
+        </p:nvSpPr>
+        <p:spPr>
+          <a:xfrm>
+            <a:off x="7936992" y="4937760"/>
+            <a:ext cx="3474720" cy="292608"/>
           </a:xfrm>
           <a:prstGeom prst="rect">
             <a:avLst/>
@@ -17209,46 +19239,7 @@
               <a:buNone/>
             </a:pPr>
             <a:r>
-              <a:rPr lang="en-US" sz="950" b="1" dirty="0">
-                <a:solidFill>
-                  <a:srgbClr val="C0392B"/>
-                </a:solidFill>
-                <a:latin typeface="Calibri" pitchFamily="34" charset="0"/>
-                <a:ea typeface="Calibri" pitchFamily="34" charset="-122"/>
-                <a:cs typeface="Calibri" pitchFamily="34" charset="-120"/>
-              </a:rPr>
-              <a:t>ZnS 1.60</a:t>
-            </a:r>
-            <a:endParaRPr lang="en-US" sz="950" dirty="0"/>
-          </a:p>
-        </p:txBody>
-      </p:sp>
-      <p:sp>
-        <p:nvSpPr>
-          <p:cNvPr id="23" name="Text 19"/>
-          <p:cNvSpPr/>
-          <p:nvPr/>
-        </p:nvSpPr>
-        <p:spPr>
-          <a:xfrm>
-            <a:off x="8732520" y="4581144"/>
-            <a:ext cx="2651760" cy="475488"/>
-          </a:xfrm>
-          <a:prstGeom prst="rect">
-            <a:avLst/>
-          </a:prstGeom>
-          <a:noFill/>
-          <a:ln/>
-        </p:spPr>
-        <p:txBody>
-          <a:bodyPr wrap="square" lIns="0" tIns="0" rIns="0" bIns="0" rtlCol="0" anchor="ctr"/>
-          <a:lstStyle/>
-          <a:p>
-            <a:pPr indent="0" marL="0">
-              <a:buNone/>
-            </a:pPr>
-            <a:r>
-              <a:rPr lang="en-US" sz="800" dirty="0">
+              <a:rPr lang="en-US" sz="750" dirty="0">
                 <a:solidFill>
                   <a:srgbClr val="7A849C"/>
                 </a:solidFill>
@@ -17256,22 +19247,22 @@
                 <a:ea typeface="Malgun Gothic" pitchFamily="34" charset="-122"/>
                 <a:cs typeface="Malgun Gothic" pitchFamily="34" charset="-120"/>
               </a:rPr>
-              <a:t>우리 계산이 아님 — 문헌 prior (Kim AFM 2015)</a:t>
-            </a:r>
-            <a:endParaRPr lang="en-US" sz="800" dirty="0"/>
-          </a:p>
-        </p:txBody>
-      </p:sp>
-      <p:sp>
-        <p:nvSpPr>
-          <p:cNvPr id="24" name="Text 20"/>
-          <p:cNvSpPr/>
-          <p:nvPr/>
-        </p:nvSpPr>
-        <p:spPr>
-          <a:xfrm>
-            <a:off x="8732520" y="5093208"/>
-            <a:ext cx="2651760" cy="219456"/>
+              <a:t>Ag 가 N 에 못 붙음 — H 위 2.89 Å. 삼차 아민, 고립전자쌍 없음</a:t>
+            </a:r>
+            <a:endParaRPr lang="en-US" sz="750" dirty="0"/>
+          </a:p>
+        </p:txBody>
+      </p:sp>
+      <p:sp>
+        <p:nvSpPr>
+          <p:cNvPr id="32" name="Text 29"/>
+          <p:cNvSpPr/>
+          <p:nvPr/>
+        </p:nvSpPr>
+        <p:spPr>
+          <a:xfrm>
+            <a:off x="7936992" y="5248656"/>
+            <a:ext cx="3474720" cy="182880"/>
           </a:xfrm>
           <a:prstGeom prst="rect">
             <a:avLst/>
@@ -17287,56 +19278,56 @@
               <a:buNone/>
             </a:pPr>
             <a:r>
-              <a:rPr lang="en-US" sz="950" b="1" dirty="0">
+              <a:rPr lang="en-US" sz="900" b="1" dirty="0">
                 <a:solidFill>
                   <a:srgbClr val="C0392B"/>
-                </a:solidFill>
-                <a:latin typeface="Calibri" pitchFamily="34" charset="0"/>
-                <a:ea typeface="Calibri" pitchFamily="34" charset="-122"/>
-                <a:cs typeface="Calibri" pitchFamily="34" charset="-120"/>
-              </a:rPr>
-              <a:t>PhCN·ZnS 1.218</a:t>
-            </a:r>
-            <a:endParaRPr lang="en-US" sz="950" dirty="0"/>
-          </a:p>
-        </p:txBody>
-      </p:sp>
-      <p:sp>
-        <p:nvSpPr>
-          <p:cNvPr id="25" name="Text 21"/>
-          <p:cNvSpPr/>
-          <p:nvPr/>
-        </p:nvSpPr>
-        <p:spPr>
-          <a:xfrm>
-            <a:off x="8732520" y="5294376"/>
-            <a:ext cx="2651760" cy="475488"/>
-          </a:xfrm>
-          <a:prstGeom prst="rect">
-            <a:avLst/>
-          </a:prstGeom>
-          <a:noFill/>
-          <a:ln/>
-        </p:spPr>
-        <p:txBody>
-          <a:bodyPr wrap="square" lIns="0" tIns="0" rIns="0" bIns="0" rtlCol="0" anchor="ctr"/>
-          <a:lstStyle/>
-          <a:p>
-            <a:pPr indent="0" marL="0">
-              <a:buNone/>
-            </a:pPr>
-            <a:r>
-              <a:rPr lang="en-US" sz="800" dirty="0">
-                <a:solidFill>
-                  <a:srgbClr val="7A849C"/>
                 </a:solidFill>
                 <a:latin typeface="Malgun Gothic" pitchFamily="34" charset="0"/>
                 <a:ea typeface="Malgun Gothic" pitchFamily="34" charset="-122"/>
                 <a:cs typeface="Malgun Gothic" pitchFamily="34" charset="-120"/>
               </a:rPr>
-              <a:t>ZnS 가 나이트릴에 붙는 에너지. Ag 결합이 아님</a:t>
-            </a:r>
-            <a:endParaRPr lang="en-US" sz="800" dirty="0"/>
+              <a:t>Liq  0.167</a:t>
+            </a:r>
+            <a:endParaRPr lang="en-US" sz="900" dirty="0"/>
+          </a:p>
+        </p:txBody>
+      </p:sp>
+      <p:sp>
+        <p:nvSpPr>
+          <p:cNvPr id="33" name="Text 30"/>
+          <p:cNvSpPr/>
+          <p:nvPr/>
+        </p:nvSpPr>
+        <p:spPr>
+          <a:xfrm>
+            <a:off x="7936992" y="5413248"/>
+            <a:ext cx="3474720" cy="292608"/>
+          </a:xfrm>
+          <a:prstGeom prst="rect">
+            <a:avLst/>
+          </a:prstGeom>
+          <a:noFill/>
+          <a:ln/>
+        </p:spPr>
+        <p:txBody>
+          <a:bodyPr wrap="square" lIns="0" tIns="0" rIns="0" bIns="0" rtlCol="0" anchor="ctr"/>
+          <a:lstStyle/>
+          <a:p>
+            <a:pPr indent="0" marL="0">
+              <a:buNone/>
+            </a:pPr>
+            <a:r>
+              <a:rPr lang="en-US" sz="750" dirty="0">
+                <a:solidFill>
+                  <a:srgbClr val="7A849C"/>
+                </a:solidFill>
+                <a:latin typeface="Malgun Gothic" pitchFamily="34" charset="0"/>
+                <a:ea typeface="Malgun Gothic" pitchFamily="34" charset="-122"/>
+                <a:cs typeface="Malgun Gothic" pitchFamily="34" charset="-120"/>
+              </a:rPr>
+              <a:t>Ag 가 의도한 O,N 킬레이트가 아니라 Li 근처(2.46 Å)로 감. 값이 주장하는 것을 나타내지 않음</a:t>
+            </a:r>
+            <a:endParaRPr lang="en-US" sz="750" dirty="0"/>
           </a:p>
         </p:txBody>
       </p:sp>
@@ -17351,6 +19342,898 @@
 <file path=ppt/slides/slide8.xml><?xml version="1.0" encoding="utf-8"?>
 <p:sld xmlns:a="http://schemas.openxmlformats.org/drawingml/2006/main" xmlns:r="http://schemas.openxmlformats.org/officeDocument/2006/relationships" xmlns:p="http://schemas.openxmlformats.org/presentationml/2006/main">
   <p:cSld name="Slide 8">
+    <p:bg>
+      <p:bgPr>
+        <a:solidFill>
+          <a:srgbClr val="F7F9FC"/>
+        </a:solidFill>
+      </p:bgPr>
+    </p:bg>
+    <p:spTree>
+      <p:nvGrpSpPr>
+        <p:cNvPr id="1" name=""/>
+        <p:cNvGrpSpPr/>
+        <p:nvPr/>
+      </p:nvGrpSpPr>
+      <p:grpSpPr>
+        <a:xfrm>
+          <a:off x="0" y="0"/>
+          <a:ext cx="0" cy="0"/>
+          <a:chOff x="0" y="0"/>
+          <a:chExt cx="0" cy="0"/>
+        </a:xfrm>
+      </p:grpSpPr>
+      <p:sp>
+        <p:nvSpPr>
+          <p:cNvPr id="2" name="Text 0"/>
+          <p:cNvSpPr/>
+          <p:nvPr/>
+        </p:nvSpPr>
+        <p:spPr>
+          <a:xfrm>
+            <a:off x="566928" y="384048"/>
+            <a:ext cx="11064240" cy="658368"/>
+          </a:xfrm>
+          <a:prstGeom prst="rect">
+            <a:avLst/>
+          </a:prstGeom>
+          <a:noFill/>
+          <a:ln/>
+        </p:spPr>
+        <p:txBody>
+          <a:bodyPr wrap="square" lIns="0" tIns="0" rIns="0" bIns="0" rtlCol="0" anchor="ctr"/>
+          <a:lstStyle/>
+          <a:p>
+            <a:pPr indent="0" marL="0">
+              <a:buNone/>
+            </a:pPr>
+            <a:r>
+              <a:rPr lang="en-US" sz="3200" b="1" dirty="0">
+                <a:solidFill>
+                  <a:srgbClr val="1A1F2E"/>
+                </a:solidFill>
+                <a:latin typeface="Malgun Gothic" pitchFamily="34" charset="0"/>
+                <a:ea typeface="Malgun Gothic" pitchFamily="34" charset="-122"/>
+                <a:cs typeface="Malgun Gothic" pitchFamily="34" charset="-120"/>
+              </a:rPr>
+              <a:t>스크리닝 재감사 — 모델 품질과 철회 항목</a:t>
+            </a:r>
+            <a:endParaRPr lang="en-US" sz="3200" dirty="0"/>
+          </a:p>
+        </p:txBody>
+      </p:sp>
+      <p:sp>
+        <p:nvSpPr>
+          <p:cNvPr id="3" name="Text 1"/>
+          <p:cNvSpPr/>
+          <p:nvPr/>
+        </p:nvSpPr>
+        <p:spPr>
+          <a:xfrm>
+            <a:off x="566928" y="1042416"/>
+            <a:ext cx="11064240" cy="384048"/>
+          </a:xfrm>
+          <a:prstGeom prst="rect">
+            <a:avLst/>
+          </a:prstGeom>
+          <a:noFill/>
+          <a:ln/>
+        </p:spPr>
+        <p:txBody>
+          <a:bodyPr wrap="square" lIns="0" tIns="0" rIns="0" bIns="0" rtlCol="0" anchor="ctr"/>
+          <a:lstStyle/>
+          <a:p>
+            <a:pPr indent="0" marL="0">
+              <a:buNone/>
+            </a:pPr>
+            <a:r>
+              <a:rPr lang="en-US" sz="1400" dirty="0">
+                <a:solidFill>
+                  <a:srgbClr val="7A849C"/>
+                </a:solidFill>
+                <a:latin typeface="Malgun Gothic" pitchFamily="34" charset="0"/>
+                <a:ea typeface="Malgun Gothic" pitchFamily="34" charset="-122"/>
+                <a:cs typeface="Malgun Gothic" pitchFamily="34" charset="-120"/>
+              </a:rPr>
+              <a:t>무기물 클러스터와 작용기 대리 화합물은 전분자 계산과 같은 줄에 둘 수 없다</a:t>
+            </a:r>
+            <a:endParaRPr lang="en-US" sz="1400" dirty="0"/>
+          </a:p>
+        </p:txBody>
+      </p:sp>
+      <p:sp>
+        <p:nvSpPr>
+          <p:cNvPr id="4" name="Shape 2"/>
+          <p:cNvSpPr/>
+          <p:nvPr/>
+        </p:nvSpPr>
+        <p:spPr>
+          <a:xfrm>
+            <a:off x="566928" y="1691640"/>
+            <a:ext cx="3566160" cy="4160520"/>
+          </a:xfrm>
+          <a:prstGeom prst="roundRect">
+            <a:avLst>
+              <a:gd name="adj" fmla="val 1538"/>
+            </a:avLst>
+          </a:prstGeom>
+          <a:solidFill>
+            <a:srgbClr val="FFFFFF"/>
+          </a:solidFill>
+          <a:ln/>
+          <a:effectLst>
+            <a:outerShdw sx="100000" sy="100000" kx="0" ky="0" algn="bl" rotWithShape="0" blurRad="114300" dist="12700" dir="5400000">
+              <a:srgbClr val="9AA5BC">
+                <a:alpha val="22000"/>
+              </a:srgbClr>
+            </a:outerShdw>
+          </a:effectLst>
+        </p:spPr>
+      </p:sp>
+      <p:sp>
+        <p:nvSpPr>
+          <p:cNvPr id="5" name="Text 3"/>
+          <p:cNvSpPr/>
+          <p:nvPr/>
+        </p:nvSpPr>
+        <p:spPr>
+          <a:xfrm>
+            <a:off x="822960" y="1856232"/>
+            <a:ext cx="3063240" cy="274320"/>
+          </a:xfrm>
+          <a:prstGeom prst="rect">
+            <a:avLst/>
+          </a:prstGeom>
+          <a:noFill/>
+          <a:ln/>
+        </p:spPr>
+        <p:txBody>
+          <a:bodyPr wrap="square" lIns="0" tIns="0" rIns="0" bIns="0" rtlCol="0" anchor="ctr"/>
+          <a:lstStyle/>
+          <a:p>
+            <a:pPr indent="0" marL="0">
+              <a:buNone/>
+            </a:pPr>
+            <a:r>
+              <a:rPr lang="en-US" sz="1300" b="1" dirty="0">
+                <a:solidFill>
+                  <a:srgbClr val="1E2761"/>
+                </a:solidFill>
+                <a:latin typeface="Malgun Gothic" pitchFamily="34" charset="0"/>
+                <a:ea typeface="Malgun Gothic" pitchFamily="34" charset="-122"/>
+                <a:cs typeface="Malgun Gothic" pitchFamily="34" charset="-120"/>
+              </a:rPr>
+              <a:t>B · 무기물 클러스터</a:t>
+            </a:r>
+            <a:endParaRPr lang="en-US" sz="1300" dirty="0"/>
+          </a:p>
+        </p:txBody>
+      </p:sp>
+      <p:sp>
+        <p:nvSpPr>
+          <p:cNvPr id="6" name="Text 4"/>
+          <p:cNvSpPr/>
+          <p:nvPr/>
+        </p:nvSpPr>
+        <p:spPr>
+          <a:xfrm>
+            <a:off x="822960" y="2121408"/>
+            <a:ext cx="3063240" cy="365760"/>
+          </a:xfrm>
+          <a:prstGeom prst="rect">
+            <a:avLst/>
+          </a:prstGeom>
+          <a:noFill/>
+          <a:ln/>
+        </p:spPr>
+        <p:txBody>
+          <a:bodyPr wrap="square" lIns="0" tIns="0" rIns="0" bIns="0" rtlCol="0" anchor="ctr"/>
+          <a:lstStyle/>
+          <a:p>
+            <a:pPr indent="0" marL="0">
+              <a:buNone/>
+            </a:pPr>
+            <a:r>
+              <a:rPr lang="en-US" sz="900" dirty="0">
+                <a:solidFill>
+                  <a:srgbClr val="7A849C"/>
+                </a:solidFill>
+                <a:latin typeface="Malgun Gothic" pitchFamily="34" charset="0"/>
+                <a:ea typeface="Malgun Gothic" pitchFamily="34" charset="-122"/>
+                <a:cs typeface="Malgun Gothic" pitchFamily="34" charset="-120"/>
+              </a:rPr>
+              <a:t>조성·배위수 민감 — 후보 간 차이보다 모델 오차가 큼</a:t>
+            </a:r>
+            <a:endParaRPr lang="en-US" sz="900" dirty="0"/>
+          </a:p>
+        </p:txBody>
+      </p:sp>
+      <p:graphicFrame>
+        <p:nvGraphicFramePr>
+          <p:cNvPr id="7" name="Chart 0" descr=""/>
+          <p:cNvGraphicFramePr/>
+          <p:nvPr/>
+        </p:nvGraphicFramePr>
+        <p:xfrm>
+          <a:off x="822960" y="2514600"/>
+          <a:ext cx="3063240" cy="2286000"/>
+        </p:xfrm>
+        <a:graphic xmlns:a="http://schemas.openxmlformats.org/drawingml/2006/main">
+          <a:graphicData uri="http://schemas.openxmlformats.org/drawingml/2006/chart">
+            <c:chart xmlns:c="http://schemas.openxmlformats.org/drawingml/2006/chart" r:id="rId1"/>
+          </a:graphicData>
+        </a:graphic>
+      </p:graphicFrame>
+      <p:sp>
+        <p:nvSpPr>
+          <p:cNvPr id="8" name="Text 5"/>
+          <p:cNvSpPr/>
+          <p:nvPr/>
+        </p:nvSpPr>
+        <p:spPr>
+          <a:xfrm>
+            <a:off x="822960" y="4892040"/>
+            <a:ext cx="3063240" cy="822960"/>
+          </a:xfrm>
+          <a:prstGeom prst="rect">
+            <a:avLst/>
+          </a:prstGeom>
+          <a:noFill/>
+          <a:ln/>
+        </p:spPr>
+        <p:txBody>
+          <a:bodyPr wrap="square" lIns="0" tIns="0" rIns="0" bIns="0" rtlCol="0" anchor="ctr"/>
+          <a:lstStyle/>
+          <a:p>
+            <a:pPr indent="0" marL="0">
+              <a:buNone/>
+            </a:pPr>
+            <a:r>
+              <a:rPr lang="en-US" sz="950" dirty="0">
+                <a:solidFill>
+                  <a:srgbClr val="7A849C"/>
+                </a:solidFill>
+                <a:latin typeface="Malgun Gothic" pitchFamily="34" charset="0"/>
+                <a:ea typeface="Malgun Gothic" pitchFamily="34" charset="-122"/>
+                <a:cs typeface="Malgun Gothic" pitchFamily="34" charset="-120"/>
+              </a:rPr>
+              <a:t>MoOx 는 산소 공공이 있어야 0.445. 화학량론 MoO3 는 0.284 로 반토막.</a:t>
+            </a:r>
+            <a:endParaRPr lang="en-US" sz="950" dirty="0"/>
+          </a:p>
+        </p:txBody>
+      </p:sp>
+      <p:sp>
+        <p:nvSpPr>
+          <p:cNvPr id="9" name="Shape 6"/>
+          <p:cNvSpPr/>
+          <p:nvPr/>
+        </p:nvSpPr>
+        <p:spPr>
+          <a:xfrm>
+            <a:off x="4370832" y="1691640"/>
+            <a:ext cx="3566160" cy="4160520"/>
+          </a:xfrm>
+          <a:prstGeom prst="roundRect">
+            <a:avLst>
+              <a:gd name="adj" fmla="val 1538"/>
+            </a:avLst>
+          </a:prstGeom>
+          <a:solidFill>
+            <a:srgbClr val="FFFFFF"/>
+          </a:solidFill>
+          <a:ln/>
+          <a:effectLst>
+            <a:outerShdw sx="100000" sy="100000" kx="0" ky="0" algn="bl" rotWithShape="0" blurRad="114300" dist="12700" dir="5400000">
+              <a:srgbClr val="9AA5BC">
+                <a:alpha val="22000"/>
+              </a:srgbClr>
+            </a:outerShdw>
+          </a:effectLst>
+        </p:spPr>
+      </p:sp>
+      <p:sp>
+        <p:nvSpPr>
+          <p:cNvPr id="10" name="Text 7"/>
+          <p:cNvSpPr/>
+          <p:nvPr/>
+        </p:nvSpPr>
+        <p:spPr>
+          <a:xfrm>
+            <a:off x="4626864" y="1856232"/>
+            <a:ext cx="3063240" cy="274320"/>
+          </a:xfrm>
+          <a:prstGeom prst="rect">
+            <a:avLst/>
+          </a:prstGeom>
+          <a:noFill/>
+          <a:ln/>
+        </p:spPr>
+        <p:txBody>
+          <a:bodyPr wrap="square" lIns="0" tIns="0" rIns="0" bIns="0" rtlCol="0" anchor="ctr"/>
+          <a:lstStyle/>
+          <a:p>
+            <a:pPr indent="0" marL="0">
+              <a:buNone/>
+            </a:pPr>
+            <a:r>
+              <a:rPr lang="en-US" sz="1300" b="1" dirty="0">
+                <a:solidFill>
+                  <a:srgbClr val="7A849C"/>
+                </a:solidFill>
+                <a:latin typeface="Malgun Gothic" pitchFamily="34" charset="0"/>
+                <a:ea typeface="Malgun Gothic" pitchFamily="34" charset="-122"/>
+                <a:cs typeface="Malgun Gothic" pitchFamily="34" charset="-120"/>
+              </a:rPr>
+              <a:t>C · 작용기 대리 화합물</a:t>
+            </a:r>
+            <a:endParaRPr lang="en-US" sz="1300" dirty="0"/>
+          </a:p>
+        </p:txBody>
+      </p:sp>
+      <p:sp>
+        <p:nvSpPr>
+          <p:cNvPr id="11" name="Text 8"/>
+          <p:cNvSpPr/>
+          <p:nvPr/>
+        </p:nvSpPr>
+        <p:spPr>
+          <a:xfrm>
+            <a:off x="4626864" y="2121408"/>
+            <a:ext cx="3063240" cy="256032"/>
+          </a:xfrm>
+          <a:prstGeom prst="rect">
+            <a:avLst/>
+          </a:prstGeom>
+          <a:noFill/>
+          <a:ln/>
+        </p:spPr>
+        <p:txBody>
+          <a:bodyPr wrap="square" lIns="0" tIns="0" rIns="0" bIns="0" rtlCol="0" anchor="ctr"/>
+          <a:lstStyle/>
+          <a:p>
+            <a:pPr indent="0" marL="0">
+              <a:buNone/>
+            </a:pPr>
+            <a:r>
+              <a:rPr lang="en-US" sz="900" dirty="0">
+                <a:solidFill>
+                  <a:srgbClr val="7A849C"/>
+                </a:solidFill>
+                <a:latin typeface="Malgun Gothic" pitchFamily="34" charset="0"/>
+                <a:ea typeface="Malgun Gothic" pitchFamily="34" charset="-122"/>
+                <a:cs typeface="Malgun Gothic" pitchFamily="34" charset="-120"/>
+              </a:rPr>
+              <a:t>재료가 아니라 결합 모티프의 대리 지표</a:t>
+            </a:r>
+            <a:endParaRPr lang="en-US" sz="900" dirty="0"/>
+          </a:p>
+        </p:txBody>
+      </p:sp>
+      <p:graphicFrame>
+        <p:nvGraphicFramePr>
+          <p:cNvPr id="12" name="Chart 1" descr=""/>
+          <p:cNvGraphicFramePr/>
+          <p:nvPr/>
+        </p:nvGraphicFramePr>
+        <p:xfrm>
+          <a:off x="4626864" y="2450592"/>
+          <a:ext cx="3063240" cy="2743200"/>
+        </p:xfrm>
+        <a:graphic xmlns:a="http://schemas.openxmlformats.org/drawingml/2006/main">
+          <a:graphicData uri="http://schemas.openxmlformats.org/drawingml/2006/chart">
+            <c:chart xmlns:c="http://schemas.openxmlformats.org/drawingml/2006/chart" r:id="rId2"/>
+          </a:graphicData>
+        </a:graphic>
+      </p:graphicFrame>
+      <p:sp>
+        <p:nvSpPr>
+          <p:cNvPr id="13" name="Text 9"/>
+          <p:cNvSpPr/>
+          <p:nvPr/>
+        </p:nvSpPr>
+        <p:spPr>
+          <a:xfrm>
+            <a:off x="4626864" y="5285232"/>
+            <a:ext cx="3063240" cy="457200"/>
+          </a:xfrm>
+          <a:prstGeom prst="rect">
+            <a:avLst/>
+          </a:prstGeom>
+          <a:noFill/>
+          <a:ln/>
+        </p:spPr>
+        <p:txBody>
+          <a:bodyPr wrap="square" lIns="0" tIns="0" rIns="0" bIns="0" rtlCol="0" anchor="ctr"/>
+          <a:lstStyle/>
+          <a:p>
+            <a:pPr indent="0" marL="0">
+              <a:buNone/>
+            </a:pPr>
+            <a:r>
+              <a:rPr lang="en-US" sz="950" dirty="0">
+                <a:solidFill>
+                  <a:srgbClr val="7A849C"/>
+                </a:solidFill>
+                <a:latin typeface="Malgun Gothic" pitchFamily="34" charset="0"/>
+                <a:ea typeface="Malgun Gothic" pitchFamily="34" charset="-122"/>
+                <a:cs typeface="Malgun Gothic" pitchFamily="34" charset="-120"/>
+              </a:rPr>
+              <a:t>HTL 코어(TPA, PhCz)는 삼차 질소라 고립전자쌍이 없다 — 원리적으로 앵커가 못 된다.</a:t>
+            </a:r>
+            <a:endParaRPr lang="en-US" sz="950" dirty="0"/>
+          </a:p>
+        </p:txBody>
+      </p:sp>
+      <p:sp>
+        <p:nvSpPr>
+          <p:cNvPr id="14" name="Shape 10"/>
+          <p:cNvSpPr/>
+          <p:nvPr/>
+        </p:nvSpPr>
+        <p:spPr>
+          <a:xfrm>
+            <a:off x="8174736" y="1691640"/>
+            <a:ext cx="3456432" cy="4160520"/>
+          </a:xfrm>
+          <a:prstGeom prst="roundRect">
+            <a:avLst>
+              <a:gd name="adj" fmla="val 1587"/>
+            </a:avLst>
+          </a:prstGeom>
+          <a:solidFill>
+            <a:srgbClr val="FFF6F3"/>
+          </a:solidFill>
+          <a:ln/>
+          <a:effectLst>
+            <a:outerShdw sx="100000" sy="100000" kx="0" ky="0" algn="bl" rotWithShape="0" blurRad="114300" dist="12700" dir="5400000">
+              <a:srgbClr val="9AA5BC">
+                <a:alpha val="22000"/>
+              </a:srgbClr>
+            </a:outerShdw>
+          </a:effectLst>
+        </p:spPr>
+      </p:sp>
+      <p:sp>
+        <p:nvSpPr>
+          <p:cNvPr id="15" name="Text 11"/>
+          <p:cNvSpPr/>
+          <p:nvPr/>
+        </p:nvSpPr>
+        <p:spPr>
+          <a:xfrm>
+            <a:off x="8430768" y="1874520"/>
+            <a:ext cx="2971800" cy="274320"/>
+          </a:xfrm>
+          <a:prstGeom prst="rect">
+            <a:avLst/>
+          </a:prstGeom>
+          <a:noFill/>
+          <a:ln/>
+        </p:spPr>
+        <p:txBody>
+          <a:bodyPr wrap="square" lIns="0" tIns="0" rIns="0" bIns="0" rtlCol="0" anchor="ctr"/>
+          <a:lstStyle/>
+          <a:p>
+            <a:pPr indent="0" marL="0">
+              <a:buNone/>
+            </a:pPr>
+            <a:r>
+              <a:rPr lang="en-US" sz="1250" b="1" dirty="0">
+                <a:solidFill>
+                  <a:srgbClr val="C0392B"/>
+                </a:solidFill>
+                <a:latin typeface="Malgun Gothic" pitchFamily="34" charset="0"/>
+                <a:ea typeface="Malgun Gothic" pitchFamily="34" charset="-122"/>
+                <a:cs typeface="Malgun Gothic" pitchFamily="34" charset="-120"/>
+              </a:rPr>
+              <a:t>재감사에서 철회한 값</a:t>
+            </a:r>
+            <a:endParaRPr lang="en-US" sz="1250" dirty="0"/>
+          </a:p>
+        </p:txBody>
+      </p:sp>
+      <p:sp>
+        <p:nvSpPr>
+          <p:cNvPr id="16" name="Text 12"/>
+          <p:cNvSpPr/>
+          <p:nvPr/>
+        </p:nvSpPr>
+        <p:spPr>
+          <a:xfrm>
+            <a:off x="8430768" y="2240280"/>
+            <a:ext cx="2971800" cy="219456"/>
+          </a:xfrm>
+          <a:prstGeom prst="rect">
+            <a:avLst/>
+          </a:prstGeom>
+          <a:noFill/>
+          <a:ln/>
+        </p:spPr>
+        <p:txBody>
+          <a:bodyPr wrap="square" lIns="0" tIns="0" rIns="0" bIns="0" rtlCol="0" anchor="ctr"/>
+          <a:lstStyle/>
+          <a:p>
+            <a:pPr indent="0" marL="0">
+              <a:buNone/>
+            </a:pPr>
+            <a:r>
+              <a:rPr lang="en-US" sz="950" b="1" dirty="0">
+                <a:solidFill>
+                  <a:srgbClr val="C0392B"/>
+                </a:solidFill>
+                <a:latin typeface="Calibri" pitchFamily="34" charset="0"/>
+                <a:ea typeface="Calibri" pitchFamily="34" charset="-122"/>
+                <a:cs typeface="Calibri" pitchFamily="34" charset="-120"/>
+              </a:rPr>
+              <a:t>Al2O3  0.910</a:t>
+            </a:r>
+            <a:endParaRPr lang="en-US" sz="950" dirty="0"/>
+          </a:p>
+        </p:txBody>
+      </p:sp>
+      <p:sp>
+        <p:nvSpPr>
+          <p:cNvPr id="17" name="Text 13"/>
+          <p:cNvSpPr/>
+          <p:nvPr/>
+        </p:nvSpPr>
+        <p:spPr>
+          <a:xfrm>
+            <a:off x="8430768" y="2441448"/>
+            <a:ext cx="2971800" cy="475488"/>
+          </a:xfrm>
+          <a:prstGeom prst="rect">
+            <a:avLst/>
+          </a:prstGeom>
+          <a:noFill/>
+          <a:ln/>
+        </p:spPr>
+        <p:txBody>
+          <a:bodyPr wrap="square" lIns="0" tIns="0" rIns="0" bIns="0" rtlCol="0" anchor="ctr"/>
+          <a:lstStyle/>
+          <a:p>
+            <a:pPr indent="0" marL="0">
+              <a:buNone/>
+            </a:pPr>
+            <a:r>
+              <a:rPr lang="en-US" sz="800" dirty="0">
+                <a:solidFill>
+                  <a:srgbClr val="7A849C"/>
+                </a:solidFill>
+                <a:latin typeface="Malgun Gothic" pitchFamily="34" charset="0"/>
+                <a:ea typeface="Malgun Gothic" pitchFamily="34" charset="-122"/>
+                <a:cs typeface="Malgun Gothic" pitchFamily="34" charset="-120"/>
+              </a:rPr>
+              <a:t>Al-rich Al10O10 클러스터 — 프로젝트 자체가 과결합으로 기록. 화학량론 Al4O6 는 0.422</a:t>
+            </a:r>
+            <a:endParaRPr lang="en-US" sz="800" dirty="0"/>
+          </a:p>
+        </p:txBody>
+      </p:sp>
+      <p:sp>
+        <p:nvSpPr>
+          <p:cNvPr id="18" name="Text 14"/>
+          <p:cNvSpPr/>
+          <p:nvPr/>
+        </p:nvSpPr>
+        <p:spPr>
+          <a:xfrm>
+            <a:off x="8430768" y="2953512"/>
+            <a:ext cx="2971800" cy="219456"/>
+          </a:xfrm>
+          <a:prstGeom prst="rect">
+            <a:avLst/>
+          </a:prstGeom>
+          <a:noFill/>
+          <a:ln/>
+        </p:spPr>
+        <p:txBody>
+          <a:bodyPr wrap="square" lIns="0" tIns="0" rIns="0" bIns="0" rtlCol="0" anchor="ctr"/>
+          <a:lstStyle/>
+          <a:p>
+            <a:pPr indent="0" marL="0">
+              <a:buNone/>
+            </a:pPr>
+            <a:r>
+              <a:rPr lang="en-US" sz="950" b="1" dirty="0">
+                <a:solidFill>
+                  <a:srgbClr val="C0392B"/>
+                </a:solidFill>
+                <a:latin typeface="Calibri" pitchFamily="34" charset="0"/>
+                <a:ea typeface="Calibri" pitchFamily="34" charset="-122"/>
+                <a:cs typeface="Calibri" pitchFamily="34" charset="-120"/>
+              </a:rPr>
+              <a:t>MoO3  −0.718</a:t>
+            </a:r>
+            <a:endParaRPr lang="en-US" sz="950" dirty="0"/>
+          </a:p>
+        </p:txBody>
+      </p:sp>
+      <p:sp>
+        <p:nvSpPr>
+          <p:cNvPr id="19" name="Text 15"/>
+          <p:cNvSpPr/>
+          <p:nvPr/>
+        </p:nvSpPr>
+        <p:spPr>
+          <a:xfrm>
+            <a:off x="8430768" y="3154680"/>
+            <a:ext cx="2971800" cy="475488"/>
+          </a:xfrm>
+          <a:prstGeom prst="rect">
+            <a:avLst/>
+          </a:prstGeom>
+          <a:noFill/>
+          <a:ln/>
+        </p:spPr>
+        <p:txBody>
+          <a:bodyPr wrap="square" lIns="0" tIns="0" rIns="0" bIns="0" rtlCol="0" anchor="ctr"/>
+          <a:lstStyle/>
+          <a:p>
+            <a:pPr indent="0" marL="0">
+              <a:buNone/>
+            </a:pPr>
+            <a:r>
+              <a:rPr lang="en-US" sz="800" dirty="0">
+                <a:solidFill>
+                  <a:srgbClr val="7A849C"/>
+                </a:solidFill>
+                <a:latin typeface="Malgun Gothic" pitchFamily="34" charset="0"/>
+                <a:ea typeface="Malgun Gothic" pitchFamily="34" charset="-122"/>
+                <a:cs typeface="Malgun Gothic" pitchFamily="34" charset="-120"/>
+              </a:rPr>
+              <a:t>미정련(xTB 기하 + DFT 단일점). Ag 위치를 DFT 로 완화하면 +0.284</a:t>
+            </a:r>
+            <a:endParaRPr lang="en-US" sz="800" dirty="0"/>
+          </a:p>
+        </p:txBody>
+      </p:sp>
+      <p:sp>
+        <p:nvSpPr>
+          <p:cNvPr id="20" name="Text 16"/>
+          <p:cNvSpPr/>
+          <p:nvPr/>
+        </p:nvSpPr>
+        <p:spPr>
+          <a:xfrm>
+            <a:off x="8430768" y="3666744"/>
+            <a:ext cx="2971800" cy="219456"/>
+          </a:xfrm>
+          <a:prstGeom prst="rect">
+            <a:avLst/>
+          </a:prstGeom>
+          <a:noFill/>
+          <a:ln/>
+        </p:spPr>
+        <p:txBody>
+          <a:bodyPr wrap="square" lIns="0" tIns="0" rIns="0" bIns="0" rtlCol="0" anchor="ctr"/>
+          <a:lstStyle/>
+          <a:p>
+            <a:pPr indent="0" marL="0">
+              <a:buNone/>
+            </a:pPr>
+            <a:r>
+              <a:rPr lang="en-US" sz="950" b="1" dirty="0">
+                <a:solidFill>
+                  <a:srgbClr val="C0392B"/>
+                </a:solidFill>
+                <a:latin typeface="Calibri" pitchFamily="34" charset="0"/>
+                <a:ea typeface="Calibri" pitchFamily="34" charset="-122"/>
+                <a:cs typeface="Calibri" pitchFamily="34" charset="-120"/>
+              </a:rPr>
+              <a:t>CuI @Cu 0.819 / CuSCN @Cu 0.567</a:t>
+            </a:r>
+            <a:endParaRPr lang="en-US" sz="950" dirty="0"/>
+          </a:p>
+        </p:txBody>
+      </p:sp>
+      <p:sp>
+        <p:nvSpPr>
+          <p:cNvPr id="21" name="Text 17"/>
+          <p:cNvSpPr/>
+          <p:nvPr/>
+        </p:nvSpPr>
+        <p:spPr>
+          <a:xfrm>
+            <a:off x="8430768" y="3867912"/>
+            <a:ext cx="2971800" cy="475488"/>
+          </a:xfrm>
+          <a:prstGeom prst="rect">
+            <a:avLst/>
+          </a:prstGeom>
+          <a:noFill/>
+          <a:ln/>
+        </p:spPr>
+        <p:txBody>
+          <a:bodyPr wrap="square" lIns="0" tIns="0" rIns="0" bIns="0" rtlCol="0" anchor="ctr"/>
+          <a:lstStyle/>
+          <a:p>
+            <a:pPr indent="0" marL="0">
+              <a:buNone/>
+            </a:pPr>
+            <a:r>
+              <a:rPr lang="en-US" sz="800" dirty="0">
+                <a:solidFill>
+                  <a:srgbClr val="7A849C"/>
+                </a:solidFill>
+                <a:latin typeface="Malgun Gothic" pitchFamily="34" charset="0"/>
+                <a:ea typeface="Malgun Gothic" pitchFamily="34" charset="-122"/>
+                <a:cs typeface="Malgun Gothic" pitchFamily="34" charset="-120"/>
+              </a:rPr>
+              <a:t>Ag–Cu 금속간 접촉. 표면 화학이 아니라 합금 결합</a:t>
+            </a:r>
+            <a:endParaRPr lang="en-US" sz="800" dirty="0"/>
+          </a:p>
+        </p:txBody>
+      </p:sp>
+      <p:sp>
+        <p:nvSpPr>
+          <p:cNvPr id="22" name="Text 18"/>
+          <p:cNvSpPr/>
+          <p:nvPr/>
+        </p:nvSpPr>
+        <p:spPr>
+          <a:xfrm>
+            <a:off x="8430768" y="4379976"/>
+            <a:ext cx="2971800" cy="219456"/>
+          </a:xfrm>
+          <a:prstGeom prst="rect">
+            <a:avLst/>
+          </a:prstGeom>
+          <a:noFill/>
+          <a:ln/>
+        </p:spPr>
+        <p:txBody>
+          <a:bodyPr wrap="square" lIns="0" tIns="0" rIns="0" bIns="0" rtlCol="0" anchor="ctr"/>
+          <a:lstStyle/>
+          <a:p>
+            <a:pPr indent="0" marL="0">
+              <a:buNone/>
+            </a:pPr>
+            <a:r>
+              <a:rPr lang="en-US" sz="950" b="1" dirty="0">
+                <a:solidFill>
+                  <a:srgbClr val="C0392B"/>
+                </a:solidFill>
+                <a:latin typeface="Calibri" pitchFamily="34" charset="0"/>
+                <a:ea typeface="Calibri" pitchFamily="34" charset="-122"/>
+                <a:cs typeface="Calibri" pitchFamily="34" charset="-120"/>
+              </a:rPr>
+              <a:t>ZnS 1.60</a:t>
+            </a:r>
+            <a:endParaRPr lang="en-US" sz="950" dirty="0"/>
+          </a:p>
+        </p:txBody>
+      </p:sp>
+      <p:sp>
+        <p:nvSpPr>
+          <p:cNvPr id="23" name="Text 19"/>
+          <p:cNvSpPr/>
+          <p:nvPr/>
+        </p:nvSpPr>
+        <p:spPr>
+          <a:xfrm>
+            <a:off x="8430768" y="4581144"/>
+            <a:ext cx="2971800" cy="475488"/>
+          </a:xfrm>
+          <a:prstGeom prst="rect">
+            <a:avLst/>
+          </a:prstGeom>
+          <a:noFill/>
+          <a:ln/>
+        </p:spPr>
+        <p:txBody>
+          <a:bodyPr wrap="square" lIns="0" tIns="0" rIns="0" bIns="0" rtlCol="0" anchor="ctr"/>
+          <a:lstStyle/>
+          <a:p>
+            <a:pPr indent="0" marL="0">
+              <a:buNone/>
+            </a:pPr>
+            <a:r>
+              <a:rPr lang="en-US" sz="800" dirty="0">
+                <a:solidFill>
+                  <a:srgbClr val="7A849C"/>
+                </a:solidFill>
+                <a:latin typeface="Malgun Gothic" pitchFamily="34" charset="0"/>
+                <a:ea typeface="Malgun Gothic" pitchFamily="34" charset="-122"/>
+                <a:cs typeface="Malgun Gothic" pitchFamily="34" charset="-120"/>
+              </a:rPr>
+              <a:t>우리 계산이 아님 — 문헌 prior (Kim AFM 2015)</a:t>
+            </a:r>
+            <a:endParaRPr lang="en-US" sz="800" dirty="0"/>
+          </a:p>
+        </p:txBody>
+      </p:sp>
+      <p:sp>
+        <p:nvSpPr>
+          <p:cNvPr id="24" name="Text 20"/>
+          <p:cNvSpPr/>
+          <p:nvPr/>
+        </p:nvSpPr>
+        <p:spPr>
+          <a:xfrm>
+            <a:off x="8430768" y="5093208"/>
+            <a:ext cx="2971800" cy="219456"/>
+          </a:xfrm>
+          <a:prstGeom prst="rect">
+            <a:avLst/>
+          </a:prstGeom>
+          <a:noFill/>
+          <a:ln/>
+        </p:spPr>
+        <p:txBody>
+          <a:bodyPr wrap="square" lIns="0" tIns="0" rIns="0" bIns="0" rtlCol="0" anchor="ctr"/>
+          <a:lstStyle/>
+          <a:p>
+            <a:pPr indent="0" marL="0">
+              <a:buNone/>
+            </a:pPr>
+            <a:r>
+              <a:rPr lang="en-US" sz="950" b="1" dirty="0">
+                <a:solidFill>
+                  <a:srgbClr val="C0392B"/>
+                </a:solidFill>
+                <a:latin typeface="Calibri" pitchFamily="34" charset="0"/>
+                <a:ea typeface="Calibri" pitchFamily="34" charset="-122"/>
+                <a:cs typeface="Calibri" pitchFamily="34" charset="-120"/>
+              </a:rPr>
+              <a:t>PhCN·ZnS 1.218</a:t>
+            </a:r>
+            <a:endParaRPr lang="en-US" sz="950" dirty="0"/>
+          </a:p>
+        </p:txBody>
+      </p:sp>
+      <p:sp>
+        <p:nvSpPr>
+          <p:cNvPr id="25" name="Text 21"/>
+          <p:cNvSpPr/>
+          <p:nvPr/>
+        </p:nvSpPr>
+        <p:spPr>
+          <a:xfrm>
+            <a:off x="8430768" y="5294376"/>
+            <a:ext cx="2971800" cy="475488"/>
+          </a:xfrm>
+          <a:prstGeom prst="rect">
+            <a:avLst/>
+          </a:prstGeom>
+          <a:noFill/>
+          <a:ln/>
+        </p:spPr>
+        <p:txBody>
+          <a:bodyPr wrap="square" lIns="0" tIns="0" rIns="0" bIns="0" rtlCol="0" anchor="ctr"/>
+          <a:lstStyle/>
+          <a:p>
+            <a:pPr indent="0" marL="0">
+              <a:buNone/>
+            </a:pPr>
+            <a:r>
+              <a:rPr lang="en-US" sz="800" dirty="0">
+                <a:solidFill>
+                  <a:srgbClr val="7A849C"/>
+                </a:solidFill>
+                <a:latin typeface="Malgun Gothic" pitchFamily="34" charset="0"/>
+                <a:ea typeface="Malgun Gothic" pitchFamily="34" charset="-122"/>
+                <a:cs typeface="Malgun Gothic" pitchFamily="34" charset="-120"/>
+              </a:rPr>
+              <a:t>ZnS 가 나이트릴에 붙는 에너지. Ag 결합이 아님</a:t>
+            </a:r>
+            <a:endParaRPr lang="en-US" sz="800" dirty="0"/>
+          </a:p>
+        </p:txBody>
+      </p:sp>
+    </p:spTree>
+  </p:cSld>
+  <p:clrMapOvr>
+    <a:masterClrMapping/>
+  </p:clrMapOvr>
+</p:sld>
+</file>
+
+<file path=ppt/slides/slide9.xml><?xml version="1.0" encoding="utf-8"?>
+<p:sld xmlns:a="http://schemas.openxmlformats.org/drawingml/2006/main" xmlns:r="http://schemas.openxmlformats.org/officeDocument/2006/relationships" xmlns:p="http://schemas.openxmlformats.org/presentationml/2006/main">
+  <p:cSld name="Slide 9">
     <p:bg>
       <p:bgPr>
         <a:solidFill>
@@ -18498,1227 +21381,6 @@
               <a:t>정량은 실측에, 재료 선택은 DFT 순위에 맡긴다</a:t>
             </a:r>
             <a:endParaRPr lang="en-US" sz="1050" dirty="0"/>
-          </a:p>
-        </p:txBody>
-      </p:sp>
-    </p:spTree>
-  </p:cSld>
-  <p:clrMapOvr>
-    <a:masterClrMapping/>
-  </p:clrMapOvr>
-</p:sld>
-</file>
-
-<file path=ppt/slides/slide9.xml><?xml version="1.0" encoding="utf-8"?>
-<p:sld xmlns:a="http://schemas.openxmlformats.org/drawingml/2006/main" xmlns:r="http://schemas.openxmlformats.org/officeDocument/2006/relationships" xmlns:p="http://schemas.openxmlformats.org/presentationml/2006/main">
-  <p:cSld name="Slide 9">
-    <p:bg>
-      <p:bgPr>
-        <a:solidFill>
-          <a:srgbClr val="F7F9FC"/>
-        </a:solidFill>
-      </p:bgPr>
-    </p:bg>
-    <p:spTree>
-      <p:nvGrpSpPr>
-        <p:cNvPr id="1" name=""/>
-        <p:cNvGrpSpPr/>
-        <p:nvPr/>
-      </p:nvGrpSpPr>
-      <p:grpSpPr>
-        <a:xfrm>
-          <a:off x="0" y="0"/>
-          <a:ext cx="0" cy="0"/>
-          <a:chOff x="0" y="0"/>
-          <a:chExt cx="0" cy="0"/>
-        </a:xfrm>
-      </p:grpSpPr>
-      <p:sp>
-        <p:nvSpPr>
-          <p:cNvPr id="2" name="Text 0"/>
-          <p:cNvSpPr/>
-          <p:nvPr/>
-        </p:nvSpPr>
-        <p:spPr>
-          <a:xfrm>
-            <a:off x="566928" y="384048"/>
-            <a:ext cx="11064240" cy="658368"/>
-          </a:xfrm>
-          <a:prstGeom prst="rect">
-            <a:avLst/>
-          </a:prstGeom>
-          <a:noFill/>
-          <a:ln/>
-        </p:spPr>
-        <p:txBody>
-          <a:bodyPr wrap="square" lIns="0" tIns="0" rIns="0" bIns="0" rtlCol="0" anchor="ctr"/>
-          <a:lstStyle/>
-          <a:p>
-            <a:pPr indent="0" marL="0">
-              <a:buNone/>
-            </a:pPr>
-            <a:r>
-              <a:rPr lang="en-US" sz="3200" b="1" dirty="0">
-                <a:solidFill>
-                  <a:srgbClr val="1A1F2E"/>
-                </a:solidFill>
-                <a:latin typeface="Malgun Gothic" pitchFamily="34" charset="0"/>
-                <a:ea typeface="Malgun Gothic" pitchFamily="34" charset="-122"/>
-                <a:cs typeface="Malgun Gothic" pitchFamily="34" charset="-120"/>
-              </a:rPr>
-              <a:t>확보한 실측 데이터</a:t>
-            </a:r>
-            <a:endParaRPr lang="en-US" sz="3200" dirty="0"/>
-          </a:p>
-        </p:txBody>
-      </p:sp>
-      <p:sp>
-        <p:nvSpPr>
-          <p:cNvPr id="3" name="Text 1"/>
-          <p:cNvSpPr/>
-          <p:nvPr/>
-        </p:nvSpPr>
-        <p:spPr>
-          <a:xfrm>
-            <a:off x="566928" y="1042416"/>
-            <a:ext cx="11064240" cy="384048"/>
-          </a:xfrm>
-          <a:prstGeom prst="rect">
-            <a:avLst/>
-          </a:prstGeom>
-          <a:noFill/>
-          <a:ln/>
-        </p:spPr>
-        <p:txBody>
-          <a:bodyPr wrap="square" lIns="0" tIns="0" rIns="0" bIns="0" rtlCol="0" anchor="ctr"/>
-          <a:lstStyle/>
-          <a:p>
-            <a:pPr indent="0" marL="0">
-              <a:buNone/>
-            </a:pPr>
-            <a:r>
-              <a:rPr lang="en-US" sz="1400" dirty="0">
-                <a:solidFill>
-                  <a:srgbClr val="7A849C"/>
-                </a:solidFill>
-                <a:latin typeface="Malgun Gothic" pitchFamily="34" charset="0"/>
-                <a:ea typeface="Malgun Gothic" pitchFamily="34" charset="-122"/>
-                <a:cs typeface="Malgun Gothic" pitchFamily="34" charset="-120"/>
-              </a:rPr>
-              <a:t>2 seed × 7 두께 = 15 시료, 절대 T/R 분광 + 4-point probe</a:t>
-            </a:r>
-            <a:endParaRPr lang="en-US" sz="1400" dirty="0"/>
-          </a:p>
-        </p:txBody>
-      </p:sp>
-      <p:sp>
-        <p:nvSpPr>
-          <p:cNvPr id="4" name="Shape 2"/>
-          <p:cNvSpPr/>
-          <p:nvPr/>
-        </p:nvSpPr>
-        <p:spPr>
-          <a:xfrm>
-            <a:off x="566928" y="1691640"/>
-            <a:ext cx="5394960" cy="4160520"/>
-          </a:xfrm>
-          <a:prstGeom prst="roundRect">
-            <a:avLst>
-              <a:gd name="adj" fmla="val 1319"/>
-            </a:avLst>
-          </a:prstGeom>
-          <a:solidFill>
-            <a:srgbClr val="FFFFFF"/>
-          </a:solidFill>
-          <a:ln/>
-          <a:effectLst>
-            <a:outerShdw sx="100000" sy="100000" kx="0" ky="0" algn="bl" rotWithShape="0" blurRad="114300" dist="12700" dir="5400000">
-              <a:srgbClr val="9AA5BC">
-                <a:alpha val="22000"/>
-              </a:srgbClr>
-            </a:outerShdw>
-          </a:effectLst>
-        </p:spPr>
-      </p:sp>
-      <p:sp>
-        <p:nvSpPr>
-          <p:cNvPr id="5" name="Text 3"/>
-          <p:cNvSpPr/>
-          <p:nvPr/>
-        </p:nvSpPr>
-        <p:spPr>
-          <a:xfrm>
-            <a:off x="868680" y="1874520"/>
-            <a:ext cx="4846320" cy="320040"/>
-          </a:xfrm>
-          <a:prstGeom prst="rect">
-            <a:avLst/>
-          </a:prstGeom>
-          <a:noFill/>
-          <a:ln/>
-        </p:spPr>
-        <p:txBody>
-          <a:bodyPr wrap="square" lIns="0" tIns="0" rIns="0" bIns="0" rtlCol="0" anchor="ctr"/>
-          <a:lstStyle/>
-          <a:p>
-            <a:pPr indent="0" marL="0">
-              <a:buNone/>
-            </a:pPr>
-            <a:r>
-              <a:rPr lang="en-US" sz="1400" b="1" dirty="0">
-                <a:solidFill>
-                  <a:srgbClr val="1A1F2E"/>
-                </a:solidFill>
-                <a:latin typeface="Malgun Gothic" pitchFamily="34" charset="0"/>
-                <a:ea typeface="Malgun Gothic" pitchFamily="34" charset="-122"/>
-                <a:cs typeface="Malgun Gothic" pitchFamily="34" charset="-120"/>
-              </a:rPr>
-              <a:t>면저항 — 두 seed 비교</a:t>
-            </a:r>
-            <a:endParaRPr lang="en-US" sz="1400" dirty="0"/>
-          </a:p>
-        </p:txBody>
-      </p:sp>
-      <p:graphicFrame>
-        <p:nvGraphicFramePr>
-          <p:cNvPr id="6" name="Chart 0" descr=""/>
-          <p:cNvGraphicFramePr/>
-          <p:nvPr/>
-        </p:nvGraphicFramePr>
-        <p:xfrm>
-          <a:off x="868680" y="2240280"/>
-          <a:ext cx="4846320" cy="3383280"/>
-        </p:xfrm>
-        <a:graphic xmlns:a="http://schemas.openxmlformats.org/drawingml/2006/main">
-          <a:graphicData uri="http://schemas.openxmlformats.org/drawingml/2006/chart">
-            <c:chart xmlns:c="http://schemas.openxmlformats.org/drawingml/2006/chart" r:id="rId1"/>
-          </a:graphicData>
-        </a:graphic>
-      </p:graphicFrame>
-      <p:sp>
-        <p:nvSpPr>
-          <p:cNvPr id="7" name="Shape 4"/>
-          <p:cNvSpPr/>
-          <p:nvPr/>
-        </p:nvSpPr>
-        <p:spPr>
-          <a:xfrm>
-            <a:off x="6217920" y="1691640"/>
-            <a:ext cx="5413248" cy="4160520"/>
-          </a:xfrm>
-          <a:prstGeom prst="roundRect">
-            <a:avLst>
-              <a:gd name="adj" fmla="val 1319"/>
-            </a:avLst>
-          </a:prstGeom>
-          <a:solidFill>
-            <a:srgbClr val="FFFFFF"/>
-          </a:solidFill>
-          <a:ln/>
-          <a:effectLst>
-            <a:outerShdw sx="100000" sy="100000" kx="0" ky="0" algn="bl" rotWithShape="0" blurRad="114300" dist="12700" dir="5400000">
-              <a:srgbClr val="9AA5BC">
-                <a:alpha val="22000"/>
-              </a:srgbClr>
-            </a:outerShdw>
-          </a:effectLst>
-        </p:spPr>
-      </p:sp>
-      <p:sp>
-        <p:nvSpPr>
-          <p:cNvPr id="8" name="Text 5"/>
-          <p:cNvSpPr/>
-          <p:nvPr/>
-        </p:nvSpPr>
-        <p:spPr>
-          <a:xfrm>
-            <a:off x="6510528" y="1874520"/>
-            <a:ext cx="4846320" cy="320040"/>
-          </a:xfrm>
-          <a:prstGeom prst="rect">
-            <a:avLst/>
-          </a:prstGeom>
-          <a:noFill/>
-          <a:ln/>
-        </p:spPr>
-        <p:txBody>
-          <a:bodyPr wrap="square" lIns="0" tIns="0" rIns="0" bIns="0" rtlCol="0" anchor="ctr"/>
-          <a:lstStyle/>
-          <a:p>
-            <a:pPr indent="0" marL="0">
-              <a:buNone/>
-            </a:pPr>
-            <a:r>
-              <a:rPr lang="en-US" sz="1400" b="1" dirty="0">
-                <a:solidFill>
-                  <a:srgbClr val="1A1F2E"/>
-                </a:solidFill>
-                <a:latin typeface="Malgun Gothic" pitchFamily="34" charset="0"/>
-                <a:ea typeface="Malgun Gothic" pitchFamily="34" charset="-122"/>
-                <a:cs typeface="Malgun Gothic" pitchFamily="34" charset="-120"/>
-              </a:rPr>
-              <a:t>데이터 구성</a:t>
-            </a:r>
-            <a:endParaRPr lang="en-US" sz="1400" dirty="0"/>
-          </a:p>
-        </p:txBody>
-      </p:sp>
-      <p:sp>
-        <p:nvSpPr>
-          <p:cNvPr id="9" name="Shape 6"/>
-          <p:cNvSpPr/>
-          <p:nvPr/>
-        </p:nvSpPr>
-        <p:spPr>
-          <a:xfrm>
-            <a:off x="6510528" y="2286000"/>
-            <a:ext cx="384048" cy="384048"/>
-          </a:xfrm>
-          <a:prstGeom prst="ellipse">
-            <a:avLst/>
-          </a:prstGeom>
-          <a:solidFill>
-            <a:srgbClr val="1E2761"/>
-          </a:solidFill>
-          <a:ln/>
-        </p:spPr>
-      </p:sp>
-      <p:sp>
-        <p:nvSpPr>
-          <p:cNvPr id="10" name="Text 7"/>
-          <p:cNvSpPr/>
-          <p:nvPr/>
-        </p:nvSpPr>
-        <p:spPr>
-          <a:xfrm>
-            <a:off x="6510528" y="2286000"/>
-            <a:ext cx="384048" cy="384048"/>
-          </a:xfrm>
-          <a:prstGeom prst="rect">
-            <a:avLst/>
-          </a:prstGeom>
-          <a:noFill/>
-          <a:ln/>
-        </p:spPr>
-        <p:txBody>
-          <a:bodyPr wrap="square" lIns="0" tIns="0" rIns="0" bIns="0" rtlCol="0" anchor="ctr"/>
-          <a:lstStyle/>
-          <a:p>
-            <a:pPr algn="ctr" indent="0" marL="0">
-              <a:buNone/>
-            </a:pPr>
-            <a:r>
-              <a:rPr lang="en-US" sz="1500" b="1" dirty="0">
-                <a:solidFill>
-                  <a:srgbClr val="FFFFFF"/>
-                </a:solidFill>
-                <a:latin typeface="Calibri" pitchFamily="34" charset="0"/>
-                <a:ea typeface="Calibri" pitchFamily="34" charset="-122"/>
-                <a:cs typeface="Calibri" pitchFamily="34" charset="-120"/>
-              </a:rPr>
-              <a:t>1</a:t>
-            </a:r>
-            <a:endParaRPr lang="en-US" sz="1500" dirty="0"/>
-          </a:p>
-        </p:txBody>
-      </p:sp>
-      <p:sp>
-        <p:nvSpPr>
-          <p:cNvPr id="11" name="Text 8"/>
-          <p:cNvSpPr/>
-          <p:nvPr/>
-        </p:nvSpPr>
-        <p:spPr>
-          <a:xfrm>
-            <a:off x="7004304" y="2267712"/>
-            <a:ext cx="1828800" cy="256032"/>
-          </a:xfrm>
-          <a:prstGeom prst="rect">
-            <a:avLst/>
-          </a:prstGeom>
-          <a:noFill/>
-          <a:ln/>
-        </p:spPr>
-        <p:txBody>
-          <a:bodyPr wrap="square" lIns="0" tIns="0" rIns="0" bIns="0" rtlCol="0" anchor="ctr"/>
-          <a:lstStyle/>
-          <a:p>
-            <a:pPr indent="0" marL="0">
-              <a:buNone/>
-            </a:pPr>
-            <a:r>
-              <a:rPr lang="en-US" sz="1150" b="1" dirty="0">
-                <a:solidFill>
-                  <a:srgbClr val="1A1F2E"/>
-                </a:solidFill>
-                <a:latin typeface="Malgun Gothic" pitchFamily="34" charset="0"/>
-                <a:ea typeface="Malgun Gothic" pitchFamily="34" charset="-122"/>
-                <a:cs typeface="Malgun Gothic" pitchFamily="34" charset="-120"/>
-              </a:rPr>
-              <a:t>절대 투과도 T</a:t>
-            </a:r>
-            <a:endParaRPr lang="en-US" sz="1150" dirty="0"/>
-          </a:p>
-        </p:txBody>
-      </p:sp>
-      <p:sp>
-        <p:nvSpPr>
-          <p:cNvPr id="12" name="Text 9"/>
-          <p:cNvSpPr/>
-          <p:nvPr/>
-        </p:nvSpPr>
-        <p:spPr>
-          <a:xfrm>
-            <a:off x="7004304" y="2468880"/>
-            <a:ext cx="4297680" cy="237744"/>
-          </a:xfrm>
-          <a:prstGeom prst="rect">
-            <a:avLst/>
-          </a:prstGeom>
-          <a:noFill/>
-          <a:ln/>
-        </p:spPr>
-        <p:txBody>
-          <a:bodyPr wrap="square" lIns="0" tIns="0" rIns="0" bIns="0" rtlCol="0" anchor="ctr"/>
-          <a:lstStyle/>
-          <a:p>
-            <a:pPr indent="0" marL="0">
-              <a:buNone/>
-            </a:pPr>
-            <a:r>
-              <a:rPr lang="en-US" sz="950" dirty="0">
-                <a:solidFill>
-                  <a:srgbClr val="7A849C"/>
-                </a:solidFill>
-                <a:latin typeface="Calibri" pitchFamily="34" charset="0"/>
-                <a:ea typeface="Calibri" pitchFamily="34" charset="-122"/>
-                <a:cs typeface="Calibri" pitchFamily="34" charset="-120"/>
-              </a:rPr>
-              <a:t>0° / 180°, 350–850 nm, 2 nm</a:t>
-            </a:r>
-            <a:endParaRPr lang="en-US" sz="950" dirty="0"/>
-          </a:p>
-        </p:txBody>
-      </p:sp>
-      <p:sp>
-        <p:nvSpPr>
-          <p:cNvPr id="13" name="Shape 10"/>
-          <p:cNvSpPr/>
-          <p:nvPr/>
-        </p:nvSpPr>
-        <p:spPr>
-          <a:xfrm>
-            <a:off x="6510528" y="2788920"/>
-            <a:ext cx="384048" cy="384048"/>
-          </a:xfrm>
-          <a:prstGeom prst="ellipse">
-            <a:avLst/>
-          </a:prstGeom>
-          <a:solidFill>
-            <a:srgbClr val="1E2761"/>
-          </a:solidFill>
-          <a:ln/>
-        </p:spPr>
-      </p:sp>
-      <p:sp>
-        <p:nvSpPr>
-          <p:cNvPr id="14" name="Text 11"/>
-          <p:cNvSpPr/>
-          <p:nvPr/>
-        </p:nvSpPr>
-        <p:spPr>
-          <a:xfrm>
-            <a:off x="6510528" y="2788920"/>
-            <a:ext cx="384048" cy="384048"/>
-          </a:xfrm>
-          <a:prstGeom prst="rect">
-            <a:avLst/>
-          </a:prstGeom>
-          <a:noFill/>
-          <a:ln/>
-        </p:spPr>
-        <p:txBody>
-          <a:bodyPr wrap="square" lIns="0" tIns="0" rIns="0" bIns="0" rtlCol="0" anchor="ctr"/>
-          <a:lstStyle/>
-          <a:p>
-            <a:pPr algn="ctr" indent="0" marL="0">
-              <a:buNone/>
-            </a:pPr>
-            <a:r>
-              <a:rPr lang="en-US" sz="1500" b="1" dirty="0">
-                <a:solidFill>
-                  <a:srgbClr val="FFFFFF"/>
-                </a:solidFill>
-                <a:latin typeface="Calibri" pitchFamily="34" charset="0"/>
-                <a:ea typeface="Calibri" pitchFamily="34" charset="-122"/>
-                <a:cs typeface="Calibri" pitchFamily="34" charset="-120"/>
-              </a:rPr>
-              <a:t>2</a:t>
-            </a:r>
-            <a:endParaRPr lang="en-US" sz="1500" dirty="0"/>
-          </a:p>
-        </p:txBody>
-      </p:sp>
-      <p:sp>
-        <p:nvSpPr>
-          <p:cNvPr id="15" name="Text 12"/>
-          <p:cNvSpPr/>
-          <p:nvPr/>
-        </p:nvSpPr>
-        <p:spPr>
-          <a:xfrm>
-            <a:off x="7004304" y="2770632"/>
-            <a:ext cx="1828800" cy="256032"/>
-          </a:xfrm>
-          <a:prstGeom prst="rect">
-            <a:avLst/>
-          </a:prstGeom>
-          <a:noFill/>
-          <a:ln/>
-        </p:spPr>
-        <p:txBody>
-          <a:bodyPr wrap="square" lIns="0" tIns="0" rIns="0" bIns="0" rtlCol="0" anchor="ctr"/>
-          <a:lstStyle/>
-          <a:p>
-            <a:pPr indent="0" marL="0">
-              <a:buNone/>
-            </a:pPr>
-            <a:r>
-              <a:rPr lang="en-US" sz="1150" b="1" dirty="0">
-                <a:solidFill>
-                  <a:srgbClr val="1A1F2E"/>
-                </a:solidFill>
-                <a:latin typeface="Malgun Gothic" pitchFamily="34" charset="0"/>
-                <a:ea typeface="Malgun Gothic" pitchFamily="34" charset="-122"/>
-                <a:cs typeface="Malgun Gothic" pitchFamily="34" charset="-120"/>
-              </a:rPr>
-              <a:t>절대 반사도 R</a:t>
-            </a:r>
-            <a:endParaRPr lang="en-US" sz="1150" dirty="0"/>
-          </a:p>
-        </p:txBody>
-      </p:sp>
-      <p:sp>
-        <p:nvSpPr>
-          <p:cNvPr id="16" name="Text 13"/>
-          <p:cNvSpPr/>
-          <p:nvPr/>
-        </p:nvSpPr>
-        <p:spPr>
-          <a:xfrm>
-            <a:off x="7004304" y="2971800"/>
-            <a:ext cx="4297680" cy="237744"/>
-          </a:xfrm>
-          <a:prstGeom prst="rect">
-            <a:avLst/>
-          </a:prstGeom>
-          <a:noFill/>
-          <a:ln/>
-        </p:spPr>
-        <p:txBody>
-          <a:bodyPr wrap="square" lIns="0" tIns="0" rIns="0" bIns="0" rtlCol="0" anchor="ctr"/>
-          <a:lstStyle/>
-          <a:p>
-            <a:pPr indent="0" marL="0">
-              <a:buNone/>
-            </a:pPr>
-            <a:r>
-              <a:rPr lang="en-US" sz="950" dirty="0">
-                <a:solidFill>
-                  <a:srgbClr val="7A849C"/>
-                </a:solidFill>
-                <a:latin typeface="Calibri" pitchFamily="34" charset="0"/>
-                <a:ea typeface="Calibri" pitchFamily="34" charset="-122"/>
-                <a:cs typeface="Calibri" pitchFamily="34" charset="-120"/>
-              </a:rPr>
-              <a:t>6° / 12°, 뒷면 보정 84.3 %</a:t>
-            </a:r>
-            <a:endParaRPr lang="en-US" sz="950" dirty="0"/>
-          </a:p>
-        </p:txBody>
-      </p:sp>
-      <p:sp>
-        <p:nvSpPr>
-          <p:cNvPr id="17" name="Shape 14"/>
-          <p:cNvSpPr/>
-          <p:nvPr/>
-        </p:nvSpPr>
-        <p:spPr>
-          <a:xfrm>
-            <a:off x="6510528" y="3291840"/>
-            <a:ext cx="384048" cy="384048"/>
-          </a:xfrm>
-          <a:prstGeom prst="ellipse">
-            <a:avLst/>
-          </a:prstGeom>
-          <a:solidFill>
-            <a:srgbClr val="1E2761"/>
-          </a:solidFill>
-          <a:ln/>
-        </p:spPr>
-      </p:sp>
-      <p:sp>
-        <p:nvSpPr>
-          <p:cNvPr id="18" name="Text 15"/>
-          <p:cNvSpPr/>
-          <p:nvPr/>
-        </p:nvSpPr>
-        <p:spPr>
-          <a:xfrm>
-            <a:off x="6510528" y="3291840"/>
-            <a:ext cx="384048" cy="384048"/>
-          </a:xfrm>
-          <a:prstGeom prst="rect">
-            <a:avLst/>
-          </a:prstGeom>
-          <a:noFill/>
-          <a:ln/>
-        </p:spPr>
-        <p:txBody>
-          <a:bodyPr wrap="square" lIns="0" tIns="0" rIns="0" bIns="0" rtlCol="0" anchor="ctr"/>
-          <a:lstStyle/>
-          <a:p>
-            <a:pPr algn="ctr" indent="0" marL="0">
-              <a:buNone/>
-            </a:pPr>
-            <a:r>
-              <a:rPr lang="en-US" sz="1500" b="1" dirty="0">
-                <a:solidFill>
-                  <a:srgbClr val="FFFFFF"/>
-                </a:solidFill>
-                <a:latin typeface="Calibri" pitchFamily="34" charset="0"/>
-                <a:ea typeface="Calibri" pitchFamily="34" charset="-122"/>
-                <a:cs typeface="Calibri" pitchFamily="34" charset="-120"/>
-              </a:rPr>
-              <a:t>3</a:t>
-            </a:r>
-            <a:endParaRPr lang="en-US" sz="1500" dirty="0"/>
-          </a:p>
-        </p:txBody>
-      </p:sp>
-      <p:sp>
-        <p:nvSpPr>
-          <p:cNvPr id="19" name="Text 16"/>
-          <p:cNvSpPr/>
-          <p:nvPr/>
-        </p:nvSpPr>
-        <p:spPr>
-          <a:xfrm>
-            <a:off x="7004304" y="3273552"/>
-            <a:ext cx="1828800" cy="256032"/>
-          </a:xfrm>
-          <a:prstGeom prst="rect">
-            <a:avLst/>
-          </a:prstGeom>
-          <a:noFill/>
-          <a:ln/>
-        </p:spPr>
-        <p:txBody>
-          <a:bodyPr wrap="square" lIns="0" tIns="0" rIns="0" bIns="0" rtlCol="0" anchor="ctr"/>
-          <a:lstStyle/>
-          <a:p>
-            <a:pPr indent="0" marL="0">
-              <a:buNone/>
-            </a:pPr>
-            <a:r>
-              <a:rPr lang="en-US" sz="1150" b="1" dirty="0">
-                <a:solidFill>
-                  <a:srgbClr val="1A1F2E"/>
-                </a:solidFill>
-                <a:latin typeface="Malgun Gothic" pitchFamily="34" charset="0"/>
-                <a:ea typeface="Malgun Gothic" pitchFamily="34" charset="-122"/>
-                <a:cs typeface="Malgun Gothic" pitchFamily="34" charset="-120"/>
-              </a:rPr>
-              <a:t>흡수도 A</a:t>
-            </a:r>
-            <a:endParaRPr lang="en-US" sz="1150" dirty="0"/>
-          </a:p>
-        </p:txBody>
-      </p:sp>
-      <p:sp>
-        <p:nvSpPr>
-          <p:cNvPr id="20" name="Text 17"/>
-          <p:cNvSpPr/>
-          <p:nvPr/>
-        </p:nvSpPr>
-        <p:spPr>
-          <a:xfrm>
-            <a:off x="7004304" y="3474720"/>
-            <a:ext cx="4297680" cy="237744"/>
-          </a:xfrm>
-          <a:prstGeom prst="rect">
-            <a:avLst/>
-          </a:prstGeom>
-          <a:noFill/>
-          <a:ln/>
-        </p:spPr>
-        <p:txBody>
-          <a:bodyPr wrap="square" lIns="0" tIns="0" rIns="0" bIns="0" rtlCol="0" anchor="ctr"/>
-          <a:lstStyle/>
-          <a:p>
-            <a:pPr indent="0" marL="0">
-              <a:buNone/>
-            </a:pPr>
-            <a:r>
-              <a:rPr lang="en-US" sz="950" dirty="0">
-                <a:solidFill>
-                  <a:srgbClr val="7A849C"/>
-                </a:solidFill>
-                <a:latin typeface="Calibri" pitchFamily="34" charset="0"/>
-                <a:ea typeface="Calibri" pitchFamily="34" charset="-122"/>
-                <a:cs typeface="Calibri" pitchFamily="34" charset="-120"/>
-              </a:rPr>
-              <a:t>1 − T − R, σ = 0.15 %p</a:t>
-            </a:r>
-            <a:endParaRPr lang="en-US" sz="950" dirty="0"/>
-          </a:p>
-        </p:txBody>
-      </p:sp>
-      <p:sp>
-        <p:nvSpPr>
-          <p:cNvPr id="21" name="Shape 18"/>
-          <p:cNvSpPr/>
-          <p:nvPr/>
-        </p:nvSpPr>
-        <p:spPr>
-          <a:xfrm>
-            <a:off x="6510528" y="3794760"/>
-            <a:ext cx="384048" cy="384048"/>
-          </a:xfrm>
-          <a:prstGeom prst="ellipse">
-            <a:avLst/>
-          </a:prstGeom>
-          <a:solidFill>
-            <a:srgbClr val="1E2761"/>
-          </a:solidFill>
-          <a:ln/>
-        </p:spPr>
-      </p:sp>
-      <p:sp>
-        <p:nvSpPr>
-          <p:cNvPr id="22" name="Text 19"/>
-          <p:cNvSpPr/>
-          <p:nvPr/>
-        </p:nvSpPr>
-        <p:spPr>
-          <a:xfrm>
-            <a:off x="6510528" y="3794760"/>
-            <a:ext cx="384048" cy="384048"/>
-          </a:xfrm>
-          <a:prstGeom prst="rect">
-            <a:avLst/>
-          </a:prstGeom>
-          <a:noFill/>
-          <a:ln/>
-        </p:spPr>
-        <p:txBody>
-          <a:bodyPr wrap="square" lIns="0" tIns="0" rIns="0" bIns="0" rtlCol="0" anchor="ctr"/>
-          <a:lstStyle/>
-          <a:p>
-            <a:pPr algn="ctr" indent="0" marL="0">
-              <a:buNone/>
-            </a:pPr>
-            <a:r>
-              <a:rPr lang="en-US" sz="1500" b="1" dirty="0">
-                <a:solidFill>
-                  <a:srgbClr val="FFFFFF"/>
-                </a:solidFill>
-                <a:latin typeface="Calibri" pitchFamily="34" charset="0"/>
-                <a:ea typeface="Calibri" pitchFamily="34" charset="-122"/>
-                <a:cs typeface="Calibri" pitchFamily="34" charset="-120"/>
-              </a:rPr>
-              <a:t>4</a:t>
-            </a:r>
-            <a:endParaRPr lang="en-US" sz="1500" dirty="0"/>
-          </a:p>
-        </p:txBody>
-      </p:sp>
-      <p:sp>
-        <p:nvSpPr>
-          <p:cNvPr id="23" name="Text 20"/>
-          <p:cNvSpPr/>
-          <p:nvPr/>
-        </p:nvSpPr>
-        <p:spPr>
-          <a:xfrm>
-            <a:off x="7004304" y="3776472"/>
-            <a:ext cx="1828800" cy="256032"/>
-          </a:xfrm>
-          <a:prstGeom prst="rect">
-            <a:avLst/>
-          </a:prstGeom>
-          <a:noFill/>
-          <a:ln/>
-        </p:spPr>
-        <p:txBody>
-          <a:bodyPr wrap="square" lIns="0" tIns="0" rIns="0" bIns="0" rtlCol="0" anchor="ctr"/>
-          <a:lstStyle/>
-          <a:p>
-            <a:pPr indent="0" marL="0">
-              <a:buNone/>
-            </a:pPr>
-            <a:r>
-              <a:rPr lang="en-US" sz="1150" b="1" dirty="0">
-                <a:solidFill>
-                  <a:srgbClr val="1A1F2E"/>
-                </a:solidFill>
-                <a:latin typeface="Malgun Gothic" pitchFamily="34" charset="0"/>
-                <a:ea typeface="Malgun Gothic" pitchFamily="34" charset="-122"/>
-                <a:cs typeface="Malgun Gothic" pitchFamily="34" charset="-120"/>
-              </a:rPr>
-              <a:t>면저항</a:t>
-            </a:r>
-            <a:endParaRPr lang="en-US" sz="1150" dirty="0"/>
-          </a:p>
-        </p:txBody>
-      </p:sp>
-      <p:sp>
-        <p:nvSpPr>
-          <p:cNvPr id="24" name="Text 21"/>
-          <p:cNvSpPr/>
-          <p:nvPr/>
-        </p:nvSpPr>
-        <p:spPr>
-          <a:xfrm>
-            <a:off x="7004304" y="3977640"/>
-            <a:ext cx="4297680" cy="237744"/>
-          </a:xfrm>
-          <a:prstGeom prst="rect">
-            <a:avLst/>
-          </a:prstGeom>
-          <a:noFill/>
-          <a:ln/>
-        </p:spPr>
-        <p:txBody>
-          <a:bodyPr wrap="square" lIns="0" tIns="0" rIns="0" bIns="0" rtlCol="0" anchor="ctr"/>
-          <a:lstStyle/>
-          <a:p>
-            <a:pPr indent="0" marL="0">
-              <a:buNone/>
-            </a:pPr>
-            <a:r>
-              <a:rPr lang="en-US" sz="950" dirty="0">
-                <a:solidFill>
-                  <a:srgbClr val="7A849C"/>
-                </a:solidFill>
-                <a:latin typeface="Calibri" pitchFamily="34" charset="0"/>
-                <a:ea typeface="Calibri" pitchFamily="34" charset="-122"/>
-                <a:cs typeface="Calibri" pitchFamily="34" charset="-120"/>
-              </a:rPr>
-              <a:t>15 시료, 4-point probe</a:t>
-            </a:r>
-            <a:endParaRPr lang="en-US" sz="950" dirty="0"/>
-          </a:p>
-        </p:txBody>
-      </p:sp>
-      <p:sp>
-        <p:nvSpPr>
-          <p:cNvPr id="25" name="Shape 22"/>
-          <p:cNvSpPr/>
-          <p:nvPr/>
-        </p:nvSpPr>
-        <p:spPr>
-          <a:xfrm>
-            <a:off x="6510528" y="4297680"/>
-            <a:ext cx="384048" cy="384048"/>
-          </a:xfrm>
-          <a:prstGeom prst="ellipse">
-            <a:avLst/>
-          </a:prstGeom>
-          <a:solidFill>
-            <a:srgbClr val="1E2761"/>
-          </a:solidFill>
-          <a:ln/>
-        </p:spPr>
-      </p:sp>
-      <p:sp>
-        <p:nvSpPr>
-          <p:cNvPr id="26" name="Text 23"/>
-          <p:cNvSpPr/>
-          <p:nvPr/>
-        </p:nvSpPr>
-        <p:spPr>
-          <a:xfrm>
-            <a:off x="6510528" y="4297680"/>
-            <a:ext cx="384048" cy="384048"/>
-          </a:xfrm>
-          <a:prstGeom prst="rect">
-            <a:avLst/>
-          </a:prstGeom>
-          <a:noFill/>
-          <a:ln/>
-        </p:spPr>
-        <p:txBody>
-          <a:bodyPr wrap="square" lIns="0" tIns="0" rIns="0" bIns="0" rtlCol="0" anchor="ctr"/>
-          <a:lstStyle/>
-          <a:p>
-            <a:pPr algn="ctr" indent="0" marL="0">
-              <a:buNone/>
-            </a:pPr>
-            <a:r>
-              <a:rPr lang="en-US" sz="1500" b="1" dirty="0">
-                <a:solidFill>
-                  <a:srgbClr val="FFFFFF"/>
-                </a:solidFill>
-                <a:latin typeface="Calibri" pitchFamily="34" charset="0"/>
-                <a:ea typeface="Calibri" pitchFamily="34" charset="-122"/>
-                <a:cs typeface="Calibri" pitchFamily="34" charset="-120"/>
-              </a:rPr>
-              <a:t>5</a:t>
-            </a:r>
-            <a:endParaRPr lang="en-US" sz="1500" dirty="0"/>
-          </a:p>
-        </p:txBody>
-      </p:sp>
-      <p:sp>
-        <p:nvSpPr>
-          <p:cNvPr id="27" name="Text 24"/>
-          <p:cNvSpPr/>
-          <p:nvPr/>
-        </p:nvSpPr>
-        <p:spPr>
-          <a:xfrm>
-            <a:off x="7004304" y="4279392"/>
-            <a:ext cx="1828800" cy="256032"/>
-          </a:xfrm>
-          <a:prstGeom prst="rect">
-            <a:avLst/>
-          </a:prstGeom>
-          <a:noFill/>
-          <a:ln/>
-        </p:spPr>
-        <p:txBody>
-          <a:bodyPr wrap="square" lIns="0" tIns="0" rIns="0" bIns="0" rtlCol="0" anchor="ctr"/>
-          <a:lstStyle/>
-          <a:p>
-            <a:pPr indent="0" marL="0">
-              <a:buNone/>
-            </a:pPr>
-            <a:r>
-              <a:rPr lang="en-US" sz="1150" b="1" dirty="0">
-                <a:solidFill>
-                  <a:srgbClr val="1A1F2E"/>
-                </a:solidFill>
-                <a:latin typeface="Malgun Gothic" pitchFamily="34" charset="0"/>
-                <a:ea typeface="Malgun Gothic" pitchFamily="34" charset="-122"/>
-                <a:cs typeface="Malgun Gothic" pitchFamily="34" charset="-120"/>
-              </a:rPr>
-              <a:t>추출 n, k</a:t>
-            </a:r>
-            <a:endParaRPr lang="en-US" sz="1150" dirty="0"/>
-          </a:p>
-        </p:txBody>
-      </p:sp>
-      <p:sp>
-        <p:nvSpPr>
-          <p:cNvPr id="28" name="Text 25"/>
-          <p:cNvSpPr/>
-          <p:nvPr/>
-        </p:nvSpPr>
-        <p:spPr>
-          <a:xfrm>
-            <a:off x="7004304" y="4480560"/>
-            <a:ext cx="4297680" cy="237744"/>
-          </a:xfrm>
-          <a:prstGeom prst="rect">
-            <a:avLst/>
-          </a:prstGeom>
-          <a:noFill/>
-          <a:ln/>
-        </p:spPr>
-        <p:txBody>
-          <a:bodyPr wrap="square" lIns="0" tIns="0" rIns="0" bIns="0" rtlCol="0" anchor="ctr"/>
-          <a:lstStyle/>
-          <a:p>
-            <a:pPr indent="0" marL="0">
-              <a:buNone/>
-            </a:pPr>
-            <a:r>
-              <a:rPr lang="en-US" sz="950" dirty="0">
-                <a:solidFill>
-                  <a:srgbClr val="7A849C"/>
-                </a:solidFill>
-                <a:latin typeface="Calibri" pitchFamily="34" charset="0"/>
-                <a:ea typeface="Calibri" pitchFamily="34" charset="-122"/>
-                <a:cs typeface="Calibri" pitchFamily="34" charset="-120"/>
-              </a:rPr>
-              <a:t>Ag 5·7·8 nm, 400–800 nm</a:t>
-            </a:r>
-            <a:endParaRPr lang="en-US" sz="950" dirty="0"/>
-          </a:p>
-        </p:txBody>
-      </p:sp>
-      <p:sp>
-        <p:nvSpPr>
-          <p:cNvPr id="29" name="Shape 26"/>
-          <p:cNvSpPr/>
-          <p:nvPr/>
-        </p:nvSpPr>
-        <p:spPr>
-          <a:xfrm>
-            <a:off x="6510528" y="4800600"/>
-            <a:ext cx="384048" cy="384048"/>
-          </a:xfrm>
-          <a:prstGeom prst="ellipse">
-            <a:avLst/>
-          </a:prstGeom>
-          <a:solidFill>
-            <a:srgbClr val="2EC4B6"/>
-          </a:solidFill>
-          <a:ln/>
-        </p:spPr>
-      </p:sp>
-      <p:sp>
-        <p:nvSpPr>
-          <p:cNvPr id="30" name="Text 27"/>
-          <p:cNvSpPr/>
-          <p:nvPr/>
-        </p:nvSpPr>
-        <p:spPr>
-          <a:xfrm>
-            <a:off x="6510528" y="4800600"/>
-            <a:ext cx="384048" cy="384048"/>
-          </a:xfrm>
-          <a:prstGeom prst="rect">
-            <a:avLst/>
-          </a:prstGeom>
-          <a:noFill/>
-          <a:ln/>
-        </p:spPr>
-        <p:txBody>
-          <a:bodyPr wrap="square" lIns="0" tIns="0" rIns="0" bIns="0" rtlCol="0" anchor="ctr"/>
-          <a:lstStyle/>
-          <a:p>
-            <a:pPr algn="ctr" indent="0" marL="0">
-              <a:buNone/>
-            </a:pPr>
-            <a:r>
-              <a:rPr lang="en-US" sz="1500" b="1" dirty="0">
-                <a:solidFill>
-                  <a:srgbClr val="FFFFFF"/>
-                </a:solidFill>
-                <a:latin typeface="Calibri" pitchFamily="34" charset="0"/>
-                <a:ea typeface="Calibri" pitchFamily="34" charset="-122"/>
-                <a:cs typeface="Calibri" pitchFamily="34" charset="-120"/>
-              </a:rPr>
-              <a:t>6</a:t>
-            </a:r>
-            <a:endParaRPr lang="en-US" sz="1500" dirty="0"/>
-          </a:p>
-        </p:txBody>
-      </p:sp>
-      <p:sp>
-        <p:nvSpPr>
-          <p:cNvPr id="31" name="Text 28"/>
-          <p:cNvSpPr/>
-          <p:nvPr/>
-        </p:nvSpPr>
-        <p:spPr>
-          <a:xfrm>
-            <a:off x="7004304" y="4782312"/>
-            <a:ext cx="1828800" cy="256032"/>
-          </a:xfrm>
-          <a:prstGeom prst="rect">
-            <a:avLst/>
-          </a:prstGeom>
-          <a:noFill/>
-          <a:ln/>
-        </p:spPr>
-        <p:txBody>
-          <a:bodyPr wrap="square" lIns="0" tIns="0" rIns="0" bIns="0" rtlCol="0" anchor="ctr"/>
-          <a:lstStyle/>
-          <a:p>
-            <a:pPr indent="0" marL="0">
-              <a:buNone/>
-            </a:pPr>
-            <a:r>
-              <a:rPr lang="en-US" sz="1150" b="1" dirty="0">
-                <a:solidFill>
-                  <a:srgbClr val="1A1F2E"/>
-                </a:solidFill>
-                <a:latin typeface="Malgun Gothic" pitchFamily="34" charset="0"/>
-                <a:ea typeface="Malgun Gothic" pitchFamily="34" charset="-122"/>
-                <a:cs typeface="Malgun Gothic" pitchFamily="34" charset="-120"/>
-              </a:rPr>
-              <a:t>DFT 결합에너지</a:t>
-            </a:r>
-            <a:endParaRPr lang="en-US" sz="1150" dirty="0"/>
-          </a:p>
-        </p:txBody>
-      </p:sp>
-      <p:sp>
-        <p:nvSpPr>
-          <p:cNvPr id="32" name="Text 29"/>
-          <p:cNvSpPr/>
-          <p:nvPr/>
-        </p:nvSpPr>
-        <p:spPr>
-          <a:xfrm>
-            <a:off x="7004304" y="4983480"/>
-            <a:ext cx="4297680" cy="237744"/>
-          </a:xfrm>
-          <a:prstGeom prst="rect">
-            <a:avLst/>
-          </a:prstGeom>
-          <a:noFill/>
-          <a:ln/>
-        </p:spPr>
-        <p:txBody>
-          <a:bodyPr wrap="square" lIns="0" tIns="0" rIns="0" bIns="0" rtlCol="0" anchor="ctr"/>
-          <a:lstStyle/>
-          <a:p>
-            <a:pPr indent="0" marL="0">
-              <a:buNone/>
-            </a:pPr>
-            <a:r>
-              <a:rPr lang="en-US" sz="950" dirty="0">
-                <a:solidFill>
-                  <a:srgbClr val="7A849C"/>
-                </a:solidFill>
-                <a:latin typeface="Calibri" pitchFamily="34" charset="0"/>
-                <a:ea typeface="Calibri" pitchFamily="34" charset="-122"/>
-                <a:cs typeface="Calibri" pitchFamily="34" charset="-120"/>
-              </a:rPr>
-              <a:t>seed 후보 20종</a:t>
-            </a:r>
-            <a:endParaRPr lang="en-US" sz="950" dirty="0"/>
-          </a:p>
-        </p:txBody>
-      </p:sp>
-      <p:sp>
-        <p:nvSpPr>
-          <p:cNvPr id="33" name="Shape 30"/>
-          <p:cNvSpPr/>
-          <p:nvPr/>
-        </p:nvSpPr>
-        <p:spPr>
-          <a:xfrm>
-            <a:off x="6510528" y="5303520"/>
-            <a:ext cx="384048" cy="384048"/>
-          </a:xfrm>
-          <a:prstGeom prst="ellipse">
-            <a:avLst/>
-          </a:prstGeom>
-          <a:solidFill>
-            <a:srgbClr val="2EC4B6"/>
-          </a:solidFill>
-          <a:ln/>
-        </p:spPr>
-      </p:sp>
-      <p:sp>
-        <p:nvSpPr>
-          <p:cNvPr id="34" name="Text 31"/>
-          <p:cNvSpPr/>
-          <p:nvPr/>
-        </p:nvSpPr>
-        <p:spPr>
-          <a:xfrm>
-            <a:off x="6510528" y="5303520"/>
-            <a:ext cx="384048" cy="384048"/>
-          </a:xfrm>
-          <a:prstGeom prst="rect">
-            <a:avLst/>
-          </a:prstGeom>
-          <a:noFill/>
-          <a:ln/>
-        </p:spPr>
-        <p:txBody>
-          <a:bodyPr wrap="square" lIns="0" tIns="0" rIns="0" bIns="0" rtlCol="0" anchor="ctr"/>
-          <a:lstStyle/>
-          <a:p>
-            <a:pPr algn="ctr" indent="0" marL="0">
-              <a:buNone/>
-            </a:pPr>
-            <a:r>
-              <a:rPr lang="en-US" sz="1500" b="1" dirty="0">
-                <a:solidFill>
-                  <a:srgbClr val="FFFFFF"/>
-                </a:solidFill>
-                <a:latin typeface="Calibri" pitchFamily="34" charset="0"/>
-                <a:ea typeface="Calibri" pitchFamily="34" charset="-122"/>
-                <a:cs typeface="Calibri" pitchFamily="34" charset="-120"/>
-              </a:rPr>
-              <a:t>7</a:t>
-            </a:r>
-            <a:endParaRPr lang="en-US" sz="1500" dirty="0"/>
-          </a:p>
-        </p:txBody>
-      </p:sp>
-      <p:sp>
-        <p:nvSpPr>
-          <p:cNvPr id="35" name="Text 32"/>
-          <p:cNvSpPr/>
-          <p:nvPr/>
-        </p:nvSpPr>
-        <p:spPr>
-          <a:xfrm>
-            <a:off x="7004304" y="5285232"/>
-            <a:ext cx="1828800" cy="256032"/>
-          </a:xfrm>
-          <a:prstGeom prst="rect">
-            <a:avLst/>
-          </a:prstGeom>
-          <a:noFill/>
-          <a:ln/>
-        </p:spPr>
-        <p:txBody>
-          <a:bodyPr wrap="square" lIns="0" tIns="0" rIns="0" bIns="0" rtlCol="0" anchor="ctr"/>
-          <a:lstStyle/>
-          <a:p>
-            <a:pPr indent="0" marL="0">
-              <a:buNone/>
-            </a:pPr>
-            <a:r>
-              <a:rPr lang="en-US" sz="1150" b="1" dirty="0">
-                <a:solidFill>
-                  <a:srgbClr val="1A1F2E"/>
-                </a:solidFill>
-                <a:latin typeface="Malgun Gothic" pitchFamily="34" charset="0"/>
-                <a:ea typeface="Malgun Gothic" pitchFamily="34" charset="-122"/>
-                <a:cs typeface="Malgun Gothic" pitchFamily="34" charset="-120"/>
-              </a:rPr>
-              <a:t>소자 광학 모델</a:t>
-            </a:r>
-            <a:endParaRPr lang="en-US" sz="1150" dirty="0"/>
-          </a:p>
-        </p:txBody>
-      </p:sp>
-      <p:sp>
-        <p:nvSpPr>
-          <p:cNvPr id="36" name="Text 33"/>
-          <p:cNvSpPr/>
-          <p:nvPr/>
-        </p:nvSpPr>
-        <p:spPr>
-          <a:xfrm>
-            <a:off x="7004304" y="5486400"/>
-            <a:ext cx="4297680" cy="237744"/>
-          </a:xfrm>
-          <a:prstGeom prst="rect">
-            <a:avLst/>
-          </a:prstGeom>
-          <a:noFill/>
-          <a:ln/>
-        </p:spPr>
-        <p:txBody>
-          <a:bodyPr wrap="square" lIns="0" tIns="0" rIns="0" bIns="0" rtlCol="0" anchor="ctr"/>
-          <a:lstStyle/>
-          <a:p>
-            <a:pPr indent="0" marL="0">
-              <a:buNone/>
-            </a:pPr>
-            <a:r>
-              <a:rPr lang="en-US" sz="950" dirty="0">
-                <a:solidFill>
-                  <a:srgbClr val="7A849C"/>
-                </a:solidFill>
-                <a:latin typeface="Calibri" pitchFamily="34" charset="0"/>
-                <a:ea typeface="Calibri" pitchFamily="34" charset="-122"/>
-                <a:cs typeface="Calibri" pitchFamily="34" charset="-120"/>
-              </a:rPr>
-              <a:t>TMM + MLA 재순환</a:t>
-            </a:r>
-            <a:endParaRPr lang="en-US" sz="950" dirty="0"/>
           </a:p>
         </p:txBody>
       </p:sp>

--- a/dft_seedlayer_screen/ppt/Ag_electrode_summary.pptx
+++ b/dft_seedlayer_screen/ppt/Ag_electrode_summary.pptx
@@ -1515,7 +1515,7 @@
             <c:bubble3D val="0"/>
             <c:spPr>
               <a:solidFill>
-                <a:srgbClr val="FF6B35"/>
+                <a:srgbClr val="9AA5BC"/>
               </a:solidFill>
               <a:effectLst/>
             </c:spPr>
@@ -1526,7 +1526,7 @@
             <c:bubble3D val="0"/>
             <c:spPr>
               <a:solidFill>
-                <a:srgbClr val="C0392B"/>
+                <a:srgbClr val="C5CEDE"/>
               </a:solidFill>
               <a:effectLst/>
             </c:spPr>
@@ -1537,7 +1537,7 @@
             <c:bubble3D val="0"/>
             <c:spPr>
               <a:solidFill>
-                <a:srgbClr val="C0392B"/>
+                <a:srgbClr val="C5CEDE"/>
               </a:solidFill>
               <a:effectLst/>
             </c:spPr>
@@ -1549,22 +1549,22 @@
                 <c:ptCount val="6"/>
                 <c:lvl>
                   <c:pt idx="0">
-                    <c:v>HATCN</c:v>
+                    <c:v>HATCN  (6자리)</c:v>
                   </c:pt>
                   <c:pt idx="1">
-                    <c:v>F4TCNQ</c:v>
+                    <c:v>F4TCNQ  (4자리)</c:v>
                   </c:pt>
                   <c:pt idx="2">
-                    <c:v>TPBi</c:v>
+                    <c:v>B3PyMPM  (2자리)</c:v>
                   </c:pt>
                   <c:pt idx="3">
-                    <c:v>MoOx</c:v>
+                    <c:v>pyridine  (1자리)</c:v>
                   </c:pt>
                   <c:pt idx="4">
-                    <c:v>MoO3</c:v>
+                    <c:v>triazine  (3자리)</c:v>
                   </c:pt>
                   <c:pt idx="5">
-                    <c:v>LiF</c:v>
+                    <c:v>BTD  (1자리)</c:v>
                   </c:pt>
                 </c:lvl>
               </c:multiLvlStrCache>
@@ -1583,10 +1583,10 @@
                   <c:v>0.4123</c:v>
                 </c:pt>
                 <c:pt idx="2">
-                  <c:v>0.1396</c:v>
+                  <c:v>0.0035</c:v>
                 </c:pt>
                 <c:pt idx="3">
-                  <c:v>0.0003</c:v>
+                  <c:v>0.0001</c:v>
                 </c:pt>
                 <c:pt idx="4">
                   <c:v>0.00005</c:v>
@@ -21171,7 +21171,7 @@
         <p:spPr>
           <a:xfrm>
             <a:off x="566928" y="3611880"/>
-            <a:ext cx="5486400" cy="320040"/>
+            <a:ext cx="5852160" cy="320040"/>
           </a:xfrm>
           <a:prstGeom prst="rect">
             <a:avLst/>
@@ -21195,7 +21195,7 @@
                 <a:ea typeface="Malgun Gothic" pitchFamily="34" charset="-122"/>
                 <a:cs typeface="Malgun Gothic" pitchFamily="34" charset="-120"/>
               </a:rPr>
-              <a:t>Venables 포화 핵밀도 — HATCN 기준 1.0</a:t>
+              <a:t>Venables 포화 핵밀도 — 단좌 결합끼리만 비교, HATCN 기준 1.0</a:t>
             </a:r>
             <a:endParaRPr lang="en-US" sz="1300" dirty="0"/>
           </a:p>
@@ -21315,7 +21315,7 @@
                 <a:ea typeface="Malgun Gothic" pitchFamily="34" charset="-122"/>
                 <a:cs typeface="Malgun Gothic" pitchFamily="34" charset="-120"/>
               </a:rPr>
-              <a:t>Venables 는 HATCN/MoOx 핵밀도 비를 3300배로 준다</a:t>
+              <a:t>E_d = 0.28·E_b 상관식은 단좌 전제 — 이좌 킬레이트(TPBi, Bphen)와 무기물은 이 사슬에 넣을 수 없다</a:t>
             </a:r>
             <a:endParaRPr lang="en-US" sz="1050" dirty="0"/>
           </a:p>
@@ -21336,7 +21336,7 @@
                 <a:ea typeface="Malgun Gothic" pitchFamily="34" charset="-122"/>
                 <a:cs typeface="Malgun Gothic" pitchFamily="34" charset="-120"/>
               </a:rPr>
-              <a:t>그대로면 닫힘 두께가 수십 배 차이나야 하지만 실측은 5 vs 7 nm</a:t>
+              <a:t>단좌끼리 비교해도 HATCN/MoOx 비가 3300배 — 그대로면 닫힘 두께가 수십 배 차이나야 하지만 실측은 5 vs 7 nm</a:t>
             </a:r>
             <a:endParaRPr lang="en-US" sz="1050" dirty="0"/>
           </a:p>

--- a/dft_seedlayer_screen/ppt/Ag_electrode_summary.pptx
+++ b/dft_seedlayer_screen/ppt/Ag_electrode_summary.pptx
@@ -9003,7 +9003,7 @@
         <c:numFmt formatCode="General" sourceLinked="1"/>
         <c:majorTickMark val="out"/>
         <c:minorTickMark val="none"/>
-        <c:tickLblPos val="nextTo"/>
+        <c:tickLblPos val="low"/>
         <c:spPr>
           <a:ln w="12700" cap="flat">
             <a:solidFill>
@@ -9295,7 +9295,7 @@
         <c:numFmt formatCode="General" sourceLinked="1"/>
         <c:majorTickMark val="out"/>
         <c:minorTickMark val="none"/>
-        <c:tickLblPos val="nextTo"/>
+        <c:tickLblPos val="low"/>
         <c:spPr>
           <a:ln w="12700" cap="flat">
             <a:solidFill>
@@ -18243,7 +18243,7 @@
         </p:nvGraphicFramePr>
         <p:xfrm>
           <a:off x="777240" y="1847088"/>
-          <a:ext cx="4663440" cy="3840480"/>
+          <a:ext cx="4663440" cy="3474720"/>
         </p:xfrm>
         <a:graphic xmlns:a="http://schemas.openxmlformats.org/drawingml/2006/main">
           <a:graphicData uri="http://schemas.openxmlformats.org/drawingml/2006/chart">
@@ -18259,8 +18259,8 @@
         </p:nvSpPr>
         <p:spPr>
           <a:xfrm>
-            <a:off x="5486400" y="1947672"/>
-            <a:ext cx="1874520" cy="274320"/>
+            <a:off x="5486400" y="5131613"/>
+            <a:ext cx="1874520" cy="256032"/>
           </a:xfrm>
           <a:prstGeom prst="rect">
             <a:avLst/>
@@ -18298,8 +18298,8 @@
         </p:nvSpPr>
         <p:spPr>
           <a:xfrm>
-            <a:off x="5486400" y="2242109"/>
-            <a:ext cx="1874520" cy="274320"/>
+            <a:off x="5486400" y="4865522"/>
+            <a:ext cx="1874520" cy="256032"/>
           </a:xfrm>
           <a:prstGeom prst="rect">
             <a:avLst/>
@@ -18337,8 +18337,8 @@
         </p:nvSpPr>
         <p:spPr>
           <a:xfrm>
-            <a:off x="5486400" y="2536546"/>
-            <a:ext cx="1874520" cy="274320"/>
+            <a:off x="5486400" y="4599432"/>
+            <a:ext cx="1874520" cy="256032"/>
           </a:xfrm>
           <a:prstGeom prst="rect">
             <a:avLst/>
@@ -18376,8 +18376,8 @@
         </p:nvSpPr>
         <p:spPr>
           <a:xfrm>
-            <a:off x="5486400" y="2830982"/>
-            <a:ext cx="1874520" cy="274320"/>
+            <a:off x="5486400" y="4333342"/>
+            <a:ext cx="1874520" cy="256032"/>
           </a:xfrm>
           <a:prstGeom prst="rect">
             <a:avLst/>
@@ -18415,8 +18415,8 @@
         </p:nvSpPr>
         <p:spPr>
           <a:xfrm>
-            <a:off x="5486400" y="3125419"/>
-            <a:ext cx="1874520" cy="274320"/>
+            <a:off x="5486400" y="4067251"/>
+            <a:ext cx="1874520" cy="256032"/>
           </a:xfrm>
           <a:prstGeom prst="rect">
             <a:avLst/>
@@ -18454,8 +18454,8 @@
         </p:nvSpPr>
         <p:spPr>
           <a:xfrm>
-            <a:off x="5486400" y="3419856"/>
-            <a:ext cx="1874520" cy="274320"/>
+            <a:off x="5486400" y="3801161"/>
+            <a:ext cx="1874520" cy="256032"/>
           </a:xfrm>
           <a:prstGeom prst="rect">
             <a:avLst/>
@@ -18493,8 +18493,8 @@
         </p:nvSpPr>
         <p:spPr>
           <a:xfrm>
-            <a:off x="5486400" y="3714293"/>
-            <a:ext cx="1874520" cy="274320"/>
+            <a:off x="5486400" y="3535070"/>
+            <a:ext cx="1874520" cy="256032"/>
           </a:xfrm>
           <a:prstGeom prst="rect">
             <a:avLst/>
@@ -18532,8 +18532,8 @@
         </p:nvSpPr>
         <p:spPr>
           <a:xfrm>
-            <a:off x="5486400" y="4008730"/>
-            <a:ext cx="1874520" cy="274320"/>
+            <a:off x="5486400" y="3268980"/>
+            <a:ext cx="1874520" cy="256032"/>
           </a:xfrm>
           <a:prstGeom prst="rect">
             <a:avLst/>
@@ -18571,8 +18571,8 @@
         </p:nvSpPr>
         <p:spPr>
           <a:xfrm>
-            <a:off x="5486400" y="4303166"/>
-            <a:ext cx="1874520" cy="274320"/>
+            <a:off x="5486400" y="3002890"/>
+            <a:ext cx="1874520" cy="256032"/>
           </a:xfrm>
           <a:prstGeom prst="rect">
             <a:avLst/>
@@ -18610,8 +18610,8 @@
         </p:nvSpPr>
         <p:spPr>
           <a:xfrm>
-            <a:off x="5486400" y="4597603"/>
-            <a:ext cx="1874520" cy="274320"/>
+            <a:off x="5486400" y="2736799"/>
+            <a:ext cx="1874520" cy="256032"/>
           </a:xfrm>
           <a:prstGeom prst="rect">
             <a:avLst/>
@@ -18649,8 +18649,8 @@
         </p:nvSpPr>
         <p:spPr>
           <a:xfrm>
-            <a:off x="5486400" y="4892040"/>
-            <a:ext cx="1874520" cy="274320"/>
+            <a:off x="5486400" y="2470709"/>
+            <a:ext cx="1874520" cy="256032"/>
           </a:xfrm>
           <a:prstGeom prst="rect">
             <a:avLst/>
@@ -18688,8 +18688,8 @@
         </p:nvSpPr>
         <p:spPr>
           <a:xfrm>
-            <a:off x="5486400" y="5186477"/>
-            <a:ext cx="1874520" cy="274320"/>
+            <a:off x="5486400" y="2204618"/>
+            <a:ext cx="1874520" cy="256032"/>
           </a:xfrm>
           <a:prstGeom prst="rect">
             <a:avLst/>
@@ -18727,8 +18727,8 @@
         </p:nvSpPr>
         <p:spPr>
           <a:xfrm>
-            <a:off x="5486400" y="5480914"/>
-            <a:ext cx="1874520" cy="274320"/>
+            <a:off x="5486400" y="1938528"/>
+            <a:ext cx="1874520" cy="256032"/>
           </a:xfrm>
           <a:prstGeom prst="rect">
             <a:avLst/>
@@ -18766,7 +18766,7 @@
         </p:nvSpPr>
         <p:spPr>
           <a:xfrm>
-            <a:off x="822960" y="5486400"/>
+            <a:off x="822960" y="5504688"/>
             <a:ext cx="146304" cy="146304"/>
           </a:xfrm>
           <a:prstGeom prst="ellipse">
@@ -18786,7 +18786,7 @@
         </p:nvSpPr>
         <p:spPr>
           <a:xfrm>
-            <a:off x="1042416" y="5449824"/>
+            <a:off x="1042416" y="5468112"/>
             <a:ext cx="1463040" cy="219456"/>
           </a:xfrm>
           <a:prstGeom prst="rect">
@@ -18825,7 +18825,7 @@
         </p:nvSpPr>
         <p:spPr>
           <a:xfrm>
-            <a:off x="2606040" y="5486400"/>
+            <a:off x="2606040" y="5504688"/>
             <a:ext cx="146304" cy="146304"/>
           </a:xfrm>
           <a:prstGeom prst="ellipse">
@@ -18845,7 +18845,7 @@
         </p:nvSpPr>
         <p:spPr>
           <a:xfrm>
-            <a:off x="2825496" y="5449824"/>
+            <a:off x="2825496" y="5468112"/>
             <a:ext cx="2194560" cy="219456"/>
           </a:xfrm>
           <a:prstGeom prst="rect">
